--- a/投影片/民意與調查Week4.pptx
+++ b/投影片/民意與調查Week4.pptx
@@ -5,7 +5,7 @@
     <p:sldMasterId id="2147483648" r:id="rId1"/>
   </p:sldMasterIdLst>
   <p:notesMasterIdLst>
-    <p:notesMasterId r:id="rId14"/>
+    <p:notesMasterId r:id="rId18"/>
   </p:notesMasterIdLst>
   <p:sldIdLst>
     <p:sldId id="256" r:id="rId2"/>
@@ -17,9 +17,13 @@
     <p:sldId id="267" r:id="rId8"/>
     <p:sldId id="268" r:id="rId9"/>
     <p:sldId id="269" r:id="rId10"/>
-    <p:sldId id="270" r:id="rId11"/>
-    <p:sldId id="271" r:id="rId12"/>
-    <p:sldId id="258" r:id="rId13"/>
+    <p:sldId id="275" r:id="rId11"/>
+    <p:sldId id="274" r:id="rId12"/>
+    <p:sldId id="270" r:id="rId13"/>
+    <p:sldId id="271" r:id="rId14"/>
+    <p:sldId id="272" r:id="rId15"/>
+    <p:sldId id="273" r:id="rId16"/>
+    <p:sldId id="258" r:id="rId17"/>
   </p:sldIdLst>
   <p:sldSz cx="12192000" cy="6858000"/>
   <p:notesSz cx="6858000" cy="9144000"/>
@@ -3794,7 +3798,7 @@
           <p:cNvPr id="2" name="Title 1">
             <a:extLst>
               <a:ext uri="{FF2B5EF4-FFF2-40B4-BE49-F238E27FC236}">
-                <a16:creationId xmlns:a16="http://schemas.microsoft.com/office/drawing/2014/main" id="{AA343FC3-4047-4A6A-6B74-C624EA381675}"/>
+                <a16:creationId xmlns:a16="http://schemas.microsoft.com/office/drawing/2014/main" id="{ED266BC7-D370-DB3B-3586-0BB7D3212D0F}"/>
               </a:ext>
             </a:extLst>
           </p:cNvPr>
@@ -3812,13 +3816,1206 @@
           <a:p>
             <a:r>
               <a:rPr lang="ja-JP" altLang="en-US"/>
+              <a:t>如何修正網路調查的非機率抽樣？（二）</a:t>
+            </a:r>
+            <a:endParaRPr lang="en-US" dirty="0"/>
+          </a:p>
+        </p:txBody>
+      </p:sp>
+      <mc:AlternateContent xmlns:mc="http://schemas.openxmlformats.org/markup-compatibility/2006">
+        <mc:Choice xmlns:a14="http://schemas.microsoft.com/office/drawing/2010/main" Requires="a14">
+          <p:sp>
+            <p:nvSpPr>
+              <p:cNvPr id="3" name="Content Placeholder 2">
+                <a:extLst>
+                  <a:ext uri="{FF2B5EF4-FFF2-40B4-BE49-F238E27FC236}">
+                    <a16:creationId xmlns:a16="http://schemas.microsoft.com/office/drawing/2014/main" id="{4F08E529-29DD-AB2C-94BF-694DBD41AB6D}"/>
+                  </a:ext>
+                </a:extLst>
+              </p:cNvPr>
+              <p:cNvSpPr>
+                <a:spLocks noGrp="1"/>
+              </p:cNvSpPr>
+              <p:nvPr>
+                <p:ph idx="1"/>
+              </p:nvPr>
+            </p:nvSpPr>
+            <p:spPr/>
+            <p:txBody>
+              <a:bodyPr>
+                <a:normAutofit fontScale="92500" lnSpcReduction="20000"/>
+              </a:bodyPr>
+              <a:lstStyle/>
+              <a:p>
+                <a:pPr>
+                  <a:lnSpc>
+                    <a:spcPct val="150000"/>
+                  </a:lnSpc>
+                  <a:buFont typeface="Wingdings" pitchFamily="2" charset="2"/>
+                  <a:buChar char="q"/>
+                </a:pPr>
+                <a:r>
+                  <a:rPr lang="ja-JP" altLang="en-US" sz="2000"/>
+                  <a:t>假設真實母體：</a:t>
+                </a:r>
+              </a:p>
+              <a:p>
+                <a:pPr marL="0" indent="0">
+                  <a:lnSpc>
+                    <a:spcPct val="150000"/>
+                  </a:lnSpc>
+                  <a:buNone/>
+                </a:pPr>
+                <a:endParaRPr lang="ja-JP" altLang="en-US" sz="2000"/>
+              </a:p>
+              <a:p>
+                <a:pPr>
+                  <a:lnSpc>
+                    <a:spcPct val="150000"/>
+                  </a:lnSpc>
+                  <a:buFont typeface="Wingdings" pitchFamily="2" charset="2"/>
+                  <a:buChar char="q"/>
+                </a:pPr>
+                <a:endParaRPr lang="en-US" altLang="ja-JP" sz="2000" dirty="0"/>
+              </a:p>
+              <a:p>
+                <a:pPr>
+                  <a:lnSpc>
+                    <a:spcPct val="150000"/>
+                  </a:lnSpc>
+                  <a:buFont typeface="Wingdings" pitchFamily="2" charset="2"/>
+                  <a:buChar char="q"/>
+                </a:pPr>
+                <a:r>
+                  <a:rPr lang="ja-JP" altLang="en-US" sz="2000"/>
+                  <a:t>但線上樣本：</a:t>
+                </a:r>
+                <a:endParaRPr lang="en-US" altLang="ja-JP" sz="2000" dirty="0"/>
+              </a:p>
+              <a:p>
+                <a:pPr marL="0" algn="l" rtl="0" eaLnBrk="1" fontAlgn="t" latinLnBrk="0" hangingPunct="1">
+                  <a:spcBef>
+                    <a:spcPts val="0"/>
+                  </a:spcBef>
+                  <a:spcAft>
+                    <a:spcPts val="0"/>
+                  </a:spcAft>
+                </a:pPr>
+                <a:r>
+                  <a:rPr lang="en-US" sz="1800" b="1" i="0" u="none" strike="noStrike" kern="1200" dirty="0" err="1">
+                    <a:solidFill>
+                      <a:srgbClr val="FFFFFF"/>
+                    </a:solidFill>
+                    <a:effectLst/>
+                    <a:latin typeface="Calibri" panose="020F0502020204030204" pitchFamily="34" charset="0"/>
+                  </a:rPr>
+                  <a:t>類型</a:t>
+                </a:r>
+                <a:endParaRPr lang="en-US" altLang="ja-JP" sz="2000" dirty="0"/>
+              </a:p>
+              <a:p>
+                <a:endParaRPr lang="en-US" altLang="ja-JP" sz="2000" dirty="0"/>
+              </a:p>
+              <a:p>
+                <a:pPr>
+                  <a:lnSpc>
+                    <a:spcPct val="150000"/>
+                  </a:lnSpc>
+                  <a:buFont typeface="Wingdings" pitchFamily="2" charset="2"/>
+                  <a:buChar char="q"/>
+                </a:pPr>
+                <a:endParaRPr lang="en-US" altLang="ja-JP" sz="2000" dirty="0"/>
+              </a:p>
+              <a:p>
+                <a:r>
+                  <a:rPr lang="ja-JP" altLang="en-US" sz="2000"/>
+                  <a:t>權重：</a:t>
+                </a:r>
+              </a:p>
+              <a:p>
+                <a:pPr>
+                  <a:buFont typeface="Arial" panose="020B0604020202020204" pitchFamily="34" charset="0"/>
+                  <a:buChar char="•"/>
+                </a:pPr>
+                <a:r>
+                  <a:rPr lang="en-US" altLang="ja-JP" sz="2000" dirty="0"/>
+                  <a:t>W(</a:t>
+                </a:r>
+                <a:r>
+                  <a:rPr lang="ja-JP" altLang="en-US" sz="2000"/>
+                  <a:t>高興趣</a:t>
+                </a:r>
+                <a:r>
+                  <a:rPr lang="en-US" altLang="ja-JP" sz="2000" dirty="0"/>
+                  <a:t>)</a:t>
+                </a:r>
+                <a:r>
+                  <a:rPr lang="ja-JP" altLang="en-US" sz="2000"/>
+                  <a:t>：</a:t>
+                </a:r>
+                <a:r>
+                  <a:rPr lang="en-US" altLang="ja-JP" sz="2000" dirty="0"/>
+                  <a:t>1/0.8=1.251/0.8 = 1.251/0.8=1.25</a:t>
+                </a:r>
+              </a:p>
+              <a:p>
+                <a:pPr>
+                  <a:buFont typeface="Arial" panose="020B0604020202020204" pitchFamily="34" charset="0"/>
+                  <a:buChar char="•"/>
+                </a:pPr>
+                <a:r>
+                  <a:rPr lang="en-US" altLang="ja-JP" sz="2000" dirty="0"/>
+                  <a:t>W(</a:t>
+                </a:r>
+                <a:r>
+                  <a:rPr lang="ja-JP" altLang="en-US" sz="2000"/>
+                  <a:t>低興趣</a:t>
+                </a:r>
+                <a:r>
+                  <a:rPr lang="en-US" altLang="ja-JP" sz="2000" dirty="0"/>
+                  <a:t>)</a:t>
+                </a:r>
+                <a:r>
+                  <a:rPr lang="ja-JP" altLang="en-US" sz="2000"/>
+                  <a:t>：</a:t>
+                </a:r>
+                <a:r>
+                  <a:rPr lang="en-US" altLang="ja-JP" sz="2000" dirty="0"/>
+                  <a:t>1/0.2=51/0.2 = 51/0.2=5</a:t>
+                </a:r>
+              </a:p>
+              <a:p>
+                <a:r>
+                  <a:rPr lang="ja-JP" altLang="en-US" sz="2000" b="0" dirty="0"/>
+                  <a:t>加權：</a:t>
+                </a:r>
+                <a14:m>
+                  <m:oMath xmlns:m="http://schemas.openxmlformats.org/officeDocument/2006/math">
+                    <m:r>
+                      <a:rPr lang="ja-JP" altLang="en-US" sz="2000" b="0" i="1" dirty="0">
+                        <a:latin typeface="Cambria Math" panose="02040503050406030204" pitchFamily="18" charset="0"/>
+                      </a:rPr>
+                      <m:t>高興趣</m:t>
+                    </m:r>
+                    <m:r>
+                      <a:rPr lang="ja-JP" altLang="en-US" sz="2000" i="1" dirty="0" smtClean="0">
+                        <a:latin typeface="Cambria Math" panose="02040503050406030204" pitchFamily="18" charset="0"/>
+                      </a:rPr>
+                      <m:t>的樣本</m:t>
+                    </m:r>
+                    <m:r>
+                      <a:rPr lang="ja-JP" altLang="en-US" sz="2000" i="1" dirty="0">
+                        <a:latin typeface="Cambria Math" panose="02040503050406030204" pitchFamily="18" charset="0"/>
+                      </a:rPr>
+                      <m:t>：</m:t>
+                    </m:r>
+                    <m:r>
+                      <a:rPr lang="en-US" altLang="ja-JP" sz="2000" b="0" i="1" smtClean="0">
+                        <a:latin typeface="Cambria Math" panose="02040503050406030204" pitchFamily="18" charset="0"/>
+                      </a:rPr>
+                      <m:t>0.8</m:t>
+                    </m:r>
+                    <m:r>
+                      <a:rPr lang="en-US" altLang="ja-JP" sz="2000" b="0" i="1" smtClean="0">
+                        <a:latin typeface="Cambria Math" panose="02040503050406030204" pitchFamily="18" charset="0"/>
+                        <a:ea typeface="Cambria Math" panose="02040503050406030204" pitchFamily="18" charset="0"/>
+                      </a:rPr>
+                      <m:t>×1.25=1</m:t>
+                    </m:r>
+                    <m:r>
+                      <a:rPr lang="zh-TW" altLang="en-US" sz="2000" b="0" i="1" smtClean="0">
+                        <a:latin typeface="Cambria Math" panose="02040503050406030204" pitchFamily="18" charset="0"/>
+                        <a:ea typeface="Cambria Math" panose="02040503050406030204" pitchFamily="18" charset="0"/>
+                      </a:rPr>
+                      <m:t> </m:t>
+                    </m:r>
+                    <m:r>
+                      <a:rPr lang="en-US" altLang="zh-TW" sz="2000" b="0" i="1" smtClean="0">
+                        <a:latin typeface="Cambria Math" panose="02040503050406030204" pitchFamily="18" charset="0"/>
+                        <a:ea typeface="Cambria Math" panose="02040503050406030204" pitchFamily="18" charset="0"/>
+                      </a:rPr>
+                      <m:t>        </m:t>
+                    </m:r>
+                    <m:r>
+                      <a:rPr lang="zh-TW" altLang="en-US" sz="2000" i="1">
+                        <a:latin typeface="Cambria Math" panose="02040503050406030204" pitchFamily="18" charset="0"/>
+                        <a:ea typeface="Cambria Math" panose="02040503050406030204" pitchFamily="18" charset="0"/>
+                      </a:rPr>
+                      <m:t>低</m:t>
+                    </m:r>
+                    <m:r>
+                      <a:rPr lang="ja-JP" altLang="en-US" sz="2000" i="1" dirty="0">
+                        <a:latin typeface="Cambria Math" panose="02040503050406030204" pitchFamily="18" charset="0"/>
+                      </a:rPr>
+                      <m:t>興趣的樣本</m:t>
+                    </m:r>
+                    <m:r>
+                      <a:rPr lang="ja-JP" altLang="en-US" sz="2000" i="1" dirty="0">
+                        <a:latin typeface="Cambria Math" panose="02040503050406030204" pitchFamily="18" charset="0"/>
+                      </a:rPr>
+                      <m:t>：</m:t>
+                    </m:r>
+                    <m:r>
+                      <a:rPr lang="en-US" altLang="ja-JP" sz="2000" i="1">
+                        <a:latin typeface="Cambria Math" panose="02040503050406030204" pitchFamily="18" charset="0"/>
+                      </a:rPr>
+                      <m:t>0</m:t>
+                    </m:r>
+                    <m:r>
+                      <a:rPr lang="en-US" altLang="ja-JP" sz="2000" b="0" i="1" smtClean="0">
+                        <a:latin typeface="Cambria Math" panose="02040503050406030204" pitchFamily="18" charset="0"/>
+                      </a:rPr>
+                      <m:t>.2</m:t>
+                    </m:r>
+                    <m:r>
+                      <a:rPr lang="en-US" altLang="ja-JP" sz="2000" i="1">
+                        <a:latin typeface="Cambria Math" panose="02040503050406030204" pitchFamily="18" charset="0"/>
+                        <a:ea typeface="Cambria Math" panose="02040503050406030204" pitchFamily="18" charset="0"/>
+                      </a:rPr>
+                      <m:t>×5=1</m:t>
+                    </m:r>
+                  </m:oMath>
+                </a14:m>
+                <a:endParaRPr lang="en-US" altLang="ja-JP" sz="2000" dirty="0"/>
+              </a:p>
+              <a:p>
+                <a:pPr>
+                  <a:buFont typeface="Arial" panose="020B0604020202020204" pitchFamily="34" charset="0"/>
+                  <a:buChar char="•"/>
+                </a:pPr>
+                <a:endParaRPr lang="en-US" altLang="ja-JP" sz="2000" dirty="0"/>
+              </a:p>
+              <a:p>
+                <a:pPr>
+                  <a:lnSpc>
+                    <a:spcPct val="150000"/>
+                  </a:lnSpc>
+                  <a:buFont typeface="Wingdings" pitchFamily="2" charset="2"/>
+                  <a:buChar char="l"/>
+                </a:pPr>
+                <a:endParaRPr lang="en-US" sz="2000" dirty="0"/>
+              </a:p>
+              <a:p>
+                <a:pPr>
+                  <a:buFont typeface="Wingdings" pitchFamily="2" charset="2"/>
+                  <a:buChar char="l"/>
+                </a:pPr>
+                <a:endParaRPr lang="en-US" dirty="0"/>
+              </a:p>
+            </p:txBody>
+          </p:sp>
+        </mc:Choice>
+        <mc:Fallback>
+          <p:sp>
+            <p:nvSpPr>
+              <p:cNvPr id="3" name="Content Placeholder 2">
+                <a:extLst>
+                  <a:ext uri="{FF2B5EF4-FFF2-40B4-BE49-F238E27FC236}">
+                    <a16:creationId xmlns:a16="http://schemas.microsoft.com/office/drawing/2014/main" id="{4F08E529-29DD-AB2C-94BF-694DBD41AB6D}"/>
+                  </a:ext>
+                </a:extLst>
+              </p:cNvPr>
+              <p:cNvSpPr>
+                <a:spLocks noGrp="1" noRot="1" noChangeAspect="1" noMove="1" noResize="1" noEditPoints="1" noAdjustHandles="1" noChangeArrowheads="1" noChangeShapeType="1" noTextEdit="1"/>
+              </p:cNvSpPr>
+              <p:nvPr>
+                <p:ph idx="1"/>
+              </p:nvPr>
+            </p:nvSpPr>
+            <p:spPr>
+              <a:blipFill>
+                <a:blip r:embed="rId2"/>
+                <a:stretch>
+                  <a:fillRect l="-483" b="-1744"/>
+                </a:stretch>
+              </a:blipFill>
+            </p:spPr>
+            <p:txBody>
+              <a:bodyPr/>
+              <a:lstStyle/>
+              <a:p>
+                <a:r>
+                  <a:rPr lang="en-US">
+                    <a:noFill/>
+                  </a:rPr>
+                  <a:t> </a:t>
+                </a:r>
+              </a:p>
+            </p:txBody>
+          </p:sp>
+        </mc:Fallback>
+      </mc:AlternateContent>
+      <p:sp>
+        <p:nvSpPr>
+          <p:cNvPr id="4" name="Slide Number Placeholder 3">
+            <a:extLst>
+              <a:ext uri="{FF2B5EF4-FFF2-40B4-BE49-F238E27FC236}">
+                <a16:creationId xmlns:a16="http://schemas.microsoft.com/office/drawing/2014/main" id="{C98085D9-FBDD-C940-3F14-8994BAC36532}"/>
+              </a:ext>
+            </a:extLst>
+          </p:cNvPr>
+          <p:cNvSpPr>
+            <a:spLocks noGrp="1"/>
+          </p:cNvSpPr>
+          <p:nvPr>
+            <p:ph type="sldNum" sz="quarter" idx="12"/>
+          </p:nvPr>
+        </p:nvSpPr>
+        <p:spPr/>
+        <p:txBody>
+          <a:bodyPr/>
+          <a:lstStyle/>
+          <a:p>
+            <a:fld id="{34E21383-B02B-694B-B2AD-A967203CDE86}" type="slidenum">
+              <a:rPr lang="en-US" smtClean="0"/>
+              <a:t>10</a:t>
+            </a:fld>
+            <a:endParaRPr lang="en-US"/>
+          </a:p>
+        </p:txBody>
+      </p:sp>
+      <p:graphicFrame>
+        <p:nvGraphicFramePr>
+          <p:cNvPr id="7" name="Table 6">
+            <a:extLst>
+              <a:ext uri="{FF2B5EF4-FFF2-40B4-BE49-F238E27FC236}">
+                <a16:creationId xmlns:a16="http://schemas.microsoft.com/office/drawing/2014/main" id="{7A95B452-B5A2-AA2F-5DCA-705F873AE120}"/>
+              </a:ext>
+            </a:extLst>
+          </p:cNvPr>
+          <p:cNvGraphicFramePr>
+            <a:graphicFrameLocks noGrp="1"/>
+          </p:cNvGraphicFramePr>
+          <p:nvPr>
+            <p:extLst>
+              <p:ext uri="{D42A27DB-BD31-4B8C-83A1-F6EECF244321}">
+                <p14:modId xmlns:p14="http://schemas.microsoft.com/office/powerpoint/2010/main" val="3721987672"/>
+              </p:ext>
+            </p:extLst>
+          </p:nvPr>
+        </p:nvGraphicFramePr>
+        <p:xfrm>
+          <a:off x="4108862" y="2331720"/>
+          <a:ext cx="3486068" cy="1097280"/>
+        </p:xfrm>
+        <a:graphic>
+          <a:graphicData uri="http://schemas.openxmlformats.org/drawingml/2006/table">
+            <a:tbl>
+              <a:tblPr firstRow="1" bandRow="1">
+                <a:tableStyleId>{5C22544A-7EE6-4342-B048-85BDC9FD1C3A}</a:tableStyleId>
+              </a:tblPr>
+              <a:tblGrid>
+                <a:gridCol w="1743034">
+                  <a:extLst>
+                    <a:ext uri="{9D8B030D-6E8A-4147-A177-3AD203B41FA5}">
+                      <a16:colId xmlns:a16="http://schemas.microsoft.com/office/drawing/2014/main" val="1459308878"/>
+                    </a:ext>
+                  </a:extLst>
+                </a:gridCol>
+                <a:gridCol w="1743034">
+                  <a:extLst>
+                    <a:ext uri="{9D8B030D-6E8A-4147-A177-3AD203B41FA5}">
+                      <a16:colId xmlns:a16="http://schemas.microsoft.com/office/drawing/2014/main" val="980495549"/>
+                    </a:ext>
+                  </a:extLst>
+                </a:gridCol>
+              </a:tblGrid>
+              <a:tr h="222128">
+                <a:tc>
+                  <a:txBody>
+                    <a:bodyPr/>
+                    <a:lstStyle/>
+                    <a:p>
+                      <a:r>
+                        <a:rPr lang="en-US" dirty="0" err="1"/>
+                        <a:t>類型</a:t>
+                      </a:r>
+                      <a:endParaRPr lang="en-US" dirty="0"/>
+                    </a:p>
+                  </a:txBody>
+                  <a:tcPr/>
+                </a:tc>
+                <a:tc>
+                  <a:txBody>
+                    <a:bodyPr/>
+                    <a:lstStyle/>
+                    <a:p>
+                      <a:r>
+                        <a:rPr lang="en-US" dirty="0" err="1"/>
+                        <a:t>比例</a:t>
+                      </a:r>
+                      <a:endParaRPr lang="en-US" dirty="0"/>
+                    </a:p>
+                  </a:txBody>
+                  <a:tcPr/>
+                </a:tc>
+                <a:extLst>
+                  <a:ext uri="{0D108BD9-81ED-4DB2-BD59-A6C34878D82A}">
+                    <a16:rowId xmlns:a16="http://schemas.microsoft.com/office/drawing/2014/main" val="326048685"/>
+                  </a:ext>
+                </a:extLst>
+              </a:tr>
+              <a:tr h="222128">
+                <a:tc>
+                  <a:txBody>
+                    <a:bodyPr/>
+                    <a:lstStyle/>
+                    <a:p>
+                      <a:r>
+                        <a:rPr lang="ja-JP" altLang="en-US" sz="1800"/>
+                        <a:t>高政治興趣</a:t>
+                      </a:r>
+                      <a:endParaRPr lang="en-US" dirty="0"/>
+                    </a:p>
+                  </a:txBody>
+                  <a:tcPr/>
+                </a:tc>
+                <a:tc>
+                  <a:txBody>
+                    <a:bodyPr/>
+                    <a:lstStyle/>
+                    <a:p>
+                      <a:r>
+                        <a:rPr lang="en-US" dirty="0"/>
+                        <a:t>50%</a:t>
+                      </a:r>
+                    </a:p>
+                  </a:txBody>
+                  <a:tcPr/>
+                </a:tc>
+                <a:extLst>
+                  <a:ext uri="{0D108BD9-81ED-4DB2-BD59-A6C34878D82A}">
+                    <a16:rowId xmlns:a16="http://schemas.microsoft.com/office/drawing/2014/main" val="877903938"/>
+                  </a:ext>
+                </a:extLst>
+              </a:tr>
+              <a:tr h="222128">
+                <a:tc>
+                  <a:txBody>
+                    <a:bodyPr/>
+                    <a:lstStyle/>
+                    <a:p>
+                      <a:r>
+                        <a:rPr lang="ja-JP" altLang="en-US" sz="1800"/>
+                        <a:t>低政治興趣</a:t>
+                      </a:r>
+                      <a:endParaRPr lang="en-US" dirty="0"/>
+                    </a:p>
+                  </a:txBody>
+                  <a:tcPr/>
+                </a:tc>
+                <a:tc>
+                  <a:txBody>
+                    <a:bodyPr/>
+                    <a:lstStyle/>
+                    <a:p>
+                      <a:r>
+                        <a:rPr lang="en-US" dirty="0"/>
+                        <a:t>30%</a:t>
+                      </a:r>
+                    </a:p>
+                  </a:txBody>
+                  <a:tcPr/>
+                </a:tc>
+                <a:extLst>
+                  <a:ext uri="{0D108BD9-81ED-4DB2-BD59-A6C34878D82A}">
+                    <a16:rowId xmlns:a16="http://schemas.microsoft.com/office/drawing/2014/main" val="841184417"/>
+                  </a:ext>
+                </a:extLst>
+              </a:tr>
+            </a:tbl>
+          </a:graphicData>
+        </a:graphic>
+      </p:graphicFrame>
+      <p:graphicFrame>
+        <p:nvGraphicFramePr>
+          <p:cNvPr id="5" name="Table 4">
+            <a:extLst>
+              <a:ext uri="{FF2B5EF4-FFF2-40B4-BE49-F238E27FC236}">
+                <a16:creationId xmlns:a16="http://schemas.microsoft.com/office/drawing/2014/main" id="{1D691A0C-65FA-B2FD-474A-DBC43A923A6A}"/>
+              </a:ext>
+            </a:extLst>
+          </p:cNvPr>
+          <p:cNvGraphicFramePr>
+            <a:graphicFrameLocks noGrp="1"/>
+          </p:cNvGraphicFramePr>
+          <p:nvPr>
+            <p:extLst>
+              <p:ext uri="{D42A27DB-BD31-4B8C-83A1-F6EECF244321}">
+                <p14:modId xmlns:p14="http://schemas.microsoft.com/office/powerpoint/2010/main" val="2086029013"/>
+              </p:ext>
+            </p:extLst>
+          </p:nvPr>
+        </p:nvGraphicFramePr>
+        <p:xfrm>
+          <a:off x="4108862" y="3684005"/>
+          <a:ext cx="3486068" cy="1118976"/>
+        </p:xfrm>
+        <a:graphic>
+          <a:graphicData uri="http://schemas.openxmlformats.org/drawingml/2006/table">
+            <a:tbl>
+              <a:tblPr firstRow="1" bandRow="1">
+                <a:tableStyleId>{5C22544A-7EE6-4342-B048-85BDC9FD1C3A}</a:tableStyleId>
+              </a:tblPr>
+              <a:tblGrid>
+                <a:gridCol w="1743034">
+                  <a:extLst>
+                    <a:ext uri="{9D8B030D-6E8A-4147-A177-3AD203B41FA5}">
+                      <a16:colId xmlns:a16="http://schemas.microsoft.com/office/drawing/2014/main" val="2198280680"/>
+                    </a:ext>
+                  </a:extLst>
+                </a:gridCol>
+                <a:gridCol w="1743034">
+                  <a:extLst>
+                    <a:ext uri="{9D8B030D-6E8A-4147-A177-3AD203B41FA5}">
+                      <a16:colId xmlns:a16="http://schemas.microsoft.com/office/drawing/2014/main" val="3632971567"/>
+                    </a:ext>
+                  </a:extLst>
+                </a:gridCol>
+              </a:tblGrid>
+              <a:tr h="377296">
+                <a:tc>
+                  <a:txBody>
+                    <a:bodyPr/>
+                    <a:lstStyle/>
+                    <a:p>
+                      <a:r>
+                        <a:rPr lang="en-US" dirty="0" err="1"/>
+                        <a:t>類型</a:t>
+                      </a:r>
+                      <a:endParaRPr lang="en-US" dirty="0"/>
+                    </a:p>
+                  </a:txBody>
+                  <a:tcPr/>
+                </a:tc>
+                <a:tc>
+                  <a:txBody>
+                    <a:bodyPr/>
+                    <a:lstStyle/>
+                    <a:p>
+                      <a:r>
+                        <a:rPr lang="en-US" dirty="0" err="1"/>
+                        <a:t>比例</a:t>
+                      </a:r>
+                      <a:endParaRPr lang="en-US" dirty="0"/>
+                    </a:p>
+                  </a:txBody>
+                  <a:tcPr/>
+                </a:tc>
+                <a:extLst>
+                  <a:ext uri="{0D108BD9-81ED-4DB2-BD59-A6C34878D82A}">
+                    <a16:rowId xmlns:a16="http://schemas.microsoft.com/office/drawing/2014/main" val="3134948381"/>
+                  </a:ext>
+                </a:extLst>
+              </a:tr>
+              <a:tr h="370840">
+                <a:tc>
+                  <a:txBody>
+                    <a:bodyPr/>
+                    <a:lstStyle/>
+                    <a:p>
+                      <a:r>
+                        <a:rPr lang="ja-JP" altLang="en-US" sz="1800"/>
+                        <a:t>高政治興趣</a:t>
+                      </a:r>
+                      <a:endParaRPr lang="en-US" dirty="0"/>
+                    </a:p>
+                  </a:txBody>
+                  <a:tcPr/>
+                </a:tc>
+                <a:tc>
+                  <a:txBody>
+                    <a:bodyPr/>
+                    <a:lstStyle/>
+                    <a:p>
+                      <a:r>
+                        <a:rPr lang="en-US" dirty="0"/>
+                        <a:t>80%</a:t>
+                      </a:r>
+                    </a:p>
+                  </a:txBody>
+                  <a:tcPr/>
+                </a:tc>
+                <a:extLst>
+                  <a:ext uri="{0D108BD9-81ED-4DB2-BD59-A6C34878D82A}">
+                    <a16:rowId xmlns:a16="http://schemas.microsoft.com/office/drawing/2014/main" val="623175551"/>
+                  </a:ext>
+                </a:extLst>
+              </a:tr>
+              <a:tr h="370840">
+                <a:tc>
+                  <a:txBody>
+                    <a:bodyPr/>
+                    <a:lstStyle/>
+                    <a:p>
+                      <a:r>
+                        <a:rPr lang="ja-JP" altLang="en-US" sz="1800"/>
+                        <a:t>低政治興趣</a:t>
+                      </a:r>
+                      <a:endParaRPr lang="en-US" dirty="0"/>
+                    </a:p>
+                  </a:txBody>
+                  <a:tcPr/>
+                </a:tc>
+                <a:tc>
+                  <a:txBody>
+                    <a:bodyPr/>
+                    <a:lstStyle/>
+                    <a:p>
+                      <a:r>
+                        <a:rPr lang="en-US" dirty="0"/>
+                        <a:t>20%</a:t>
+                      </a:r>
+                    </a:p>
+                  </a:txBody>
+                  <a:tcPr/>
+                </a:tc>
+                <a:extLst>
+                  <a:ext uri="{0D108BD9-81ED-4DB2-BD59-A6C34878D82A}">
+                    <a16:rowId xmlns:a16="http://schemas.microsoft.com/office/drawing/2014/main" val="4166148556"/>
+                  </a:ext>
+                </a:extLst>
+              </a:tr>
+            </a:tbl>
+          </a:graphicData>
+        </a:graphic>
+      </p:graphicFrame>
+    </p:spTree>
+    <p:extLst>
+      <p:ext uri="{BB962C8B-B14F-4D97-AF65-F5344CB8AC3E}">
+        <p14:creationId xmlns:p14="http://schemas.microsoft.com/office/powerpoint/2010/main" val="662208996"/>
+      </p:ext>
+    </p:extLst>
+  </p:cSld>
+  <p:clrMapOvr>
+    <a:masterClrMapping/>
+  </p:clrMapOvr>
+</p:sld>
+</file>
+
+<file path=ppt/slides/slide11.xml><?xml version="1.0" encoding="utf-8"?>
+<p:sld xmlns:a="http://schemas.openxmlformats.org/drawingml/2006/main" xmlns:r="http://schemas.openxmlformats.org/officeDocument/2006/relationships" xmlns:p="http://schemas.openxmlformats.org/presentationml/2006/main">
+  <p:cSld>
+    <p:spTree>
+      <p:nvGrpSpPr>
+        <p:cNvPr id="1" name=""/>
+        <p:cNvGrpSpPr/>
+        <p:nvPr/>
+      </p:nvGrpSpPr>
+      <p:grpSpPr>
+        <a:xfrm>
+          <a:off x="0" y="0"/>
+          <a:ext cx="0" cy="0"/>
+          <a:chOff x="0" y="0"/>
+          <a:chExt cx="0" cy="0"/>
+        </a:xfrm>
+      </p:grpSpPr>
+      <p:sp>
+        <p:nvSpPr>
+          <p:cNvPr id="2" name="Title 1">
+            <a:extLst>
+              <a:ext uri="{FF2B5EF4-FFF2-40B4-BE49-F238E27FC236}">
+                <a16:creationId xmlns:a16="http://schemas.microsoft.com/office/drawing/2014/main" id="{34C3B381-AADF-A517-1FDA-0779313EAF53}"/>
+              </a:ext>
+            </a:extLst>
+          </p:cNvPr>
+          <p:cNvSpPr>
+            <a:spLocks noGrp="1"/>
+          </p:cNvSpPr>
+          <p:nvPr>
+            <p:ph type="title"/>
+          </p:nvPr>
+        </p:nvSpPr>
+        <p:spPr/>
+        <p:txBody>
+          <a:bodyPr/>
+          <a:lstStyle/>
+          <a:p>
+            <a:r>
+              <a:rPr lang="ja-JP" altLang="en-US"/>
               <a:t>網路調查的</a:t>
             </a:r>
             <a:r>
               <a:rPr lang="en-US" dirty="0" err="1"/>
-              <a:t>加權</a:t>
-            </a:r>
-            <a:endParaRPr lang="en-US" dirty="0"/>
+              <a:t>加權（一</a:t>
+            </a:r>
+            <a:r>
+              <a:rPr lang="en-US" dirty="0"/>
+              <a:t>）</a:t>
+            </a:r>
+          </a:p>
+        </p:txBody>
+      </p:sp>
+      <mc:AlternateContent xmlns:mc="http://schemas.openxmlformats.org/markup-compatibility/2006">
+        <mc:Choice xmlns:a14="http://schemas.microsoft.com/office/drawing/2010/main" Requires="a14">
+          <p:sp>
+            <p:nvSpPr>
+              <p:cNvPr id="3" name="Content Placeholder 2">
+                <a:extLst>
+                  <a:ext uri="{FF2B5EF4-FFF2-40B4-BE49-F238E27FC236}">
+                    <a16:creationId xmlns:a16="http://schemas.microsoft.com/office/drawing/2014/main" id="{21C97CC7-B9FA-04C8-1299-5314BA2E8745}"/>
+                  </a:ext>
+                </a:extLst>
+              </p:cNvPr>
+              <p:cNvSpPr>
+                <a:spLocks noGrp="1"/>
+              </p:cNvSpPr>
+              <p:nvPr>
+                <p:ph idx="1"/>
+              </p:nvPr>
+            </p:nvSpPr>
+            <p:spPr/>
+            <p:txBody>
+              <a:bodyPr/>
+              <a:lstStyle/>
+              <a:p>
+                <a:pPr>
+                  <a:lnSpc>
+                    <a:spcPct val="150000"/>
+                  </a:lnSpc>
+                  <a:buFont typeface="Wingdings" pitchFamily="2" charset="2"/>
+                  <a:buChar char="q"/>
+                </a:pPr>
+                <a:r>
+                  <a:rPr lang="ja-JP" altLang="en-US" sz="2000"/>
+                  <a:t>例如：如果用電話訪問招募受訪者，然後寄同意書給受訪者，最後寄問卷給受訪者。這一套過程，有三次的選擇偏誤。</a:t>
+                </a:r>
+                <a:endParaRPr lang="en-US" altLang="ja-JP" sz="2000" dirty="0"/>
+              </a:p>
+              <a:p>
+                <a:pPr marL="742950" lvl="1" indent="-285750">
+                  <a:buFont typeface="Arial" panose="020B0604020202020204" pitchFamily="34" charset="0"/>
+                  <a:buChar char="•"/>
+                </a:pPr>
+                <a14:m>
+                  <m:oMath xmlns:m="http://schemas.openxmlformats.org/officeDocument/2006/math">
+                    <m:sSub>
+                      <m:sSubPr>
+                        <m:ctrlPr>
+                          <a:rPr lang="en-US" i="1" smtClean="0">
+                            <a:latin typeface="Cambria Math" panose="02040503050406030204" pitchFamily="18" charset="0"/>
+                          </a:rPr>
+                        </m:ctrlPr>
+                      </m:sSubPr>
+                      <m:e>
+                        <m:r>
+                          <a:rPr lang="en-US" b="0" i="1" smtClean="0">
+                            <a:latin typeface="Cambria Math" panose="02040503050406030204" pitchFamily="18" charset="0"/>
+                          </a:rPr>
+                          <m:t>𝑆</m:t>
+                        </m:r>
+                      </m:e>
+                      <m:sub>
+                        <m:r>
+                          <a:rPr lang="en-US" b="0" i="1" smtClean="0">
+                            <a:latin typeface="Cambria Math" panose="02040503050406030204" pitchFamily="18" charset="0"/>
+                          </a:rPr>
+                          <m:t>𝑖</m:t>
+                        </m:r>
+                      </m:sub>
+                    </m:sSub>
+                    <m:r>
+                      <a:rPr lang="en-US" b="0" i="1" smtClean="0">
+                        <a:latin typeface="Cambria Math" panose="02040503050406030204" pitchFamily="18" charset="0"/>
+                      </a:rPr>
+                      <m:t>=1</m:t>
+                    </m:r>
+                  </m:oMath>
+                </a14:m>
+                <a:r>
+                  <a:rPr lang="en-US" dirty="0"/>
+                  <a:t>：</a:t>
+                </a:r>
+                <a:r>
+                  <a:rPr lang="ja-JP" altLang="en-US"/>
+                  <a:t>電話樣本「被抽到且完成訪問」（</a:t>
+                </a:r>
+                <a:r>
+                  <a:rPr lang="en-US" dirty="0"/>
+                  <a:t>reference sample）</a:t>
+                </a:r>
+              </a:p>
+              <a:p>
+                <a:pPr marL="742950" lvl="1" indent="-285750">
+                  <a:buFont typeface="Arial" panose="020B0604020202020204" pitchFamily="34" charset="0"/>
+                  <a:buChar char="•"/>
+                </a:pPr>
+                <a14:m>
+                  <m:oMath xmlns:m="http://schemas.openxmlformats.org/officeDocument/2006/math">
+                    <m:sSub>
+                      <m:sSubPr>
+                        <m:ctrlPr>
+                          <a:rPr lang="en-US" i="1" smtClean="0">
+                            <a:latin typeface="Cambria Math" panose="02040503050406030204" pitchFamily="18" charset="0"/>
+                          </a:rPr>
+                        </m:ctrlPr>
+                      </m:sSubPr>
+                      <m:e>
+                        <m:r>
+                          <a:rPr lang="en-US" b="0" i="1" smtClean="0">
+                            <a:latin typeface="Cambria Math" panose="02040503050406030204" pitchFamily="18" charset="0"/>
+                          </a:rPr>
+                          <m:t>𝐽</m:t>
+                        </m:r>
+                      </m:e>
+                      <m:sub>
+                        <m:r>
+                          <a:rPr lang="en-US" b="0" i="1" smtClean="0">
+                            <a:latin typeface="Cambria Math" panose="02040503050406030204" pitchFamily="18" charset="0"/>
+                          </a:rPr>
+                          <m:t>𝑖</m:t>
+                        </m:r>
+                      </m:sub>
+                    </m:sSub>
+                    <m:r>
+                      <a:rPr lang="en-US" b="0" i="1" smtClean="0">
+                        <a:latin typeface="Cambria Math" panose="02040503050406030204" pitchFamily="18" charset="0"/>
+                      </a:rPr>
+                      <m:t>=1 </m:t>
+                    </m:r>
+                  </m:oMath>
+                </a14:m>
+                <a:r>
+                  <a:rPr lang="en-US" dirty="0"/>
+                  <a:t>：</a:t>
+                </a:r>
+                <a:r>
+                  <a:rPr lang="ja-JP" altLang="en-US"/>
+                  <a:t>在電話訪問後「同意加入 </a:t>
+                </a:r>
+                <a:r>
+                  <a:rPr lang="en-US" dirty="0"/>
+                  <a:t>panel」</a:t>
+                </a:r>
+              </a:p>
+              <a:p>
+                <a:pPr marL="742950" lvl="1" indent="-285750">
+                  <a:buFont typeface="Arial" panose="020B0604020202020204" pitchFamily="34" charset="0"/>
+                  <a:buChar char="•"/>
+                </a:pPr>
+                <a14:m>
+                  <m:oMath xmlns:m="http://schemas.openxmlformats.org/officeDocument/2006/math">
+                    <m:sSub>
+                      <m:sSubPr>
+                        <m:ctrlPr>
+                          <a:rPr lang="en-US" i="1" smtClean="0">
+                            <a:latin typeface="Cambria Math" panose="02040503050406030204" pitchFamily="18" charset="0"/>
+                          </a:rPr>
+                        </m:ctrlPr>
+                      </m:sSubPr>
+                      <m:e>
+                        <m:r>
+                          <a:rPr lang="en-US" b="0" i="1" smtClean="0">
+                            <a:latin typeface="Cambria Math" panose="02040503050406030204" pitchFamily="18" charset="0"/>
+                          </a:rPr>
+                          <m:t>𝑅</m:t>
+                        </m:r>
+                      </m:e>
+                      <m:sub>
+                        <m:r>
+                          <a:rPr lang="en-US" b="0" i="1" smtClean="0">
+                            <a:latin typeface="Cambria Math" panose="02040503050406030204" pitchFamily="18" charset="0"/>
+                          </a:rPr>
+                          <m:t>𝑖</m:t>
+                        </m:r>
+                      </m:sub>
+                    </m:sSub>
+                    <m:r>
+                      <a:rPr lang="en-US" b="0" i="1" smtClean="0">
+                        <a:latin typeface="Cambria Math" panose="02040503050406030204" pitchFamily="18" charset="0"/>
+                      </a:rPr>
+                      <m:t>=1 </m:t>
+                    </m:r>
+                  </m:oMath>
+                </a14:m>
+                <a:r>
+                  <a:rPr lang="en-US" dirty="0"/>
+                  <a:t>：</a:t>
+                </a:r>
+                <a:r>
+                  <a:rPr lang="ja-JP" altLang="en-US"/>
+                  <a:t>在同意加入後「實際完成線上問卷」</a:t>
+                </a:r>
+              </a:p>
+              <a:p>
+                <a:r>
+                  <a:rPr lang="ja-JP" altLang="en-US" sz="2100"/>
+                  <a:t>最後資料的集合是：</a:t>
+                </a:r>
+                <a14:m>
+                  <m:oMath xmlns:m="http://schemas.openxmlformats.org/officeDocument/2006/math">
+                    <m:d>
+                      <m:dPr>
+                        <m:begChr m:val="{"/>
+                        <m:endChr m:val="}"/>
+                        <m:ctrlPr>
+                          <a:rPr lang="en-US" altLang="ja-JP" sz="2100" i="1" smtClean="0">
+                            <a:latin typeface="Cambria Math" panose="02040503050406030204" pitchFamily="18" charset="0"/>
+                          </a:rPr>
+                        </m:ctrlPr>
+                      </m:dPr>
+                      <m:e>
+                        <m:r>
+                          <a:rPr lang="en-US" altLang="ja-JP" sz="2100" b="0" i="1" smtClean="0">
+                            <a:latin typeface="Cambria Math" panose="02040503050406030204" pitchFamily="18" charset="0"/>
+                          </a:rPr>
+                          <m:t>𝑖</m:t>
+                        </m:r>
+                        <m:r>
+                          <a:rPr lang="en-US" altLang="ja-JP" sz="2100" b="0" i="1" smtClean="0">
+                            <a:latin typeface="Cambria Math" panose="02040503050406030204" pitchFamily="18" charset="0"/>
+                          </a:rPr>
+                          <m:t>:</m:t>
+                        </m:r>
+                        <m:sSub>
+                          <m:sSubPr>
+                            <m:ctrlPr>
+                              <a:rPr lang="en-US" sz="2400" i="1">
+                                <a:latin typeface="Cambria Math" panose="02040503050406030204" pitchFamily="18" charset="0"/>
+                              </a:rPr>
+                            </m:ctrlPr>
+                          </m:sSubPr>
+                          <m:e>
+                            <m:r>
+                              <a:rPr lang="en-US" sz="2400" i="1">
+                                <a:latin typeface="Cambria Math" panose="02040503050406030204" pitchFamily="18" charset="0"/>
+                              </a:rPr>
+                              <m:t>𝑆</m:t>
+                            </m:r>
+                          </m:e>
+                          <m:sub>
+                            <m:r>
+                              <a:rPr lang="en-US" sz="2400" i="1">
+                                <a:latin typeface="Cambria Math" panose="02040503050406030204" pitchFamily="18" charset="0"/>
+                              </a:rPr>
+                              <m:t>𝑖</m:t>
+                            </m:r>
+                          </m:sub>
+                        </m:sSub>
+                        <m:r>
+                          <a:rPr lang="en-US" sz="2400" i="1">
+                            <a:latin typeface="Cambria Math" panose="02040503050406030204" pitchFamily="18" charset="0"/>
+                          </a:rPr>
+                          <m:t>=1</m:t>
+                        </m:r>
+                        <m:r>
+                          <a:rPr lang="en-US" sz="2400" b="0" i="1" smtClean="0">
+                            <a:latin typeface="Cambria Math" panose="02040503050406030204" pitchFamily="18" charset="0"/>
+                          </a:rPr>
+                          <m:t>,</m:t>
+                        </m:r>
+                        <m:sSub>
+                          <m:sSubPr>
+                            <m:ctrlPr>
+                              <a:rPr lang="en-US" sz="2400" i="1">
+                                <a:latin typeface="Cambria Math" panose="02040503050406030204" pitchFamily="18" charset="0"/>
+                              </a:rPr>
+                            </m:ctrlPr>
+                          </m:sSubPr>
+                          <m:e>
+                            <m:r>
+                              <a:rPr lang="en-US" sz="2400" b="0" i="1" smtClean="0">
+                                <a:latin typeface="Cambria Math" panose="02040503050406030204" pitchFamily="18" charset="0"/>
+                              </a:rPr>
+                              <m:t>𝐽</m:t>
+                            </m:r>
+                          </m:e>
+                          <m:sub>
+                            <m:r>
+                              <a:rPr lang="en-US" sz="2400" i="1">
+                                <a:latin typeface="Cambria Math" panose="02040503050406030204" pitchFamily="18" charset="0"/>
+                              </a:rPr>
+                              <m:t>𝑖</m:t>
+                            </m:r>
+                          </m:sub>
+                        </m:sSub>
+                        <m:r>
+                          <a:rPr lang="en-US" sz="2400" i="1">
+                            <a:latin typeface="Cambria Math" panose="02040503050406030204" pitchFamily="18" charset="0"/>
+                          </a:rPr>
+                          <m:t>=1</m:t>
+                        </m:r>
+                        <m:r>
+                          <a:rPr lang="en-US" sz="2400" b="0" i="1" smtClean="0">
+                            <a:latin typeface="Cambria Math" panose="02040503050406030204" pitchFamily="18" charset="0"/>
+                          </a:rPr>
+                          <m:t>,</m:t>
+                        </m:r>
+                        <m:sSub>
+                          <m:sSubPr>
+                            <m:ctrlPr>
+                              <a:rPr lang="en-US" sz="2400" i="1">
+                                <a:latin typeface="Cambria Math" panose="02040503050406030204" pitchFamily="18" charset="0"/>
+                              </a:rPr>
+                            </m:ctrlPr>
+                          </m:sSubPr>
+                          <m:e>
+                            <m:r>
+                              <a:rPr lang="en-US" sz="2400" b="0" i="1" smtClean="0">
+                                <a:latin typeface="Cambria Math" panose="02040503050406030204" pitchFamily="18" charset="0"/>
+                              </a:rPr>
+                              <m:t>𝑅</m:t>
+                            </m:r>
+                          </m:e>
+                          <m:sub>
+                            <m:r>
+                              <a:rPr lang="en-US" sz="2400" i="1">
+                                <a:latin typeface="Cambria Math" panose="02040503050406030204" pitchFamily="18" charset="0"/>
+                              </a:rPr>
+                              <m:t>𝑖</m:t>
+                            </m:r>
+                          </m:sub>
+                        </m:sSub>
+                        <m:r>
+                          <a:rPr lang="en-US" sz="2400" i="1">
+                            <a:latin typeface="Cambria Math" panose="02040503050406030204" pitchFamily="18" charset="0"/>
+                          </a:rPr>
+                          <m:t>=1</m:t>
+                        </m:r>
+                      </m:e>
+                    </m:d>
+                  </m:oMath>
+                </a14:m>
+                <a:endParaRPr lang="ja-JP" altLang="en-US" sz="2100"/>
+              </a:p>
+              <a:p>
+                <a:endParaRPr lang="en-US" dirty="0"/>
+              </a:p>
+            </p:txBody>
+          </p:sp>
+        </mc:Choice>
+        <mc:Fallback>
+          <p:sp>
+            <p:nvSpPr>
+              <p:cNvPr id="3" name="Content Placeholder 2">
+                <a:extLst>
+                  <a:ext uri="{FF2B5EF4-FFF2-40B4-BE49-F238E27FC236}">
+                    <a16:creationId xmlns:a16="http://schemas.microsoft.com/office/drawing/2014/main" id="{21C97CC7-B9FA-04C8-1299-5314BA2E8745}"/>
+                  </a:ext>
+                </a:extLst>
+              </p:cNvPr>
+              <p:cNvSpPr>
+                <a:spLocks noGrp="1" noRot="1" noChangeAspect="1" noMove="1" noResize="1" noEditPoints="1" noAdjustHandles="1" noChangeArrowheads="1" noChangeShapeType="1" noTextEdit="1"/>
+              </p:cNvSpPr>
+              <p:nvPr>
+                <p:ph idx="1"/>
+              </p:nvPr>
+            </p:nvSpPr>
+            <p:spPr>
+              <a:blipFill>
+                <a:blip r:embed="rId2"/>
+                <a:stretch>
+                  <a:fillRect l="-603"/>
+                </a:stretch>
+              </a:blipFill>
+            </p:spPr>
+            <p:txBody>
+              <a:bodyPr/>
+              <a:lstStyle/>
+              <a:p>
+                <a:r>
+                  <a:rPr lang="en-US">
+                    <a:noFill/>
+                  </a:rPr>
+                  <a:t> </a:t>
+                </a:r>
+              </a:p>
+            </p:txBody>
+          </p:sp>
+        </mc:Fallback>
+      </mc:AlternateContent>
+      <p:sp>
+        <p:nvSpPr>
+          <p:cNvPr id="4" name="Slide Number Placeholder 3">
+            <a:extLst>
+              <a:ext uri="{FF2B5EF4-FFF2-40B4-BE49-F238E27FC236}">
+                <a16:creationId xmlns:a16="http://schemas.microsoft.com/office/drawing/2014/main" id="{7D6CAABB-2C93-9A83-3F20-00511F754068}"/>
+              </a:ext>
+            </a:extLst>
+          </p:cNvPr>
+          <p:cNvSpPr>
+            <a:spLocks noGrp="1"/>
+          </p:cNvSpPr>
+          <p:nvPr>
+            <p:ph type="sldNum" sz="quarter" idx="12"/>
+          </p:nvPr>
+        </p:nvSpPr>
+        <p:spPr/>
+        <p:txBody>
+          <a:bodyPr/>
+          <a:lstStyle/>
+          <a:p>
+            <a:fld id="{34E21383-B02B-694B-B2AD-A967203CDE86}" type="slidenum">
+              <a:rPr lang="en-US" smtClean="0"/>
+              <a:t>11</a:t>
+            </a:fld>
+            <a:endParaRPr lang="en-US"/>
+          </a:p>
+        </p:txBody>
+      </p:sp>
+    </p:spTree>
+    <p:extLst>
+      <p:ext uri="{BB962C8B-B14F-4D97-AF65-F5344CB8AC3E}">
+        <p14:creationId xmlns:p14="http://schemas.microsoft.com/office/powerpoint/2010/main" val="450557797"/>
+      </p:ext>
+    </p:extLst>
+  </p:cSld>
+  <p:clrMapOvr>
+    <a:masterClrMapping/>
+  </p:clrMapOvr>
+</p:sld>
+</file>
+
+<file path=ppt/slides/slide12.xml><?xml version="1.0" encoding="utf-8"?>
+<p:sld xmlns:a="http://schemas.openxmlformats.org/drawingml/2006/main" xmlns:r="http://schemas.openxmlformats.org/officeDocument/2006/relationships" xmlns:p="http://schemas.openxmlformats.org/presentationml/2006/main">
+  <p:cSld>
+    <p:spTree>
+      <p:nvGrpSpPr>
+        <p:cNvPr id="1" name=""/>
+        <p:cNvGrpSpPr/>
+        <p:nvPr/>
+      </p:nvGrpSpPr>
+      <p:grpSpPr>
+        <a:xfrm>
+          <a:off x="0" y="0"/>
+          <a:ext cx="0" cy="0"/>
+          <a:chOff x="0" y="0"/>
+          <a:chExt cx="0" cy="0"/>
+        </a:xfrm>
+      </p:grpSpPr>
+      <p:sp>
+        <p:nvSpPr>
+          <p:cNvPr id="2" name="Title 1">
+            <a:extLst>
+              <a:ext uri="{FF2B5EF4-FFF2-40B4-BE49-F238E27FC236}">
+                <a16:creationId xmlns:a16="http://schemas.microsoft.com/office/drawing/2014/main" id="{AA343FC3-4047-4A6A-6B74-C624EA381675}"/>
+              </a:ext>
+            </a:extLst>
+          </p:cNvPr>
+          <p:cNvSpPr>
+            <a:spLocks noGrp="1"/>
+          </p:cNvSpPr>
+          <p:nvPr>
+            <p:ph type="title"/>
+          </p:nvPr>
+        </p:nvSpPr>
+        <p:spPr/>
+        <p:txBody>
+          <a:bodyPr/>
+          <a:lstStyle/>
+          <a:p>
+            <a:r>
+              <a:rPr lang="ja-JP" altLang="en-US"/>
+              <a:t>網路調查的</a:t>
+            </a:r>
+            <a:r>
+              <a:rPr lang="en-US" dirty="0" err="1"/>
+              <a:t>加權（二</a:t>
+            </a:r>
+            <a:r>
+              <a:rPr lang="en-US" dirty="0"/>
+              <a:t>）</a:t>
+            </a:r>
           </a:p>
         </p:txBody>
       </p:sp>
@@ -4487,7 +5684,7 @@
           <a:p>
             <a:fld id="{34E21383-B02B-694B-B2AD-A967203CDE86}" type="slidenum">
               <a:rPr lang="en-US" smtClean="0"/>
-              <a:t>10</a:t>
+              <a:t>12</a:t>
             </a:fld>
             <a:endParaRPr lang="en-US"/>
           </a:p>
@@ -4506,7 +5703,7 @@
 </p:sld>
 </file>
 
-<file path=ppt/slides/slide11.xml><?xml version="1.0" encoding="utf-8"?>
+<file path=ppt/slides/slide13.xml><?xml version="1.0" encoding="utf-8"?>
 <p:sld xmlns:a="http://schemas.openxmlformats.org/drawingml/2006/main" xmlns:r="http://schemas.openxmlformats.org/officeDocument/2006/relationships" xmlns:p="http://schemas.openxmlformats.org/presentationml/2006/main">
   <p:cSld>
     <p:spTree>
@@ -4544,7 +5741,18 @@
           <a:bodyPr/>
           <a:lstStyle/>
           <a:p>
-            <a:endParaRPr lang="en-US"/>
+            <a:r>
+              <a:rPr lang="ja-JP" altLang="en-US"/>
+              <a:t>網路調查的</a:t>
+            </a:r>
+            <a:r>
+              <a:rPr lang="en-US" dirty="0" err="1"/>
+              <a:t>加權（三</a:t>
+            </a:r>
+            <a:r>
+              <a:rPr lang="en-US" dirty="0"/>
+              <a:t>）</a:t>
+            </a:r>
           </a:p>
         </p:txBody>
       </p:sp>
@@ -4572,79 +5780,68 @@
           <a:lstStyle/>
           <a:p>
             <a:r>
-              <a:rPr lang="ja-JP" altLang="en-US"/>
-              <a:t>觀察到的資料</a:t>
-            </a:r>
-            <a:r>
-              <a:rPr lang="en-US" altLang="ja-JP" dirty="0"/>
+              <a:rPr lang="ja-JP" altLang="en-US" sz="2400"/>
+              <a:t>因為觀察到的資料</a:t>
+            </a:r>
+            <a:r>
+              <a:rPr lang="en-US" altLang="ja-JP" sz="2400" dirty="0"/>
               <a:t>=</a:t>
             </a:r>
             <a:r>
-              <a:rPr lang="ja-JP" altLang="en-US"/>
+              <a:rPr lang="ja-JP" altLang="en-US" sz="2400"/>
               <a:t>真實資料</a:t>
             </a:r>
             <a:r>
-              <a:rPr lang="en-US" altLang="ja-JP" dirty="0"/>
+              <a:rPr lang="en-US" altLang="ja-JP" sz="2400" dirty="0"/>
               <a:t>×</a:t>
             </a:r>
             <a:r>
-              <a:rPr lang="ja-JP" altLang="en-US"/>
+              <a:rPr lang="ja-JP" altLang="en-US" sz="2400"/>
+              <a:t>被抽中的機率，所以修正後資料</a:t>
+            </a:r>
+            <a:r>
+              <a:rPr lang="en-US" altLang="ja-JP" sz="2400" dirty="0"/>
+              <a:t>=</a:t>
+            </a:r>
+            <a:r>
+              <a:rPr lang="ja-JP" altLang="en-US" sz="2400"/>
               <a:t>被抽中的機率</a:t>
             </a:r>
-            <a:endParaRPr lang="en-US" altLang="ja-JP" dirty="0"/>
-          </a:p>
-          <a:p>
-            <a:r>
-              <a:rPr lang="ja-JP" altLang="en-US"/>
-              <a:t>所以修正後資料</a:t>
-            </a:r>
-            <a:r>
-              <a:rPr lang="en-US" altLang="ja-JP" dirty="0"/>
-              <a:t>=</a:t>
-            </a:r>
-            <a:r>
-              <a:rPr lang="ja-JP" altLang="en-US"/>
-              <a:t>被抽中的機率</a:t>
-            </a:r>
-            <a:r>
-              <a:rPr lang="en-US" altLang="ja-JP" dirty="0"/>
+            <a:r>
+              <a:rPr lang="en-US" altLang="ja-JP" sz="2400" dirty="0"/>
               <a:t>/</a:t>
             </a:r>
             <a:r>
-              <a:rPr lang="ja-JP" altLang="en-US"/>
+              <a:rPr lang="ja-JP" altLang="en-US" sz="2400"/>
               <a:t>觀察到的資料​，稱為</a:t>
             </a:r>
             <a:r>
-              <a:rPr lang="en-US" altLang="ja-JP" dirty="0"/>
-              <a:t>Inversed Probability Weighting </a:t>
-            </a:r>
-            <a:r>
-              <a:rPr lang="en-US" altLang="ja-JP"/>
-              <a:t>(IPW)</a:t>
-            </a:r>
-            <a:r>
-              <a:rPr lang="ja-JP" altLang="en-US"/>
+              <a:rPr lang="en-US" altLang="ja-JP" sz="2400" dirty="0"/>
+              <a:t>Inversed Probability Weighting (IPW)</a:t>
+            </a:r>
+            <a:r>
+              <a:rPr lang="ja-JP" altLang="en-US" sz="2400"/>
               <a:t>。</a:t>
             </a:r>
-            <a:endParaRPr lang="en-US" altLang="ja-JP" dirty="0"/>
-          </a:p>
-          <a:p>
-            <a:r>
-              <a:rPr lang="ja-JP" altLang="en-US"/>
-              <a:t>前提是：會不會加入資料以及最後的預測（例如：投票）只依賴於我們觀察到的 𝑋</a:t>
-            </a:r>
-          </a:p>
-          <a:p>
-            <a:r>
-              <a:rPr lang="ja-JP" altLang="en-US"/>
+            <a:endParaRPr lang="en-US" altLang="ja-JP" sz="2400" dirty="0"/>
+          </a:p>
+          <a:p>
+            <a:r>
+              <a:rPr lang="ja-JP" altLang="en-US" sz="2400"/>
+              <a:t>這一套程序的前提是加入資料以及最後的預測（例如：投票）只依賴於我們觀察到的 𝑋</a:t>
+            </a:r>
+          </a:p>
+          <a:p>
+            <a:r>
+              <a:rPr lang="ja-JP" altLang="en-US" sz="2400"/>
               <a:t>如果有 </a:t>
             </a:r>
             <a:r>
-              <a:rPr lang="en-US" dirty="0"/>
+              <a:rPr lang="en-US" sz="2400" dirty="0"/>
               <a:t>unobserved trait（</a:t>
             </a:r>
             <a:r>
-              <a:rPr lang="ja-JP" altLang="en-US"/>
+              <a:rPr lang="ja-JP" altLang="en-US" sz="2400"/>
               <a:t>例如「隱性政治熱情」）同時影響：</a:t>
             </a:r>
           </a:p>
@@ -4654,7 +5851,7 @@
               <a:buChar char="ü"/>
             </a:pPr>
             <a:r>
-              <a:rPr lang="ja-JP" altLang="en-US"/>
+              <a:rPr lang="ja-JP" altLang="en-US" sz="2400"/>
               <a:t>上網填問卷</a:t>
             </a:r>
           </a:p>
@@ -4664,28 +5861,28 @@
               <a:buChar char="ü"/>
             </a:pPr>
             <a:r>
-              <a:rPr lang="ja-JP" altLang="en-US"/>
+              <a:rPr lang="ja-JP" altLang="en-US" sz="2400"/>
               <a:t>投票意向</a:t>
             </a:r>
           </a:p>
           <a:p>
             <a:r>
-              <a:rPr lang="en-US" dirty="0"/>
+              <a:rPr lang="en-US" sz="2400" dirty="0"/>
               <a:t>👉 </a:t>
             </a:r>
             <a:r>
-              <a:rPr lang="ja-JP" altLang="en-US"/>
+              <a:rPr lang="ja-JP" altLang="en-US" sz="2400"/>
               <a:t>那麼 </a:t>
             </a:r>
             <a:r>
-              <a:rPr lang="en-US" dirty="0"/>
+              <a:rPr lang="en-US" sz="2400" dirty="0"/>
               <a:t>IPW </a:t>
             </a:r>
             <a:r>
-              <a:rPr lang="ja-JP" altLang="en-US"/>
+              <a:rPr lang="ja-JP" altLang="en-US" sz="2400"/>
               <a:t>不能完全修正</a:t>
             </a:r>
-            <a:endParaRPr lang="en-US" dirty="0"/>
+            <a:endParaRPr lang="en-US" sz="2400" dirty="0"/>
           </a:p>
         </p:txBody>
       </p:sp>
@@ -4712,7 +5909,7 @@
           <a:p>
             <a:fld id="{34E21383-B02B-694B-B2AD-A967203CDE86}" type="slidenum">
               <a:rPr lang="en-US" smtClean="0"/>
-              <a:t>11</a:t>
+              <a:t>13</a:t>
             </a:fld>
             <a:endParaRPr lang="en-US"/>
           </a:p>
@@ -4731,7 +5928,7 @@
 </p:sld>
 </file>
 
-<file path=ppt/slides/slide12.xml><?xml version="1.0" encoding="utf-8"?>
+<file path=ppt/slides/slide14.xml><?xml version="1.0" encoding="utf-8"?>
 <p:sld xmlns:a="http://schemas.openxmlformats.org/drawingml/2006/main" xmlns:r="http://schemas.openxmlformats.org/officeDocument/2006/relationships" xmlns:p="http://schemas.openxmlformats.org/presentationml/2006/main">
   <p:cSld>
     <p:spTree>
@@ -4753,6 +5950,385 @@
           <p:cNvPr id="2" name="Title 1">
             <a:extLst>
               <a:ext uri="{FF2B5EF4-FFF2-40B4-BE49-F238E27FC236}">
+                <a16:creationId xmlns:a16="http://schemas.microsoft.com/office/drawing/2014/main" id="{CA97296C-20CB-E09A-16CC-99A289B64445}"/>
+              </a:ext>
+            </a:extLst>
+          </p:cNvPr>
+          <p:cNvSpPr>
+            <a:spLocks noGrp="1"/>
+          </p:cNvSpPr>
+          <p:nvPr>
+            <p:ph type="title"/>
+          </p:nvPr>
+        </p:nvSpPr>
+        <p:spPr/>
+        <p:txBody>
+          <a:bodyPr/>
+          <a:lstStyle/>
+          <a:p>
+            <a:r>
+              <a:rPr lang="ja-JP" altLang="en-US"/>
+              <a:t>網路調查的</a:t>
+            </a:r>
+            <a:r>
+              <a:rPr lang="en-US" dirty="0" err="1"/>
+              <a:t>加權（四</a:t>
+            </a:r>
+            <a:r>
+              <a:rPr lang="en-US" dirty="0"/>
+              <a:t>）</a:t>
+            </a:r>
+          </a:p>
+        </p:txBody>
+      </p:sp>
+      <p:sp>
+        <p:nvSpPr>
+          <p:cNvPr id="3" name="Content Placeholder 2">
+            <a:extLst>
+              <a:ext uri="{FF2B5EF4-FFF2-40B4-BE49-F238E27FC236}">
+                <a16:creationId xmlns:a16="http://schemas.microsoft.com/office/drawing/2014/main" id="{503E2529-124E-4C1E-A46F-EA482C25D185}"/>
+              </a:ext>
+            </a:extLst>
+          </p:cNvPr>
+          <p:cNvSpPr>
+            <a:spLocks noGrp="1"/>
+          </p:cNvSpPr>
+          <p:nvPr>
+            <p:ph idx="1"/>
+          </p:nvPr>
+        </p:nvSpPr>
+        <p:spPr/>
+        <p:txBody>
+          <a:bodyPr>
+            <a:normAutofit fontScale="92500" lnSpcReduction="10000"/>
+          </a:bodyPr>
+          <a:lstStyle/>
+          <a:p>
+            <a:r>
+              <a:rPr lang="ja-JP" altLang="en-US"/>
+              <a:t>第一層：電話樣本對母體加權</a:t>
+            </a:r>
+          </a:p>
+          <a:p>
+            <a:r>
+              <a:rPr lang="ja-JP" altLang="en-US"/>
+              <a:t>電話樣本雖然比較接近 </a:t>
+            </a:r>
+            <a:r>
+              <a:rPr lang="en-US" dirty="0"/>
+              <a:t>probability sample，</a:t>
+            </a:r>
+            <a:r>
+              <a:rPr lang="ja-JP" altLang="en-US"/>
+              <a:t>但還是會有：</a:t>
+            </a:r>
+          </a:p>
+          <a:p>
+            <a:pPr marL="514350" indent="-514350">
+              <a:buFont typeface="+mj-lt"/>
+              <a:buAutoNum type="arabicPeriod"/>
+            </a:pPr>
+            <a:r>
+              <a:rPr lang="ja-JP" altLang="en-US"/>
+              <a:t>拒訪</a:t>
+            </a:r>
+          </a:p>
+          <a:p>
+            <a:pPr marL="514350" indent="-514350">
+              <a:buFont typeface="+mj-lt"/>
+              <a:buAutoNum type="arabicPeriod"/>
+            </a:pPr>
+            <a:r>
+              <a:rPr lang="en-US" dirty="0"/>
+              <a:t>frame coverage </a:t>
+            </a:r>
+            <a:r>
+              <a:rPr lang="ja-JP" altLang="en-US"/>
+              <a:t>問題</a:t>
+            </a:r>
+          </a:p>
+          <a:p>
+            <a:pPr marL="514350" indent="-514350">
+              <a:buFont typeface="+mj-lt"/>
+              <a:buAutoNum type="arabicPeriod"/>
+            </a:pPr>
+            <a:r>
+              <a:rPr lang="ja-JP" altLang="en-US"/>
+              <a:t>市話</a:t>
+            </a:r>
+            <a:r>
+              <a:rPr lang="en-US" altLang="ja-JP" dirty="0"/>
+              <a:t>/</a:t>
+            </a:r>
+            <a:r>
+              <a:rPr lang="ja-JP" altLang="en-US"/>
+              <a:t>手機混合抽樣偏誤</a:t>
+            </a:r>
+          </a:p>
+          <a:p>
+            <a:endParaRPr lang="ja-JP" altLang="en-US"/>
+          </a:p>
+          <a:p>
+            <a:r>
+              <a:rPr lang="ja-JP" altLang="en-US"/>
+              <a:t>所以要用母體已知分布（例如年齡、性別、區域、教育）去校準電話樣本。</a:t>
+            </a:r>
+          </a:p>
+          <a:p>
+            <a:r>
+              <a:rPr lang="ja-JP" altLang="en-US"/>
+              <a:t>這時母體資料的作用是：把電話樣本修正成更接近母體的 </a:t>
+            </a:r>
+            <a:r>
+              <a:rPr lang="en-US" dirty="0"/>
+              <a:t>reference sample</a:t>
+            </a:r>
+          </a:p>
+        </p:txBody>
+      </p:sp>
+      <p:sp>
+        <p:nvSpPr>
+          <p:cNvPr id="4" name="Slide Number Placeholder 3">
+            <a:extLst>
+              <a:ext uri="{FF2B5EF4-FFF2-40B4-BE49-F238E27FC236}">
+                <a16:creationId xmlns:a16="http://schemas.microsoft.com/office/drawing/2014/main" id="{911EB2DB-3B3B-5073-A0E6-CC69741A5721}"/>
+              </a:ext>
+            </a:extLst>
+          </p:cNvPr>
+          <p:cNvSpPr>
+            <a:spLocks noGrp="1"/>
+          </p:cNvSpPr>
+          <p:nvPr>
+            <p:ph type="sldNum" sz="quarter" idx="12"/>
+          </p:nvPr>
+        </p:nvSpPr>
+        <p:spPr/>
+        <p:txBody>
+          <a:bodyPr/>
+          <a:lstStyle/>
+          <a:p>
+            <a:fld id="{34E21383-B02B-694B-B2AD-A967203CDE86}" type="slidenum">
+              <a:rPr lang="en-US" smtClean="0"/>
+              <a:t>14</a:t>
+            </a:fld>
+            <a:endParaRPr lang="en-US"/>
+          </a:p>
+        </p:txBody>
+      </p:sp>
+    </p:spTree>
+    <p:extLst>
+      <p:ext uri="{BB962C8B-B14F-4D97-AF65-F5344CB8AC3E}">
+        <p14:creationId xmlns:p14="http://schemas.microsoft.com/office/powerpoint/2010/main" val="3340902583"/>
+      </p:ext>
+    </p:extLst>
+  </p:cSld>
+  <p:clrMapOvr>
+    <a:masterClrMapping/>
+  </p:clrMapOvr>
+</p:sld>
+</file>
+
+<file path=ppt/slides/slide15.xml><?xml version="1.0" encoding="utf-8"?>
+<p:sld xmlns:a="http://schemas.openxmlformats.org/drawingml/2006/main" xmlns:r="http://schemas.openxmlformats.org/officeDocument/2006/relationships" xmlns:p="http://schemas.openxmlformats.org/presentationml/2006/main">
+  <p:cSld>
+    <p:spTree>
+      <p:nvGrpSpPr>
+        <p:cNvPr id="1" name=""/>
+        <p:cNvGrpSpPr/>
+        <p:nvPr/>
+      </p:nvGrpSpPr>
+      <p:grpSpPr>
+        <a:xfrm>
+          <a:off x="0" y="0"/>
+          <a:ext cx="0" cy="0"/>
+          <a:chOff x="0" y="0"/>
+          <a:chExt cx="0" cy="0"/>
+        </a:xfrm>
+      </p:grpSpPr>
+      <p:sp>
+        <p:nvSpPr>
+          <p:cNvPr id="2" name="Title 1">
+            <a:extLst>
+              <a:ext uri="{FF2B5EF4-FFF2-40B4-BE49-F238E27FC236}">
+                <a16:creationId xmlns:a16="http://schemas.microsoft.com/office/drawing/2014/main" id="{CA97296C-20CB-E09A-16CC-99A289B64445}"/>
+              </a:ext>
+            </a:extLst>
+          </p:cNvPr>
+          <p:cNvSpPr>
+            <a:spLocks noGrp="1"/>
+          </p:cNvSpPr>
+          <p:nvPr>
+            <p:ph type="title"/>
+          </p:nvPr>
+        </p:nvSpPr>
+        <p:spPr/>
+        <p:txBody>
+          <a:bodyPr/>
+          <a:lstStyle/>
+          <a:p>
+            <a:r>
+              <a:rPr lang="ja-JP" altLang="en-US"/>
+              <a:t>網路調查的</a:t>
+            </a:r>
+            <a:r>
+              <a:rPr lang="en-US" dirty="0" err="1"/>
+              <a:t>加權（五</a:t>
+            </a:r>
+            <a:r>
+              <a:rPr lang="en-US" dirty="0"/>
+              <a:t>）</a:t>
+            </a:r>
+          </a:p>
+        </p:txBody>
+      </p:sp>
+      <p:sp>
+        <p:nvSpPr>
+          <p:cNvPr id="3" name="Content Placeholder 2">
+            <a:extLst>
+              <a:ext uri="{FF2B5EF4-FFF2-40B4-BE49-F238E27FC236}">
+                <a16:creationId xmlns:a16="http://schemas.microsoft.com/office/drawing/2014/main" id="{503E2529-124E-4C1E-A46F-EA482C25D185}"/>
+              </a:ext>
+            </a:extLst>
+          </p:cNvPr>
+          <p:cNvSpPr>
+            <a:spLocks noGrp="1"/>
+          </p:cNvSpPr>
+          <p:nvPr>
+            <p:ph idx="1"/>
+          </p:nvPr>
+        </p:nvSpPr>
+        <p:spPr/>
+        <p:txBody>
+          <a:bodyPr>
+            <a:normAutofit/>
+          </a:bodyPr>
+          <a:lstStyle/>
+          <a:p>
+            <a:r>
+              <a:rPr lang="ja-JP" altLang="en-US"/>
+              <a:t>第二層：線上樣本對電話</a:t>
+            </a:r>
+            <a:r>
+              <a:rPr lang="en-US" altLang="ja-JP" dirty="0"/>
+              <a:t>/</a:t>
+            </a:r>
+            <a:r>
+              <a:rPr lang="ja-JP" altLang="en-US"/>
+              <a:t>母體加權</a:t>
+            </a:r>
+          </a:p>
+          <a:p>
+            <a:r>
+              <a:rPr lang="ja-JP" altLang="en-US"/>
+              <a:t>線上樣本不是直接從母體抽出來，而是從電話樣本中再篩一次：</a:t>
+            </a:r>
+          </a:p>
+          <a:p>
+            <a:pPr marL="514350" indent="-514350">
+              <a:buFont typeface="+mj-lt"/>
+              <a:buAutoNum type="arabicPeriod"/>
+            </a:pPr>
+            <a:r>
+              <a:rPr lang="ja-JP" altLang="en-US"/>
+              <a:t>願不願意加入 </a:t>
+            </a:r>
+            <a:r>
+              <a:rPr lang="en-US" altLang="ja-JP" dirty="0"/>
+              <a:t>panel</a:t>
+            </a:r>
+          </a:p>
+          <a:p>
+            <a:pPr marL="514350" indent="-514350">
+              <a:buFont typeface="+mj-lt"/>
+              <a:buAutoNum type="arabicPeriod"/>
+            </a:pPr>
+            <a:r>
+              <a:rPr lang="ja-JP" altLang="en-US"/>
+              <a:t>會不會真的完成線上問卷</a:t>
+            </a:r>
+          </a:p>
+          <a:p>
+            <a:endParaRPr lang="ja-JP" altLang="en-US"/>
+          </a:p>
+          <a:p>
+            <a:r>
+              <a:rPr lang="ja-JP" altLang="en-US"/>
+              <a:t>所以我們用電話樣本估計「誰比較容易上線」，然後再加權。</a:t>
+            </a:r>
+          </a:p>
+          <a:p>
+            <a:r>
+              <a:rPr lang="ja-JP" altLang="en-US"/>
+              <a:t>母體資料校正好電話樣本；再由電話樣本作為橋樑，把線上樣本拉回母體。</a:t>
+            </a:r>
+            <a:endParaRPr lang="en-US" dirty="0"/>
+          </a:p>
+        </p:txBody>
+      </p:sp>
+      <p:sp>
+        <p:nvSpPr>
+          <p:cNvPr id="4" name="Slide Number Placeholder 3">
+            <a:extLst>
+              <a:ext uri="{FF2B5EF4-FFF2-40B4-BE49-F238E27FC236}">
+                <a16:creationId xmlns:a16="http://schemas.microsoft.com/office/drawing/2014/main" id="{911EB2DB-3B3B-5073-A0E6-CC69741A5721}"/>
+              </a:ext>
+            </a:extLst>
+          </p:cNvPr>
+          <p:cNvSpPr>
+            <a:spLocks noGrp="1"/>
+          </p:cNvSpPr>
+          <p:nvPr>
+            <p:ph type="sldNum" sz="quarter" idx="12"/>
+          </p:nvPr>
+        </p:nvSpPr>
+        <p:spPr/>
+        <p:txBody>
+          <a:bodyPr/>
+          <a:lstStyle/>
+          <a:p>
+            <a:fld id="{34E21383-B02B-694B-B2AD-A967203CDE86}" type="slidenum">
+              <a:rPr lang="en-US" smtClean="0"/>
+              <a:t>15</a:t>
+            </a:fld>
+            <a:endParaRPr lang="en-US"/>
+          </a:p>
+        </p:txBody>
+      </p:sp>
+    </p:spTree>
+    <p:extLst>
+      <p:ext uri="{BB962C8B-B14F-4D97-AF65-F5344CB8AC3E}">
+        <p14:creationId xmlns:p14="http://schemas.microsoft.com/office/powerpoint/2010/main" val="1893645266"/>
+      </p:ext>
+    </p:extLst>
+  </p:cSld>
+  <p:clrMapOvr>
+    <a:masterClrMapping/>
+  </p:clrMapOvr>
+</p:sld>
+</file>
+
+<file path=ppt/slides/slide16.xml><?xml version="1.0" encoding="utf-8"?>
+<p:sld xmlns:a="http://schemas.openxmlformats.org/drawingml/2006/main" xmlns:r="http://schemas.openxmlformats.org/officeDocument/2006/relationships" xmlns:p="http://schemas.openxmlformats.org/presentationml/2006/main">
+  <p:cSld>
+    <p:spTree>
+      <p:nvGrpSpPr>
+        <p:cNvPr id="1" name=""/>
+        <p:cNvGrpSpPr/>
+        <p:nvPr/>
+      </p:nvGrpSpPr>
+      <p:grpSpPr>
+        <a:xfrm>
+          <a:off x="0" y="0"/>
+          <a:ext cx="0" cy="0"/>
+          <a:chOff x="0" y="0"/>
+          <a:chExt cx="0" cy="0"/>
+        </a:xfrm>
+      </p:grpSpPr>
+      <p:sp>
+        <p:nvSpPr>
+          <p:cNvPr id="2" name="Title 1">
+            <a:extLst>
+              <a:ext uri="{FF2B5EF4-FFF2-40B4-BE49-F238E27FC236}">
                 <a16:creationId xmlns:a16="http://schemas.microsoft.com/office/drawing/2014/main" id="{ED266BC7-D370-DB3B-3586-0BB7D3212D0F}"/>
               </a:ext>
             </a:extLst>
@@ -4953,7 +6529,7 @@
           <a:p>
             <a:fld id="{34E21383-B02B-694B-B2AD-A967203CDE86}" type="slidenum">
               <a:rPr lang="en-US" smtClean="0"/>
-              <a:t>12</a:t>
+              <a:t>16</a:t>
             </a:fld>
             <a:endParaRPr lang="en-US"/>
           </a:p>
@@ -6492,462 +8068,119 @@
           <a:p>
             <a:r>
               <a:rPr lang="ja-JP" altLang="en-US"/>
-              <a:t>如何修正網路調查的非機率抽樣？</a:t>
+              <a:t>如何修正網路調查的非機率抽樣？（一）</a:t>
             </a:r>
             <a:endParaRPr lang="en-US" dirty="0"/>
           </a:p>
         </p:txBody>
       </p:sp>
-      <mc:AlternateContent xmlns:mc="http://schemas.openxmlformats.org/markup-compatibility/2006" xmlns:a14="http://schemas.microsoft.com/office/drawing/2010/main">
-        <mc:Choice Requires="a14">
-          <p:sp>
-            <p:nvSpPr>
-              <p:cNvPr id="3" name="Content Placeholder 2">
-                <a:extLst>
-                  <a:ext uri="{FF2B5EF4-FFF2-40B4-BE49-F238E27FC236}">
-                    <a16:creationId xmlns:a16="http://schemas.microsoft.com/office/drawing/2014/main" id="{4F08E529-29DD-AB2C-94BF-694DBD41AB6D}"/>
-                  </a:ext>
-                </a:extLst>
-              </p:cNvPr>
-              <p:cNvSpPr>
-                <a:spLocks noGrp="1"/>
-              </p:cNvSpPr>
-              <p:nvPr>
-                <p:ph idx="1"/>
-              </p:nvPr>
-            </p:nvSpPr>
-            <p:spPr/>
-            <p:txBody>
-              <a:bodyPr>
-                <a:normAutofit/>
-              </a:bodyPr>
-              <a:lstStyle/>
-              <a:p>
-                <a:pPr>
-                  <a:lnSpc>
-                    <a:spcPct val="150000"/>
-                  </a:lnSpc>
-                  <a:buFont typeface="Wingdings" pitchFamily="2" charset="2"/>
-                  <a:buChar char="q"/>
-                </a:pPr>
-                <a:r>
-                  <a:rPr lang="ja-JP" altLang="en-US" sz="2000"/>
-                  <a:t>配額抽樣 </a:t>
-                </a:r>
-                <a:r>
-                  <a:rPr lang="en-US" altLang="ja-JP" sz="2000" dirty="0"/>
-                  <a:t>(Quota Sampling)</a:t>
-                </a:r>
-                <a:r>
-                  <a:rPr lang="ja-JP" altLang="en-US" sz="2000"/>
-                  <a:t>： 如果資料庫中有足夠的樣本，可以設定性別、年齡比例，一旦某族群收滿足夠的樣本，就停止發送給受訪者。</a:t>
-                </a:r>
-              </a:p>
-              <a:p>
-                <a:pPr>
-                  <a:lnSpc>
-                    <a:spcPct val="150000"/>
-                  </a:lnSpc>
-                  <a:buFont typeface="Wingdings" pitchFamily="2" charset="2"/>
-                  <a:buChar char="q"/>
-                </a:pPr>
-                <a:r>
-                  <a:rPr lang="ja-JP" altLang="en-US" sz="2000"/>
-                  <a:t>加權校正 </a:t>
-                </a:r>
-                <a:r>
-                  <a:rPr lang="en-US" altLang="ja-JP" sz="2000" dirty="0"/>
-                  <a:t>(Weighting)</a:t>
-                </a:r>
-                <a:r>
-                  <a:rPr lang="ja-JP" altLang="en-US" sz="2000"/>
-                  <a:t>： 根據人口普查數據，對受訪者進行事後數學調整。</a:t>
-                </a:r>
-                <a:endParaRPr lang="en-US" altLang="ja-JP" sz="2000" dirty="0"/>
-              </a:p>
-              <a:p>
-                <a:pPr>
-                  <a:lnSpc>
-                    <a:spcPct val="150000"/>
-                  </a:lnSpc>
-                  <a:buFont typeface="Wingdings" pitchFamily="2" charset="2"/>
-                  <a:buChar char="q"/>
-                </a:pPr>
-                <a:r>
-                  <a:rPr lang="ja-JP" altLang="en-US" sz="2000"/>
-                  <a:t>例如：如果用電話訪問招募受訪者，然後寄同意書給受訪者，最後寄問卷給受訪者。這一套過程，有三次的選擇偏誤。</a:t>
-                </a:r>
-                <a:endParaRPr lang="en-US" altLang="ja-JP" sz="2000" dirty="0"/>
-              </a:p>
-              <a:p>
-                <a:pPr marL="742950" lvl="1" indent="-285750">
-                  <a:buFont typeface="Arial" panose="020B0604020202020204" pitchFamily="34" charset="0"/>
-                  <a:buChar char="•"/>
-                </a:pPr>
-                <a14:m>
-                  <m:oMath xmlns:m="http://schemas.openxmlformats.org/officeDocument/2006/math">
-                    <m:sSub>
-                      <m:sSubPr>
-                        <m:ctrlPr>
-                          <a:rPr lang="en-US" i="1" smtClean="0">
-                            <a:latin typeface="Cambria Math" panose="02040503050406030204" pitchFamily="18" charset="0"/>
-                          </a:rPr>
-                        </m:ctrlPr>
-                      </m:sSubPr>
-                      <m:e>
-                        <m:r>
-                          <a:rPr lang="en-US" b="0" i="1" smtClean="0">
-                            <a:latin typeface="Cambria Math" panose="02040503050406030204" pitchFamily="18" charset="0"/>
-                          </a:rPr>
-                          <m:t>𝑆</m:t>
-                        </m:r>
-                      </m:e>
-                      <m:sub>
-                        <m:r>
-                          <a:rPr lang="en-US" b="0" i="1" smtClean="0">
-                            <a:latin typeface="Cambria Math" panose="02040503050406030204" pitchFamily="18" charset="0"/>
-                          </a:rPr>
-                          <m:t>𝑖</m:t>
-                        </m:r>
-                      </m:sub>
-                    </m:sSub>
-                    <m:r>
-                      <a:rPr lang="en-US" b="0" i="1" smtClean="0">
-                        <a:latin typeface="Cambria Math" panose="02040503050406030204" pitchFamily="18" charset="0"/>
-                      </a:rPr>
-                      <m:t>=1</m:t>
-                    </m:r>
-                  </m:oMath>
-                </a14:m>
-                <a:r>
-                  <a:rPr lang="en-US" dirty="0"/>
-                  <a:t>：</a:t>
-                </a:r>
-                <a:r>
-                  <a:rPr lang="ja-JP" altLang="en-US"/>
-                  <a:t>電話樣本「被抽到且完成訪問」（</a:t>
-                </a:r>
-                <a:r>
-                  <a:rPr lang="en-US" dirty="0"/>
-                  <a:t>reference sample）</a:t>
-                </a:r>
-              </a:p>
-              <a:p>
-                <a:pPr marL="742950" lvl="1" indent="-285750">
-                  <a:buFont typeface="Arial" panose="020B0604020202020204" pitchFamily="34" charset="0"/>
-                  <a:buChar char="•"/>
-                </a:pPr>
-                <a14:m>
-                  <m:oMath xmlns:m="http://schemas.openxmlformats.org/officeDocument/2006/math">
-                    <m:sSub>
-                      <m:sSubPr>
-                        <m:ctrlPr>
-                          <a:rPr lang="en-US" i="1" smtClean="0">
-                            <a:latin typeface="Cambria Math" panose="02040503050406030204" pitchFamily="18" charset="0"/>
-                          </a:rPr>
-                        </m:ctrlPr>
-                      </m:sSubPr>
-                      <m:e>
-                        <m:r>
-                          <a:rPr lang="en-US" b="0" i="1" smtClean="0">
-                            <a:latin typeface="Cambria Math" panose="02040503050406030204" pitchFamily="18" charset="0"/>
-                          </a:rPr>
-                          <m:t>𝐽</m:t>
-                        </m:r>
-                      </m:e>
-                      <m:sub>
-                        <m:r>
-                          <a:rPr lang="en-US" b="0" i="1" smtClean="0">
-                            <a:latin typeface="Cambria Math" panose="02040503050406030204" pitchFamily="18" charset="0"/>
-                          </a:rPr>
-                          <m:t>𝑖</m:t>
-                        </m:r>
-                      </m:sub>
-                    </m:sSub>
-                    <m:r>
-                      <a:rPr lang="en-US" b="0" i="1" smtClean="0">
-                        <a:latin typeface="Cambria Math" panose="02040503050406030204" pitchFamily="18" charset="0"/>
-                      </a:rPr>
-                      <m:t>=1 </m:t>
-                    </m:r>
-                  </m:oMath>
-                </a14:m>
-                <a:r>
-                  <a:rPr lang="en-US" dirty="0"/>
-                  <a:t>：</a:t>
-                </a:r>
-                <a:r>
-                  <a:rPr lang="ja-JP" altLang="en-US"/>
-                  <a:t>在電話訪問後「同意加入 </a:t>
-                </a:r>
-                <a:r>
-                  <a:rPr lang="en-US" dirty="0"/>
-                  <a:t>panel」</a:t>
-                </a:r>
-              </a:p>
-              <a:p>
-                <a:pPr marL="742950" lvl="1" indent="-285750">
-                  <a:buFont typeface="Arial" panose="020B0604020202020204" pitchFamily="34" charset="0"/>
-                  <a:buChar char="•"/>
-                </a:pPr>
-                <a14:m>
-                  <m:oMath xmlns:m="http://schemas.openxmlformats.org/officeDocument/2006/math">
-                    <m:sSub>
-                      <m:sSubPr>
-                        <m:ctrlPr>
-                          <a:rPr lang="en-US" i="1" smtClean="0">
-                            <a:latin typeface="Cambria Math" panose="02040503050406030204" pitchFamily="18" charset="0"/>
-                          </a:rPr>
-                        </m:ctrlPr>
-                      </m:sSubPr>
-                      <m:e>
-                        <m:r>
-                          <a:rPr lang="en-US" b="0" i="1" smtClean="0">
-                            <a:latin typeface="Cambria Math" panose="02040503050406030204" pitchFamily="18" charset="0"/>
-                          </a:rPr>
-                          <m:t>𝑅</m:t>
-                        </m:r>
-                      </m:e>
-                      <m:sub>
-                        <m:r>
-                          <a:rPr lang="en-US" b="0" i="1" smtClean="0">
-                            <a:latin typeface="Cambria Math" panose="02040503050406030204" pitchFamily="18" charset="0"/>
-                          </a:rPr>
-                          <m:t>𝑖</m:t>
-                        </m:r>
-                      </m:sub>
-                    </m:sSub>
-                    <m:r>
-                      <a:rPr lang="en-US" b="0" i="1" smtClean="0">
-                        <a:latin typeface="Cambria Math" panose="02040503050406030204" pitchFamily="18" charset="0"/>
-                      </a:rPr>
-                      <m:t>=1 </m:t>
-                    </m:r>
-                  </m:oMath>
-                </a14:m>
-                <a:r>
-                  <a:rPr lang="en-US" dirty="0"/>
-                  <a:t>：</a:t>
-                </a:r>
-                <a:r>
-                  <a:rPr lang="ja-JP" altLang="en-US"/>
-                  <a:t>在同意加入後「實際完成線上問卷」</a:t>
-                </a:r>
-              </a:p>
-              <a:p>
-                <a:r>
-                  <a:rPr lang="ja-JP" altLang="en-US" sz="2100"/>
-                  <a:t>最後資料的集合是：</a:t>
-                </a:r>
-                <a14:m>
-                  <m:oMath xmlns:m="http://schemas.openxmlformats.org/officeDocument/2006/math">
-                    <m:d>
-                      <m:dPr>
-                        <m:begChr m:val="{"/>
-                        <m:endChr m:val="}"/>
-                        <m:ctrlPr>
-                          <a:rPr lang="en-US" altLang="ja-JP" sz="2100" i="1" smtClean="0">
-                            <a:latin typeface="Cambria Math" panose="02040503050406030204" pitchFamily="18" charset="0"/>
-                          </a:rPr>
-                        </m:ctrlPr>
-                      </m:dPr>
-                      <m:e>
-                        <m:r>
-                          <a:rPr lang="en-US" altLang="ja-JP" sz="2100" b="0" i="1" smtClean="0">
-                            <a:latin typeface="Cambria Math" panose="02040503050406030204" pitchFamily="18" charset="0"/>
-                          </a:rPr>
-                          <m:t>𝑖</m:t>
-                        </m:r>
-                        <m:r>
-                          <a:rPr lang="en-US" altLang="ja-JP" sz="2100" b="0" i="1" smtClean="0">
-                            <a:latin typeface="Cambria Math" panose="02040503050406030204" pitchFamily="18" charset="0"/>
-                          </a:rPr>
-                          <m:t>:</m:t>
-                        </m:r>
-                        <m:sSub>
-                          <m:sSubPr>
-                            <m:ctrlPr>
-                              <a:rPr lang="en-US" sz="2400" i="1">
-                                <a:latin typeface="Cambria Math" panose="02040503050406030204" pitchFamily="18" charset="0"/>
-                              </a:rPr>
-                            </m:ctrlPr>
-                          </m:sSubPr>
-                          <m:e>
-                            <m:r>
-                              <a:rPr lang="en-US" sz="2400" i="1">
-                                <a:latin typeface="Cambria Math" panose="02040503050406030204" pitchFamily="18" charset="0"/>
-                              </a:rPr>
-                              <m:t>𝑆</m:t>
-                            </m:r>
-                          </m:e>
-                          <m:sub>
-                            <m:r>
-                              <a:rPr lang="en-US" sz="2400" i="1">
-                                <a:latin typeface="Cambria Math" panose="02040503050406030204" pitchFamily="18" charset="0"/>
-                              </a:rPr>
-                              <m:t>𝑖</m:t>
-                            </m:r>
-                          </m:sub>
-                        </m:sSub>
-                        <m:r>
-                          <a:rPr lang="en-US" sz="2400" i="1">
-                            <a:latin typeface="Cambria Math" panose="02040503050406030204" pitchFamily="18" charset="0"/>
-                          </a:rPr>
-                          <m:t>=1</m:t>
-                        </m:r>
-                        <m:r>
-                          <a:rPr lang="en-US" sz="2400" b="0" i="1" smtClean="0">
-                            <a:latin typeface="Cambria Math" panose="02040503050406030204" pitchFamily="18" charset="0"/>
-                          </a:rPr>
-                          <m:t>,</m:t>
-                        </m:r>
-                        <m:sSub>
-                          <m:sSubPr>
-                            <m:ctrlPr>
-                              <a:rPr lang="en-US" sz="2400" i="1">
-                                <a:latin typeface="Cambria Math" panose="02040503050406030204" pitchFamily="18" charset="0"/>
-                              </a:rPr>
-                            </m:ctrlPr>
-                          </m:sSubPr>
-                          <m:e>
-                            <m:r>
-                              <a:rPr lang="en-US" sz="2400" b="0" i="1" smtClean="0">
-                                <a:latin typeface="Cambria Math" panose="02040503050406030204" pitchFamily="18" charset="0"/>
-                              </a:rPr>
-                              <m:t>𝐽</m:t>
-                            </m:r>
-                          </m:e>
-                          <m:sub>
-                            <m:r>
-                              <a:rPr lang="en-US" sz="2400" i="1">
-                                <a:latin typeface="Cambria Math" panose="02040503050406030204" pitchFamily="18" charset="0"/>
-                              </a:rPr>
-                              <m:t>𝑖</m:t>
-                            </m:r>
-                          </m:sub>
-                        </m:sSub>
-                        <m:r>
-                          <a:rPr lang="en-US" sz="2400" i="1">
-                            <a:latin typeface="Cambria Math" panose="02040503050406030204" pitchFamily="18" charset="0"/>
-                          </a:rPr>
-                          <m:t>=1</m:t>
-                        </m:r>
-                        <m:r>
-                          <a:rPr lang="en-US" sz="2400" b="0" i="1" smtClean="0">
-                            <a:latin typeface="Cambria Math" panose="02040503050406030204" pitchFamily="18" charset="0"/>
-                          </a:rPr>
-                          <m:t>,</m:t>
-                        </m:r>
-                        <m:sSub>
-                          <m:sSubPr>
-                            <m:ctrlPr>
-                              <a:rPr lang="en-US" sz="2400" i="1">
-                                <a:latin typeface="Cambria Math" panose="02040503050406030204" pitchFamily="18" charset="0"/>
-                              </a:rPr>
-                            </m:ctrlPr>
-                          </m:sSubPr>
-                          <m:e>
-                            <m:r>
-                              <a:rPr lang="en-US" sz="2400" b="0" i="1" smtClean="0">
-                                <a:latin typeface="Cambria Math" panose="02040503050406030204" pitchFamily="18" charset="0"/>
-                              </a:rPr>
-                              <m:t>𝑅</m:t>
-                            </m:r>
-                          </m:e>
-                          <m:sub>
-                            <m:r>
-                              <a:rPr lang="en-US" sz="2400" i="1">
-                                <a:latin typeface="Cambria Math" panose="02040503050406030204" pitchFamily="18" charset="0"/>
-                              </a:rPr>
-                              <m:t>𝑖</m:t>
-                            </m:r>
-                          </m:sub>
-                        </m:sSub>
-                        <m:r>
-                          <a:rPr lang="en-US" sz="2400" i="1">
-                            <a:latin typeface="Cambria Math" panose="02040503050406030204" pitchFamily="18" charset="0"/>
-                          </a:rPr>
-                          <m:t>=1</m:t>
-                        </m:r>
-                      </m:e>
-                    </m:d>
-                  </m:oMath>
-                </a14:m>
-                <a:endParaRPr lang="ja-JP" altLang="en-US" sz="2100"/>
-              </a:p>
-              <a:p>
-                <a:endParaRPr lang="en-US" altLang="ja-JP" sz="2000" dirty="0"/>
-              </a:p>
-              <a:p>
-                <a:pPr>
-                  <a:lnSpc>
-                    <a:spcPct val="150000"/>
-                  </a:lnSpc>
-                  <a:buFont typeface="Wingdings" pitchFamily="2" charset="2"/>
-                  <a:buChar char="q"/>
-                </a:pPr>
-                <a:endParaRPr lang="en-US" altLang="ja-JP" sz="2000" dirty="0"/>
-              </a:p>
-              <a:p>
-                <a:pPr>
-                  <a:lnSpc>
-                    <a:spcPct val="150000"/>
-                  </a:lnSpc>
-                  <a:buFont typeface="Wingdings" pitchFamily="2" charset="2"/>
-                  <a:buChar char="l"/>
-                </a:pPr>
-                <a:endParaRPr lang="en-US" sz="2000" dirty="0"/>
-              </a:p>
-              <a:p>
-                <a:pPr>
-                  <a:buFont typeface="Wingdings" pitchFamily="2" charset="2"/>
-                  <a:buChar char="l"/>
-                </a:pPr>
-                <a:endParaRPr lang="en-US" dirty="0"/>
-              </a:p>
-            </p:txBody>
-          </p:sp>
-        </mc:Choice>
-        <mc:Fallback xmlns="">
-          <p:sp>
-            <p:nvSpPr>
-              <p:cNvPr id="3" name="Content Placeholder 2">
-                <a:extLst>
-                  <a:ext uri="{FF2B5EF4-FFF2-40B4-BE49-F238E27FC236}">
-                    <a16:creationId xmlns:a16="http://schemas.microsoft.com/office/drawing/2014/main" id="{4F08E529-29DD-AB2C-94BF-694DBD41AB6D}"/>
-                  </a:ext>
-                </a:extLst>
-              </p:cNvPr>
-              <p:cNvSpPr>
-                <a:spLocks noGrp="1" noRot="1" noChangeAspect="1" noMove="1" noResize="1" noEditPoints="1" noAdjustHandles="1" noChangeArrowheads="1" noChangeShapeType="1" noTextEdit="1"/>
-              </p:cNvSpPr>
-              <p:nvPr>
-                <p:ph idx="1"/>
-              </p:nvPr>
-            </p:nvSpPr>
-            <p:spPr>
-              <a:blipFill>
-                <a:blip r:embed="rId2"/>
-                <a:stretch>
-                  <a:fillRect l="-603"/>
-                </a:stretch>
-              </a:blipFill>
-            </p:spPr>
-            <p:txBody>
-              <a:bodyPr/>
-              <a:lstStyle/>
-              <a:p>
-                <a:r>
-                  <a:rPr lang="en-US">
-                    <a:noFill/>
-                  </a:rPr>
-                  <a:t> </a:t>
-                </a:r>
-              </a:p>
-            </p:txBody>
-          </p:sp>
-        </mc:Fallback>
-      </mc:AlternateContent>
+      <p:sp>
+        <p:nvSpPr>
+          <p:cNvPr id="3" name="Content Placeholder 2">
+            <a:extLst>
+              <a:ext uri="{FF2B5EF4-FFF2-40B4-BE49-F238E27FC236}">
+                <a16:creationId xmlns:a16="http://schemas.microsoft.com/office/drawing/2014/main" id="{4F08E529-29DD-AB2C-94BF-694DBD41AB6D}"/>
+              </a:ext>
+            </a:extLst>
+          </p:cNvPr>
+          <p:cNvSpPr>
+            <a:spLocks noGrp="1"/>
+          </p:cNvSpPr>
+          <p:nvPr>
+            <p:ph idx="1"/>
+          </p:nvPr>
+        </p:nvSpPr>
+        <p:spPr/>
+        <p:txBody>
+          <a:bodyPr>
+            <a:normAutofit/>
+          </a:bodyPr>
+          <a:lstStyle/>
+          <a:p>
+            <a:pPr>
+              <a:lnSpc>
+                <a:spcPct val="150000"/>
+              </a:lnSpc>
+              <a:buFont typeface="Wingdings" pitchFamily="2" charset="2"/>
+              <a:buChar char="q"/>
+            </a:pPr>
+            <a:r>
+              <a:rPr lang="ja-JP" altLang="en-US" sz="2000"/>
+              <a:t>配額抽樣 </a:t>
+            </a:r>
+            <a:r>
+              <a:rPr lang="en-US" altLang="ja-JP" sz="2000" dirty="0"/>
+              <a:t>(Quota Sampling)</a:t>
+            </a:r>
+            <a:r>
+              <a:rPr lang="ja-JP" altLang="en-US" sz="2000"/>
+              <a:t>： 如果資料庫中有足夠的樣本，可以設定性別、年齡比例，一旦某族群收滿足夠的樣本，就停止發送給受訪者。</a:t>
+            </a:r>
+          </a:p>
+          <a:p>
+            <a:pPr>
+              <a:lnSpc>
+                <a:spcPct val="150000"/>
+              </a:lnSpc>
+              <a:buFont typeface="Wingdings" pitchFamily="2" charset="2"/>
+              <a:buChar char="q"/>
+            </a:pPr>
+            <a:r>
+              <a:rPr lang="ja-JP" altLang="en-US" sz="2000"/>
+              <a:t>加權校正 </a:t>
+            </a:r>
+            <a:r>
+              <a:rPr lang="en-US" altLang="ja-JP" sz="2000" dirty="0"/>
+              <a:t>(Weighting)</a:t>
+            </a:r>
+            <a:r>
+              <a:rPr lang="ja-JP" altLang="en-US" sz="2000"/>
+              <a:t>： 根據人口普查數據，對受訪者進行事後數學調整。</a:t>
+            </a:r>
+            <a:endParaRPr lang="en-US" altLang="ja-JP" sz="2000" dirty="0"/>
+          </a:p>
+          <a:p>
+            <a:pPr>
+              <a:lnSpc>
+                <a:spcPct val="150000"/>
+              </a:lnSpc>
+              <a:buFont typeface="Wingdings" pitchFamily="2" charset="2"/>
+              <a:buChar char="q"/>
+            </a:pPr>
+            <a:endParaRPr lang="en-US" altLang="ja-JP" sz="2000" dirty="0"/>
+          </a:p>
+          <a:p>
+            <a:endParaRPr lang="en-US" altLang="ja-JP" sz="2000" dirty="0"/>
+          </a:p>
+          <a:p>
+            <a:pPr>
+              <a:lnSpc>
+                <a:spcPct val="150000"/>
+              </a:lnSpc>
+              <a:buFont typeface="Wingdings" pitchFamily="2" charset="2"/>
+              <a:buChar char="q"/>
+            </a:pPr>
+            <a:endParaRPr lang="en-US" altLang="ja-JP" sz="2000" dirty="0"/>
+          </a:p>
+          <a:p>
+            <a:pPr>
+              <a:lnSpc>
+                <a:spcPct val="150000"/>
+              </a:lnSpc>
+              <a:buFont typeface="Wingdings" pitchFamily="2" charset="2"/>
+              <a:buChar char="l"/>
+            </a:pPr>
+            <a:endParaRPr lang="en-US" sz="2000" dirty="0"/>
+          </a:p>
+          <a:p>
+            <a:pPr>
+              <a:buFont typeface="Wingdings" pitchFamily="2" charset="2"/>
+              <a:buChar char="l"/>
+            </a:pPr>
+            <a:endParaRPr lang="en-US" dirty="0"/>
+          </a:p>
+        </p:txBody>
+      </p:sp>
       <p:sp>
         <p:nvSpPr>
           <p:cNvPr id="4" name="Slide Number Placeholder 3">

--- a/投影片/民意與調查Week4.pptx
+++ b/投影片/民意與調查Week4.pptx
@@ -5,7 +5,7 @@
     <p:sldMasterId id="2147483648" r:id="rId1"/>
   </p:sldMasterIdLst>
   <p:notesMasterIdLst>
-    <p:notesMasterId r:id="rId18"/>
+    <p:notesMasterId r:id="rId21"/>
   </p:notesMasterIdLst>
   <p:sldIdLst>
     <p:sldId id="256" r:id="rId2"/>
@@ -23,7 +23,10 @@
     <p:sldId id="271" r:id="rId14"/>
     <p:sldId id="272" r:id="rId15"/>
     <p:sldId id="273" r:id="rId16"/>
-    <p:sldId id="258" r:id="rId17"/>
+    <p:sldId id="276" r:id="rId17"/>
+    <p:sldId id="279" r:id="rId18"/>
+    <p:sldId id="278" r:id="rId19"/>
+    <p:sldId id="280" r:id="rId20"/>
   </p:sldIdLst>
   <p:sldSz cx="12192000" cy="6858000"/>
   <p:notesSz cx="6858000" cy="9144000"/>
@@ -212,7 +215,7 @@
           <a:p>
             <a:fld id="{308549C9-F1F2-A344-9318-AC3AB4654B7E}" type="datetimeFigureOut">
               <a:rPr lang="en-US" smtClean="0"/>
-              <a:t>3/17/26</a:t>
+              <a:t>3/18/26</a:t>
             </a:fld>
             <a:endParaRPr lang="en-US"/>
           </a:p>
@@ -626,7 +629,7 @@
           <a:p>
             <a:fld id="{0ECB731F-7F54-EF4E-BC14-D4454C95FF4D}" type="datetime1">
               <a:rPr lang="en-US" smtClean="0"/>
-              <a:t>3/17/26</a:t>
+              <a:t>3/18/26</a:t>
             </a:fld>
             <a:endParaRPr lang="en-US"/>
           </a:p>
@@ -824,7 +827,7 @@
           <a:p>
             <a:fld id="{5FC0AAEB-F940-CA44-B742-2110711973A7}" type="datetime1">
               <a:rPr lang="en-US" smtClean="0"/>
-              <a:t>3/17/26</a:t>
+              <a:t>3/18/26</a:t>
             </a:fld>
             <a:endParaRPr lang="en-US"/>
           </a:p>
@@ -1032,7 +1035,7 @@
           <a:p>
             <a:fld id="{0C0FC7EA-A73C-4146-9B14-54C11597AA40}" type="datetime1">
               <a:rPr lang="en-US" smtClean="0"/>
-              <a:t>3/17/26</a:t>
+              <a:t>3/18/26</a:t>
             </a:fld>
             <a:endParaRPr lang="en-US"/>
           </a:p>
@@ -1230,7 +1233,7 @@
           <a:p>
             <a:fld id="{24943121-CDD1-174D-9095-06B3974B3CC1}" type="datetime1">
               <a:rPr lang="en-US" smtClean="0"/>
-              <a:t>3/17/26</a:t>
+              <a:t>3/18/26</a:t>
             </a:fld>
             <a:endParaRPr lang="en-US"/>
           </a:p>
@@ -1505,7 +1508,7 @@
           <a:p>
             <a:fld id="{21F2BAF9-EAD3-1641-87AF-ADC71D8222CD}" type="datetime1">
               <a:rPr lang="en-US" smtClean="0"/>
-              <a:t>3/17/26</a:t>
+              <a:t>3/18/26</a:t>
             </a:fld>
             <a:endParaRPr lang="en-US"/>
           </a:p>
@@ -1770,7 +1773,7 @@
           <a:p>
             <a:fld id="{F8F7A49D-4C23-6A49-AF9D-C0E1C1130921}" type="datetime1">
               <a:rPr lang="en-US" smtClean="0"/>
-              <a:t>3/17/26</a:t>
+              <a:t>3/18/26</a:t>
             </a:fld>
             <a:endParaRPr lang="en-US"/>
           </a:p>
@@ -2182,7 +2185,7 @@
           <a:p>
             <a:fld id="{9F516F59-8951-4749-B49C-6C88C0B4B6BD}" type="datetime1">
               <a:rPr lang="en-US" smtClean="0"/>
-              <a:t>3/17/26</a:t>
+              <a:t>3/18/26</a:t>
             </a:fld>
             <a:endParaRPr lang="en-US"/>
           </a:p>
@@ -2323,7 +2326,7 @@
           <a:p>
             <a:fld id="{CA82BBDF-C485-174D-8051-FF3ED3DF33C6}" type="datetime1">
               <a:rPr lang="en-US" smtClean="0"/>
-              <a:t>3/17/26</a:t>
+              <a:t>3/18/26</a:t>
             </a:fld>
             <a:endParaRPr lang="en-US"/>
           </a:p>
@@ -2436,7 +2439,7 @@
           <a:p>
             <a:fld id="{3CA316C8-35EA-C448-A7DB-295F753FB635}" type="datetime1">
               <a:rPr lang="en-US" smtClean="0"/>
-              <a:t>3/17/26</a:t>
+              <a:t>3/18/26</a:t>
             </a:fld>
             <a:endParaRPr lang="en-US"/>
           </a:p>
@@ -2747,7 +2750,7 @@
           <a:p>
             <a:fld id="{3EBA6818-685C-B142-BE10-A6D54A85D7FF}" type="datetime1">
               <a:rPr lang="en-US" smtClean="0"/>
-              <a:t>3/17/26</a:t>
+              <a:t>3/18/26</a:t>
             </a:fld>
             <a:endParaRPr lang="en-US"/>
           </a:p>
@@ -3035,7 +3038,7 @@
           <a:p>
             <a:fld id="{D444D57B-5B66-2F49-AB7C-362DD22B45D8}" type="datetime1">
               <a:rPr lang="en-US" smtClean="0"/>
-              <a:t>3/17/26</a:t>
+              <a:t>3/18/26</a:t>
             </a:fld>
             <a:endParaRPr lang="en-US"/>
           </a:p>
@@ -3276,7 +3279,7 @@
           <a:p>
             <a:fld id="{4025DC53-D744-A54C-8957-51F9F93FF803}" type="datetime1">
               <a:rPr lang="en-US" smtClean="0"/>
-              <a:t>3/17/26</a:t>
+              <a:t>3/18/26</a:t>
             </a:fld>
             <a:endParaRPr lang="en-US"/>
           </a:p>
@@ -3822,8 +3825,8 @@
           </a:p>
         </p:txBody>
       </p:sp>
-      <mc:AlternateContent xmlns:mc="http://schemas.openxmlformats.org/markup-compatibility/2006">
-        <mc:Choice xmlns:a14="http://schemas.microsoft.com/office/drawing/2010/main" Requires="a14">
+      <mc:AlternateContent xmlns:mc="http://schemas.openxmlformats.org/markup-compatibility/2006" xmlns:a14="http://schemas.microsoft.com/office/drawing/2010/main">
+        <mc:Choice Requires="a14">
           <p:sp>
             <p:nvSpPr>
               <p:cNvPr id="3" name="Content Placeholder 2">
@@ -4047,13 +4050,7 @@
                       <a:rPr lang="ja-JP" altLang="en-US" sz="2000" i="1" dirty="0">
                         <a:latin typeface="Cambria Math" panose="02040503050406030204" pitchFamily="18" charset="0"/>
                       </a:rPr>
-                      <m:t>興趣的樣本</m:t>
-                    </m:r>
-                    <m:r>
-                      <a:rPr lang="ja-JP" altLang="en-US" sz="2000" i="1" dirty="0">
-                        <a:latin typeface="Cambria Math" panose="02040503050406030204" pitchFamily="18" charset="0"/>
-                      </a:rPr>
-                      <m:t>：</m:t>
+                      <m:t>興趣的樣本：</m:t>
                     </m:r>
                     <m:r>
                       <a:rPr lang="en-US" altLang="ja-JP" sz="2000" i="1">
@@ -4105,7 +4102,7 @@
             </p:txBody>
           </p:sp>
         </mc:Choice>
-        <mc:Fallback>
+        <mc:Fallback xmlns="">
           <p:sp>
             <p:nvSpPr>
               <p:cNvPr id="3" name="Content Placeholder 2">
@@ -4546,8 +4543,8 @@
           </a:p>
         </p:txBody>
       </p:sp>
-      <mc:AlternateContent xmlns:mc="http://schemas.openxmlformats.org/markup-compatibility/2006">
-        <mc:Choice xmlns:a14="http://schemas.microsoft.com/office/drawing/2010/main" Requires="a14">
+      <mc:AlternateContent xmlns:mc="http://schemas.openxmlformats.org/markup-compatibility/2006" xmlns:a14="http://schemas.microsoft.com/office/drawing/2010/main">
+        <mc:Choice Requires="a14">
           <p:sp>
             <p:nvSpPr>
               <p:cNvPr id="3" name="Content Placeholder 2">
@@ -4884,7 +4881,7 @@
             </p:txBody>
           </p:sp>
         </mc:Choice>
-        <mc:Fallback>
+        <mc:Fallback xmlns="">
           <p:sp>
             <p:nvSpPr>
               <p:cNvPr id="3" name="Content Placeholder 2">
@@ -5019,8 +5016,8 @@
           </a:p>
         </p:txBody>
       </p:sp>
-      <mc:AlternateContent xmlns:mc="http://schemas.openxmlformats.org/markup-compatibility/2006">
-        <mc:Choice xmlns:a14="http://schemas.microsoft.com/office/drawing/2010/main" Requires="a14">
+      <mc:AlternateContent xmlns:mc="http://schemas.openxmlformats.org/markup-compatibility/2006" xmlns:a14="http://schemas.microsoft.com/office/drawing/2010/main">
+        <mc:Choice Requires="a14">
           <p:sp>
             <p:nvSpPr>
               <p:cNvPr id="3" name="Content Placeholder 2">
@@ -5621,7 +5618,7 @@
             </p:txBody>
           </p:sp>
         </mc:Choice>
-        <mc:Fallback>
+        <mc:Fallback xmlns="">
           <p:sp>
             <p:nvSpPr>
               <p:cNvPr id="3" name="Content Placeholder 2">
@@ -6205,21 +6202,21 @@
           <a:lstStyle/>
           <a:p>
             <a:r>
-              <a:rPr lang="ja-JP" altLang="en-US"/>
+              <a:rPr lang="ja-JP" altLang="en-US" sz="2000"/>
               <a:t>第二層：線上樣本對電話</a:t>
             </a:r>
             <a:r>
-              <a:rPr lang="en-US" altLang="ja-JP" dirty="0"/>
+              <a:rPr lang="en-US" altLang="ja-JP" sz="2000" dirty="0"/>
               <a:t>/</a:t>
             </a:r>
             <a:r>
-              <a:rPr lang="ja-JP" altLang="en-US"/>
+              <a:rPr lang="ja-JP" altLang="en-US" sz="2000"/>
               <a:t>母體加權</a:t>
             </a:r>
           </a:p>
           <a:p>
             <a:r>
-              <a:rPr lang="ja-JP" altLang="en-US"/>
+              <a:rPr lang="ja-JP" altLang="en-US" sz="2000"/>
               <a:t>線上樣本不是直接從母體抽出來，而是從電話樣本中再篩一次：</a:t>
             </a:r>
           </a:p>
@@ -6229,11 +6226,11 @@
               <a:buAutoNum type="arabicPeriod"/>
             </a:pPr>
             <a:r>
-              <a:rPr lang="ja-JP" altLang="en-US"/>
+              <a:rPr lang="ja-JP" altLang="en-US" sz="2000"/>
               <a:t>願不願意加入 </a:t>
             </a:r>
             <a:r>
-              <a:rPr lang="en-US" altLang="ja-JP" dirty="0"/>
+              <a:rPr lang="en-US" altLang="ja-JP" sz="2000" dirty="0"/>
               <a:t>panel</a:t>
             </a:r>
           </a:p>
@@ -6243,25 +6240,25 @@
               <a:buAutoNum type="arabicPeriod"/>
             </a:pPr>
             <a:r>
-              <a:rPr lang="ja-JP" altLang="en-US"/>
+              <a:rPr lang="ja-JP" altLang="en-US" sz="2000"/>
               <a:t>會不會真的完成線上問卷</a:t>
             </a:r>
           </a:p>
           <a:p>
-            <a:endParaRPr lang="ja-JP" altLang="en-US"/>
-          </a:p>
-          <a:p>
-            <a:r>
-              <a:rPr lang="ja-JP" altLang="en-US"/>
+            <a:endParaRPr lang="ja-JP" altLang="en-US" sz="2000"/>
+          </a:p>
+          <a:p>
+            <a:r>
+              <a:rPr lang="ja-JP" altLang="en-US" sz="2000"/>
               <a:t>所以我們用電話樣本估計「誰比較容易上線」，然後再加權。</a:t>
             </a:r>
           </a:p>
           <a:p>
             <a:r>
-              <a:rPr lang="ja-JP" altLang="en-US"/>
+              <a:rPr lang="ja-JP" altLang="en-US" sz="2000"/>
               <a:t>母體資料校正好電話樣本；再由電話樣本作為橋樑，把線上樣本拉回母體。</a:t>
             </a:r>
-            <a:endParaRPr lang="en-US" dirty="0"/>
+            <a:endParaRPr lang="en-US" sz="2000" dirty="0"/>
           </a:p>
         </p:txBody>
       </p:sp>
@@ -6312,6 +6309,211 @@
   <p:cSld>
     <p:spTree>
       <p:nvGrpSpPr>
+        <p:cNvPr id="1" name="">
+          <a:extLst>
+            <a:ext uri="{FF2B5EF4-FFF2-40B4-BE49-F238E27FC236}">
+              <a16:creationId xmlns:a16="http://schemas.microsoft.com/office/drawing/2014/main" id="{C94E537B-C4AE-0BF8-E9D6-45951B9AF486}"/>
+            </a:ext>
+          </a:extLst>
+        </p:cNvPr>
+        <p:cNvGrpSpPr/>
+        <p:nvPr/>
+      </p:nvGrpSpPr>
+      <p:grpSpPr>
+        <a:xfrm>
+          <a:off x="0" y="0"/>
+          <a:ext cx="0" cy="0"/>
+          <a:chOff x="0" y="0"/>
+          <a:chExt cx="0" cy="0"/>
+        </a:xfrm>
+      </p:grpSpPr>
+      <p:sp>
+        <p:nvSpPr>
+          <p:cNvPr id="2" name="Title 1">
+            <a:extLst>
+              <a:ext uri="{FF2B5EF4-FFF2-40B4-BE49-F238E27FC236}">
+                <a16:creationId xmlns:a16="http://schemas.microsoft.com/office/drawing/2014/main" id="{25C1C553-0DB6-FAF8-C31F-2B4753D9E155}"/>
+              </a:ext>
+            </a:extLst>
+          </p:cNvPr>
+          <p:cNvSpPr>
+            <a:spLocks noGrp="1"/>
+          </p:cNvSpPr>
+          <p:nvPr>
+            <p:ph type="title"/>
+          </p:nvPr>
+        </p:nvSpPr>
+        <p:spPr/>
+        <p:txBody>
+          <a:bodyPr/>
+          <a:lstStyle/>
+          <a:p>
+            <a:r>
+              <a:rPr lang="ja-JP" altLang="en-US"/>
+              <a:t>網路調查與電話訪問結合</a:t>
+            </a:r>
+            <a:r>
+              <a:rPr lang="en-US" dirty="0"/>
+              <a:t>（</a:t>
+            </a:r>
+            <a:r>
+              <a:rPr lang="en-US" dirty="0" err="1"/>
+              <a:t>一</a:t>
+            </a:r>
+            <a:r>
+              <a:rPr lang="en-US" dirty="0"/>
+              <a:t>）</a:t>
+            </a:r>
+          </a:p>
+        </p:txBody>
+      </p:sp>
+      <p:sp>
+        <p:nvSpPr>
+          <p:cNvPr id="3" name="Content Placeholder 2">
+            <a:extLst>
+              <a:ext uri="{FF2B5EF4-FFF2-40B4-BE49-F238E27FC236}">
+                <a16:creationId xmlns:a16="http://schemas.microsoft.com/office/drawing/2014/main" id="{A92D7A7D-2D91-0425-975E-AAA6C5AE3342}"/>
+              </a:ext>
+            </a:extLst>
+          </p:cNvPr>
+          <p:cNvSpPr>
+            <a:spLocks noGrp="1"/>
+          </p:cNvSpPr>
+          <p:nvPr>
+            <p:ph idx="1"/>
+          </p:nvPr>
+        </p:nvSpPr>
+        <p:spPr/>
+        <p:txBody>
+          <a:bodyPr/>
+          <a:lstStyle/>
+          <a:p>
+            <a:pPr>
+              <a:lnSpc>
+                <a:spcPct val="150000"/>
+              </a:lnSpc>
+              <a:buFont typeface="Wingdings" pitchFamily="2" charset="2"/>
+              <a:buChar char="q"/>
+            </a:pPr>
+            <a:r>
+              <a:rPr lang="ja-JP" altLang="en-US" sz="2000"/>
+              <a:t>學者建議電話訪問與網路調查同時進行，並且詢問受訪者一些生活上的問題，用這些題目預測哪些人更容易成為網路調查的受訪者。</a:t>
+            </a:r>
+            <a:endParaRPr lang="en-US" altLang="ja-JP" sz="2000" dirty="0"/>
+          </a:p>
+          <a:p>
+            <a:pPr>
+              <a:lnSpc>
+                <a:spcPct val="150000"/>
+              </a:lnSpc>
+              <a:buFont typeface="Wingdings" pitchFamily="2" charset="2"/>
+              <a:buChar char="q"/>
+            </a:pPr>
+            <a:r>
+              <a:rPr lang="ja-JP" altLang="en-US" sz="2000"/>
+              <a:t>例如：詢問受訪者起床時間、就寢時間、上次是否投票。</a:t>
+            </a:r>
+            <a:endParaRPr lang="en-US" altLang="ja-JP" sz="2000" dirty="0"/>
+          </a:p>
+          <a:p>
+            <a:pPr marL="742950" lvl="1" indent="-285750">
+              <a:buFont typeface="Arial" panose="020B0604020202020204" pitchFamily="34" charset="0"/>
+              <a:buChar char="•"/>
+            </a:pPr>
+            <a:r>
+              <a:rPr lang="en-US" sz="2000" dirty="0" err="1"/>
+              <a:t>起床時間：晚起床的人比較可能接觸網路</a:t>
+            </a:r>
+            <a:endParaRPr lang="en-US" sz="2000" dirty="0"/>
+          </a:p>
+          <a:p>
+            <a:pPr marL="742950" lvl="1" indent="-285750">
+              <a:buFont typeface="Arial" panose="020B0604020202020204" pitchFamily="34" charset="0"/>
+              <a:buChar char="•"/>
+            </a:pPr>
+            <a:r>
+              <a:rPr lang="en-US" sz="2000" dirty="0" err="1"/>
+              <a:t>就寢時間：晚睡的人比較可能接觸網路</a:t>
+            </a:r>
+            <a:endParaRPr lang="en-US" sz="2000" dirty="0"/>
+          </a:p>
+          <a:p>
+            <a:pPr marL="742950" lvl="1" indent="-285750">
+              <a:buFont typeface="Arial" panose="020B0604020202020204" pitchFamily="34" charset="0"/>
+              <a:buChar char="•"/>
+            </a:pPr>
+            <a:r>
+              <a:rPr lang="ja-JP" altLang="en-US" sz="2000"/>
+              <a:t>上次是否投票</a:t>
+            </a:r>
+            <a:r>
+              <a:rPr lang="en-US" sz="2000" dirty="0"/>
+              <a:t>：</a:t>
+            </a:r>
+            <a:r>
+              <a:rPr lang="en-US" sz="2000" dirty="0" err="1"/>
+              <a:t>上次投票的人比較可能願意參加網路調查</a:t>
+            </a:r>
+            <a:endParaRPr lang="ja-JP" altLang="en-US" sz="2000"/>
+          </a:p>
+          <a:p>
+            <a:r>
+              <a:rPr lang="ja-JP" altLang="en-US" sz="2000"/>
+              <a:t>合併這兩筆樣本之後，可以用這三個題目預測受訪者成為網路樣本的機率。</a:t>
+            </a:r>
+          </a:p>
+          <a:p>
+            <a:endParaRPr lang="en-US" dirty="0"/>
+          </a:p>
+        </p:txBody>
+      </p:sp>
+      <p:sp>
+        <p:nvSpPr>
+          <p:cNvPr id="4" name="Slide Number Placeholder 3">
+            <a:extLst>
+              <a:ext uri="{FF2B5EF4-FFF2-40B4-BE49-F238E27FC236}">
+                <a16:creationId xmlns:a16="http://schemas.microsoft.com/office/drawing/2014/main" id="{B1649232-4471-01C1-446B-ED966910EFE8}"/>
+              </a:ext>
+            </a:extLst>
+          </p:cNvPr>
+          <p:cNvSpPr>
+            <a:spLocks noGrp="1"/>
+          </p:cNvSpPr>
+          <p:nvPr>
+            <p:ph type="sldNum" sz="quarter" idx="12"/>
+          </p:nvPr>
+        </p:nvSpPr>
+        <p:spPr/>
+        <p:txBody>
+          <a:bodyPr/>
+          <a:lstStyle/>
+          <a:p>
+            <a:fld id="{34E21383-B02B-694B-B2AD-A967203CDE86}" type="slidenum">
+              <a:rPr lang="en-US" smtClean="0"/>
+              <a:t>16</a:t>
+            </a:fld>
+            <a:endParaRPr lang="en-US"/>
+          </a:p>
+        </p:txBody>
+      </p:sp>
+    </p:spTree>
+    <p:extLst>
+      <p:ext uri="{BB962C8B-B14F-4D97-AF65-F5344CB8AC3E}">
+        <p14:creationId xmlns:p14="http://schemas.microsoft.com/office/powerpoint/2010/main" val="1423686379"/>
+      </p:ext>
+    </p:extLst>
+  </p:cSld>
+  <p:clrMapOvr>
+    <a:masterClrMapping/>
+  </p:clrMapOvr>
+</p:sld>
+</file>
+
+<file path=ppt/slides/slide17.xml><?xml version="1.0" encoding="utf-8"?>
+<p:sld xmlns:a="http://schemas.openxmlformats.org/drawingml/2006/main" xmlns:r="http://schemas.openxmlformats.org/officeDocument/2006/relationships" xmlns:p="http://schemas.openxmlformats.org/presentationml/2006/main">
+  <p:cSld>
+    <p:spTree>
+      <p:nvGrpSpPr>
         <p:cNvPr id="1" name=""/>
         <p:cNvGrpSpPr/>
         <p:nvPr/>
@@ -6326,10 +6528,10 @@
       </p:grpSpPr>
       <p:sp>
         <p:nvSpPr>
-          <p:cNvPr id="2" name="Title 1">
-            <a:extLst>
-              <a:ext uri="{FF2B5EF4-FFF2-40B4-BE49-F238E27FC236}">
-                <a16:creationId xmlns:a16="http://schemas.microsoft.com/office/drawing/2014/main" id="{ED266BC7-D370-DB3B-3586-0BB7D3212D0F}"/>
+          <p:cNvPr id="2" name="標題 1">
+            <a:extLst>
+              <a:ext uri="{FF2B5EF4-FFF2-40B4-BE49-F238E27FC236}">
+                <a16:creationId xmlns:a16="http://schemas.microsoft.com/office/drawing/2014/main" id="{383EE3C2-DDD8-7A06-09FA-3DA3575D43D0}"/>
               </a:ext>
             </a:extLst>
           </p:cNvPr>
@@ -6347,18 +6549,535 @@
           <a:p>
             <a:r>
               <a:rPr lang="ja-JP" altLang="en-US"/>
-              <a:t>期末報告</a:t>
-            </a:r>
-            <a:endParaRPr lang="en-US" dirty="0"/>
-          </a:p>
-        </p:txBody>
-      </p:sp>
-      <p:sp>
-        <p:nvSpPr>
-          <p:cNvPr id="3" name="Content Placeholder 2">
-            <a:extLst>
-              <a:ext uri="{FF2B5EF4-FFF2-40B4-BE49-F238E27FC236}">
-                <a16:creationId xmlns:a16="http://schemas.microsoft.com/office/drawing/2014/main" id="{4F08E529-29DD-AB2C-94BF-694DBD41AB6D}"/>
+              <a:t>網路調查與電話訪問結合</a:t>
+            </a:r>
+            <a:r>
+              <a:rPr lang="en-US" altLang="zh-TW" dirty="0"/>
+              <a:t>（</a:t>
+            </a:r>
+            <a:r>
+              <a:rPr lang="zh-TW" altLang="en-US" dirty="0"/>
+              <a:t>二</a:t>
+            </a:r>
+            <a:r>
+              <a:rPr lang="en-US" altLang="zh-TW" dirty="0"/>
+              <a:t>）</a:t>
+            </a:r>
+            <a:endParaRPr kumimoji="1" lang="zh-TW" altLang="en-US" dirty="0"/>
+          </a:p>
+        </p:txBody>
+      </p:sp>
+      <mc:AlternateContent xmlns:mc="http://schemas.openxmlformats.org/markup-compatibility/2006">
+        <mc:Choice xmlns:a14="http://schemas.microsoft.com/office/drawing/2010/main" Requires="a14">
+          <p:sp>
+            <p:nvSpPr>
+              <p:cNvPr id="3" name="內容版面配置區 2">
+                <a:extLst>
+                  <a:ext uri="{FF2B5EF4-FFF2-40B4-BE49-F238E27FC236}">
+                    <a16:creationId xmlns:a16="http://schemas.microsoft.com/office/drawing/2014/main" id="{2D1E07AE-ED5B-6F60-8C27-C97012B8AC94}"/>
+                  </a:ext>
+                </a:extLst>
+              </p:cNvPr>
+              <p:cNvSpPr>
+                <a:spLocks noGrp="1"/>
+              </p:cNvSpPr>
+              <p:nvPr>
+                <p:ph idx="1"/>
+              </p:nvPr>
+            </p:nvSpPr>
+            <p:spPr/>
+            <p:txBody>
+              <a:bodyPr>
+                <a:normAutofit fontScale="85000" lnSpcReduction="10000"/>
+              </a:bodyPr>
+              <a:lstStyle/>
+              <a:p>
+                <a:pPr marL="514350" indent="-514350">
+                  <a:lnSpc>
+                    <a:spcPct val="150000"/>
+                  </a:lnSpc>
+                  <a:buFont typeface="+mj-lt"/>
+                  <a:buAutoNum type="arabicPeriod"/>
+                </a:pPr>
+                <a:r>
+                  <a:rPr kumimoji="1" lang="zh-TW" altLang="en-US" sz="2000" dirty="0"/>
+                  <a:t>「入選機率調整法」（</a:t>
+                </a:r>
+                <a:r>
+                  <a:rPr kumimoji="1" lang="en-US" altLang="zh-TW" sz="2000" dirty="0"/>
+                  <a:t>Propensity Score Adjustment, PSA</a:t>
+                </a:r>
+                <a:r>
+                  <a:rPr kumimoji="1" lang="zh-TW" altLang="en-US" sz="2000" dirty="0"/>
+                  <a:t>）是處理非機率樣本（如網路自願調查）偏誤的核心統計技術。</a:t>
+                </a:r>
+                <a:endParaRPr kumimoji="1" lang="en-US" altLang="zh-TW" sz="2000" dirty="0"/>
+              </a:p>
+              <a:p>
+                <a:pPr marL="514350" indent="-514350">
+                  <a:lnSpc>
+                    <a:spcPct val="150000"/>
+                  </a:lnSpc>
+                  <a:buFont typeface="+mj-lt"/>
+                  <a:buAutoNum type="arabicPeriod"/>
+                </a:pPr>
+                <a:r>
+                  <a:rPr kumimoji="1" lang="zh-TW" altLang="en-US" sz="2000" dirty="0"/>
+                  <a:t>合併與標記將兩份數據合併。給予一個標籤變數 </a:t>
+                </a:r>
+                <a:r>
+                  <a:rPr kumimoji="1" lang="en" altLang="zh-TW" sz="2000" dirty="0"/>
+                  <a:t>Y</a:t>
+                </a:r>
+                <a:r>
+                  <a:rPr kumimoji="1" lang="zh-TW" altLang="en" sz="2000" dirty="0"/>
+                  <a:t>：</a:t>
+                </a:r>
+                <a:r>
+                  <a:rPr kumimoji="1" lang="zh-TW" altLang="en-US" sz="2000" dirty="0"/>
+                  <a:t>如果是來自網路問卷， </a:t>
+                </a:r>
+                <a:r>
+                  <a:rPr kumimoji="1" lang="en" altLang="zh-TW" sz="2000" dirty="0"/>
+                  <a:t>Y = 1</a:t>
+                </a:r>
+                <a:r>
+                  <a:rPr kumimoji="1" lang="zh-TW" altLang="en-US" sz="2000" dirty="0"/>
+                  <a:t>。如果是來自隨機樣本， </a:t>
+                </a:r>
+                <a:r>
+                  <a:rPr kumimoji="1" lang="en" altLang="zh-TW" sz="2000" dirty="0"/>
+                  <a:t>Y = 0</a:t>
+                </a:r>
+              </a:p>
+              <a:p>
+                <a:pPr marL="514350" indent="-514350">
+                  <a:lnSpc>
+                    <a:spcPct val="150000"/>
+                  </a:lnSpc>
+                  <a:buFont typeface="+mj-lt"/>
+                  <a:buAutoNum type="arabicPeriod"/>
+                </a:pPr>
+                <a:r>
+                  <a:rPr kumimoji="1" lang="zh-TW" altLang="en-US" sz="2000" dirty="0"/>
+                  <a:t>建立勝算對數迴歸模型 </a:t>
+                </a:r>
+                <a:r>
+                  <a:rPr kumimoji="1" lang="en-US" altLang="zh-TW" sz="2000" dirty="0"/>
+                  <a:t>(</a:t>
+                </a:r>
+                <a:r>
+                  <a:rPr kumimoji="1" lang="en" altLang="zh-TW" sz="2000" dirty="0"/>
+                  <a:t>Logistic Regression)</a:t>
+                </a:r>
+                <a:r>
+                  <a:rPr kumimoji="1" lang="zh-TW" altLang="en-US" sz="2000" dirty="0"/>
+                  <a:t>，利用兩組樣本中都有的共通變數（如：年齡、性別、</a:t>
+                </a:r>
+                <a:r>
+                  <a:rPr kumimoji="1" lang="en" altLang="zh-TW" sz="2000" dirty="0" err="1"/>
+                  <a:t>Webographics</a:t>
+                </a:r>
+                <a:r>
+                  <a:rPr kumimoji="1" lang="en" altLang="zh-TW" sz="2000" dirty="0"/>
+                  <a:t> </a:t>
+                </a:r>
+                <a:r>
+                  <a:rPr kumimoji="1" lang="zh-TW" altLang="en-US" sz="2000" dirty="0"/>
+                  <a:t>網路行為）作為自變數 </a:t>
+                </a:r>
+                <a:r>
+                  <a:rPr kumimoji="1" lang="en-US" altLang="zh-TW" sz="2000" dirty="0"/>
+                  <a:t>(</a:t>
+                </a:r>
+                <a:r>
+                  <a:rPr kumimoji="1" lang="en" altLang="zh-TW" sz="2000" dirty="0"/>
+                  <a:t>X)</a:t>
+                </a:r>
+                <a:r>
+                  <a:rPr kumimoji="1" lang="zh-TW" altLang="en" sz="2000" dirty="0"/>
+                  <a:t>，</a:t>
+                </a:r>
+                <a:r>
+                  <a:rPr kumimoji="1" lang="zh-TW" altLang="en-US" sz="2000" dirty="0"/>
+                  <a:t>去預測每一個人屬於 </a:t>
+                </a:r>
+                <a:r>
+                  <a:rPr kumimoji="1" lang="en" altLang="zh-TW" sz="2000" dirty="0"/>
+                  <a:t>Y=1 </a:t>
+                </a:r>
+                <a:r>
+                  <a:rPr kumimoji="1" lang="zh-TW" altLang="en-US" sz="2000" dirty="0"/>
+                  <a:t>的機率。這個計算出來的機率值 </a:t>
+                </a:r>
+                <a14:m>
+                  <m:oMath xmlns:m="http://schemas.openxmlformats.org/officeDocument/2006/math">
+                    <m:acc>
+                      <m:accPr>
+                        <m:chr m:val="̂"/>
+                        <m:ctrlPr>
+                          <a:rPr kumimoji="1" lang="zh-TW" altLang="en-US" sz="2000" i="1" smtClean="0">
+                            <a:latin typeface="Cambria Math" panose="02040503050406030204" pitchFamily="18" charset="0"/>
+                          </a:rPr>
+                        </m:ctrlPr>
+                      </m:accPr>
+                      <m:e>
+                        <m:r>
+                          <a:rPr kumimoji="1" lang="en-US" altLang="zh-TW" sz="2000" b="0" i="1" smtClean="0">
+                            <a:latin typeface="Cambria Math" panose="02040503050406030204" pitchFamily="18" charset="0"/>
+                          </a:rPr>
+                          <m:t>𝑝</m:t>
+                        </m:r>
+                      </m:e>
+                    </m:acc>
+                  </m:oMath>
+                </a14:m>
+                <a:r>
+                  <a:rPr kumimoji="1" lang="zh-TW" altLang="en" sz="2000" dirty="0"/>
+                  <a:t>，</a:t>
+                </a:r>
+                <a:r>
+                  <a:rPr kumimoji="1" lang="zh-TW" altLang="en-US" sz="2000" dirty="0"/>
+                  <a:t>就是傾向分數 </a:t>
+                </a:r>
+                <a:r>
+                  <a:rPr kumimoji="1" lang="en-US" altLang="zh-TW" sz="2000" dirty="0"/>
+                  <a:t>(</a:t>
+                </a:r>
+                <a:r>
+                  <a:rPr kumimoji="1" lang="en" altLang="zh-TW" sz="2000" dirty="0"/>
+                  <a:t>Propensity Score)</a:t>
+                </a:r>
+                <a:r>
+                  <a:rPr kumimoji="1" lang="zh-TW" altLang="en" sz="2000" dirty="0"/>
+                  <a:t>。</a:t>
+                </a:r>
+                <a:r>
+                  <a:rPr kumimoji="1" lang="zh-TW" altLang="en-US" sz="2000" dirty="0"/>
+                  <a:t>分數越高：代表這個特徵的人在網路上極端活躍，過度代表（</a:t>
+                </a:r>
+                <a:r>
+                  <a:rPr kumimoji="1" lang="en" altLang="zh-TW" sz="2000" dirty="0"/>
+                  <a:t>Over-represented</a:t>
+                </a:r>
+                <a:r>
+                  <a:rPr kumimoji="1" lang="zh-TW" altLang="en" sz="2000" dirty="0"/>
+                  <a:t>）。</a:t>
+                </a:r>
+                <a:r>
+                  <a:rPr kumimoji="1" lang="zh-TW" altLang="en-US" sz="2000" dirty="0"/>
+                  <a:t>分數越低：代表這個特徵的人很少出現在網路調查中（</a:t>
+                </a:r>
+                <a:r>
+                  <a:rPr kumimoji="1" lang="en" altLang="zh-TW" sz="2000" dirty="0"/>
+                  <a:t>Under-represented</a:t>
+                </a:r>
+                <a:r>
+                  <a:rPr kumimoji="1" lang="zh-TW" altLang="en" sz="2000" dirty="0"/>
+                  <a:t>）。</a:t>
+                </a:r>
+                <a:endParaRPr kumimoji="1" lang="en-US" altLang="zh-TW" sz="2000" dirty="0"/>
+              </a:p>
+              <a:p>
+                <a:pPr marL="514350" indent="-514350">
+                  <a:lnSpc>
+                    <a:spcPct val="150000"/>
+                  </a:lnSpc>
+                  <a:buFont typeface="+mj-lt"/>
+                  <a:buAutoNum type="arabicPeriod"/>
+                </a:pPr>
+                <a:r>
+                  <a:rPr kumimoji="1" lang="zh-TW" altLang="en-US" sz="2000" dirty="0"/>
+                  <a:t>根據傾向分數，給予非機率樣本不同的權重。公式通常為：</a:t>
+                </a:r>
+                <a:r>
+                  <a:rPr kumimoji="1" lang="en" altLang="zh-TW" sz="2000" dirty="0"/>
+                  <a:t>W = (1 - </a:t>
+                </a:r>
+                <a:r>
+                  <a:rPr kumimoji="1" lang="zh-TW" altLang="en-US" sz="2000" dirty="0"/>
+                  <a:t> </a:t>
+                </a:r>
+                <a14:m>
+                  <m:oMath xmlns:m="http://schemas.openxmlformats.org/officeDocument/2006/math">
+                    <m:acc>
+                      <m:accPr>
+                        <m:chr m:val="̂"/>
+                        <m:ctrlPr>
+                          <a:rPr kumimoji="1" lang="zh-TW" altLang="en-US" sz="2000" i="1">
+                            <a:latin typeface="Cambria Math" panose="02040503050406030204" pitchFamily="18" charset="0"/>
+                          </a:rPr>
+                        </m:ctrlPr>
+                      </m:accPr>
+                      <m:e>
+                        <m:r>
+                          <a:rPr kumimoji="1" lang="en-US" altLang="zh-TW" sz="2000" i="1">
+                            <a:latin typeface="Cambria Math" panose="02040503050406030204" pitchFamily="18" charset="0"/>
+                          </a:rPr>
+                          <m:t>𝑝</m:t>
+                        </m:r>
+                      </m:e>
+                    </m:acc>
+                    <m:r>
+                      <a:rPr kumimoji="1" lang="en-US" altLang="zh-TW" sz="2000" b="0" i="0" smtClean="0">
+                        <a:latin typeface="Cambria Math" panose="02040503050406030204" pitchFamily="18" charset="0"/>
+                      </a:rPr>
+                      <m:t>)/</m:t>
+                    </m:r>
+                  </m:oMath>
+                </a14:m>
+                <a:r>
+                  <a:rPr kumimoji="1" lang="zh-TW" altLang="en-US" sz="2000" dirty="0"/>
+                  <a:t> </a:t>
+                </a:r>
+                <a14:m>
+                  <m:oMath xmlns:m="http://schemas.openxmlformats.org/officeDocument/2006/math">
+                    <m:acc>
+                      <m:accPr>
+                        <m:chr m:val="̂"/>
+                        <m:ctrlPr>
+                          <a:rPr kumimoji="1" lang="zh-TW" altLang="en-US" sz="2000" i="1">
+                            <a:latin typeface="Cambria Math" panose="02040503050406030204" pitchFamily="18" charset="0"/>
+                          </a:rPr>
+                        </m:ctrlPr>
+                      </m:accPr>
+                      <m:e>
+                        <m:r>
+                          <a:rPr kumimoji="1" lang="en-US" altLang="zh-TW" sz="2000" i="1">
+                            <a:latin typeface="Cambria Math" panose="02040503050406030204" pitchFamily="18" charset="0"/>
+                          </a:rPr>
+                          <m:t>𝑝</m:t>
+                        </m:r>
+                      </m:e>
+                    </m:acc>
+                  </m:oMath>
+                </a14:m>
+                <a:r>
+                  <a:rPr kumimoji="1" lang="zh-TW" altLang="en-US" sz="2000" dirty="0"/>
+                  <a:t>如果  </a:t>
+                </a:r>
+                <a14:m>
+                  <m:oMath xmlns:m="http://schemas.openxmlformats.org/officeDocument/2006/math">
+                    <m:acc>
+                      <m:accPr>
+                        <m:chr m:val="̂"/>
+                        <m:ctrlPr>
+                          <a:rPr kumimoji="1" lang="zh-TW" altLang="en-US" sz="2000" i="1" smtClean="0">
+                            <a:latin typeface="Cambria Math" panose="02040503050406030204" pitchFamily="18" charset="0"/>
+                          </a:rPr>
+                        </m:ctrlPr>
+                      </m:accPr>
+                      <m:e>
+                        <m:r>
+                          <a:rPr kumimoji="1" lang="en-US" altLang="zh-TW" sz="2000" b="0" i="1" smtClean="0">
+                            <a:latin typeface="Cambria Math" panose="02040503050406030204" pitchFamily="18" charset="0"/>
+                          </a:rPr>
+                          <m:t>𝑝</m:t>
+                        </m:r>
+                      </m:e>
+                    </m:acc>
+                  </m:oMath>
+                </a14:m>
+                <a:r>
+                  <a:rPr kumimoji="1" lang="en" altLang="zh-TW" sz="2000" dirty="0"/>
+                  <a:t> </a:t>
+                </a:r>
+                <a:r>
+                  <a:rPr kumimoji="1" lang="zh-TW" altLang="en-US" sz="2000" dirty="0"/>
+                  <a:t>很大（如 </a:t>
+                </a:r>
+                <a:r>
+                  <a:rPr kumimoji="1" lang="en-US" altLang="zh-TW" sz="2000" dirty="0"/>
+                  <a:t>0.9</a:t>
+                </a:r>
+                <a:r>
+                  <a:rPr kumimoji="1" lang="zh-TW" altLang="en-US" sz="2000" dirty="0"/>
+                  <a:t>）： 權重會變得很小，降低該樣本的影響力。如果  </a:t>
+                </a:r>
+                <a14:m>
+                  <m:oMath xmlns:m="http://schemas.openxmlformats.org/officeDocument/2006/math">
+                    <m:acc>
+                      <m:accPr>
+                        <m:chr m:val="̂"/>
+                        <m:ctrlPr>
+                          <a:rPr kumimoji="1" lang="zh-TW" altLang="en-US" sz="2000" i="1">
+                            <a:latin typeface="Cambria Math" panose="02040503050406030204" pitchFamily="18" charset="0"/>
+                          </a:rPr>
+                        </m:ctrlPr>
+                      </m:accPr>
+                      <m:e>
+                        <m:r>
+                          <a:rPr kumimoji="1" lang="en-US" altLang="zh-TW" sz="2000" i="1">
+                            <a:latin typeface="Cambria Math" panose="02040503050406030204" pitchFamily="18" charset="0"/>
+                          </a:rPr>
+                          <m:t>𝑝</m:t>
+                        </m:r>
+                      </m:e>
+                    </m:acc>
+                  </m:oMath>
+                </a14:m>
+                <a:r>
+                  <a:rPr kumimoji="1" lang="zh-TW" altLang="en-US" sz="2000" dirty="0"/>
+                  <a:t>很小（如 </a:t>
+                </a:r>
+                <a:r>
+                  <a:rPr kumimoji="1" lang="en-US" altLang="zh-TW" sz="2000" dirty="0"/>
+                  <a:t>0.1</a:t>
+                </a:r>
+                <a:r>
+                  <a:rPr kumimoji="1" lang="zh-TW" altLang="en-US" sz="2000" dirty="0"/>
+                  <a:t>）： 權重會變大，放大該樣本的發言權。</a:t>
+                </a:r>
+              </a:p>
+            </p:txBody>
+          </p:sp>
+        </mc:Choice>
+        <mc:Fallback>
+          <p:sp>
+            <p:nvSpPr>
+              <p:cNvPr id="3" name="內容版面配置區 2">
+                <a:extLst>
+                  <a:ext uri="{FF2B5EF4-FFF2-40B4-BE49-F238E27FC236}">
+                    <a16:creationId xmlns:a16="http://schemas.microsoft.com/office/drawing/2014/main" id="{2D1E07AE-ED5B-6F60-8C27-C97012B8AC94}"/>
+                  </a:ext>
+                </a:extLst>
+              </p:cNvPr>
+              <p:cNvSpPr>
+                <a:spLocks noGrp="1" noRot="1" noChangeAspect="1" noMove="1" noResize="1" noEditPoints="1" noAdjustHandles="1" noChangeArrowheads="1" noChangeShapeType="1" noTextEdit="1"/>
+              </p:cNvSpPr>
+              <p:nvPr>
+                <p:ph idx="1"/>
+              </p:nvPr>
+            </p:nvSpPr>
+            <p:spPr>
+              <a:blipFill>
+                <a:blip r:embed="rId2"/>
+                <a:stretch>
+                  <a:fillRect l="-483" r="-1086"/>
+                </a:stretch>
+              </a:blipFill>
+            </p:spPr>
+            <p:txBody>
+              <a:bodyPr/>
+              <a:lstStyle/>
+              <a:p>
+                <a:r>
+                  <a:rPr lang="zh-TW" altLang="en-US">
+                    <a:noFill/>
+                  </a:rPr>
+                  <a:t> </a:t>
+                </a:r>
+              </a:p>
+            </p:txBody>
+          </p:sp>
+        </mc:Fallback>
+      </mc:AlternateContent>
+      <p:sp>
+        <p:nvSpPr>
+          <p:cNvPr id="4" name="投影片編號版面配置區 3">
+            <a:extLst>
+              <a:ext uri="{FF2B5EF4-FFF2-40B4-BE49-F238E27FC236}">
+                <a16:creationId xmlns:a16="http://schemas.microsoft.com/office/drawing/2014/main" id="{8C477EDC-9A39-CFFD-2F6B-8CBAED496081}"/>
+              </a:ext>
+            </a:extLst>
+          </p:cNvPr>
+          <p:cNvSpPr>
+            <a:spLocks noGrp="1"/>
+          </p:cNvSpPr>
+          <p:nvPr>
+            <p:ph type="sldNum" sz="quarter" idx="12"/>
+          </p:nvPr>
+        </p:nvSpPr>
+        <p:spPr/>
+        <p:txBody>
+          <a:bodyPr/>
+          <a:lstStyle/>
+          <a:p>
+            <a:fld id="{34E21383-B02B-694B-B2AD-A967203CDE86}" type="slidenum">
+              <a:rPr lang="en-US" smtClean="0"/>
+              <a:t>17</a:t>
+            </a:fld>
+            <a:endParaRPr lang="en-US"/>
+          </a:p>
+        </p:txBody>
+      </p:sp>
+    </p:spTree>
+    <p:extLst>
+      <p:ext uri="{BB962C8B-B14F-4D97-AF65-F5344CB8AC3E}">
+        <p14:creationId xmlns:p14="http://schemas.microsoft.com/office/powerpoint/2010/main" val="2186623153"/>
+      </p:ext>
+    </p:extLst>
+  </p:cSld>
+  <p:clrMapOvr>
+    <a:masterClrMapping/>
+  </p:clrMapOvr>
+</p:sld>
+</file>
+
+<file path=ppt/slides/slide18.xml><?xml version="1.0" encoding="utf-8"?>
+<p:sld xmlns:a="http://schemas.openxmlformats.org/drawingml/2006/main" xmlns:r="http://schemas.openxmlformats.org/officeDocument/2006/relationships" xmlns:p="http://schemas.openxmlformats.org/presentationml/2006/main">
+  <p:cSld>
+    <p:spTree>
+      <p:nvGrpSpPr>
+        <p:cNvPr id="1" name=""/>
+        <p:cNvGrpSpPr/>
+        <p:nvPr/>
+      </p:nvGrpSpPr>
+      <p:grpSpPr>
+        <a:xfrm>
+          <a:off x="0" y="0"/>
+          <a:ext cx="0" cy="0"/>
+          <a:chOff x="0" y="0"/>
+          <a:chExt cx="0" cy="0"/>
+        </a:xfrm>
+      </p:grpSpPr>
+      <p:sp>
+        <p:nvSpPr>
+          <p:cNvPr id="2" name="標題 1">
+            <a:extLst>
+              <a:ext uri="{FF2B5EF4-FFF2-40B4-BE49-F238E27FC236}">
+                <a16:creationId xmlns:a16="http://schemas.microsoft.com/office/drawing/2014/main" id="{F4B25333-FA00-DAC2-008C-F9F92142250C}"/>
+              </a:ext>
+            </a:extLst>
+          </p:cNvPr>
+          <p:cNvSpPr>
+            <a:spLocks noGrp="1"/>
+          </p:cNvSpPr>
+          <p:nvPr>
+            <p:ph type="title"/>
+          </p:nvPr>
+        </p:nvSpPr>
+        <p:spPr/>
+        <p:txBody>
+          <a:bodyPr/>
+          <a:lstStyle/>
+          <a:p>
+            <a:r>
+              <a:rPr lang="ja-JP" altLang="en-US"/>
+              <a:t>網路調查與電話訪問結合</a:t>
+            </a:r>
+            <a:r>
+              <a:rPr lang="en-US" altLang="zh-TW" dirty="0"/>
+              <a:t>（</a:t>
+            </a:r>
+            <a:r>
+              <a:rPr lang="zh-TW" altLang="en-US" dirty="0"/>
+              <a:t>三</a:t>
+            </a:r>
+            <a:r>
+              <a:rPr lang="en-US" altLang="zh-TW" dirty="0"/>
+              <a:t>）</a:t>
+            </a:r>
+            <a:endParaRPr kumimoji="1" lang="zh-TW" altLang="en-US" dirty="0"/>
+          </a:p>
+        </p:txBody>
+      </p:sp>
+      <p:sp>
+        <p:nvSpPr>
+          <p:cNvPr id="3" name="內容版面配置區 2">
+            <a:extLst>
+              <a:ext uri="{FF2B5EF4-FFF2-40B4-BE49-F238E27FC236}">
+                <a16:creationId xmlns:a16="http://schemas.microsoft.com/office/drawing/2014/main" id="{9157172E-4746-788F-EAED-46AA41DEFF13}"/>
               </a:ext>
             </a:extLst>
           </p:cNvPr>
@@ -6372,11 +7091,22 @@
         <p:spPr/>
         <p:txBody>
           <a:bodyPr>
-            <a:normAutofit fontScale="92500" lnSpcReduction="10000"/>
+            <a:normAutofit lnSpcReduction="10000"/>
           </a:bodyPr>
           <a:lstStyle/>
           <a:p>
-            <a:pPr marL="514350" indent="-514350">
+            <a:r>
+              <a:rPr kumimoji="1" lang="en" altLang="zh-TW" sz="2000" dirty="0" err="1"/>
+              <a:t>Webographics</a:t>
+            </a:r>
+            <a:r>
+              <a:rPr kumimoji="1" lang="zh-TW" altLang="en-US" sz="2000" dirty="0"/>
+              <a:t>有如下的可能問題：</a:t>
+            </a:r>
+            <a:endParaRPr kumimoji="1" lang="en-US" altLang="zh-TW" sz="2000" dirty="0"/>
+          </a:p>
+          <a:p>
+            <a:pPr marL="457200" indent="-457200">
               <a:lnSpc>
                 <a:spcPct val="150000"/>
               </a:lnSpc>
@@ -6384,23 +7114,13 @@
               <a:buAutoNum type="arabicPeriod"/>
             </a:pPr>
             <a:r>
-              <a:rPr lang="zh-TW" altLang="en-US" kern="100" dirty="0">
-                <a:effectLst/>
-                <a:latin typeface="Times New Roman" panose="02020603050405020304" pitchFamily="18" charset="0"/>
-                <a:ea typeface="DFKai-SB"/>
-                <a:cs typeface="Times New Roman" panose="02020603050405020304" pitchFamily="18" charset="0"/>
-              </a:rPr>
-              <a:t>為鼓勵團隊合作，期末報告係由學生分組針對民意或者調查的主題進行研究，例如政府是否回應民意？個人的意見如何形成？如何改進問卷的設計或者執行方式等等？</a:t>
-            </a:r>
-            <a:endParaRPr lang="en-US" altLang="zh-TW" kern="100" dirty="0">
-              <a:effectLst/>
-              <a:latin typeface="Times New Roman" panose="02020603050405020304" pitchFamily="18" charset="0"/>
-              <a:ea typeface="DFKai-SB"/>
-              <a:cs typeface="Times New Roman" panose="02020603050405020304" pitchFamily="18" charset="0"/>
-            </a:endParaRPr>
-          </a:p>
-          <a:p>
-            <a:pPr marL="514350" indent="-514350">
+              <a:rPr kumimoji="1" lang="zh-TW" altLang="en-US" sz="2000" dirty="0"/>
+              <a:t>變數選擇的主觀性：哪些 指標最關鍵？（是上網時數？還是是否使用網銀？）目前並沒有統一標準。選錯變數可能導致加權無效，甚至增加統計噪訊。</a:t>
+            </a:r>
+            <a:endParaRPr kumimoji="1" lang="en-US" altLang="zh-TW" sz="2000" dirty="0"/>
+          </a:p>
+          <a:p>
+            <a:pPr marL="457200" indent="-457200">
               <a:lnSpc>
                 <a:spcPct val="150000"/>
               </a:lnSpc>
@@ -6408,23 +7128,41 @@
               <a:buAutoNum type="arabicPeriod"/>
             </a:pPr>
             <a:r>
-              <a:rPr lang="zh-TW" altLang="en-US" kern="100" dirty="0">
-                <a:effectLst/>
-                <a:latin typeface="Times New Roman" panose="02020603050405020304" pitchFamily="18" charset="0"/>
-                <a:ea typeface="DFKai-SB"/>
-                <a:cs typeface="Times New Roman" panose="02020603050405020304" pitchFamily="18" charset="0"/>
-              </a:rPr>
-              <a:t>期末進行分組發表報告後，於兩週後繳交完整報告。</a:t>
-            </a:r>
-            <a:endParaRPr lang="en-US" altLang="zh-TW" kern="100" dirty="0">
-              <a:effectLst/>
-              <a:latin typeface="Times New Roman" panose="02020603050405020304" pitchFamily="18" charset="0"/>
-              <a:ea typeface="DFKai-SB"/>
-              <a:cs typeface="Times New Roman" panose="02020603050405020304" pitchFamily="18" charset="0"/>
-            </a:endParaRPr>
-          </a:p>
-          <a:p>
-            <a:pPr marL="514350" indent="-514350">
+              <a:rPr kumimoji="1" lang="zh-TW" altLang="en-US" sz="2000" dirty="0"/>
+              <a:t>可能導致樣本權值過大：如果某個特定網路行為族群在你的樣本中極少（例如：很少上網的高齡者），為了補齊權重，該樣本的權值會被放大到極端（如 </a:t>
+            </a:r>
+            <a:r>
+              <a:rPr kumimoji="1" lang="en-US" altLang="zh-TW" sz="2000" dirty="0"/>
+              <a:t>1 </a:t>
+            </a:r>
+            <a:r>
+              <a:rPr kumimoji="1" lang="zh-TW" altLang="en-US" sz="2000" dirty="0"/>
+              <a:t>個人代表 </a:t>
+            </a:r>
+            <a:r>
+              <a:rPr kumimoji="1" lang="en-US" altLang="zh-TW" sz="2000" dirty="0"/>
+              <a:t>500 </a:t>
+            </a:r>
+            <a:r>
+              <a:rPr kumimoji="1" lang="zh-TW" altLang="en-US" sz="2000" dirty="0"/>
+              <a:t>個人）。這會導致標準誤（</a:t>
+            </a:r>
+            <a:r>
+              <a:rPr kumimoji="1" lang="en" altLang="zh-TW" sz="2000" dirty="0"/>
+              <a:t>Standard Error</a:t>
+            </a:r>
+            <a:r>
+              <a:rPr kumimoji="1" lang="zh-TW" altLang="en" sz="2000" dirty="0"/>
+              <a:t>）</a:t>
+            </a:r>
+            <a:r>
+              <a:rPr kumimoji="1" lang="zh-TW" altLang="en-US" sz="2000" dirty="0"/>
+              <a:t>暴增，讓調查結果不穩定。</a:t>
+            </a:r>
+            <a:endParaRPr kumimoji="1" lang="en-US" altLang="zh-TW" sz="2000" dirty="0"/>
+          </a:p>
+          <a:p>
+            <a:pPr marL="457200" indent="-457200">
               <a:lnSpc>
                 <a:spcPct val="150000"/>
               </a:lnSpc>
@@ -6432,86 +7170,30 @@
               <a:buAutoNum type="arabicPeriod"/>
             </a:pPr>
             <a:r>
-              <a:rPr lang="zh-TW" altLang="en-US" kern="100" dirty="0">
-                <a:effectLst/>
-                <a:latin typeface="Times New Roman" panose="02020603050405020304" pitchFamily="18" charset="0"/>
-                <a:ea typeface="DFKai-SB"/>
-                <a:cs typeface="Times New Roman" panose="02020603050405020304" pitchFamily="18" charset="0"/>
-              </a:rPr>
-              <a:t>每一組最少</a:t>
-            </a:r>
-            <a:r>
-              <a:rPr lang="en-US" altLang="zh-TW" kern="100" dirty="0">
-                <a:effectLst/>
-                <a:latin typeface="Times New Roman" panose="02020603050405020304" pitchFamily="18" charset="0"/>
-                <a:ea typeface="DFKai-SB"/>
-                <a:cs typeface="Times New Roman" panose="02020603050405020304" pitchFamily="18" charset="0"/>
-              </a:rPr>
-              <a:t>2</a:t>
-            </a:r>
-            <a:r>
-              <a:rPr lang="zh-TW" altLang="en-US" kern="100" dirty="0">
-                <a:effectLst/>
-                <a:latin typeface="Times New Roman" panose="02020603050405020304" pitchFamily="18" charset="0"/>
-                <a:ea typeface="DFKai-SB"/>
-                <a:cs typeface="Times New Roman" panose="02020603050405020304" pitchFamily="18" charset="0"/>
-              </a:rPr>
-              <a:t>人，最多</a:t>
-            </a:r>
-            <a:r>
-              <a:rPr lang="en-US" altLang="zh-TW" kern="100" dirty="0">
-                <a:effectLst/>
-                <a:latin typeface="Times New Roman" panose="02020603050405020304" pitchFamily="18" charset="0"/>
-                <a:ea typeface="DFKai-SB"/>
-                <a:cs typeface="Times New Roman" panose="02020603050405020304" pitchFamily="18" charset="0"/>
-              </a:rPr>
-              <a:t>4</a:t>
-            </a:r>
-            <a:r>
-              <a:rPr lang="zh-TW" altLang="en-US" kern="100" dirty="0">
-                <a:effectLst/>
-                <a:latin typeface="Times New Roman" panose="02020603050405020304" pitchFamily="18" charset="0"/>
-                <a:ea typeface="DFKai-SB"/>
-                <a:cs typeface="Times New Roman" panose="02020603050405020304" pitchFamily="18" charset="0"/>
-              </a:rPr>
-              <a:t>人。</a:t>
-            </a:r>
-            <a:endParaRPr lang="en-US" altLang="zh-TW" kern="100" dirty="0">
-              <a:effectLst/>
-              <a:latin typeface="Times New Roman" panose="02020603050405020304" pitchFamily="18" charset="0"/>
-              <a:ea typeface="DFKai-SB"/>
-              <a:cs typeface="Times New Roman" panose="02020603050405020304" pitchFamily="18" charset="0"/>
-            </a:endParaRPr>
-          </a:p>
-          <a:p>
-            <a:pPr marL="514350" indent="-514350">
-              <a:lnSpc>
-                <a:spcPct val="150000"/>
-              </a:lnSpc>
-              <a:buFont typeface="+mj-lt"/>
-              <a:buAutoNum type="arabicPeriod"/>
-            </a:pPr>
-            <a:r>
-              <a:rPr lang="zh-TW" altLang="en-US" kern="100" dirty="0">
-                <a:effectLst/>
-                <a:latin typeface="Times New Roman" panose="02020603050405020304" pitchFamily="18" charset="0"/>
-                <a:ea typeface="DFKai-SB"/>
-                <a:cs typeface="Times New Roman" panose="02020603050405020304" pitchFamily="18" charset="0"/>
-              </a:rPr>
-              <a:t>報告至少包括：研究問題與可能貢獻、文獻回顧、研究發現與建議以及結論。</a:t>
-            </a:r>
-            <a:endParaRPr lang="en-US" dirty="0">
-              <a:effectLst/>
-            </a:endParaRPr>
-          </a:p>
-        </p:txBody>
-      </p:sp>
-      <p:sp>
-        <p:nvSpPr>
-          <p:cNvPr id="4" name="Slide Number Placeholder 3">
-            <a:extLst>
-              <a:ext uri="{FF2B5EF4-FFF2-40B4-BE49-F238E27FC236}">
-                <a16:creationId xmlns:a16="http://schemas.microsoft.com/office/drawing/2014/main" id="{713E27AD-FE49-2E5F-F622-F163350A2DD4}"/>
+              <a:rPr kumimoji="1" lang="zh-TW" altLang="en-US" sz="2000" dirty="0"/>
+              <a:t>無法處理「未觀測到的差異」：即使網路行為一樣，自願填問卷的人與被動受訪的人在「性格（如熱衷程度）」上仍有本質區別，這是 </a:t>
+            </a:r>
+            <a:r>
+              <a:rPr kumimoji="1" lang="en" altLang="zh-TW" sz="2000" dirty="0" err="1"/>
+              <a:t>Webographics</a:t>
+            </a:r>
+            <a:r>
+              <a:rPr kumimoji="1" lang="en" altLang="zh-TW" sz="2000" dirty="0"/>
+              <a:t> </a:t>
+            </a:r>
+            <a:r>
+              <a:rPr kumimoji="1" lang="zh-TW" altLang="en-US" sz="2000" dirty="0"/>
+              <a:t>數據無法完全消除的殘餘偏差。</a:t>
+            </a:r>
+          </a:p>
+        </p:txBody>
+      </p:sp>
+      <p:sp>
+        <p:nvSpPr>
+          <p:cNvPr id="4" name="投影片編號版面配置區 3">
+            <a:extLst>
+              <a:ext uri="{FF2B5EF4-FFF2-40B4-BE49-F238E27FC236}">
+                <a16:creationId xmlns:a16="http://schemas.microsoft.com/office/drawing/2014/main" id="{4B3EC6B7-9114-0FA4-6CAB-B58ECE6A1FDB}"/>
               </a:ext>
             </a:extLst>
           </p:cNvPr>
@@ -6529,7 +7211,7 @@
           <a:p>
             <a:fld id="{34E21383-B02B-694B-B2AD-A967203CDE86}" type="slidenum">
               <a:rPr lang="en-US" smtClean="0"/>
-              <a:t>16</a:t>
+              <a:t>18</a:t>
             </a:fld>
             <a:endParaRPr lang="en-US"/>
           </a:p>
@@ -6538,7 +7220,215 @@
     </p:spTree>
     <p:extLst>
       <p:ext uri="{BB962C8B-B14F-4D97-AF65-F5344CB8AC3E}">
-        <p14:creationId xmlns:p14="http://schemas.microsoft.com/office/powerpoint/2010/main" val="448999480"/>
+        <p14:creationId xmlns:p14="http://schemas.microsoft.com/office/powerpoint/2010/main" val="4074013559"/>
+      </p:ext>
+    </p:extLst>
+  </p:cSld>
+  <p:clrMapOvr>
+    <a:masterClrMapping/>
+  </p:clrMapOvr>
+</p:sld>
+</file>
+
+<file path=ppt/slides/slide19.xml><?xml version="1.0" encoding="utf-8"?>
+<p:sld xmlns:a="http://schemas.openxmlformats.org/drawingml/2006/main" xmlns:r="http://schemas.openxmlformats.org/officeDocument/2006/relationships" xmlns:p="http://schemas.openxmlformats.org/presentationml/2006/main">
+  <p:cSld>
+    <p:spTree>
+      <p:nvGrpSpPr>
+        <p:cNvPr id="1" name="">
+          <a:extLst>
+            <a:ext uri="{FF2B5EF4-FFF2-40B4-BE49-F238E27FC236}">
+              <a16:creationId xmlns:a16="http://schemas.microsoft.com/office/drawing/2014/main" id="{3E6B6B50-8148-E70C-37D0-8D64E7AF72B1}"/>
+            </a:ext>
+          </a:extLst>
+        </p:cNvPr>
+        <p:cNvGrpSpPr/>
+        <p:nvPr/>
+      </p:nvGrpSpPr>
+      <p:grpSpPr>
+        <a:xfrm>
+          <a:off x="0" y="0"/>
+          <a:ext cx="0" cy="0"/>
+          <a:chOff x="0" y="0"/>
+          <a:chExt cx="0" cy="0"/>
+        </a:xfrm>
+      </p:grpSpPr>
+      <p:sp>
+        <p:nvSpPr>
+          <p:cNvPr id="2" name="標題 1">
+            <a:extLst>
+              <a:ext uri="{FF2B5EF4-FFF2-40B4-BE49-F238E27FC236}">
+                <a16:creationId xmlns:a16="http://schemas.microsoft.com/office/drawing/2014/main" id="{9387CC88-554C-2C96-ADDE-E298EF1ABBB6}"/>
+              </a:ext>
+            </a:extLst>
+          </p:cNvPr>
+          <p:cNvSpPr>
+            <a:spLocks noGrp="1"/>
+          </p:cNvSpPr>
+          <p:nvPr>
+            <p:ph type="title"/>
+          </p:nvPr>
+        </p:nvSpPr>
+        <p:spPr/>
+        <p:txBody>
+          <a:bodyPr/>
+          <a:lstStyle/>
+          <a:p>
+            <a:r>
+              <a:rPr lang="ja-JP" altLang="en-US"/>
+              <a:t>網路調查與電話訪問結合</a:t>
+            </a:r>
+            <a:r>
+              <a:rPr lang="en-US" altLang="zh-TW" dirty="0"/>
+              <a:t>（</a:t>
+            </a:r>
+            <a:r>
+              <a:rPr lang="zh-TW" altLang="en-US" dirty="0"/>
+              <a:t>四</a:t>
+            </a:r>
+            <a:r>
+              <a:rPr lang="en-US" altLang="zh-TW" dirty="0"/>
+              <a:t>）</a:t>
+            </a:r>
+            <a:endParaRPr kumimoji="1" lang="zh-TW" altLang="en-US" dirty="0"/>
+          </a:p>
+        </p:txBody>
+      </p:sp>
+      <p:sp>
+        <p:nvSpPr>
+          <p:cNvPr id="3" name="內容版面配置區 2">
+            <a:extLst>
+              <a:ext uri="{FF2B5EF4-FFF2-40B4-BE49-F238E27FC236}">
+                <a16:creationId xmlns:a16="http://schemas.microsoft.com/office/drawing/2014/main" id="{45B18FE7-5730-D4EA-75C6-EA68004792D2}"/>
+              </a:ext>
+            </a:extLst>
+          </p:cNvPr>
+          <p:cNvSpPr>
+            <a:spLocks noGrp="1"/>
+          </p:cNvSpPr>
+          <p:nvPr>
+            <p:ph idx="1"/>
+          </p:nvPr>
+        </p:nvSpPr>
+        <p:spPr/>
+        <p:txBody>
+          <a:bodyPr>
+            <a:normAutofit/>
+          </a:bodyPr>
+          <a:lstStyle/>
+          <a:p>
+            <a:r>
+              <a:rPr kumimoji="1" lang="zh-TW" altLang="en-US" sz="2000" dirty="0"/>
+              <a:t>假設你的網路調查發現「</a:t>
+            </a:r>
+            <a:r>
+              <a:rPr kumimoji="1" lang="en-US" altLang="zh-TW" sz="2000" dirty="0"/>
+              <a:t>20-29 </a:t>
+            </a:r>
+            <a:r>
+              <a:rPr kumimoji="1" lang="zh-TW" altLang="en-US" sz="2000" dirty="0"/>
+              <a:t>歲、每天上網 </a:t>
+            </a:r>
+            <a:r>
+              <a:rPr kumimoji="1" lang="en-US" altLang="zh-TW" sz="2000" dirty="0"/>
+              <a:t>5 </a:t>
+            </a:r>
+            <a:r>
+              <a:rPr kumimoji="1" lang="zh-TW" altLang="en-US" sz="2000" dirty="0"/>
+              <a:t>小時以上」的人滿意台北市長的程度極高，且這群人在你的問卷中佔了 </a:t>
+            </a:r>
+            <a:r>
+              <a:rPr kumimoji="1" lang="en-US" altLang="zh-TW" sz="2000" dirty="0"/>
+              <a:t>80%</a:t>
+            </a:r>
+            <a:r>
+              <a:rPr kumimoji="1" lang="zh-TW" altLang="en-US" sz="2000" dirty="0"/>
+              <a:t>。</a:t>
+            </a:r>
+          </a:p>
+          <a:p>
+            <a:endParaRPr kumimoji="1" lang="zh-TW" altLang="en-US" sz="2000" dirty="0"/>
+          </a:p>
+          <a:p>
+            <a:r>
+              <a:rPr kumimoji="1" lang="zh-TW" altLang="en-US" sz="2000" dirty="0"/>
+              <a:t>但是根據「隨機抽樣」的基準樣本顯示，這群人在真實社會中其實只佔 </a:t>
+            </a:r>
+            <a:r>
+              <a:rPr kumimoji="1" lang="en-US" altLang="zh-TW" sz="2000" dirty="0"/>
+              <a:t>20%</a:t>
+            </a:r>
+            <a:r>
+              <a:rPr kumimoji="1" lang="zh-TW" altLang="en-US" sz="2000" dirty="0"/>
+              <a:t>。</a:t>
+            </a:r>
+          </a:p>
+          <a:p>
+            <a:endParaRPr kumimoji="1" lang="zh-TW" altLang="en-US" sz="2000" dirty="0"/>
+          </a:p>
+          <a:p>
+            <a:r>
+              <a:rPr kumimoji="1" lang="en" altLang="zh-TW" sz="2000" dirty="0"/>
+              <a:t>PSA </a:t>
+            </a:r>
+            <a:r>
+              <a:rPr kumimoji="1" lang="zh-TW" altLang="en-US" sz="2000" dirty="0"/>
+              <a:t>會算出這群人的傾向分數極高。</a:t>
+            </a:r>
+          </a:p>
+          <a:p>
+            <a:endParaRPr kumimoji="1" lang="zh-TW" altLang="en-US" sz="2000" dirty="0"/>
+          </a:p>
+          <a:p>
+            <a:r>
+              <a:rPr kumimoji="1" lang="zh-TW" altLang="en-US" sz="2000" dirty="0"/>
+              <a:t>模型會自動調低這群人的權重。</a:t>
+            </a:r>
+          </a:p>
+          <a:p>
+            <a:endParaRPr kumimoji="1" lang="zh-TW" altLang="en-US" sz="2000" dirty="0"/>
+          </a:p>
+          <a:p>
+            <a:r>
+              <a:rPr kumimoji="1" lang="zh-TW" altLang="en-US" sz="2000" dirty="0"/>
+              <a:t>最終計算總平均滿意度時，結果會向「真實母體」靠攏。</a:t>
+            </a:r>
+          </a:p>
+        </p:txBody>
+      </p:sp>
+      <p:sp>
+        <p:nvSpPr>
+          <p:cNvPr id="4" name="投影片編號版面配置區 3">
+            <a:extLst>
+              <a:ext uri="{FF2B5EF4-FFF2-40B4-BE49-F238E27FC236}">
+                <a16:creationId xmlns:a16="http://schemas.microsoft.com/office/drawing/2014/main" id="{64988104-9334-8792-9756-F36D63F92C90}"/>
+              </a:ext>
+            </a:extLst>
+          </p:cNvPr>
+          <p:cNvSpPr>
+            <a:spLocks noGrp="1"/>
+          </p:cNvSpPr>
+          <p:nvPr>
+            <p:ph type="sldNum" sz="quarter" idx="12"/>
+          </p:nvPr>
+        </p:nvSpPr>
+        <p:spPr/>
+        <p:txBody>
+          <a:bodyPr/>
+          <a:lstStyle/>
+          <a:p>
+            <a:fld id="{34E21383-B02B-694B-B2AD-A967203CDE86}" type="slidenum">
+              <a:rPr lang="en-US" smtClean="0"/>
+              <a:t>19</a:t>
+            </a:fld>
+            <a:endParaRPr lang="en-US"/>
+          </a:p>
+        </p:txBody>
+      </p:sp>
+    </p:spTree>
+    <p:extLst>
+      <p:ext uri="{BB962C8B-B14F-4D97-AF65-F5344CB8AC3E}">
+        <p14:creationId xmlns:p14="http://schemas.microsoft.com/office/powerpoint/2010/main" val="1666849061"/>
       </p:ext>
     </p:extLst>
   </p:cSld>
@@ -6659,58 +7549,6 @@
             </a:pPr>
             <a:r>
               <a:rPr lang="zh-TW" altLang="en-US" kern="100" dirty="0">
-                <a:latin typeface="Times New Roman" panose="02020603050405020304" pitchFamily="18" charset="0"/>
-                <a:ea typeface="DFKai-SB"/>
-                <a:cs typeface="Times New Roman" panose="02020603050405020304" pitchFamily="18" charset="0"/>
-              </a:rPr>
-              <a:t>網路調查的優點</a:t>
-            </a:r>
-            <a:endParaRPr lang="en-US" altLang="zh-TW" kern="100" dirty="0">
-              <a:latin typeface="Times New Roman" panose="02020603050405020304" pitchFamily="18" charset="0"/>
-              <a:ea typeface="DFKai-SB"/>
-              <a:cs typeface="Times New Roman" panose="02020603050405020304" pitchFamily="18" charset="0"/>
-            </a:endParaRPr>
-          </a:p>
-          <a:p>
-            <a:pPr marL="0" marR="0" indent="304800" algn="just">
-              <a:lnSpc>
-                <a:spcPct val="150000"/>
-              </a:lnSpc>
-              <a:spcBef>
-                <a:spcPts val="0"/>
-              </a:spcBef>
-              <a:spcAft>
-                <a:spcPts val="0"/>
-              </a:spcAft>
-            </a:pPr>
-            <a:r>
-              <a:rPr lang="zh-TW" altLang="en-US" kern="100" dirty="0">
-                <a:latin typeface="Times New Roman" panose="02020603050405020304" pitchFamily="18" charset="0"/>
-                <a:ea typeface="DFKai-SB"/>
-                <a:cs typeface="Times New Roman" panose="02020603050405020304" pitchFamily="18" charset="0"/>
-              </a:rPr>
-              <a:t>網路調查的問題</a:t>
-            </a:r>
-            <a:endParaRPr lang="en-US" altLang="zh-TW" kern="100" dirty="0">
-              <a:latin typeface="Times New Roman" panose="02020603050405020304" pitchFamily="18" charset="0"/>
-              <a:ea typeface="DFKai-SB"/>
-              <a:cs typeface="Times New Roman" panose="02020603050405020304" pitchFamily="18" charset="0"/>
-            </a:endParaRPr>
-          </a:p>
-          <a:p>
-            <a:pPr marL="0" marR="0" indent="304800" algn="just">
-              <a:lnSpc>
-                <a:spcPct val="150000"/>
-              </a:lnSpc>
-              <a:spcBef>
-                <a:spcPts val="0"/>
-              </a:spcBef>
-              <a:spcAft>
-                <a:spcPts val="0"/>
-              </a:spcAft>
-            </a:pPr>
-            <a:r>
-              <a:rPr lang="zh-TW" altLang="en-US" kern="100" dirty="0">
                 <a:effectLst/>
                 <a:latin typeface="Times New Roman" panose="02020603050405020304" pitchFamily="18" charset="0"/>
                 <a:ea typeface="DFKai-SB"/>
@@ -6719,13 +7557,12 @@
               <a:t>網路調查的</a:t>
             </a:r>
             <a:r>
-              <a:rPr lang="zh-TW" kern="100" dirty="0">
-                <a:effectLst/>
+              <a:rPr lang="zh-TW" altLang="en-US" kern="100" dirty="0">
                 <a:latin typeface="Times New Roman" panose="02020603050405020304" pitchFamily="18" charset="0"/>
                 <a:ea typeface="DFKai-SB"/>
                 <a:cs typeface="Times New Roman" panose="02020603050405020304" pitchFamily="18" charset="0"/>
               </a:rPr>
-              <a:t>實務</a:t>
+              <a:t>加權</a:t>
             </a:r>
             <a:endParaRPr lang="en-US" altLang="zh-TW" sz="2000" kern="100" dirty="0">
               <a:effectLst/>

--- a/投影片/民意與調查Week4.pptx
+++ b/投影片/民意與調查Week4.pptx
@@ -5,7 +5,7 @@
     <p:sldMasterId id="2147483648" r:id="rId1"/>
   </p:sldMasterIdLst>
   <p:notesMasterIdLst>
-    <p:notesMasterId r:id="rId21"/>
+    <p:notesMasterId r:id="rId27"/>
   </p:notesMasterIdLst>
   <p:sldIdLst>
     <p:sldId id="256" r:id="rId2"/>
@@ -27,6 +27,12 @@
     <p:sldId id="279" r:id="rId18"/>
     <p:sldId id="278" r:id="rId19"/>
     <p:sldId id="280" r:id="rId20"/>
+    <p:sldId id="282" r:id="rId21"/>
+    <p:sldId id="283" r:id="rId22"/>
+    <p:sldId id="285" r:id="rId23"/>
+    <p:sldId id="286" r:id="rId24"/>
+    <p:sldId id="284" r:id="rId25"/>
+    <p:sldId id="281" r:id="rId26"/>
   </p:sldIdLst>
   <p:sldSz cx="12192000" cy="6858000"/>
   <p:notesSz cx="6858000" cy="9144000"/>
@@ -215,7 +221,7 @@
           <a:p>
             <a:fld id="{308549C9-F1F2-A344-9318-AC3AB4654B7E}" type="datetimeFigureOut">
               <a:rPr lang="en-US" smtClean="0"/>
-              <a:t>3/18/26</a:t>
+              <a:t>3/23/26</a:t>
             </a:fld>
             <a:endParaRPr lang="en-US"/>
           </a:p>
@@ -629,7 +635,7 @@
           <a:p>
             <a:fld id="{0ECB731F-7F54-EF4E-BC14-D4454C95FF4D}" type="datetime1">
               <a:rPr lang="en-US" smtClean="0"/>
-              <a:t>3/18/26</a:t>
+              <a:t>3/23/26</a:t>
             </a:fld>
             <a:endParaRPr lang="en-US"/>
           </a:p>
@@ -827,7 +833,7 @@
           <a:p>
             <a:fld id="{5FC0AAEB-F940-CA44-B742-2110711973A7}" type="datetime1">
               <a:rPr lang="en-US" smtClean="0"/>
-              <a:t>3/18/26</a:t>
+              <a:t>3/23/26</a:t>
             </a:fld>
             <a:endParaRPr lang="en-US"/>
           </a:p>
@@ -1035,7 +1041,7 @@
           <a:p>
             <a:fld id="{0C0FC7EA-A73C-4146-9B14-54C11597AA40}" type="datetime1">
               <a:rPr lang="en-US" smtClean="0"/>
-              <a:t>3/18/26</a:t>
+              <a:t>3/23/26</a:t>
             </a:fld>
             <a:endParaRPr lang="en-US"/>
           </a:p>
@@ -1233,7 +1239,7 @@
           <a:p>
             <a:fld id="{24943121-CDD1-174D-9095-06B3974B3CC1}" type="datetime1">
               <a:rPr lang="en-US" smtClean="0"/>
-              <a:t>3/18/26</a:t>
+              <a:t>3/23/26</a:t>
             </a:fld>
             <a:endParaRPr lang="en-US"/>
           </a:p>
@@ -1508,7 +1514,7 @@
           <a:p>
             <a:fld id="{21F2BAF9-EAD3-1641-87AF-ADC71D8222CD}" type="datetime1">
               <a:rPr lang="en-US" smtClean="0"/>
-              <a:t>3/18/26</a:t>
+              <a:t>3/23/26</a:t>
             </a:fld>
             <a:endParaRPr lang="en-US"/>
           </a:p>
@@ -1773,7 +1779,7 @@
           <a:p>
             <a:fld id="{F8F7A49D-4C23-6A49-AF9D-C0E1C1130921}" type="datetime1">
               <a:rPr lang="en-US" smtClean="0"/>
-              <a:t>3/18/26</a:t>
+              <a:t>3/23/26</a:t>
             </a:fld>
             <a:endParaRPr lang="en-US"/>
           </a:p>
@@ -2185,7 +2191,7 @@
           <a:p>
             <a:fld id="{9F516F59-8951-4749-B49C-6C88C0B4B6BD}" type="datetime1">
               <a:rPr lang="en-US" smtClean="0"/>
-              <a:t>3/18/26</a:t>
+              <a:t>3/23/26</a:t>
             </a:fld>
             <a:endParaRPr lang="en-US"/>
           </a:p>
@@ -2326,7 +2332,7 @@
           <a:p>
             <a:fld id="{CA82BBDF-C485-174D-8051-FF3ED3DF33C6}" type="datetime1">
               <a:rPr lang="en-US" smtClean="0"/>
-              <a:t>3/18/26</a:t>
+              <a:t>3/23/26</a:t>
             </a:fld>
             <a:endParaRPr lang="en-US"/>
           </a:p>
@@ -2439,7 +2445,7 @@
           <a:p>
             <a:fld id="{3CA316C8-35EA-C448-A7DB-295F753FB635}" type="datetime1">
               <a:rPr lang="en-US" smtClean="0"/>
-              <a:t>3/18/26</a:t>
+              <a:t>3/23/26</a:t>
             </a:fld>
             <a:endParaRPr lang="en-US"/>
           </a:p>
@@ -2750,7 +2756,7 @@
           <a:p>
             <a:fld id="{3EBA6818-685C-B142-BE10-A6D54A85D7FF}" type="datetime1">
               <a:rPr lang="en-US" smtClean="0"/>
-              <a:t>3/18/26</a:t>
+              <a:t>3/23/26</a:t>
             </a:fld>
             <a:endParaRPr lang="en-US"/>
           </a:p>
@@ -3038,7 +3044,7 @@
           <a:p>
             <a:fld id="{D444D57B-5B66-2F49-AB7C-362DD22B45D8}" type="datetime1">
               <a:rPr lang="en-US" smtClean="0"/>
-              <a:t>3/18/26</a:t>
+              <a:t>3/23/26</a:t>
             </a:fld>
             <a:endParaRPr lang="en-US"/>
           </a:p>
@@ -3279,7 +3285,7 @@
           <a:p>
             <a:fld id="{4025DC53-D744-A54C-8957-51F9F93FF803}" type="datetime1">
               <a:rPr lang="en-US" smtClean="0"/>
-              <a:t>3/18/26</a:t>
+              <a:t>3/23/26</a:t>
             </a:fld>
             <a:endParaRPr lang="en-US"/>
           </a:p>
@@ -6350,7 +6356,7 @@
           <a:p>
             <a:r>
               <a:rPr lang="ja-JP" altLang="en-US"/>
-              <a:t>網路調查與電話訪問結合</a:t>
+              <a:t>入選機率調整法</a:t>
             </a:r>
             <a:r>
               <a:rPr lang="en-US" dirty="0"/>
@@ -6385,7 +6391,9 @@
         </p:nvSpPr>
         <p:spPr/>
         <p:txBody>
-          <a:bodyPr/>
+          <a:bodyPr>
+            <a:normAutofit lnSpcReduction="10000"/>
+          </a:bodyPr>
           <a:lstStyle/>
           <a:p>
             <a:pPr>
@@ -6396,8 +6404,16 @@
               <a:buChar char="q"/>
             </a:pPr>
             <a:r>
-              <a:rPr lang="ja-JP" altLang="en-US" sz="2000"/>
-              <a:t>學者建議電話訪問與網路調查同時進行，並且詢問受訪者一些生活上的問題，用這些題目預測哪些人更容易成為網路調查的受訪者。</a:t>
+              <a:rPr kumimoji="1" lang="zh-TW" altLang="en-US" sz="2000" dirty="0"/>
+              <a:t>「入選機率調整法」（</a:t>
+            </a:r>
+            <a:r>
+              <a:rPr kumimoji="1" lang="en-US" altLang="zh-TW" sz="2000" dirty="0"/>
+              <a:t>Propensity Score Adjustment, PSA</a:t>
+            </a:r>
+            <a:r>
+              <a:rPr kumimoji="1" lang="zh-TW" altLang="en-US" sz="2000" dirty="0"/>
+              <a:t>）是處理非機率樣本（如網路自願調查）偏誤的核心統計技術。</a:t>
             </a:r>
             <a:endParaRPr lang="en-US" altLang="ja-JP" sz="2000" dirty="0"/>
           </a:p>
@@ -6411,7 +6427,21 @@
             </a:pPr>
             <a:r>
               <a:rPr lang="ja-JP" altLang="en-US" sz="2000"/>
-              <a:t>例如：詢問受訪者起床時間、就寢時間、上次是否投票。</a:t>
+              <a:t>學者建議電話訪問與網路調查同時進行，並且詢問受訪者一些生活上的問題，用這些題目預測哪些人更容易成為網路調查的受訪者。</a:t>
+            </a:r>
+            <a:endParaRPr lang="en-US" altLang="ja-JP" sz="2000" dirty="0"/>
+          </a:p>
+          <a:p>
+            <a:pPr>
+              <a:lnSpc>
+                <a:spcPct val="150000"/>
+              </a:lnSpc>
+              <a:buFont typeface="Wingdings" pitchFamily="2" charset="2"/>
+              <a:buChar char="q"/>
+            </a:pPr>
+            <a:r>
+              <a:rPr lang="ja-JP" altLang="en-US" sz="2000"/>
+              <a:t>例如：詢問受訪者起床時間、就寢時間、上次是否投票、是否可以在家上網、以前有沒有接受過訪問等等。</a:t>
             </a:r>
             <a:endParaRPr lang="en-US" altLang="ja-JP" sz="2000" dirty="0"/>
           </a:p>
@@ -6549,7 +6579,7 @@
           <a:p>
             <a:r>
               <a:rPr lang="ja-JP" altLang="en-US"/>
-              <a:t>網路調查與電話訪問結合</a:t>
+              <a:t>入選機率調整法</a:t>
             </a:r>
             <a:r>
               <a:rPr lang="en-US" altLang="zh-TW" dirty="0"/>
@@ -6601,15 +6631,7 @@
                 </a:pPr>
                 <a:r>
                   <a:rPr kumimoji="1" lang="zh-TW" altLang="en-US" sz="2000" dirty="0"/>
-                  <a:t>「入選機率調整法」（</a:t>
-                </a:r>
-                <a:r>
-                  <a:rPr kumimoji="1" lang="en-US" altLang="zh-TW" sz="2000" dirty="0"/>
-                  <a:t>Propensity Score Adjustment, PSA</a:t>
-                </a:r>
-                <a:r>
-                  <a:rPr kumimoji="1" lang="zh-TW" altLang="en-US" sz="2000" dirty="0"/>
-                  <a:t>）是處理非機率樣本（如網路自願調查）偏誤的核心統計技術。</a:t>
+                  <a:t>為了處理非機率樣本（如網路自願調查）偏誤，我們同時進行網路與電話訪問調查。</a:t>
                 </a:r>
                 <a:endParaRPr kumimoji="1" lang="en-US" altLang="zh-TW" sz="2000" dirty="0"/>
               </a:p>
@@ -7054,7 +7076,7 @@
           <a:p>
             <a:r>
               <a:rPr lang="ja-JP" altLang="en-US"/>
-              <a:t>網路調查與電話訪問結合</a:t>
+              <a:t>入選機率調整法</a:t>
             </a:r>
             <a:r>
               <a:rPr lang="en-US" altLang="zh-TW" dirty="0"/>
@@ -7276,7 +7298,7 @@
           <a:p>
             <a:r>
               <a:rPr lang="ja-JP" altLang="en-US"/>
-              <a:t>網路調查與電話訪問結合</a:t>
+              <a:t>入選機率調整法</a:t>
             </a:r>
             <a:r>
               <a:rPr lang="en-US" altLang="zh-TW" dirty="0"/>
@@ -7319,7 +7341,7 @@
           <a:p>
             <a:r>
               <a:rPr kumimoji="1" lang="zh-TW" altLang="en-US" sz="2000" dirty="0"/>
-              <a:t>假設你的網路調查發現「</a:t>
+              <a:t>假設網路調查發現「</a:t>
             </a:r>
             <a:r>
               <a:rPr kumimoji="1" lang="en-US" altLang="zh-TW" sz="2000" dirty="0"/>
@@ -7335,7 +7357,7 @@
             </a:r>
             <a:r>
               <a:rPr kumimoji="1" lang="zh-TW" altLang="en-US" sz="2000" dirty="0"/>
-              <a:t>小時以上」的人滿意台北市長的程度極高，且這群人在你的問卷中佔了 </a:t>
+              <a:t>小時以上」的人滿意台北市長的程度極高，且這群人在問卷中佔了 </a:t>
             </a:r>
             <a:r>
               <a:rPr kumimoji="1" lang="en-US" altLang="zh-TW" sz="2000" dirty="0"/>
@@ -7620,6 +7642,1104 @@
     <p:extLst>
       <p:ext uri="{BB962C8B-B14F-4D97-AF65-F5344CB8AC3E}">
         <p14:creationId xmlns:p14="http://schemas.microsoft.com/office/powerpoint/2010/main" val="3913136485"/>
+      </p:ext>
+    </p:extLst>
+  </p:cSld>
+  <p:clrMapOvr>
+    <a:masterClrMapping/>
+  </p:clrMapOvr>
+</p:sld>
+</file>
+
+<file path=ppt/slides/slide20.xml><?xml version="1.0" encoding="utf-8"?>
+<p:sld xmlns:a="http://schemas.openxmlformats.org/drawingml/2006/main" xmlns:r="http://schemas.openxmlformats.org/officeDocument/2006/relationships" xmlns:p="http://schemas.openxmlformats.org/presentationml/2006/main">
+  <p:cSld>
+    <p:spTree>
+      <p:nvGrpSpPr>
+        <p:cNvPr id="1" name="">
+          <a:extLst>
+            <a:ext uri="{FF2B5EF4-FFF2-40B4-BE49-F238E27FC236}">
+              <a16:creationId xmlns:a16="http://schemas.microsoft.com/office/drawing/2014/main" id="{7ECA122E-5965-FA9D-75FD-B513B52AE0CB}"/>
+            </a:ext>
+          </a:extLst>
+        </p:cNvPr>
+        <p:cNvGrpSpPr/>
+        <p:nvPr/>
+      </p:nvGrpSpPr>
+      <p:grpSpPr>
+        <a:xfrm>
+          <a:off x="0" y="0"/>
+          <a:ext cx="0" cy="0"/>
+          <a:chOff x="0" y="0"/>
+          <a:chExt cx="0" cy="0"/>
+        </a:xfrm>
+      </p:grpSpPr>
+      <p:sp>
+        <p:nvSpPr>
+          <p:cNvPr id="2" name="標題 1">
+            <a:extLst>
+              <a:ext uri="{FF2B5EF4-FFF2-40B4-BE49-F238E27FC236}">
+                <a16:creationId xmlns:a16="http://schemas.microsoft.com/office/drawing/2014/main" id="{00CEF2A7-A3B4-8748-11CD-087DCD7673E2}"/>
+              </a:ext>
+            </a:extLst>
+          </p:cNvPr>
+          <p:cNvSpPr>
+            <a:spLocks noGrp="1"/>
+          </p:cNvSpPr>
+          <p:nvPr>
+            <p:ph type="title"/>
+          </p:nvPr>
+        </p:nvSpPr>
+        <p:spPr/>
+        <p:txBody>
+          <a:bodyPr/>
+          <a:lstStyle/>
+          <a:p>
+            <a:r>
+              <a:rPr lang="ja-JP" altLang="en-US"/>
+              <a:t>混合式調查</a:t>
+            </a:r>
+            <a:r>
+              <a:rPr lang="en-US" altLang="zh-TW" dirty="0"/>
+              <a:t>（</a:t>
+            </a:r>
+            <a:r>
+              <a:rPr lang="zh-TW" altLang="en-US" dirty="0"/>
+              <a:t>一</a:t>
+            </a:r>
+            <a:r>
+              <a:rPr lang="en-US" altLang="zh-TW" dirty="0"/>
+              <a:t>）</a:t>
+            </a:r>
+            <a:endParaRPr kumimoji="1" lang="zh-TW" altLang="en-US" dirty="0"/>
+          </a:p>
+        </p:txBody>
+      </p:sp>
+      <p:sp>
+        <p:nvSpPr>
+          <p:cNvPr id="3" name="內容版面配置區 2">
+            <a:extLst>
+              <a:ext uri="{FF2B5EF4-FFF2-40B4-BE49-F238E27FC236}">
+                <a16:creationId xmlns:a16="http://schemas.microsoft.com/office/drawing/2014/main" id="{C1EA9404-CED0-1FC4-5487-8BC4946AF648}"/>
+              </a:ext>
+            </a:extLst>
+          </p:cNvPr>
+          <p:cNvSpPr>
+            <a:spLocks noGrp="1"/>
+          </p:cNvSpPr>
+          <p:nvPr>
+            <p:ph idx="1"/>
+          </p:nvPr>
+        </p:nvSpPr>
+        <p:spPr/>
+        <p:txBody>
+          <a:bodyPr>
+            <a:normAutofit/>
+          </a:bodyPr>
+          <a:lstStyle/>
+          <a:p>
+            <a:pPr>
+              <a:lnSpc>
+                <a:spcPct val="150000"/>
+              </a:lnSpc>
+            </a:pPr>
+            <a:r>
+              <a:rPr kumimoji="1" lang="zh-TW" altLang="en-US" sz="2000" dirty="0"/>
+              <a:t>為了降低訪問成本，但是收集到一定數量的樣本，並且維持資料的品質，學者提出混合式調查</a:t>
+            </a:r>
+            <a:r>
+              <a:rPr kumimoji="1" lang="en-US" altLang="zh-TW" sz="2000" dirty="0"/>
+              <a:t>(mixed-mode survey)</a:t>
+            </a:r>
+            <a:r>
+              <a:rPr kumimoji="1" lang="zh-TW" altLang="en-US" sz="2000" dirty="0"/>
+              <a:t>。</a:t>
+            </a:r>
+            <a:endParaRPr kumimoji="1" lang="en-US" altLang="zh-TW" sz="2000" dirty="0"/>
+          </a:p>
+          <a:p>
+            <a:pPr>
+              <a:lnSpc>
+                <a:spcPct val="150000"/>
+              </a:lnSpc>
+            </a:pPr>
+            <a:r>
+              <a:rPr kumimoji="1" lang="zh-TW" altLang="en-US" sz="2000" dirty="0"/>
+              <a:t>混合式調查的主要特點是讓受訪者自填</a:t>
+            </a:r>
+            <a:r>
+              <a:rPr kumimoji="1" lang="en-US" altLang="zh-TW" sz="2000" dirty="0"/>
+              <a:t>(self-administered)</a:t>
+            </a:r>
+            <a:r>
+              <a:rPr kumimoji="1" lang="zh-TW" altLang="en-US" sz="2000" dirty="0"/>
+              <a:t>，所以電話訪問與面訪調查可以結合郵寄問卷、網路問卷等等。</a:t>
+            </a:r>
+            <a:endParaRPr kumimoji="1" lang="en-US" altLang="zh-TW" sz="2000" dirty="0"/>
+          </a:p>
+          <a:p>
+            <a:pPr>
+              <a:lnSpc>
+                <a:spcPct val="150000"/>
+              </a:lnSpc>
+            </a:pPr>
+            <a:r>
+              <a:rPr kumimoji="1" lang="zh-TW" altLang="en-US" sz="2000" dirty="0"/>
+              <a:t>可以分為同時進行</a:t>
+            </a:r>
+            <a:r>
+              <a:rPr kumimoji="1" lang="en-US" altLang="zh-TW" sz="2000" dirty="0"/>
+              <a:t>(concurrent)</a:t>
+            </a:r>
+            <a:r>
+              <a:rPr kumimoji="1" lang="zh-TW" altLang="en-US" sz="2000" dirty="0"/>
+              <a:t>以及依序進行</a:t>
+            </a:r>
+            <a:r>
+              <a:rPr kumimoji="1" lang="en-US" altLang="zh-TW" sz="2000" dirty="0"/>
+              <a:t>(sequential)</a:t>
+            </a:r>
+            <a:r>
+              <a:rPr kumimoji="1" lang="zh-TW" altLang="en-US" sz="2000" dirty="0"/>
+              <a:t>兩種。有些「同時進行式」混合調查允許受訪者選擇要用哪一種調查模式。例如受訪者可以選擇電訪或者自填網路問卷，提高受訪者接受調查的意願。不過，要限制某些特徵的受訪者，例如可能沒辦法上網或者沒辦法接電話（例如在國外），他們的選擇權利。</a:t>
+            </a:r>
+            <a:endParaRPr kumimoji="1" lang="en-US" altLang="zh-TW" sz="2000" dirty="0"/>
+          </a:p>
+          <a:p>
+            <a:endParaRPr kumimoji="1" lang="zh-TW" altLang="en-US" sz="2000" dirty="0"/>
+          </a:p>
+        </p:txBody>
+      </p:sp>
+      <p:sp>
+        <p:nvSpPr>
+          <p:cNvPr id="4" name="投影片編號版面配置區 3">
+            <a:extLst>
+              <a:ext uri="{FF2B5EF4-FFF2-40B4-BE49-F238E27FC236}">
+                <a16:creationId xmlns:a16="http://schemas.microsoft.com/office/drawing/2014/main" id="{77330523-6286-D0B3-E9E4-7AB59F7C4AA7}"/>
+              </a:ext>
+            </a:extLst>
+          </p:cNvPr>
+          <p:cNvSpPr>
+            <a:spLocks noGrp="1"/>
+          </p:cNvSpPr>
+          <p:nvPr>
+            <p:ph type="sldNum" sz="quarter" idx="12"/>
+          </p:nvPr>
+        </p:nvSpPr>
+        <p:spPr/>
+        <p:txBody>
+          <a:bodyPr/>
+          <a:lstStyle/>
+          <a:p>
+            <a:fld id="{34E21383-B02B-694B-B2AD-A967203CDE86}" type="slidenum">
+              <a:rPr lang="en-US" smtClean="0"/>
+              <a:t>20</a:t>
+            </a:fld>
+            <a:endParaRPr lang="en-US"/>
+          </a:p>
+        </p:txBody>
+      </p:sp>
+    </p:spTree>
+    <p:extLst>
+      <p:ext uri="{BB962C8B-B14F-4D97-AF65-F5344CB8AC3E}">
+        <p14:creationId xmlns:p14="http://schemas.microsoft.com/office/powerpoint/2010/main" val="2075321502"/>
+      </p:ext>
+    </p:extLst>
+  </p:cSld>
+  <p:clrMapOvr>
+    <a:masterClrMapping/>
+  </p:clrMapOvr>
+</p:sld>
+</file>
+
+<file path=ppt/slides/slide21.xml><?xml version="1.0" encoding="utf-8"?>
+<p:sld xmlns:a="http://schemas.openxmlformats.org/drawingml/2006/main" xmlns:r="http://schemas.openxmlformats.org/officeDocument/2006/relationships" xmlns:p="http://schemas.openxmlformats.org/presentationml/2006/main">
+  <p:cSld>
+    <p:spTree>
+      <p:nvGrpSpPr>
+        <p:cNvPr id="1" name=""/>
+        <p:cNvGrpSpPr/>
+        <p:nvPr/>
+      </p:nvGrpSpPr>
+      <p:grpSpPr>
+        <a:xfrm>
+          <a:off x="0" y="0"/>
+          <a:ext cx="0" cy="0"/>
+          <a:chOff x="0" y="0"/>
+          <a:chExt cx="0" cy="0"/>
+        </a:xfrm>
+      </p:grpSpPr>
+      <p:sp>
+        <p:nvSpPr>
+          <p:cNvPr id="5" name="標題 4">
+            <a:extLst>
+              <a:ext uri="{FF2B5EF4-FFF2-40B4-BE49-F238E27FC236}">
+                <a16:creationId xmlns:a16="http://schemas.microsoft.com/office/drawing/2014/main" id="{33E8A9C4-7ACB-3C55-7D5B-D0873F0A94C2}"/>
+              </a:ext>
+            </a:extLst>
+          </p:cNvPr>
+          <p:cNvSpPr>
+            <a:spLocks noGrp="1"/>
+          </p:cNvSpPr>
+          <p:nvPr>
+            <p:ph type="title"/>
+          </p:nvPr>
+        </p:nvSpPr>
+        <p:spPr/>
+        <p:txBody>
+          <a:bodyPr/>
+          <a:lstStyle/>
+          <a:p>
+            <a:r>
+              <a:rPr kumimoji="1" lang="zh-TW" altLang="en-US" sz="4400" dirty="0"/>
+              <a:t>同時進行</a:t>
+            </a:r>
+            <a:r>
+              <a:rPr kumimoji="1" lang="en-US" altLang="zh-TW" sz="4400" dirty="0"/>
+              <a:t>(concurrent)</a:t>
+            </a:r>
+            <a:r>
+              <a:rPr kumimoji="1" lang="zh-TW" altLang="en-US" sz="4400" dirty="0"/>
+              <a:t>混合式調查</a:t>
+            </a:r>
+            <a:endParaRPr lang="zh-TW" altLang="en-US" dirty="0"/>
+          </a:p>
+        </p:txBody>
+      </p:sp>
+      <p:sp>
+        <p:nvSpPr>
+          <p:cNvPr id="2" name="投影片編號版面配置區 1">
+            <a:extLst>
+              <a:ext uri="{FF2B5EF4-FFF2-40B4-BE49-F238E27FC236}">
+                <a16:creationId xmlns:a16="http://schemas.microsoft.com/office/drawing/2014/main" id="{DA51D1FF-4BBD-B68D-1613-D8AF5298360A}"/>
+              </a:ext>
+            </a:extLst>
+          </p:cNvPr>
+          <p:cNvSpPr>
+            <a:spLocks noGrp="1"/>
+          </p:cNvSpPr>
+          <p:nvPr>
+            <p:ph type="sldNum" sz="quarter" idx="12"/>
+          </p:nvPr>
+        </p:nvSpPr>
+        <p:spPr/>
+        <p:txBody>
+          <a:bodyPr/>
+          <a:lstStyle/>
+          <a:p>
+            <a:fld id="{34E21383-B02B-694B-B2AD-A967203CDE86}" type="slidenum">
+              <a:rPr lang="en-US" smtClean="0"/>
+              <a:t>21</a:t>
+            </a:fld>
+            <a:endParaRPr lang="en-US"/>
+          </a:p>
+        </p:txBody>
+      </p:sp>
+      <p:pic>
+        <p:nvPicPr>
+          <p:cNvPr id="4" name="圖片 3">
+            <a:extLst>
+              <a:ext uri="{FF2B5EF4-FFF2-40B4-BE49-F238E27FC236}">
+                <a16:creationId xmlns:a16="http://schemas.microsoft.com/office/drawing/2014/main" id="{C1E7E73F-BA88-71FE-D867-82A3765918A6}"/>
+              </a:ext>
+            </a:extLst>
+          </p:cNvPr>
+          <p:cNvPicPr>
+            <a:picLocks noChangeAspect="1"/>
+          </p:cNvPicPr>
+          <p:nvPr/>
+        </p:nvPicPr>
+        <p:blipFill>
+          <a:blip r:embed="rId2"/>
+          <a:stretch>
+            <a:fillRect/>
+          </a:stretch>
+        </p:blipFill>
+        <p:spPr>
+          <a:xfrm>
+            <a:off x="1885950" y="1714500"/>
+            <a:ext cx="7772400" cy="3165230"/>
+          </a:xfrm>
+          <a:prstGeom prst="rect">
+            <a:avLst/>
+          </a:prstGeom>
+        </p:spPr>
+      </p:pic>
+      <p:sp>
+        <p:nvSpPr>
+          <p:cNvPr id="7" name="文字方塊 6">
+            <a:extLst>
+              <a:ext uri="{FF2B5EF4-FFF2-40B4-BE49-F238E27FC236}">
+                <a16:creationId xmlns:a16="http://schemas.microsoft.com/office/drawing/2014/main" id="{6A654AAB-9100-E7E3-BAD4-41162A12769A}"/>
+              </a:ext>
+            </a:extLst>
+          </p:cNvPr>
+          <p:cNvSpPr txBox="1"/>
+          <p:nvPr/>
+        </p:nvSpPr>
+        <p:spPr>
+          <a:xfrm>
+            <a:off x="1736862" y="5294874"/>
+            <a:ext cx="7921487" cy="400110"/>
+          </a:xfrm>
+          <a:prstGeom prst="rect">
+            <a:avLst/>
+          </a:prstGeom>
+          <a:noFill/>
+        </p:spPr>
+        <p:txBody>
+          <a:bodyPr wrap="square">
+            <a:spAutoFit/>
+          </a:bodyPr>
+          <a:lstStyle/>
+          <a:p>
+            <a:r>
+              <a:rPr lang="en" altLang="zh-TW" sz="2000" dirty="0">
+                <a:solidFill>
+                  <a:schemeClr val="tx1"/>
+                </a:solidFill>
+              </a:rPr>
+              <a:t>Source: </a:t>
+            </a:r>
+            <a:r>
+              <a:rPr lang="en" altLang="zh-TW" sz="2000" dirty="0" err="1">
+                <a:solidFill>
+                  <a:schemeClr val="tx1"/>
+                </a:solidFill>
+              </a:rPr>
+              <a:t>Biffignandi</a:t>
+            </a:r>
+            <a:r>
+              <a:rPr lang="en-US" altLang="zh-TW" sz="2000" dirty="0">
+                <a:solidFill>
+                  <a:schemeClr val="tx1"/>
+                </a:solidFill>
+              </a:rPr>
+              <a:t> and </a:t>
+            </a:r>
+            <a:r>
+              <a:rPr lang="en" altLang="zh-TW" sz="2000" dirty="0">
+                <a:solidFill>
+                  <a:schemeClr val="tx1"/>
+                </a:solidFill>
+              </a:rPr>
+              <a:t>Bethlehem (2021) Handbook of Web Survey, p. 344</a:t>
+            </a:r>
+            <a:endParaRPr lang="zh-TW" altLang="en-US" sz="2000" dirty="0">
+              <a:solidFill>
+                <a:schemeClr val="tx1"/>
+              </a:solidFill>
+            </a:endParaRPr>
+          </a:p>
+        </p:txBody>
+      </p:sp>
+    </p:spTree>
+    <p:extLst>
+      <p:ext uri="{BB962C8B-B14F-4D97-AF65-F5344CB8AC3E}">
+        <p14:creationId xmlns:p14="http://schemas.microsoft.com/office/powerpoint/2010/main" val="642962622"/>
+      </p:ext>
+    </p:extLst>
+  </p:cSld>
+  <p:clrMapOvr>
+    <a:masterClrMapping/>
+  </p:clrMapOvr>
+</p:sld>
+</file>
+
+<file path=ppt/slides/slide22.xml><?xml version="1.0" encoding="utf-8"?>
+<p:sld xmlns:a="http://schemas.openxmlformats.org/drawingml/2006/main" xmlns:r="http://schemas.openxmlformats.org/officeDocument/2006/relationships" xmlns:p="http://schemas.openxmlformats.org/presentationml/2006/main">
+  <p:cSld>
+    <p:spTree>
+      <p:nvGrpSpPr>
+        <p:cNvPr id="1" name=""/>
+        <p:cNvGrpSpPr/>
+        <p:nvPr/>
+      </p:nvGrpSpPr>
+      <p:grpSpPr>
+        <a:xfrm>
+          <a:off x="0" y="0"/>
+          <a:ext cx="0" cy="0"/>
+          <a:chOff x="0" y="0"/>
+          <a:chExt cx="0" cy="0"/>
+        </a:xfrm>
+      </p:grpSpPr>
+      <p:sp>
+        <p:nvSpPr>
+          <p:cNvPr id="2" name="投影片編號版面配置區 1">
+            <a:extLst>
+              <a:ext uri="{FF2B5EF4-FFF2-40B4-BE49-F238E27FC236}">
+                <a16:creationId xmlns:a16="http://schemas.microsoft.com/office/drawing/2014/main" id="{A0E86C1C-C9CC-7306-F445-3C98D7EADC7F}"/>
+              </a:ext>
+            </a:extLst>
+          </p:cNvPr>
+          <p:cNvSpPr>
+            <a:spLocks noGrp="1"/>
+          </p:cNvSpPr>
+          <p:nvPr>
+            <p:ph type="sldNum" sz="quarter" idx="12"/>
+          </p:nvPr>
+        </p:nvSpPr>
+        <p:spPr/>
+        <p:txBody>
+          <a:bodyPr/>
+          <a:lstStyle/>
+          <a:p>
+            <a:fld id="{34E21383-B02B-694B-B2AD-A967203CDE86}" type="slidenum">
+              <a:rPr lang="en-US" smtClean="0"/>
+              <a:t>22</a:t>
+            </a:fld>
+            <a:endParaRPr lang="en-US"/>
+          </a:p>
+        </p:txBody>
+      </p:sp>
+      <p:pic>
+        <p:nvPicPr>
+          <p:cNvPr id="4" name="圖片 3">
+            <a:extLst>
+              <a:ext uri="{FF2B5EF4-FFF2-40B4-BE49-F238E27FC236}">
+                <a16:creationId xmlns:a16="http://schemas.microsoft.com/office/drawing/2014/main" id="{CCB0FDF4-6ABC-B3DE-9954-3316BF12F1C5}"/>
+              </a:ext>
+            </a:extLst>
+          </p:cNvPr>
+          <p:cNvPicPr>
+            <a:picLocks noChangeAspect="1"/>
+          </p:cNvPicPr>
+          <p:nvPr/>
+        </p:nvPicPr>
+        <p:blipFill>
+          <a:blip r:embed="rId2"/>
+          <a:stretch>
+            <a:fillRect/>
+          </a:stretch>
+        </p:blipFill>
+        <p:spPr>
+          <a:xfrm>
+            <a:off x="1769165" y="516834"/>
+            <a:ext cx="7056783" cy="6341165"/>
+          </a:xfrm>
+          <a:prstGeom prst="rect">
+            <a:avLst/>
+          </a:prstGeom>
+        </p:spPr>
+      </p:pic>
+    </p:spTree>
+    <p:extLst>
+      <p:ext uri="{BB962C8B-B14F-4D97-AF65-F5344CB8AC3E}">
+        <p14:creationId xmlns:p14="http://schemas.microsoft.com/office/powerpoint/2010/main" val="268336046"/>
+      </p:ext>
+    </p:extLst>
+  </p:cSld>
+  <p:clrMapOvr>
+    <a:masterClrMapping/>
+  </p:clrMapOvr>
+</p:sld>
+</file>
+
+<file path=ppt/slides/slide23.xml><?xml version="1.0" encoding="utf-8"?>
+<p:sld xmlns:a="http://schemas.openxmlformats.org/drawingml/2006/main" xmlns:r="http://schemas.openxmlformats.org/officeDocument/2006/relationships" xmlns:p="http://schemas.openxmlformats.org/presentationml/2006/main">
+  <p:cSld>
+    <p:spTree>
+      <p:nvGrpSpPr>
+        <p:cNvPr id="1" name="">
+          <a:extLst>
+            <a:ext uri="{FF2B5EF4-FFF2-40B4-BE49-F238E27FC236}">
+              <a16:creationId xmlns:a16="http://schemas.microsoft.com/office/drawing/2014/main" id="{255AEBBD-5339-E43A-AE0C-9BBC816DEE85}"/>
+            </a:ext>
+          </a:extLst>
+        </p:cNvPr>
+        <p:cNvGrpSpPr/>
+        <p:nvPr/>
+      </p:nvGrpSpPr>
+      <p:grpSpPr>
+        <a:xfrm>
+          <a:off x="0" y="0"/>
+          <a:ext cx="0" cy="0"/>
+          <a:chOff x="0" y="0"/>
+          <a:chExt cx="0" cy="0"/>
+        </a:xfrm>
+      </p:grpSpPr>
+      <p:sp>
+        <p:nvSpPr>
+          <p:cNvPr id="2" name="標題 1">
+            <a:extLst>
+              <a:ext uri="{FF2B5EF4-FFF2-40B4-BE49-F238E27FC236}">
+                <a16:creationId xmlns:a16="http://schemas.microsoft.com/office/drawing/2014/main" id="{CB14C032-FC26-D38F-4787-1446CD4DA376}"/>
+              </a:ext>
+            </a:extLst>
+          </p:cNvPr>
+          <p:cNvSpPr>
+            <a:spLocks noGrp="1"/>
+          </p:cNvSpPr>
+          <p:nvPr>
+            <p:ph type="title"/>
+          </p:nvPr>
+        </p:nvSpPr>
+        <p:spPr/>
+        <p:txBody>
+          <a:bodyPr/>
+          <a:lstStyle/>
+          <a:p>
+            <a:r>
+              <a:rPr lang="ja-JP" altLang="en-US"/>
+              <a:t>混合式調查（二</a:t>
+            </a:r>
+            <a:r>
+              <a:rPr lang="en-US" altLang="zh-TW" dirty="0"/>
+              <a:t>）</a:t>
+            </a:r>
+            <a:endParaRPr kumimoji="1" lang="zh-TW" altLang="en-US" dirty="0"/>
+          </a:p>
+        </p:txBody>
+      </p:sp>
+      <p:sp>
+        <p:nvSpPr>
+          <p:cNvPr id="3" name="內容版面配置區 2">
+            <a:extLst>
+              <a:ext uri="{FF2B5EF4-FFF2-40B4-BE49-F238E27FC236}">
+                <a16:creationId xmlns:a16="http://schemas.microsoft.com/office/drawing/2014/main" id="{6099AEBD-DD6E-B612-911E-4BC4B49F8E32}"/>
+              </a:ext>
+            </a:extLst>
+          </p:cNvPr>
+          <p:cNvSpPr>
+            <a:spLocks noGrp="1"/>
+          </p:cNvSpPr>
+          <p:nvPr>
+            <p:ph idx="1"/>
+          </p:nvPr>
+        </p:nvSpPr>
+        <p:spPr/>
+        <p:txBody>
+          <a:bodyPr>
+            <a:normAutofit/>
+          </a:bodyPr>
+          <a:lstStyle/>
+          <a:p>
+            <a:pPr>
+              <a:lnSpc>
+                <a:spcPct val="150000"/>
+              </a:lnSpc>
+            </a:pPr>
+            <a:r>
+              <a:rPr kumimoji="1" lang="zh-TW" altLang="en-US" sz="2000" dirty="0"/>
+              <a:t>依序進行式混合調查則是先用一種模式接觸受訪者，如果受訪者沒有回應，再改用另一種模式。</a:t>
+            </a:r>
+            <a:endParaRPr kumimoji="1" lang="en-US" altLang="zh-TW" sz="2000" dirty="0"/>
+          </a:p>
+          <a:p>
+            <a:pPr>
+              <a:lnSpc>
+                <a:spcPct val="150000"/>
+              </a:lnSpc>
+            </a:pPr>
+            <a:r>
+              <a:rPr kumimoji="1" lang="zh-TW" altLang="en-US" sz="2000" dirty="0"/>
+              <a:t>如果用成本比較低的調查模式接觸受訪者，例如郵寄問卷給被抽中的加戶，再用面對面模式接觸沒有反應的受訪者，可以控制訪問的成本。</a:t>
+            </a:r>
+            <a:endParaRPr kumimoji="1" lang="en-US" altLang="zh-TW" sz="2000" dirty="0"/>
+          </a:p>
+          <a:p>
+            <a:pPr>
+              <a:lnSpc>
+                <a:spcPct val="150000"/>
+              </a:lnSpc>
+            </a:pPr>
+            <a:r>
+              <a:rPr kumimoji="1" lang="zh-TW" altLang="en-US" sz="2000" dirty="0"/>
+              <a:t>如果用成功率比較高的調查模式接觸受訪者，例如面對面訪問，再郵寄問卷給不在家的受訪者，可以提高訪問成功率。</a:t>
+            </a:r>
+            <a:endParaRPr kumimoji="1" lang="en-US" altLang="zh-TW" sz="2000" dirty="0"/>
+          </a:p>
+          <a:p>
+            <a:pPr>
+              <a:lnSpc>
+                <a:spcPct val="150000"/>
+              </a:lnSpc>
+            </a:pPr>
+            <a:r>
+              <a:rPr kumimoji="1" lang="zh-TW" altLang="en-US" sz="2000"/>
+              <a:t>如果是固定追蹤樣本調查，可以先用面對面訪問，再用電話訪問追蹤。</a:t>
+            </a:r>
+            <a:endParaRPr kumimoji="1" lang="en-US" altLang="zh-TW" sz="2000" dirty="0"/>
+          </a:p>
+          <a:p>
+            <a:pPr>
+              <a:lnSpc>
+                <a:spcPct val="150000"/>
+              </a:lnSpc>
+            </a:pPr>
+            <a:r>
+              <a:rPr kumimoji="1" lang="zh-TW" altLang="en-US" sz="2000" dirty="0">
+                <a:solidFill>
+                  <a:srgbClr val="FF0000"/>
+                </a:solidFill>
+              </a:rPr>
+              <a:t>問題：還有其他的混合方式嗎？</a:t>
+            </a:r>
+            <a:endParaRPr kumimoji="1" lang="en-US" altLang="zh-TW" sz="2000" dirty="0">
+              <a:solidFill>
+                <a:srgbClr val="FF0000"/>
+              </a:solidFill>
+            </a:endParaRPr>
+          </a:p>
+          <a:p>
+            <a:endParaRPr kumimoji="1" lang="zh-TW" altLang="en-US" sz="2000" dirty="0"/>
+          </a:p>
+        </p:txBody>
+      </p:sp>
+      <p:sp>
+        <p:nvSpPr>
+          <p:cNvPr id="4" name="投影片編號版面配置區 3">
+            <a:extLst>
+              <a:ext uri="{FF2B5EF4-FFF2-40B4-BE49-F238E27FC236}">
+                <a16:creationId xmlns:a16="http://schemas.microsoft.com/office/drawing/2014/main" id="{D57706C6-633A-80F1-0099-93B0F911537B}"/>
+              </a:ext>
+            </a:extLst>
+          </p:cNvPr>
+          <p:cNvSpPr>
+            <a:spLocks noGrp="1"/>
+          </p:cNvSpPr>
+          <p:nvPr>
+            <p:ph type="sldNum" sz="quarter" idx="12"/>
+          </p:nvPr>
+        </p:nvSpPr>
+        <p:spPr/>
+        <p:txBody>
+          <a:bodyPr/>
+          <a:lstStyle/>
+          <a:p>
+            <a:fld id="{34E21383-B02B-694B-B2AD-A967203CDE86}" type="slidenum">
+              <a:rPr lang="en-US" smtClean="0"/>
+              <a:t>23</a:t>
+            </a:fld>
+            <a:endParaRPr lang="en-US"/>
+          </a:p>
+        </p:txBody>
+      </p:sp>
+    </p:spTree>
+    <p:extLst>
+      <p:ext uri="{BB962C8B-B14F-4D97-AF65-F5344CB8AC3E}">
+        <p14:creationId xmlns:p14="http://schemas.microsoft.com/office/powerpoint/2010/main" val="1911122506"/>
+      </p:ext>
+    </p:extLst>
+  </p:cSld>
+  <p:clrMapOvr>
+    <a:masterClrMapping/>
+  </p:clrMapOvr>
+</p:sld>
+</file>
+
+<file path=ppt/slides/slide24.xml><?xml version="1.0" encoding="utf-8"?>
+<p:sld xmlns:a="http://schemas.openxmlformats.org/drawingml/2006/main" xmlns:r="http://schemas.openxmlformats.org/officeDocument/2006/relationships" xmlns:p="http://schemas.openxmlformats.org/presentationml/2006/main">
+  <p:cSld>
+    <p:spTree>
+      <p:nvGrpSpPr>
+        <p:cNvPr id="1" name="">
+          <a:extLst>
+            <a:ext uri="{FF2B5EF4-FFF2-40B4-BE49-F238E27FC236}">
+              <a16:creationId xmlns:a16="http://schemas.microsoft.com/office/drawing/2014/main" id="{6F8A4FB4-0EC4-1867-247A-36106B8A0E8E}"/>
+            </a:ext>
+          </a:extLst>
+        </p:cNvPr>
+        <p:cNvGrpSpPr/>
+        <p:nvPr/>
+      </p:nvGrpSpPr>
+      <p:grpSpPr>
+        <a:xfrm>
+          <a:off x="0" y="0"/>
+          <a:ext cx="0" cy="0"/>
+          <a:chOff x="0" y="0"/>
+          <a:chExt cx="0" cy="0"/>
+        </a:xfrm>
+      </p:grpSpPr>
+      <p:sp>
+        <p:nvSpPr>
+          <p:cNvPr id="5" name="標題 4">
+            <a:extLst>
+              <a:ext uri="{FF2B5EF4-FFF2-40B4-BE49-F238E27FC236}">
+                <a16:creationId xmlns:a16="http://schemas.microsoft.com/office/drawing/2014/main" id="{7354E6CC-8C0B-4BE9-E33D-E8DC952E25BF}"/>
+              </a:ext>
+            </a:extLst>
+          </p:cNvPr>
+          <p:cNvSpPr>
+            <a:spLocks noGrp="1"/>
+          </p:cNvSpPr>
+          <p:nvPr>
+            <p:ph type="title"/>
+          </p:nvPr>
+        </p:nvSpPr>
+        <p:spPr/>
+        <p:txBody>
+          <a:bodyPr/>
+          <a:lstStyle/>
+          <a:p>
+            <a:r>
+              <a:rPr kumimoji="1" lang="zh-TW" altLang="en-US" dirty="0"/>
+              <a:t>依序</a:t>
+            </a:r>
+            <a:r>
+              <a:rPr kumimoji="1" lang="zh-TW" altLang="en-US" sz="4400" dirty="0"/>
+              <a:t>進行</a:t>
+            </a:r>
+            <a:r>
+              <a:rPr kumimoji="1" lang="en-US" altLang="zh-TW" sz="4400" dirty="0"/>
+              <a:t>(</a:t>
+            </a:r>
+            <a:r>
+              <a:rPr kumimoji="1" lang="en-US" altLang="zh-TW" dirty="0"/>
+              <a:t>sequential</a:t>
+            </a:r>
+            <a:r>
+              <a:rPr kumimoji="1" lang="en-US" altLang="zh-TW" sz="4400" dirty="0"/>
+              <a:t>)</a:t>
+            </a:r>
+            <a:r>
+              <a:rPr kumimoji="1" lang="zh-TW" altLang="en-US" sz="4400" dirty="0"/>
+              <a:t>混合式調查</a:t>
+            </a:r>
+            <a:endParaRPr lang="zh-TW" altLang="en-US" dirty="0"/>
+          </a:p>
+        </p:txBody>
+      </p:sp>
+      <p:sp>
+        <p:nvSpPr>
+          <p:cNvPr id="2" name="投影片編號版面配置區 1">
+            <a:extLst>
+              <a:ext uri="{FF2B5EF4-FFF2-40B4-BE49-F238E27FC236}">
+                <a16:creationId xmlns:a16="http://schemas.microsoft.com/office/drawing/2014/main" id="{9A7145AF-F9A3-D54F-256C-D68600F6DEC7}"/>
+              </a:ext>
+            </a:extLst>
+          </p:cNvPr>
+          <p:cNvSpPr>
+            <a:spLocks noGrp="1"/>
+          </p:cNvSpPr>
+          <p:nvPr>
+            <p:ph type="sldNum" sz="quarter" idx="12"/>
+          </p:nvPr>
+        </p:nvSpPr>
+        <p:spPr/>
+        <p:txBody>
+          <a:bodyPr/>
+          <a:lstStyle/>
+          <a:p>
+            <a:fld id="{34E21383-B02B-694B-B2AD-A967203CDE86}" type="slidenum">
+              <a:rPr lang="en-US" smtClean="0"/>
+              <a:t>24</a:t>
+            </a:fld>
+            <a:endParaRPr lang="en-US"/>
+          </a:p>
+        </p:txBody>
+      </p:sp>
+      <p:pic>
+        <p:nvPicPr>
+          <p:cNvPr id="6" name="圖片 5">
+            <a:extLst>
+              <a:ext uri="{FF2B5EF4-FFF2-40B4-BE49-F238E27FC236}">
+                <a16:creationId xmlns:a16="http://schemas.microsoft.com/office/drawing/2014/main" id="{5BB14411-C73F-0729-F115-E53316A1F766}"/>
+              </a:ext>
+            </a:extLst>
+          </p:cNvPr>
+          <p:cNvPicPr>
+            <a:picLocks noChangeAspect="1"/>
+          </p:cNvPicPr>
+          <p:nvPr/>
+        </p:nvPicPr>
+        <p:blipFill>
+          <a:blip r:embed="rId2"/>
+          <a:stretch>
+            <a:fillRect/>
+          </a:stretch>
+        </p:blipFill>
+        <p:spPr>
+          <a:xfrm>
+            <a:off x="2028411" y="2124213"/>
+            <a:ext cx="7772400" cy="3527380"/>
+          </a:xfrm>
+          <a:prstGeom prst="rect">
+            <a:avLst/>
+          </a:prstGeom>
+        </p:spPr>
+      </p:pic>
+      <p:sp>
+        <p:nvSpPr>
+          <p:cNvPr id="8" name="文字方塊 7">
+            <a:extLst>
+              <a:ext uri="{FF2B5EF4-FFF2-40B4-BE49-F238E27FC236}">
+                <a16:creationId xmlns:a16="http://schemas.microsoft.com/office/drawing/2014/main" id="{FA4F262E-F515-D8DE-FAF6-5DEFDFD5B2D9}"/>
+              </a:ext>
+            </a:extLst>
+          </p:cNvPr>
+          <p:cNvSpPr txBox="1"/>
+          <p:nvPr/>
+        </p:nvSpPr>
+        <p:spPr>
+          <a:xfrm>
+            <a:off x="1726922" y="5651593"/>
+            <a:ext cx="8251965" cy="400110"/>
+          </a:xfrm>
+          <a:prstGeom prst="rect">
+            <a:avLst/>
+          </a:prstGeom>
+          <a:noFill/>
+        </p:spPr>
+        <p:txBody>
+          <a:bodyPr wrap="square">
+            <a:spAutoFit/>
+          </a:bodyPr>
+          <a:lstStyle/>
+          <a:p>
+            <a:r>
+              <a:rPr lang="en" altLang="zh-TW" sz="2000" dirty="0">
+                <a:solidFill>
+                  <a:schemeClr val="tx1"/>
+                </a:solidFill>
+              </a:rPr>
+              <a:t>Source: </a:t>
+            </a:r>
+            <a:r>
+              <a:rPr lang="en" altLang="zh-TW" sz="2000" dirty="0" err="1">
+                <a:solidFill>
+                  <a:schemeClr val="tx1"/>
+                </a:solidFill>
+              </a:rPr>
+              <a:t>Biffignandi</a:t>
+            </a:r>
+            <a:r>
+              <a:rPr lang="en-US" altLang="zh-TW" sz="2000" dirty="0">
+                <a:solidFill>
+                  <a:schemeClr val="tx1"/>
+                </a:solidFill>
+              </a:rPr>
+              <a:t> and </a:t>
+            </a:r>
+            <a:r>
+              <a:rPr lang="en" altLang="zh-TW" sz="2000" dirty="0">
+                <a:solidFill>
+                  <a:schemeClr val="tx1"/>
+                </a:solidFill>
+              </a:rPr>
+              <a:t>Bethlehem (2021) Handbook of Web Survey, p. </a:t>
+            </a:r>
+            <a:r>
+              <a:rPr lang="en" altLang="zh-TW" sz="2000" dirty="0"/>
+              <a:t>345</a:t>
+            </a:r>
+            <a:endParaRPr lang="zh-TW" altLang="en-US" sz="2000" dirty="0">
+              <a:solidFill>
+                <a:schemeClr val="tx1"/>
+              </a:solidFill>
+            </a:endParaRPr>
+          </a:p>
+        </p:txBody>
+      </p:sp>
+      <p:pic>
+        <p:nvPicPr>
+          <p:cNvPr id="9" name="圖片 8">
+            <a:extLst>
+              <a:ext uri="{FF2B5EF4-FFF2-40B4-BE49-F238E27FC236}">
+                <a16:creationId xmlns:a16="http://schemas.microsoft.com/office/drawing/2014/main" id="{EDD3D27D-A48B-D422-7BD7-3FF3E2901239}"/>
+              </a:ext>
+            </a:extLst>
+          </p:cNvPr>
+          <p:cNvPicPr>
+            <a:picLocks noChangeAspect="1"/>
+          </p:cNvPicPr>
+          <p:nvPr/>
+        </p:nvPicPr>
+        <p:blipFill>
+          <a:blip r:embed="rId2"/>
+          <a:stretch>
+            <a:fillRect/>
+          </a:stretch>
+        </p:blipFill>
+        <p:spPr>
+          <a:xfrm>
+            <a:off x="2028411" y="2046598"/>
+            <a:ext cx="7772400" cy="3527380"/>
+          </a:xfrm>
+          <a:prstGeom prst="rect">
+            <a:avLst/>
+          </a:prstGeom>
+        </p:spPr>
+      </p:pic>
+    </p:spTree>
+    <p:extLst>
+      <p:ext uri="{BB962C8B-B14F-4D97-AF65-F5344CB8AC3E}">
+        <p14:creationId xmlns:p14="http://schemas.microsoft.com/office/powerpoint/2010/main" val="3193981211"/>
+      </p:ext>
+    </p:extLst>
+  </p:cSld>
+  <p:clrMapOvr>
+    <a:masterClrMapping/>
+  </p:clrMapOvr>
+</p:sld>
+</file>
+
+<file path=ppt/slides/slide25.xml><?xml version="1.0" encoding="utf-8"?>
+<p:sld xmlns:a="http://schemas.openxmlformats.org/drawingml/2006/main" xmlns:r="http://schemas.openxmlformats.org/officeDocument/2006/relationships" xmlns:p="http://schemas.openxmlformats.org/presentationml/2006/main">
+  <p:cSld>
+    <p:spTree>
+      <p:nvGrpSpPr>
+        <p:cNvPr id="1" name=""/>
+        <p:cNvGrpSpPr/>
+        <p:nvPr/>
+      </p:nvGrpSpPr>
+      <p:grpSpPr>
+        <a:xfrm>
+          <a:off x="0" y="0"/>
+          <a:ext cx="0" cy="0"/>
+          <a:chOff x="0" y="0"/>
+          <a:chExt cx="0" cy="0"/>
+        </a:xfrm>
+      </p:grpSpPr>
+      <p:sp>
+        <p:nvSpPr>
+          <p:cNvPr id="2" name="標題 1">
+            <a:extLst>
+              <a:ext uri="{FF2B5EF4-FFF2-40B4-BE49-F238E27FC236}">
+                <a16:creationId xmlns:a16="http://schemas.microsoft.com/office/drawing/2014/main" id="{C2788B51-F32E-8A34-0FC4-F4C0663E3CD2}"/>
+              </a:ext>
+            </a:extLst>
+          </p:cNvPr>
+          <p:cNvSpPr>
+            <a:spLocks noGrp="1"/>
+          </p:cNvSpPr>
+          <p:nvPr>
+            <p:ph type="title"/>
+          </p:nvPr>
+        </p:nvSpPr>
+        <p:spPr/>
+        <p:txBody>
+          <a:bodyPr/>
+          <a:lstStyle/>
+          <a:p>
+            <a:r>
+              <a:rPr kumimoji="1" lang="zh-TW" altLang="en-US" dirty="0"/>
+              <a:t>推薦文獻</a:t>
+            </a:r>
+          </a:p>
+        </p:txBody>
+      </p:sp>
+      <p:sp>
+        <p:nvSpPr>
+          <p:cNvPr id="3" name="內容版面配置區 2">
+            <a:extLst>
+              <a:ext uri="{FF2B5EF4-FFF2-40B4-BE49-F238E27FC236}">
+                <a16:creationId xmlns:a16="http://schemas.microsoft.com/office/drawing/2014/main" id="{7DB30E3B-4B36-E992-92C2-61F8D3F0A0C5}"/>
+              </a:ext>
+            </a:extLst>
+          </p:cNvPr>
+          <p:cNvSpPr>
+            <a:spLocks noGrp="1"/>
+          </p:cNvSpPr>
+          <p:nvPr>
+            <p:ph idx="1"/>
+          </p:nvPr>
+        </p:nvSpPr>
+        <p:spPr/>
+        <p:txBody>
+          <a:bodyPr/>
+          <a:lstStyle/>
+          <a:p>
+            <a:r>
+              <a:rPr kumimoji="1" lang="zh-TW" altLang="en-US" sz="2000" dirty="0"/>
+              <a:t>杜素豪、羅婉云、洪永泰，</a:t>
+            </a:r>
+            <a:r>
+              <a:rPr kumimoji="1" lang="en-US" altLang="zh-TW" sz="2000" dirty="0"/>
+              <a:t>2009</a:t>
+            </a:r>
+            <a:r>
+              <a:rPr kumimoji="1" lang="zh-TW" altLang="en-US" sz="2000" dirty="0"/>
+              <a:t>，</a:t>
+            </a:r>
+            <a:r>
+              <a:rPr lang="zh-TW" altLang="zh-TW" sz="2000" dirty="0">
+                <a:effectLst/>
+                <a:ea typeface="Hiragino Mincho Pro W3" panose="02020300000000000000" pitchFamily="18" charset="-128"/>
+                <a:cs typeface="Times New Roman (本文 CS 字型)"/>
+              </a:rPr>
+              <a:t> 〈</a:t>
+            </a:r>
+            <a:r>
+              <a:rPr kumimoji="1" lang="zh-TW" altLang="en-US" sz="2000" dirty="0"/>
+              <a:t>以入選機率調整法修正調查推估偏差的成效評估</a:t>
+            </a:r>
+            <a:r>
+              <a:rPr lang="zh-TW" altLang="zh-TW" sz="2000" dirty="0">
+                <a:effectLst/>
+                <a:ea typeface="Hiragino Mincho Pro W3" panose="02020300000000000000" pitchFamily="18" charset="-128"/>
+                <a:cs typeface="Times New Roman (本文 CS 字型)"/>
+              </a:rPr>
+              <a:t>〉</a:t>
+            </a:r>
+            <a:endParaRPr lang="en-US" altLang="zh-TW" sz="2000" dirty="0">
+              <a:effectLst/>
+              <a:ea typeface="Hiragino Mincho Pro W3" panose="02020300000000000000" pitchFamily="18" charset="-128"/>
+              <a:cs typeface="Times New Roman (本文 CS 字型)"/>
+            </a:endParaRPr>
+          </a:p>
+          <a:p>
+            <a:r>
+              <a:rPr lang="en" altLang="zh-TW" sz="2000" dirty="0">
+                <a:effectLst/>
+              </a:rPr>
+              <a:t>AAPOR 2020, Transitions from Telephone Surveys to Self-Administered and Mixed-Mode Surveys, AAPOR.</a:t>
+            </a:r>
+          </a:p>
+          <a:p>
+            <a:r>
+              <a:rPr lang="en" altLang="zh-TW" sz="2000" dirty="0">
+                <a:effectLst/>
+              </a:rPr>
+              <a:t>Sanders, D., Clarke, H.D., Stewart, M.C., Whiteley, P. 2007. “Does mode matter for modeling political choice: evidence from the British election study.” Polit. Anal. 15, 257–285.</a:t>
+            </a:r>
+          </a:p>
+          <a:p>
+            <a:r>
+              <a:rPr lang="en" altLang="zh-TW" sz="2000" dirty="0">
+                <a:effectLst/>
+              </a:rPr>
+              <a:t>Malhotra, N., Krosnick, J.A. 2007. “The effect of survey mode on inferences about political attitudes and behavior: comparing the 2000 and 2004 ANES to internet surveys with non-probability samples.” Polit. Anal. 15, 286–323.</a:t>
+            </a:r>
+          </a:p>
+          <a:p>
+            <a:endParaRPr kumimoji="1" lang="zh-TW" altLang="en-US" dirty="0"/>
+          </a:p>
+        </p:txBody>
+      </p:sp>
+      <p:sp>
+        <p:nvSpPr>
+          <p:cNvPr id="4" name="投影片編號版面配置區 3">
+            <a:extLst>
+              <a:ext uri="{FF2B5EF4-FFF2-40B4-BE49-F238E27FC236}">
+                <a16:creationId xmlns:a16="http://schemas.microsoft.com/office/drawing/2014/main" id="{B13E2320-A6CE-591D-7B3D-AAA8B0A65653}"/>
+              </a:ext>
+            </a:extLst>
+          </p:cNvPr>
+          <p:cNvSpPr>
+            <a:spLocks noGrp="1"/>
+          </p:cNvSpPr>
+          <p:nvPr>
+            <p:ph type="sldNum" sz="quarter" idx="12"/>
+          </p:nvPr>
+        </p:nvSpPr>
+        <p:spPr/>
+        <p:txBody>
+          <a:bodyPr/>
+          <a:lstStyle/>
+          <a:p>
+            <a:fld id="{34E21383-B02B-694B-B2AD-A967203CDE86}" type="slidenum">
+              <a:rPr lang="en-US" smtClean="0"/>
+              <a:t>25</a:t>
+            </a:fld>
+            <a:endParaRPr lang="en-US"/>
+          </a:p>
+        </p:txBody>
+      </p:sp>
+    </p:spTree>
+    <p:extLst>
+      <p:ext uri="{BB962C8B-B14F-4D97-AF65-F5344CB8AC3E}">
+        <p14:creationId xmlns:p14="http://schemas.microsoft.com/office/powerpoint/2010/main" val="1994321973"/>
       </p:ext>
     </p:extLst>
   </p:cSld>

--- a/投影片/民意與調查Week4.pptx
+++ b/投影片/民意與調查Week4.pptx
@@ -5,34 +5,39 @@
     <p:sldMasterId id="2147483648" r:id="rId1"/>
   </p:sldMasterIdLst>
   <p:notesMasterIdLst>
-    <p:notesMasterId r:id="rId27"/>
+    <p:notesMasterId r:id="rId32"/>
   </p:notesMasterIdLst>
   <p:sldIdLst>
     <p:sldId id="256" r:id="rId2"/>
     <p:sldId id="259" r:id="rId3"/>
     <p:sldId id="260" r:id="rId4"/>
-    <p:sldId id="264" r:id="rId5"/>
-    <p:sldId id="265" r:id="rId6"/>
-    <p:sldId id="266" r:id="rId7"/>
-    <p:sldId id="267" r:id="rId8"/>
-    <p:sldId id="268" r:id="rId9"/>
-    <p:sldId id="269" r:id="rId10"/>
-    <p:sldId id="275" r:id="rId11"/>
-    <p:sldId id="274" r:id="rId12"/>
-    <p:sldId id="270" r:id="rId13"/>
-    <p:sldId id="271" r:id="rId14"/>
-    <p:sldId id="272" r:id="rId15"/>
-    <p:sldId id="273" r:id="rId16"/>
-    <p:sldId id="276" r:id="rId17"/>
-    <p:sldId id="279" r:id="rId18"/>
-    <p:sldId id="278" r:id="rId19"/>
-    <p:sldId id="280" r:id="rId20"/>
-    <p:sldId id="282" r:id="rId21"/>
-    <p:sldId id="283" r:id="rId22"/>
-    <p:sldId id="285" r:id="rId23"/>
-    <p:sldId id="286" r:id="rId24"/>
-    <p:sldId id="284" r:id="rId25"/>
-    <p:sldId id="281" r:id="rId26"/>
+    <p:sldId id="289" r:id="rId5"/>
+    <p:sldId id="291" r:id="rId6"/>
+    <p:sldId id="264" r:id="rId7"/>
+    <p:sldId id="265" r:id="rId8"/>
+    <p:sldId id="266" r:id="rId9"/>
+    <p:sldId id="267" r:id="rId10"/>
+    <p:sldId id="268" r:id="rId11"/>
+    <p:sldId id="269" r:id="rId12"/>
+    <p:sldId id="275" r:id="rId13"/>
+    <p:sldId id="274" r:id="rId14"/>
+    <p:sldId id="270" r:id="rId15"/>
+    <p:sldId id="271" r:id="rId16"/>
+    <p:sldId id="272" r:id="rId17"/>
+    <p:sldId id="273" r:id="rId18"/>
+    <p:sldId id="276" r:id="rId19"/>
+    <p:sldId id="279" r:id="rId20"/>
+    <p:sldId id="278" r:id="rId21"/>
+    <p:sldId id="280" r:id="rId22"/>
+    <p:sldId id="282" r:id="rId23"/>
+    <p:sldId id="283" r:id="rId24"/>
+    <p:sldId id="285" r:id="rId25"/>
+    <p:sldId id="286" r:id="rId26"/>
+    <p:sldId id="284" r:id="rId27"/>
+    <p:sldId id="287" r:id="rId28"/>
+    <p:sldId id="288" r:id="rId29"/>
+    <p:sldId id="290" r:id="rId30"/>
+    <p:sldId id="281" r:id="rId31"/>
   </p:sldIdLst>
   <p:sldSz cx="12192000" cy="6858000"/>
   <p:notesSz cx="6858000" cy="9144000"/>
@@ -3825,6 +3830,457 @@
           <a:p>
             <a:r>
               <a:rPr lang="ja-JP" altLang="en-US"/>
+              <a:t>網路調查的非機率抽樣</a:t>
+            </a:r>
+            <a:endParaRPr lang="en-US" dirty="0"/>
+          </a:p>
+        </p:txBody>
+      </p:sp>
+      <p:sp>
+        <p:nvSpPr>
+          <p:cNvPr id="3" name="Content Placeholder 2">
+            <a:extLst>
+              <a:ext uri="{FF2B5EF4-FFF2-40B4-BE49-F238E27FC236}">
+                <a16:creationId xmlns:a16="http://schemas.microsoft.com/office/drawing/2014/main" id="{4F08E529-29DD-AB2C-94BF-694DBD41AB6D}"/>
+              </a:ext>
+            </a:extLst>
+          </p:cNvPr>
+          <p:cNvSpPr>
+            <a:spLocks noGrp="1"/>
+          </p:cNvSpPr>
+          <p:nvPr>
+            <p:ph idx="1"/>
+          </p:nvPr>
+        </p:nvSpPr>
+        <p:spPr/>
+        <p:txBody>
+          <a:bodyPr>
+            <a:normAutofit fontScale="85000" lnSpcReduction="10000"/>
+          </a:bodyPr>
+          <a:lstStyle/>
+          <a:p>
+            <a:pPr>
+              <a:lnSpc>
+                <a:spcPct val="150000"/>
+              </a:lnSpc>
+              <a:buFont typeface="Wingdings" pitchFamily="2" charset="2"/>
+              <a:buChar char="l"/>
+            </a:pPr>
+            <a:r>
+              <a:rPr lang="ja-JP" altLang="en-US" sz="2000"/>
+              <a:t>自願參與偏差 </a:t>
+            </a:r>
+            <a:r>
+              <a:rPr lang="en-US" altLang="ja-JP" sz="2000" dirty="0"/>
+              <a:t>(Self-Selection Bias)</a:t>
+            </a:r>
+            <a:r>
+              <a:rPr lang="ja-JP" altLang="en-US" sz="2000"/>
+              <a:t>：由對該主題感興趣、有強烈意見，或單純想領取獎勵的人自行決定加入。</a:t>
+            </a:r>
+            <a:endParaRPr lang="en-US" altLang="ja-JP" sz="2000" dirty="0"/>
+          </a:p>
+          <a:p>
+            <a:pPr>
+              <a:lnSpc>
+                <a:spcPct val="150000"/>
+              </a:lnSpc>
+              <a:buFont typeface="Wingdings" pitchFamily="2" charset="2"/>
+              <a:buChar char="l"/>
+            </a:pPr>
+            <a:r>
+              <a:rPr lang="ja-JP" altLang="en-US" sz="2000"/>
+              <a:t>涵蓋誤差 </a:t>
+            </a:r>
+            <a:r>
+              <a:rPr lang="en-US" altLang="ja-JP" sz="2000" dirty="0"/>
+              <a:t>(Coverage Error)</a:t>
+            </a:r>
+            <a:r>
+              <a:rPr lang="ja-JP" altLang="en-US" sz="2000"/>
+              <a:t>：並非所有人都有同等的機會上網或看到調查連結。例如高齡族群、低收入者的上網頻率較低。</a:t>
+            </a:r>
+            <a:endParaRPr lang="en-US" altLang="ja-JP" sz="2000" dirty="0"/>
+          </a:p>
+          <a:p>
+            <a:pPr>
+              <a:lnSpc>
+                <a:spcPct val="150000"/>
+              </a:lnSpc>
+              <a:buFont typeface="Wingdings" pitchFamily="2" charset="2"/>
+              <a:buChar char="l"/>
+            </a:pPr>
+            <a:r>
+              <a:rPr lang="ja-JP" altLang="en-US" sz="2000"/>
+              <a:t>非隨機的「便利性」：研究者通常將連結發布在自己能觸及的社群媒體、論壇或 </a:t>
+            </a:r>
+            <a:r>
+              <a:rPr lang="en-US" altLang="ja-JP" sz="2000" dirty="0"/>
+              <a:t>LINE </a:t>
+            </a:r>
+            <a:r>
+              <a:rPr lang="ja-JP" altLang="en-US" sz="2000"/>
+              <a:t>群組中。受限於研究者的「同溫層」。</a:t>
+            </a:r>
+            <a:endParaRPr lang="en-US" altLang="ja-JP" sz="2000" dirty="0"/>
+          </a:p>
+          <a:p>
+            <a:pPr>
+              <a:lnSpc>
+                <a:spcPct val="150000"/>
+              </a:lnSpc>
+              <a:buFont typeface="Wingdings" pitchFamily="2" charset="2"/>
+              <a:buChar char="l"/>
+            </a:pPr>
+            <a:r>
+              <a:rPr lang="ja-JP" altLang="en-US" sz="2000"/>
+              <a:t>樣本性質難以驗證：</a:t>
+            </a:r>
+          </a:p>
+          <a:p>
+            <a:pPr>
+              <a:lnSpc>
+                <a:spcPct val="150000"/>
+              </a:lnSpc>
+              <a:buFont typeface="Courier New" panose="02070309020205020404" pitchFamily="49" charset="0"/>
+              <a:buChar char="o"/>
+            </a:pPr>
+            <a:r>
+              <a:rPr lang="ja-JP" altLang="en-US" sz="2000"/>
+              <a:t>重複填答： 同一人可能為了獎品多次填寫。</a:t>
+            </a:r>
+          </a:p>
+          <a:p>
+            <a:pPr>
+              <a:lnSpc>
+                <a:spcPct val="150000"/>
+              </a:lnSpc>
+              <a:buFont typeface="Courier New" panose="02070309020205020404" pitchFamily="49" charset="0"/>
+              <a:buChar char="o"/>
+            </a:pPr>
+            <a:r>
+              <a:rPr lang="ja-JP" altLang="en-US" sz="2000"/>
+              <a:t>機器人與無效樣本： </a:t>
+            </a:r>
+            <a:r>
+              <a:rPr lang="en-US" altLang="ja-JP" sz="2000" dirty="0"/>
+              <a:t>AI </a:t>
+            </a:r>
+            <a:r>
+              <a:rPr lang="ja-JP" altLang="en-US" sz="2000"/>
+              <a:t>或自動化程式可能產生大量垃圾數據。</a:t>
+            </a:r>
+          </a:p>
+          <a:p>
+            <a:pPr>
+              <a:lnSpc>
+                <a:spcPct val="150000"/>
+              </a:lnSpc>
+              <a:buFont typeface="Courier New" panose="02070309020205020404" pitchFamily="49" charset="0"/>
+              <a:buChar char="o"/>
+            </a:pPr>
+            <a:r>
+              <a:rPr lang="ja-JP" altLang="en-US" sz="2000"/>
+              <a:t>身分造假： 受訪者可能為了領取獎勵而虛報符合填答問卷條件的年齡或職業。</a:t>
+            </a:r>
+            <a:endParaRPr lang="en-US" altLang="ja-JP" sz="2000" dirty="0"/>
+          </a:p>
+          <a:p>
+            <a:pPr>
+              <a:lnSpc>
+                <a:spcPct val="150000"/>
+              </a:lnSpc>
+              <a:buFont typeface="Wingdings" pitchFamily="2" charset="2"/>
+              <a:buChar char="l"/>
+            </a:pPr>
+            <a:endParaRPr lang="en-US" sz="2000" dirty="0"/>
+          </a:p>
+          <a:p>
+            <a:pPr>
+              <a:buFont typeface="Wingdings" pitchFamily="2" charset="2"/>
+              <a:buChar char="l"/>
+            </a:pPr>
+            <a:endParaRPr lang="en-US" dirty="0"/>
+          </a:p>
+        </p:txBody>
+      </p:sp>
+      <p:sp>
+        <p:nvSpPr>
+          <p:cNvPr id="4" name="Slide Number Placeholder 3">
+            <a:extLst>
+              <a:ext uri="{FF2B5EF4-FFF2-40B4-BE49-F238E27FC236}">
+                <a16:creationId xmlns:a16="http://schemas.microsoft.com/office/drawing/2014/main" id="{C98085D9-FBDD-C940-3F14-8994BAC36532}"/>
+              </a:ext>
+            </a:extLst>
+          </p:cNvPr>
+          <p:cNvSpPr>
+            <a:spLocks noGrp="1"/>
+          </p:cNvSpPr>
+          <p:nvPr>
+            <p:ph type="sldNum" sz="quarter" idx="12"/>
+          </p:nvPr>
+        </p:nvSpPr>
+        <p:spPr/>
+        <p:txBody>
+          <a:bodyPr/>
+          <a:lstStyle/>
+          <a:p>
+            <a:fld id="{34E21383-B02B-694B-B2AD-A967203CDE86}" type="slidenum">
+              <a:rPr lang="en-US" smtClean="0"/>
+              <a:t>10</a:t>
+            </a:fld>
+            <a:endParaRPr lang="en-US"/>
+          </a:p>
+        </p:txBody>
+      </p:sp>
+    </p:spTree>
+    <p:extLst>
+      <p:ext uri="{BB962C8B-B14F-4D97-AF65-F5344CB8AC3E}">
+        <p14:creationId xmlns:p14="http://schemas.microsoft.com/office/powerpoint/2010/main" val="1700727804"/>
+      </p:ext>
+    </p:extLst>
+  </p:cSld>
+  <p:clrMapOvr>
+    <a:masterClrMapping/>
+  </p:clrMapOvr>
+</p:sld>
+</file>
+
+<file path=ppt/slides/slide11.xml><?xml version="1.0" encoding="utf-8"?>
+<p:sld xmlns:a="http://schemas.openxmlformats.org/drawingml/2006/main" xmlns:r="http://schemas.openxmlformats.org/officeDocument/2006/relationships" xmlns:p="http://schemas.openxmlformats.org/presentationml/2006/main">
+  <p:cSld>
+    <p:spTree>
+      <p:nvGrpSpPr>
+        <p:cNvPr id="1" name=""/>
+        <p:cNvGrpSpPr/>
+        <p:nvPr/>
+      </p:nvGrpSpPr>
+      <p:grpSpPr>
+        <a:xfrm>
+          <a:off x="0" y="0"/>
+          <a:ext cx="0" cy="0"/>
+          <a:chOff x="0" y="0"/>
+          <a:chExt cx="0" cy="0"/>
+        </a:xfrm>
+      </p:grpSpPr>
+      <p:sp>
+        <p:nvSpPr>
+          <p:cNvPr id="2" name="Title 1">
+            <a:extLst>
+              <a:ext uri="{FF2B5EF4-FFF2-40B4-BE49-F238E27FC236}">
+                <a16:creationId xmlns:a16="http://schemas.microsoft.com/office/drawing/2014/main" id="{ED266BC7-D370-DB3B-3586-0BB7D3212D0F}"/>
+              </a:ext>
+            </a:extLst>
+          </p:cNvPr>
+          <p:cNvSpPr>
+            <a:spLocks noGrp="1"/>
+          </p:cNvSpPr>
+          <p:nvPr>
+            <p:ph type="title"/>
+          </p:nvPr>
+        </p:nvSpPr>
+        <p:spPr/>
+        <p:txBody>
+          <a:bodyPr/>
+          <a:lstStyle/>
+          <a:p>
+            <a:r>
+              <a:rPr lang="ja-JP" altLang="en-US"/>
+              <a:t>如何修正網路調查的非機率抽樣？（一）</a:t>
+            </a:r>
+            <a:endParaRPr lang="en-US" dirty="0"/>
+          </a:p>
+        </p:txBody>
+      </p:sp>
+      <p:sp>
+        <p:nvSpPr>
+          <p:cNvPr id="3" name="Content Placeholder 2">
+            <a:extLst>
+              <a:ext uri="{FF2B5EF4-FFF2-40B4-BE49-F238E27FC236}">
+                <a16:creationId xmlns:a16="http://schemas.microsoft.com/office/drawing/2014/main" id="{4F08E529-29DD-AB2C-94BF-694DBD41AB6D}"/>
+              </a:ext>
+            </a:extLst>
+          </p:cNvPr>
+          <p:cNvSpPr>
+            <a:spLocks noGrp="1"/>
+          </p:cNvSpPr>
+          <p:nvPr>
+            <p:ph idx="1"/>
+          </p:nvPr>
+        </p:nvSpPr>
+        <p:spPr/>
+        <p:txBody>
+          <a:bodyPr>
+            <a:normAutofit/>
+          </a:bodyPr>
+          <a:lstStyle/>
+          <a:p>
+            <a:pPr>
+              <a:lnSpc>
+                <a:spcPct val="150000"/>
+              </a:lnSpc>
+              <a:buFont typeface="Wingdings" pitchFamily="2" charset="2"/>
+              <a:buChar char="q"/>
+            </a:pPr>
+            <a:r>
+              <a:rPr lang="ja-JP" altLang="en-US" sz="2000"/>
+              <a:t>配額抽樣 </a:t>
+            </a:r>
+            <a:r>
+              <a:rPr lang="en-US" altLang="ja-JP" sz="2000" dirty="0"/>
+              <a:t>(Quota Sampling)</a:t>
+            </a:r>
+            <a:r>
+              <a:rPr lang="ja-JP" altLang="en-US" sz="2000"/>
+              <a:t>： 如果資料庫中有足夠的樣本，可以設定性別、年齡比例，一旦某族群收滿足夠的樣本，就停止發送給受訪者。</a:t>
+            </a:r>
+          </a:p>
+          <a:p>
+            <a:pPr>
+              <a:lnSpc>
+                <a:spcPct val="150000"/>
+              </a:lnSpc>
+              <a:buFont typeface="Wingdings" pitchFamily="2" charset="2"/>
+              <a:buChar char="q"/>
+            </a:pPr>
+            <a:r>
+              <a:rPr lang="ja-JP" altLang="en-US" sz="2000"/>
+              <a:t>加權校正 </a:t>
+            </a:r>
+            <a:r>
+              <a:rPr lang="en-US" altLang="ja-JP" sz="2000" dirty="0"/>
+              <a:t>(Weighting)</a:t>
+            </a:r>
+            <a:r>
+              <a:rPr lang="ja-JP" altLang="en-US" sz="2000"/>
+              <a:t>： 根據人口普查數據，對受訪者進行事後數學調整。</a:t>
+            </a:r>
+            <a:endParaRPr lang="en-US" altLang="ja-JP" sz="2000" dirty="0"/>
+          </a:p>
+          <a:p>
+            <a:pPr>
+              <a:lnSpc>
+                <a:spcPct val="150000"/>
+              </a:lnSpc>
+              <a:buFont typeface="Wingdings" pitchFamily="2" charset="2"/>
+              <a:buChar char="q"/>
+            </a:pPr>
+            <a:endParaRPr lang="en-US" altLang="ja-JP" sz="2000" dirty="0"/>
+          </a:p>
+          <a:p>
+            <a:endParaRPr lang="en-US" altLang="ja-JP" sz="2000" dirty="0"/>
+          </a:p>
+          <a:p>
+            <a:pPr>
+              <a:lnSpc>
+                <a:spcPct val="150000"/>
+              </a:lnSpc>
+              <a:buFont typeface="Wingdings" pitchFamily="2" charset="2"/>
+              <a:buChar char="q"/>
+            </a:pPr>
+            <a:endParaRPr lang="en-US" altLang="ja-JP" sz="2000" dirty="0"/>
+          </a:p>
+          <a:p>
+            <a:pPr>
+              <a:lnSpc>
+                <a:spcPct val="150000"/>
+              </a:lnSpc>
+              <a:buFont typeface="Wingdings" pitchFamily="2" charset="2"/>
+              <a:buChar char="l"/>
+            </a:pPr>
+            <a:endParaRPr lang="en-US" sz="2000" dirty="0"/>
+          </a:p>
+          <a:p>
+            <a:pPr>
+              <a:buFont typeface="Wingdings" pitchFamily="2" charset="2"/>
+              <a:buChar char="l"/>
+            </a:pPr>
+            <a:endParaRPr lang="en-US" dirty="0"/>
+          </a:p>
+        </p:txBody>
+      </p:sp>
+      <p:sp>
+        <p:nvSpPr>
+          <p:cNvPr id="4" name="Slide Number Placeholder 3">
+            <a:extLst>
+              <a:ext uri="{FF2B5EF4-FFF2-40B4-BE49-F238E27FC236}">
+                <a16:creationId xmlns:a16="http://schemas.microsoft.com/office/drawing/2014/main" id="{C98085D9-FBDD-C940-3F14-8994BAC36532}"/>
+              </a:ext>
+            </a:extLst>
+          </p:cNvPr>
+          <p:cNvSpPr>
+            <a:spLocks noGrp="1"/>
+          </p:cNvSpPr>
+          <p:nvPr>
+            <p:ph type="sldNum" sz="quarter" idx="12"/>
+          </p:nvPr>
+        </p:nvSpPr>
+        <p:spPr/>
+        <p:txBody>
+          <a:bodyPr/>
+          <a:lstStyle/>
+          <a:p>
+            <a:fld id="{34E21383-B02B-694B-B2AD-A967203CDE86}" type="slidenum">
+              <a:rPr lang="en-US" smtClean="0"/>
+              <a:t>11</a:t>
+            </a:fld>
+            <a:endParaRPr lang="en-US"/>
+          </a:p>
+        </p:txBody>
+      </p:sp>
+    </p:spTree>
+    <p:extLst>
+      <p:ext uri="{BB962C8B-B14F-4D97-AF65-F5344CB8AC3E}">
+        <p14:creationId xmlns:p14="http://schemas.microsoft.com/office/powerpoint/2010/main" val="3836497003"/>
+      </p:ext>
+    </p:extLst>
+  </p:cSld>
+  <p:clrMapOvr>
+    <a:masterClrMapping/>
+  </p:clrMapOvr>
+</p:sld>
+</file>
+
+<file path=ppt/slides/slide12.xml><?xml version="1.0" encoding="utf-8"?>
+<p:sld xmlns:a="http://schemas.openxmlformats.org/drawingml/2006/main" xmlns:r="http://schemas.openxmlformats.org/officeDocument/2006/relationships" xmlns:p="http://schemas.openxmlformats.org/presentationml/2006/main">
+  <p:cSld>
+    <p:spTree>
+      <p:nvGrpSpPr>
+        <p:cNvPr id="1" name=""/>
+        <p:cNvGrpSpPr/>
+        <p:nvPr/>
+      </p:nvGrpSpPr>
+      <p:grpSpPr>
+        <a:xfrm>
+          <a:off x="0" y="0"/>
+          <a:ext cx="0" cy="0"/>
+          <a:chOff x="0" y="0"/>
+          <a:chExt cx="0" cy="0"/>
+        </a:xfrm>
+      </p:grpSpPr>
+      <p:sp>
+        <p:nvSpPr>
+          <p:cNvPr id="2" name="Title 1">
+            <a:extLst>
+              <a:ext uri="{FF2B5EF4-FFF2-40B4-BE49-F238E27FC236}">
+                <a16:creationId xmlns:a16="http://schemas.microsoft.com/office/drawing/2014/main" id="{ED266BC7-D370-DB3B-3586-0BB7D3212D0F}"/>
+              </a:ext>
+            </a:extLst>
+          </p:cNvPr>
+          <p:cNvSpPr>
+            <a:spLocks noGrp="1"/>
+          </p:cNvSpPr>
+          <p:nvPr>
+            <p:ph type="title"/>
+          </p:nvPr>
+        </p:nvSpPr>
+        <p:spPr/>
+        <p:txBody>
+          <a:bodyPr/>
+          <a:lstStyle/>
+          <a:p>
+            <a:r>
+              <a:rPr lang="ja-JP" altLang="en-US"/>
               <a:t>如何修正網路調查的非機率抽樣？（二）</a:t>
             </a:r>
             <a:endParaRPr lang="en-US" dirty="0"/>
@@ -4171,7 +4627,7 @@
           <a:p>
             <a:fld id="{34E21383-B02B-694B-B2AD-A967203CDE86}" type="slidenum">
               <a:rPr lang="en-US" smtClean="0"/>
-              <a:t>10</a:t>
+              <a:t>12</a:t>
             </a:fld>
             <a:endParaRPr lang="en-US"/>
           </a:p>
@@ -4496,7 +4952,7 @@
 </p:sld>
 </file>
 
-<file path=ppt/slides/slide11.xml><?xml version="1.0" encoding="utf-8"?>
+<file path=ppt/slides/slide13.xml><?xml version="1.0" encoding="utf-8"?>
 <p:sld xmlns:a="http://schemas.openxmlformats.org/drawingml/2006/main" xmlns:r="http://schemas.openxmlformats.org/officeDocument/2006/relationships" xmlns:p="http://schemas.openxmlformats.org/presentationml/2006/main">
   <p:cSld>
     <p:spTree>
@@ -4950,7 +5406,7 @@
           <a:p>
             <a:fld id="{34E21383-B02B-694B-B2AD-A967203CDE86}" type="slidenum">
               <a:rPr lang="en-US" smtClean="0"/>
-              <a:t>11</a:t>
+              <a:t>13</a:t>
             </a:fld>
             <a:endParaRPr lang="en-US"/>
           </a:p>
@@ -4969,7 +5425,7 @@
 </p:sld>
 </file>
 
-<file path=ppt/slides/slide12.xml><?xml version="1.0" encoding="utf-8"?>
+<file path=ppt/slides/slide14.xml><?xml version="1.0" encoding="utf-8"?>
 <p:sld xmlns:a="http://schemas.openxmlformats.org/drawingml/2006/main" xmlns:r="http://schemas.openxmlformats.org/officeDocument/2006/relationships" xmlns:p="http://schemas.openxmlformats.org/presentationml/2006/main">
   <p:cSld>
     <p:spTree>
@@ -5687,7 +6143,7 @@
           <a:p>
             <a:fld id="{34E21383-B02B-694B-B2AD-A967203CDE86}" type="slidenum">
               <a:rPr lang="en-US" smtClean="0"/>
-              <a:t>12</a:t>
+              <a:t>14</a:t>
             </a:fld>
             <a:endParaRPr lang="en-US"/>
           </a:p>
@@ -5697,431 +6153,6 @@
     <p:extLst>
       <p:ext uri="{BB962C8B-B14F-4D97-AF65-F5344CB8AC3E}">
         <p14:creationId xmlns:p14="http://schemas.microsoft.com/office/powerpoint/2010/main" val="1486744652"/>
-      </p:ext>
-    </p:extLst>
-  </p:cSld>
-  <p:clrMapOvr>
-    <a:masterClrMapping/>
-  </p:clrMapOvr>
-</p:sld>
-</file>
-
-<file path=ppt/slides/slide13.xml><?xml version="1.0" encoding="utf-8"?>
-<p:sld xmlns:a="http://schemas.openxmlformats.org/drawingml/2006/main" xmlns:r="http://schemas.openxmlformats.org/officeDocument/2006/relationships" xmlns:p="http://schemas.openxmlformats.org/presentationml/2006/main">
-  <p:cSld>
-    <p:spTree>
-      <p:nvGrpSpPr>
-        <p:cNvPr id="1" name=""/>
-        <p:cNvGrpSpPr/>
-        <p:nvPr/>
-      </p:nvGrpSpPr>
-      <p:grpSpPr>
-        <a:xfrm>
-          <a:off x="0" y="0"/>
-          <a:ext cx="0" cy="0"/>
-          <a:chOff x="0" y="0"/>
-          <a:chExt cx="0" cy="0"/>
-        </a:xfrm>
-      </p:grpSpPr>
-      <p:sp>
-        <p:nvSpPr>
-          <p:cNvPr id="2" name="Title 1">
-            <a:extLst>
-              <a:ext uri="{FF2B5EF4-FFF2-40B4-BE49-F238E27FC236}">
-                <a16:creationId xmlns:a16="http://schemas.microsoft.com/office/drawing/2014/main" id="{DA77E66D-9F36-5B97-5623-156937724516}"/>
-              </a:ext>
-            </a:extLst>
-          </p:cNvPr>
-          <p:cNvSpPr>
-            <a:spLocks noGrp="1"/>
-          </p:cNvSpPr>
-          <p:nvPr>
-            <p:ph type="title"/>
-          </p:nvPr>
-        </p:nvSpPr>
-        <p:spPr/>
-        <p:txBody>
-          <a:bodyPr/>
-          <a:lstStyle/>
-          <a:p>
-            <a:r>
-              <a:rPr lang="ja-JP" altLang="en-US"/>
-              <a:t>網路調查的</a:t>
-            </a:r>
-            <a:r>
-              <a:rPr lang="en-US" dirty="0" err="1"/>
-              <a:t>加權（三</a:t>
-            </a:r>
-            <a:r>
-              <a:rPr lang="en-US" dirty="0"/>
-              <a:t>）</a:t>
-            </a:r>
-          </a:p>
-        </p:txBody>
-      </p:sp>
-      <p:sp>
-        <p:nvSpPr>
-          <p:cNvPr id="3" name="Content Placeholder 2">
-            <a:extLst>
-              <a:ext uri="{FF2B5EF4-FFF2-40B4-BE49-F238E27FC236}">
-                <a16:creationId xmlns:a16="http://schemas.microsoft.com/office/drawing/2014/main" id="{AB16EA0F-9F78-1203-E782-0F8EC7D2F0A9}"/>
-              </a:ext>
-            </a:extLst>
-          </p:cNvPr>
-          <p:cNvSpPr>
-            <a:spLocks noGrp="1"/>
-          </p:cNvSpPr>
-          <p:nvPr>
-            <p:ph idx="1"/>
-          </p:nvPr>
-        </p:nvSpPr>
-        <p:spPr/>
-        <p:txBody>
-          <a:bodyPr>
-            <a:normAutofit/>
-          </a:bodyPr>
-          <a:lstStyle/>
-          <a:p>
-            <a:r>
-              <a:rPr lang="ja-JP" altLang="en-US" sz="2400"/>
-              <a:t>因為觀察到的資料</a:t>
-            </a:r>
-            <a:r>
-              <a:rPr lang="en-US" altLang="ja-JP" sz="2400" dirty="0"/>
-              <a:t>=</a:t>
-            </a:r>
-            <a:r>
-              <a:rPr lang="ja-JP" altLang="en-US" sz="2400"/>
-              <a:t>真實資料</a:t>
-            </a:r>
-            <a:r>
-              <a:rPr lang="en-US" altLang="ja-JP" sz="2400" dirty="0"/>
-              <a:t>×</a:t>
-            </a:r>
-            <a:r>
-              <a:rPr lang="ja-JP" altLang="en-US" sz="2400"/>
-              <a:t>被抽中的機率，所以修正後資料</a:t>
-            </a:r>
-            <a:r>
-              <a:rPr lang="en-US" altLang="ja-JP" sz="2400" dirty="0"/>
-              <a:t>=</a:t>
-            </a:r>
-            <a:r>
-              <a:rPr lang="ja-JP" altLang="en-US" sz="2400"/>
-              <a:t>被抽中的機率</a:t>
-            </a:r>
-            <a:r>
-              <a:rPr lang="en-US" altLang="ja-JP" sz="2400" dirty="0"/>
-              <a:t>/</a:t>
-            </a:r>
-            <a:r>
-              <a:rPr lang="ja-JP" altLang="en-US" sz="2400"/>
-              <a:t>觀察到的資料​，稱為</a:t>
-            </a:r>
-            <a:r>
-              <a:rPr lang="en-US" altLang="ja-JP" sz="2400" dirty="0"/>
-              <a:t>Inversed Probability Weighting (IPW)</a:t>
-            </a:r>
-            <a:r>
-              <a:rPr lang="ja-JP" altLang="en-US" sz="2400"/>
-              <a:t>。</a:t>
-            </a:r>
-            <a:endParaRPr lang="en-US" altLang="ja-JP" sz="2400" dirty="0"/>
-          </a:p>
-          <a:p>
-            <a:r>
-              <a:rPr lang="ja-JP" altLang="en-US" sz="2400"/>
-              <a:t>這一套程序的前提是加入資料以及最後的預測（例如：投票）只依賴於我們觀察到的 𝑋</a:t>
-            </a:r>
-          </a:p>
-          <a:p>
-            <a:r>
-              <a:rPr lang="ja-JP" altLang="en-US" sz="2400"/>
-              <a:t>如果有 </a:t>
-            </a:r>
-            <a:r>
-              <a:rPr lang="en-US" sz="2400" dirty="0"/>
-              <a:t>unobserved trait（</a:t>
-            </a:r>
-            <a:r>
-              <a:rPr lang="ja-JP" altLang="en-US" sz="2400"/>
-              <a:t>例如「隱性政治熱情」）同時影響：</a:t>
-            </a:r>
-          </a:p>
-          <a:p>
-            <a:pPr>
-              <a:buFont typeface="Wingdings" pitchFamily="2" charset="2"/>
-              <a:buChar char="ü"/>
-            </a:pPr>
-            <a:r>
-              <a:rPr lang="ja-JP" altLang="en-US" sz="2400"/>
-              <a:t>上網填問卷</a:t>
-            </a:r>
-          </a:p>
-          <a:p>
-            <a:pPr>
-              <a:buFont typeface="Wingdings" pitchFamily="2" charset="2"/>
-              <a:buChar char="ü"/>
-            </a:pPr>
-            <a:r>
-              <a:rPr lang="ja-JP" altLang="en-US" sz="2400"/>
-              <a:t>投票意向</a:t>
-            </a:r>
-          </a:p>
-          <a:p>
-            <a:r>
-              <a:rPr lang="en-US" sz="2400" dirty="0"/>
-              <a:t>👉 </a:t>
-            </a:r>
-            <a:r>
-              <a:rPr lang="ja-JP" altLang="en-US" sz="2400"/>
-              <a:t>那麼 </a:t>
-            </a:r>
-            <a:r>
-              <a:rPr lang="en-US" sz="2400" dirty="0"/>
-              <a:t>IPW </a:t>
-            </a:r>
-            <a:r>
-              <a:rPr lang="ja-JP" altLang="en-US" sz="2400"/>
-              <a:t>不能完全修正</a:t>
-            </a:r>
-            <a:endParaRPr lang="en-US" sz="2400" dirty="0"/>
-          </a:p>
-        </p:txBody>
-      </p:sp>
-      <p:sp>
-        <p:nvSpPr>
-          <p:cNvPr id="4" name="Slide Number Placeholder 3">
-            <a:extLst>
-              <a:ext uri="{FF2B5EF4-FFF2-40B4-BE49-F238E27FC236}">
-                <a16:creationId xmlns:a16="http://schemas.microsoft.com/office/drawing/2014/main" id="{8B934A1A-6A41-BD1C-EF90-321E7BAE7721}"/>
-              </a:ext>
-            </a:extLst>
-          </p:cNvPr>
-          <p:cNvSpPr>
-            <a:spLocks noGrp="1"/>
-          </p:cNvSpPr>
-          <p:nvPr>
-            <p:ph type="sldNum" sz="quarter" idx="12"/>
-          </p:nvPr>
-        </p:nvSpPr>
-        <p:spPr/>
-        <p:txBody>
-          <a:bodyPr/>
-          <a:lstStyle/>
-          <a:p>
-            <a:fld id="{34E21383-B02B-694B-B2AD-A967203CDE86}" type="slidenum">
-              <a:rPr lang="en-US" smtClean="0"/>
-              <a:t>13</a:t>
-            </a:fld>
-            <a:endParaRPr lang="en-US"/>
-          </a:p>
-        </p:txBody>
-      </p:sp>
-    </p:spTree>
-    <p:extLst>
-      <p:ext uri="{BB962C8B-B14F-4D97-AF65-F5344CB8AC3E}">
-        <p14:creationId xmlns:p14="http://schemas.microsoft.com/office/powerpoint/2010/main" val="3293910327"/>
-      </p:ext>
-    </p:extLst>
-  </p:cSld>
-  <p:clrMapOvr>
-    <a:masterClrMapping/>
-  </p:clrMapOvr>
-</p:sld>
-</file>
-
-<file path=ppt/slides/slide14.xml><?xml version="1.0" encoding="utf-8"?>
-<p:sld xmlns:a="http://schemas.openxmlformats.org/drawingml/2006/main" xmlns:r="http://schemas.openxmlformats.org/officeDocument/2006/relationships" xmlns:p="http://schemas.openxmlformats.org/presentationml/2006/main">
-  <p:cSld>
-    <p:spTree>
-      <p:nvGrpSpPr>
-        <p:cNvPr id="1" name=""/>
-        <p:cNvGrpSpPr/>
-        <p:nvPr/>
-      </p:nvGrpSpPr>
-      <p:grpSpPr>
-        <a:xfrm>
-          <a:off x="0" y="0"/>
-          <a:ext cx="0" cy="0"/>
-          <a:chOff x="0" y="0"/>
-          <a:chExt cx="0" cy="0"/>
-        </a:xfrm>
-      </p:grpSpPr>
-      <p:sp>
-        <p:nvSpPr>
-          <p:cNvPr id="2" name="Title 1">
-            <a:extLst>
-              <a:ext uri="{FF2B5EF4-FFF2-40B4-BE49-F238E27FC236}">
-                <a16:creationId xmlns:a16="http://schemas.microsoft.com/office/drawing/2014/main" id="{CA97296C-20CB-E09A-16CC-99A289B64445}"/>
-              </a:ext>
-            </a:extLst>
-          </p:cNvPr>
-          <p:cNvSpPr>
-            <a:spLocks noGrp="1"/>
-          </p:cNvSpPr>
-          <p:nvPr>
-            <p:ph type="title"/>
-          </p:nvPr>
-        </p:nvSpPr>
-        <p:spPr/>
-        <p:txBody>
-          <a:bodyPr/>
-          <a:lstStyle/>
-          <a:p>
-            <a:r>
-              <a:rPr lang="ja-JP" altLang="en-US"/>
-              <a:t>網路調查的</a:t>
-            </a:r>
-            <a:r>
-              <a:rPr lang="en-US" dirty="0" err="1"/>
-              <a:t>加權（四</a:t>
-            </a:r>
-            <a:r>
-              <a:rPr lang="en-US" dirty="0"/>
-              <a:t>）</a:t>
-            </a:r>
-          </a:p>
-        </p:txBody>
-      </p:sp>
-      <p:sp>
-        <p:nvSpPr>
-          <p:cNvPr id="3" name="Content Placeholder 2">
-            <a:extLst>
-              <a:ext uri="{FF2B5EF4-FFF2-40B4-BE49-F238E27FC236}">
-                <a16:creationId xmlns:a16="http://schemas.microsoft.com/office/drawing/2014/main" id="{503E2529-124E-4C1E-A46F-EA482C25D185}"/>
-              </a:ext>
-            </a:extLst>
-          </p:cNvPr>
-          <p:cNvSpPr>
-            <a:spLocks noGrp="1"/>
-          </p:cNvSpPr>
-          <p:nvPr>
-            <p:ph idx="1"/>
-          </p:nvPr>
-        </p:nvSpPr>
-        <p:spPr/>
-        <p:txBody>
-          <a:bodyPr>
-            <a:normAutofit fontScale="92500" lnSpcReduction="10000"/>
-          </a:bodyPr>
-          <a:lstStyle/>
-          <a:p>
-            <a:r>
-              <a:rPr lang="ja-JP" altLang="en-US"/>
-              <a:t>第一層：電話樣本對母體加權</a:t>
-            </a:r>
-          </a:p>
-          <a:p>
-            <a:r>
-              <a:rPr lang="ja-JP" altLang="en-US"/>
-              <a:t>電話樣本雖然比較接近 </a:t>
-            </a:r>
-            <a:r>
-              <a:rPr lang="en-US" dirty="0"/>
-              <a:t>probability sample，</a:t>
-            </a:r>
-            <a:r>
-              <a:rPr lang="ja-JP" altLang="en-US"/>
-              <a:t>但還是會有：</a:t>
-            </a:r>
-          </a:p>
-          <a:p>
-            <a:pPr marL="514350" indent="-514350">
-              <a:buFont typeface="+mj-lt"/>
-              <a:buAutoNum type="arabicPeriod"/>
-            </a:pPr>
-            <a:r>
-              <a:rPr lang="ja-JP" altLang="en-US"/>
-              <a:t>拒訪</a:t>
-            </a:r>
-          </a:p>
-          <a:p>
-            <a:pPr marL="514350" indent="-514350">
-              <a:buFont typeface="+mj-lt"/>
-              <a:buAutoNum type="arabicPeriod"/>
-            </a:pPr>
-            <a:r>
-              <a:rPr lang="en-US" dirty="0"/>
-              <a:t>frame coverage </a:t>
-            </a:r>
-            <a:r>
-              <a:rPr lang="ja-JP" altLang="en-US"/>
-              <a:t>問題</a:t>
-            </a:r>
-          </a:p>
-          <a:p>
-            <a:pPr marL="514350" indent="-514350">
-              <a:buFont typeface="+mj-lt"/>
-              <a:buAutoNum type="arabicPeriod"/>
-            </a:pPr>
-            <a:r>
-              <a:rPr lang="ja-JP" altLang="en-US"/>
-              <a:t>市話</a:t>
-            </a:r>
-            <a:r>
-              <a:rPr lang="en-US" altLang="ja-JP" dirty="0"/>
-              <a:t>/</a:t>
-            </a:r>
-            <a:r>
-              <a:rPr lang="ja-JP" altLang="en-US"/>
-              <a:t>手機混合抽樣偏誤</a:t>
-            </a:r>
-          </a:p>
-          <a:p>
-            <a:endParaRPr lang="ja-JP" altLang="en-US"/>
-          </a:p>
-          <a:p>
-            <a:r>
-              <a:rPr lang="ja-JP" altLang="en-US"/>
-              <a:t>所以要用母體已知分布（例如年齡、性別、區域、教育）去校準電話樣本。</a:t>
-            </a:r>
-          </a:p>
-          <a:p>
-            <a:r>
-              <a:rPr lang="ja-JP" altLang="en-US"/>
-              <a:t>這時母體資料的作用是：把電話樣本修正成更接近母體的 </a:t>
-            </a:r>
-            <a:r>
-              <a:rPr lang="en-US" dirty="0"/>
-              <a:t>reference sample</a:t>
-            </a:r>
-          </a:p>
-        </p:txBody>
-      </p:sp>
-      <p:sp>
-        <p:nvSpPr>
-          <p:cNvPr id="4" name="Slide Number Placeholder 3">
-            <a:extLst>
-              <a:ext uri="{FF2B5EF4-FFF2-40B4-BE49-F238E27FC236}">
-                <a16:creationId xmlns:a16="http://schemas.microsoft.com/office/drawing/2014/main" id="{911EB2DB-3B3B-5073-A0E6-CC69741A5721}"/>
-              </a:ext>
-            </a:extLst>
-          </p:cNvPr>
-          <p:cNvSpPr>
-            <a:spLocks noGrp="1"/>
-          </p:cNvSpPr>
-          <p:nvPr>
-            <p:ph type="sldNum" sz="quarter" idx="12"/>
-          </p:nvPr>
-        </p:nvSpPr>
-        <p:spPr/>
-        <p:txBody>
-          <a:bodyPr/>
-          <a:lstStyle/>
-          <a:p>
-            <a:fld id="{34E21383-B02B-694B-B2AD-A967203CDE86}" type="slidenum">
-              <a:rPr lang="en-US" smtClean="0"/>
-              <a:t>14</a:t>
-            </a:fld>
-            <a:endParaRPr lang="en-US"/>
-          </a:p>
-        </p:txBody>
-      </p:sp>
-    </p:spTree>
-    <p:extLst>
-      <p:ext uri="{BB962C8B-B14F-4D97-AF65-F5344CB8AC3E}">
-        <p14:creationId xmlns:p14="http://schemas.microsoft.com/office/powerpoint/2010/main" val="3340902583"/>
       </p:ext>
     </p:extLst>
   </p:cSld>
@@ -6153,7 +6184,7 @@
           <p:cNvPr id="2" name="Title 1">
             <a:extLst>
               <a:ext uri="{FF2B5EF4-FFF2-40B4-BE49-F238E27FC236}">
-                <a16:creationId xmlns:a16="http://schemas.microsoft.com/office/drawing/2014/main" id="{CA97296C-20CB-E09A-16CC-99A289B64445}"/>
+                <a16:creationId xmlns:a16="http://schemas.microsoft.com/office/drawing/2014/main" id="{DA77E66D-9F36-5B97-5623-156937724516}"/>
               </a:ext>
             </a:extLst>
           </p:cNvPr>
@@ -6175,7 +6206,7 @@
             </a:r>
             <a:r>
               <a:rPr lang="en-US" dirty="0" err="1"/>
-              <a:t>加權（五</a:t>
+              <a:t>加權（三</a:t>
             </a:r>
             <a:r>
               <a:rPr lang="en-US" dirty="0"/>
@@ -6189,7 +6220,7 @@
           <p:cNvPr id="3" name="Content Placeholder 2">
             <a:extLst>
               <a:ext uri="{FF2B5EF4-FFF2-40B4-BE49-F238E27FC236}">
-                <a16:creationId xmlns:a16="http://schemas.microsoft.com/office/drawing/2014/main" id="{503E2529-124E-4C1E-A46F-EA482C25D185}"/>
+                <a16:creationId xmlns:a16="http://schemas.microsoft.com/office/drawing/2014/main" id="{AB16EA0F-9F78-1203-E782-0F8EC7D2F0A9}"/>
               </a:ext>
             </a:extLst>
           </p:cNvPr>
@@ -6208,63 +6239,109 @@
           <a:lstStyle/>
           <a:p>
             <a:r>
-              <a:rPr lang="ja-JP" altLang="en-US" sz="2000"/>
-              <a:t>第二層：線上樣本對電話</a:t>
-            </a:r>
-            <a:r>
-              <a:rPr lang="en-US" altLang="ja-JP" sz="2000" dirty="0"/>
+              <a:rPr lang="ja-JP" altLang="en-US" sz="2400"/>
+              <a:t>因為觀察到的資料</a:t>
+            </a:r>
+            <a:r>
+              <a:rPr lang="en-US" altLang="ja-JP" sz="2400" dirty="0"/>
+              <a:t>=</a:t>
+            </a:r>
+            <a:r>
+              <a:rPr lang="ja-JP" altLang="en-US" sz="2400"/>
+              <a:t>真實資料</a:t>
+            </a:r>
+            <a:r>
+              <a:rPr lang="en-US" altLang="ja-JP" sz="2400" dirty="0"/>
+              <a:t>×</a:t>
+            </a:r>
+            <a:r>
+              <a:rPr lang="ja-JP" altLang="en-US" sz="2400"/>
+              <a:t>被抽中的機率，所以修正後資料</a:t>
+            </a:r>
+            <a:r>
+              <a:rPr lang="en-US" altLang="ja-JP" sz="2400" dirty="0"/>
+              <a:t>=</a:t>
+            </a:r>
+            <a:r>
+              <a:rPr lang="ja-JP" altLang="en-US" sz="2400"/>
+              <a:t>被抽中的機率</a:t>
+            </a:r>
+            <a:r>
+              <a:rPr lang="en-US" altLang="ja-JP" sz="2400" dirty="0"/>
               <a:t>/</a:t>
             </a:r>
             <a:r>
-              <a:rPr lang="ja-JP" altLang="en-US" sz="2000"/>
-              <a:t>母體加權</a:t>
-            </a:r>
-          </a:p>
-          <a:p>
-            <a:r>
-              <a:rPr lang="ja-JP" altLang="en-US" sz="2000"/>
-              <a:t>線上樣本不是直接從母體抽出來，而是從電話樣本中再篩一次：</a:t>
-            </a:r>
-          </a:p>
-          <a:p>
-            <a:pPr marL="514350" indent="-514350">
-              <a:buFont typeface="+mj-lt"/>
-              <a:buAutoNum type="arabicPeriod"/>
+              <a:rPr lang="ja-JP" altLang="en-US" sz="2400"/>
+              <a:t>觀察到的資料​，稱為</a:t>
+            </a:r>
+            <a:r>
+              <a:rPr lang="en-US" altLang="ja-JP" sz="2400" dirty="0"/>
+              <a:t>Inversed Probability Weighting (IPW)</a:t>
+            </a:r>
+            <a:r>
+              <a:rPr lang="ja-JP" altLang="en-US" sz="2400"/>
+              <a:t>。</a:t>
+            </a:r>
+            <a:endParaRPr lang="en-US" altLang="ja-JP" sz="2400" dirty="0"/>
+          </a:p>
+          <a:p>
+            <a:r>
+              <a:rPr lang="ja-JP" altLang="en-US" sz="2400"/>
+              <a:t>這一套程序的前提是加入資料以及最後的預測（例如：投票）只依賴於我們觀察到的 𝑋</a:t>
+            </a:r>
+          </a:p>
+          <a:p>
+            <a:r>
+              <a:rPr lang="ja-JP" altLang="en-US" sz="2400"/>
+              <a:t>如果有 </a:t>
+            </a:r>
+            <a:r>
+              <a:rPr lang="en-US" sz="2400" dirty="0"/>
+              <a:t>unobserved trait（</a:t>
+            </a:r>
+            <a:r>
+              <a:rPr lang="ja-JP" altLang="en-US" sz="2400"/>
+              <a:t>例如「隱性政治熱情」）同時影響：</a:t>
+            </a:r>
+          </a:p>
+          <a:p>
+            <a:pPr>
+              <a:buFont typeface="Wingdings" pitchFamily="2" charset="2"/>
+              <a:buChar char="ü"/>
             </a:pPr>
             <a:r>
-              <a:rPr lang="ja-JP" altLang="en-US" sz="2000"/>
-              <a:t>願不願意加入 </a:t>
-            </a:r>
-            <a:r>
-              <a:rPr lang="en-US" altLang="ja-JP" sz="2000" dirty="0"/>
-              <a:t>panel</a:t>
-            </a:r>
-          </a:p>
-          <a:p>
-            <a:pPr marL="514350" indent="-514350">
-              <a:buFont typeface="+mj-lt"/>
-              <a:buAutoNum type="arabicPeriod"/>
+              <a:rPr lang="ja-JP" altLang="en-US" sz="2400"/>
+              <a:t>上網填問卷</a:t>
+            </a:r>
+          </a:p>
+          <a:p>
+            <a:pPr>
+              <a:buFont typeface="Wingdings" pitchFamily="2" charset="2"/>
+              <a:buChar char="ü"/>
             </a:pPr>
             <a:r>
-              <a:rPr lang="ja-JP" altLang="en-US" sz="2000"/>
-              <a:t>會不會真的完成線上問卷</a:t>
-            </a:r>
-          </a:p>
-          <a:p>
-            <a:endParaRPr lang="ja-JP" altLang="en-US" sz="2000"/>
-          </a:p>
-          <a:p>
-            <a:r>
-              <a:rPr lang="ja-JP" altLang="en-US" sz="2000"/>
-              <a:t>所以我們用電話樣本估計「誰比較容易上線」，然後再加權。</a:t>
-            </a:r>
-          </a:p>
-          <a:p>
-            <a:r>
-              <a:rPr lang="ja-JP" altLang="en-US" sz="2000"/>
-              <a:t>母體資料校正好電話樣本；再由電話樣本作為橋樑，把線上樣本拉回母體。</a:t>
-            </a:r>
-            <a:endParaRPr lang="en-US" sz="2000" dirty="0"/>
+              <a:rPr lang="ja-JP" altLang="en-US" sz="2400"/>
+              <a:t>投票意向</a:t>
+            </a:r>
+          </a:p>
+          <a:p>
+            <a:r>
+              <a:rPr lang="en-US" sz="2400" dirty="0"/>
+              <a:t>👉 </a:t>
+            </a:r>
+            <a:r>
+              <a:rPr lang="ja-JP" altLang="en-US" sz="2400"/>
+              <a:t>那麼 </a:t>
+            </a:r>
+            <a:r>
+              <a:rPr lang="en-US" sz="2400" dirty="0"/>
+              <a:t>IPW </a:t>
+            </a:r>
+            <a:r>
+              <a:rPr lang="ja-JP" altLang="en-US" sz="2400"/>
+              <a:t>不能完全修正</a:t>
+            </a:r>
+            <a:endParaRPr lang="en-US" sz="2400" dirty="0"/>
           </a:p>
         </p:txBody>
       </p:sp>
@@ -6273,7 +6350,7 @@
           <p:cNvPr id="4" name="Slide Number Placeholder 3">
             <a:extLst>
               <a:ext uri="{FF2B5EF4-FFF2-40B4-BE49-F238E27FC236}">
-                <a16:creationId xmlns:a16="http://schemas.microsoft.com/office/drawing/2014/main" id="{911EB2DB-3B3B-5073-A0E6-CC69741A5721}"/>
+                <a16:creationId xmlns:a16="http://schemas.microsoft.com/office/drawing/2014/main" id="{8B934A1A-6A41-BD1C-EF90-321E7BAE7721}"/>
               </a:ext>
             </a:extLst>
           </p:cNvPr>
@@ -6300,7 +6377,7 @@
     </p:spTree>
     <p:extLst>
       <p:ext uri="{BB962C8B-B14F-4D97-AF65-F5344CB8AC3E}">
-        <p14:creationId xmlns:p14="http://schemas.microsoft.com/office/powerpoint/2010/main" val="1893645266"/>
+        <p14:creationId xmlns:p14="http://schemas.microsoft.com/office/powerpoint/2010/main" val="3293910327"/>
       </p:ext>
     </p:extLst>
   </p:cSld>
@@ -6315,13 +6392,7 @@
   <p:cSld>
     <p:spTree>
       <p:nvGrpSpPr>
-        <p:cNvPr id="1" name="">
-          <a:extLst>
-            <a:ext uri="{FF2B5EF4-FFF2-40B4-BE49-F238E27FC236}">
-              <a16:creationId xmlns:a16="http://schemas.microsoft.com/office/drawing/2014/main" id="{C94E537B-C4AE-0BF8-E9D6-45951B9AF486}"/>
-            </a:ext>
-          </a:extLst>
-        </p:cNvPr>
+        <p:cNvPr id="1" name=""/>
         <p:cNvGrpSpPr/>
         <p:nvPr/>
       </p:nvGrpSpPr>
@@ -6338,7 +6409,7 @@
           <p:cNvPr id="2" name="Title 1">
             <a:extLst>
               <a:ext uri="{FF2B5EF4-FFF2-40B4-BE49-F238E27FC236}">
-                <a16:creationId xmlns:a16="http://schemas.microsoft.com/office/drawing/2014/main" id="{25C1C553-0DB6-FAF8-C31F-2B4753D9E155}"/>
+                <a16:creationId xmlns:a16="http://schemas.microsoft.com/office/drawing/2014/main" id="{CA97296C-20CB-E09A-16CC-99A289B64445}"/>
               </a:ext>
             </a:extLst>
           </p:cNvPr>
@@ -6356,15 +6427,11 @@
           <a:p>
             <a:r>
               <a:rPr lang="ja-JP" altLang="en-US"/>
-              <a:t>入選機率調整法</a:t>
-            </a:r>
-            <a:r>
-              <a:rPr lang="en-US" dirty="0"/>
-              <a:t>（</a:t>
+              <a:t>網路調查的</a:t>
             </a:r>
             <a:r>
               <a:rPr lang="en-US" dirty="0" err="1"/>
-              <a:t>一</a:t>
+              <a:t>加權（四</a:t>
             </a:r>
             <a:r>
               <a:rPr lang="en-US" dirty="0"/>
@@ -6378,7 +6445,7 @@
           <p:cNvPr id="3" name="Content Placeholder 2">
             <a:extLst>
               <a:ext uri="{FF2B5EF4-FFF2-40B4-BE49-F238E27FC236}">
-                <a16:creationId xmlns:a16="http://schemas.microsoft.com/office/drawing/2014/main" id="{A92D7A7D-2D91-0425-975E-AAA6C5AE3342}"/>
+                <a16:creationId xmlns:a16="http://schemas.microsoft.com/office/drawing/2014/main" id="{503E2529-124E-4C1E-A46F-EA482C25D185}"/>
               </a:ext>
             </a:extLst>
           </p:cNvPr>
@@ -6392,108 +6459,89 @@
         <p:spPr/>
         <p:txBody>
           <a:bodyPr>
-            <a:normAutofit lnSpcReduction="10000"/>
+            <a:normAutofit fontScale="92500" lnSpcReduction="10000"/>
           </a:bodyPr>
           <a:lstStyle/>
           <a:p>
-            <a:pPr>
-              <a:lnSpc>
-                <a:spcPct val="150000"/>
-              </a:lnSpc>
-              <a:buFont typeface="Wingdings" pitchFamily="2" charset="2"/>
-              <a:buChar char="q"/>
+            <a:r>
+              <a:rPr lang="ja-JP" altLang="en-US"/>
+              <a:t>第一層：電話樣本對母體加權</a:t>
+            </a:r>
+          </a:p>
+          <a:p>
+            <a:r>
+              <a:rPr lang="ja-JP" altLang="en-US"/>
+              <a:t>電話樣本雖然比較接近 </a:t>
+            </a:r>
+            <a:r>
+              <a:rPr lang="en-US" dirty="0"/>
+              <a:t>probability sample，</a:t>
+            </a:r>
+            <a:r>
+              <a:rPr lang="ja-JP" altLang="en-US"/>
+              <a:t>但還是會有：</a:t>
+            </a:r>
+          </a:p>
+          <a:p>
+            <a:pPr marL="514350" indent="-514350">
+              <a:buFont typeface="+mj-lt"/>
+              <a:buAutoNum type="arabicPeriod"/>
             </a:pPr>
             <a:r>
-              <a:rPr kumimoji="1" lang="zh-TW" altLang="en-US" sz="2000" dirty="0"/>
-              <a:t>「入選機率調整法」（</a:t>
-            </a:r>
-            <a:r>
-              <a:rPr kumimoji="1" lang="en-US" altLang="zh-TW" sz="2000" dirty="0"/>
-              <a:t>Propensity Score Adjustment, PSA</a:t>
-            </a:r>
-            <a:r>
-              <a:rPr kumimoji="1" lang="zh-TW" altLang="en-US" sz="2000" dirty="0"/>
-              <a:t>）是處理非機率樣本（如網路自願調查）偏誤的核心統計技術。</a:t>
-            </a:r>
-            <a:endParaRPr lang="en-US" altLang="ja-JP" sz="2000" dirty="0"/>
-          </a:p>
-          <a:p>
-            <a:pPr>
-              <a:lnSpc>
-                <a:spcPct val="150000"/>
-              </a:lnSpc>
-              <a:buFont typeface="Wingdings" pitchFamily="2" charset="2"/>
-              <a:buChar char="q"/>
+              <a:rPr lang="ja-JP" altLang="en-US"/>
+              <a:t>拒訪</a:t>
+            </a:r>
+          </a:p>
+          <a:p>
+            <a:pPr marL="514350" indent="-514350">
+              <a:buFont typeface="+mj-lt"/>
+              <a:buAutoNum type="arabicPeriod"/>
             </a:pPr>
             <a:r>
-              <a:rPr lang="ja-JP" altLang="en-US" sz="2000"/>
-              <a:t>學者建議電話訪問與網路調查同時進行，並且詢問受訪者一些生活上的問題，用這些題目預測哪些人更容易成為網路調查的受訪者。</a:t>
-            </a:r>
-            <a:endParaRPr lang="en-US" altLang="ja-JP" sz="2000" dirty="0"/>
-          </a:p>
-          <a:p>
-            <a:pPr>
-              <a:lnSpc>
-                <a:spcPct val="150000"/>
-              </a:lnSpc>
-              <a:buFont typeface="Wingdings" pitchFamily="2" charset="2"/>
-              <a:buChar char="q"/>
+              <a:rPr lang="en-US" dirty="0"/>
+              <a:t>frame coverage </a:t>
+            </a:r>
+            <a:r>
+              <a:rPr lang="ja-JP" altLang="en-US"/>
+              <a:t>問題</a:t>
+            </a:r>
+          </a:p>
+          <a:p>
+            <a:pPr marL="514350" indent="-514350">
+              <a:buFont typeface="+mj-lt"/>
+              <a:buAutoNum type="arabicPeriod"/>
             </a:pPr>
             <a:r>
-              <a:rPr lang="ja-JP" altLang="en-US" sz="2000"/>
-              <a:t>例如：詢問受訪者起床時間、就寢時間、上次是否投票、是否可以在家上網、以前有沒有接受過訪問等等。</a:t>
-            </a:r>
-            <a:endParaRPr lang="en-US" altLang="ja-JP" sz="2000" dirty="0"/>
-          </a:p>
-          <a:p>
-            <a:pPr marL="742950" lvl="1" indent="-285750">
-              <a:buFont typeface="Arial" panose="020B0604020202020204" pitchFamily="34" charset="0"/>
-              <a:buChar char="•"/>
-            </a:pPr>
-            <a:r>
-              <a:rPr lang="en-US" sz="2000" dirty="0" err="1"/>
-              <a:t>起床時間：晚起床的人比較可能接觸網路</a:t>
-            </a:r>
-            <a:endParaRPr lang="en-US" sz="2000" dirty="0"/>
-          </a:p>
-          <a:p>
-            <a:pPr marL="742950" lvl="1" indent="-285750">
-              <a:buFont typeface="Arial" panose="020B0604020202020204" pitchFamily="34" charset="0"/>
-              <a:buChar char="•"/>
-            </a:pPr>
-            <a:r>
-              <a:rPr lang="en-US" sz="2000" dirty="0" err="1"/>
-              <a:t>就寢時間：晚睡的人比較可能接觸網路</a:t>
-            </a:r>
-            <a:endParaRPr lang="en-US" sz="2000" dirty="0"/>
-          </a:p>
-          <a:p>
-            <a:pPr marL="742950" lvl="1" indent="-285750">
-              <a:buFont typeface="Arial" panose="020B0604020202020204" pitchFamily="34" charset="0"/>
-              <a:buChar char="•"/>
-            </a:pPr>
-            <a:r>
-              <a:rPr lang="ja-JP" altLang="en-US" sz="2000"/>
-              <a:t>上次是否投票</a:t>
-            </a:r>
-            <a:r>
-              <a:rPr lang="en-US" sz="2000" dirty="0"/>
-              <a:t>：</a:t>
-            </a:r>
-            <a:r>
-              <a:rPr lang="en-US" sz="2000" dirty="0" err="1"/>
-              <a:t>上次投票的人比較可能願意參加網路調查</a:t>
-            </a:r>
-            <a:endParaRPr lang="ja-JP" altLang="en-US" sz="2000"/>
-          </a:p>
-          <a:p>
-            <a:r>
-              <a:rPr lang="ja-JP" altLang="en-US" sz="2000"/>
-              <a:t>合併這兩筆樣本之後，可以用這三個題目預測受訪者成為網路樣本的機率。</a:t>
-            </a:r>
-          </a:p>
-          <a:p>
-            <a:endParaRPr lang="en-US" dirty="0"/>
+              <a:rPr lang="ja-JP" altLang="en-US"/>
+              <a:t>市話</a:t>
+            </a:r>
+            <a:r>
+              <a:rPr lang="en-US" altLang="ja-JP" dirty="0"/>
+              <a:t>/</a:t>
+            </a:r>
+            <a:r>
+              <a:rPr lang="ja-JP" altLang="en-US"/>
+              <a:t>手機混合抽樣偏誤</a:t>
+            </a:r>
+          </a:p>
+          <a:p>
+            <a:endParaRPr lang="ja-JP" altLang="en-US"/>
+          </a:p>
+          <a:p>
+            <a:r>
+              <a:rPr lang="ja-JP" altLang="en-US"/>
+              <a:t>所以要用母體已知分布（例如年齡、性別、區域、教育）去校準電話樣本。</a:t>
+            </a:r>
+          </a:p>
+          <a:p>
+            <a:r>
+              <a:rPr lang="ja-JP" altLang="en-US"/>
+              <a:t>這時母體資料的作用是：把電話樣本修正成更接近母體的 </a:t>
+            </a:r>
+            <a:r>
+              <a:rPr lang="en-US" dirty="0"/>
+              <a:t>reference sample</a:t>
+            </a:r>
           </a:p>
         </p:txBody>
       </p:sp>
@@ -6502,7 +6550,7 @@
           <p:cNvPr id="4" name="Slide Number Placeholder 3">
             <a:extLst>
               <a:ext uri="{FF2B5EF4-FFF2-40B4-BE49-F238E27FC236}">
-                <a16:creationId xmlns:a16="http://schemas.microsoft.com/office/drawing/2014/main" id="{B1649232-4471-01C1-446B-ED966910EFE8}"/>
+                <a16:creationId xmlns:a16="http://schemas.microsoft.com/office/drawing/2014/main" id="{911EB2DB-3B3B-5073-A0E6-CC69741A5721}"/>
               </a:ext>
             </a:extLst>
           </p:cNvPr>
@@ -6529,7 +6577,7 @@
     </p:spTree>
     <p:extLst>
       <p:ext uri="{BB962C8B-B14F-4D97-AF65-F5344CB8AC3E}">
-        <p14:creationId xmlns:p14="http://schemas.microsoft.com/office/powerpoint/2010/main" val="1423686379"/>
+        <p14:creationId xmlns:p14="http://schemas.microsoft.com/office/powerpoint/2010/main" val="3340902583"/>
       </p:ext>
     </p:extLst>
   </p:cSld>
@@ -6558,10 +6606,195 @@
       </p:grpSpPr>
       <p:sp>
         <p:nvSpPr>
-          <p:cNvPr id="2" name="標題 1">
-            <a:extLst>
-              <a:ext uri="{FF2B5EF4-FFF2-40B4-BE49-F238E27FC236}">
-                <a16:creationId xmlns:a16="http://schemas.microsoft.com/office/drawing/2014/main" id="{383EE3C2-DDD8-7A06-09FA-3DA3575D43D0}"/>
+          <p:cNvPr id="2" name="Title 1">
+            <a:extLst>
+              <a:ext uri="{FF2B5EF4-FFF2-40B4-BE49-F238E27FC236}">
+                <a16:creationId xmlns:a16="http://schemas.microsoft.com/office/drawing/2014/main" id="{CA97296C-20CB-E09A-16CC-99A289B64445}"/>
+              </a:ext>
+            </a:extLst>
+          </p:cNvPr>
+          <p:cNvSpPr>
+            <a:spLocks noGrp="1"/>
+          </p:cNvSpPr>
+          <p:nvPr>
+            <p:ph type="title"/>
+          </p:nvPr>
+        </p:nvSpPr>
+        <p:spPr/>
+        <p:txBody>
+          <a:bodyPr/>
+          <a:lstStyle/>
+          <a:p>
+            <a:r>
+              <a:rPr lang="ja-JP" altLang="en-US"/>
+              <a:t>網路調查的</a:t>
+            </a:r>
+            <a:r>
+              <a:rPr lang="en-US" dirty="0" err="1"/>
+              <a:t>加權（五</a:t>
+            </a:r>
+            <a:r>
+              <a:rPr lang="en-US" dirty="0"/>
+              <a:t>）</a:t>
+            </a:r>
+          </a:p>
+        </p:txBody>
+      </p:sp>
+      <p:sp>
+        <p:nvSpPr>
+          <p:cNvPr id="3" name="Content Placeholder 2">
+            <a:extLst>
+              <a:ext uri="{FF2B5EF4-FFF2-40B4-BE49-F238E27FC236}">
+                <a16:creationId xmlns:a16="http://schemas.microsoft.com/office/drawing/2014/main" id="{503E2529-124E-4C1E-A46F-EA482C25D185}"/>
+              </a:ext>
+            </a:extLst>
+          </p:cNvPr>
+          <p:cNvSpPr>
+            <a:spLocks noGrp="1"/>
+          </p:cNvSpPr>
+          <p:nvPr>
+            <p:ph idx="1"/>
+          </p:nvPr>
+        </p:nvSpPr>
+        <p:spPr/>
+        <p:txBody>
+          <a:bodyPr>
+            <a:normAutofit/>
+          </a:bodyPr>
+          <a:lstStyle/>
+          <a:p>
+            <a:r>
+              <a:rPr lang="ja-JP" altLang="en-US" sz="2000"/>
+              <a:t>第二層：線上樣本對電話</a:t>
+            </a:r>
+            <a:r>
+              <a:rPr lang="en-US" altLang="ja-JP" sz="2000" dirty="0"/>
+              <a:t>/</a:t>
+            </a:r>
+            <a:r>
+              <a:rPr lang="ja-JP" altLang="en-US" sz="2000"/>
+              <a:t>母體加權</a:t>
+            </a:r>
+          </a:p>
+          <a:p>
+            <a:r>
+              <a:rPr lang="ja-JP" altLang="en-US" sz="2000"/>
+              <a:t>線上樣本不是直接從母體抽出來，而是從電話樣本中再篩一次：</a:t>
+            </a:r>
+          </a:p>
+          <a:p>
+            <a:pPr marL="514350" indent="-514350">
+              <a:buFont typeface="+mj-lt"/>
+              <a:buAutoNum type="arabicPeriod"/>
+            </a:pPr>
+            <a:r>
+              <a:rPr lang="ja-JP" altLang="en-US" sz="2000"/>
+              <a:t>願不願意加入 </a:t>
+            </a:r>
+            <a:r>
+              <a:rPr lang="en-US" altLang="ja-JP" sz="2000" dirty="0"/>
+              <a:t>panel</a:t>
+            </a:r>
+          </a:p>
+          <a:p>
+            <a:pPr marL="514350" indent="-514350">
+              <a:buFont typeface="+mj-lt"/>
+              <a:buAutoNum type="arabicPeriod"/>
+            </a:pPr>
+            <a:r>
+              <a:rPr lang="ja-JP" altLang="en-US" sz="2000"/>
+              <a:t>會不會真的完成線上問卷</a:t>
+            </a:r>
+          </a:p>
+          <a:p>
+            <a:endParaRPr lang="ja-JP" altLang="en-US" sz="2000"/>
+          </a:p>
+          <a:p>
+            <a:r>
+              <a:rPr lang="ja-JP" altLang="en-US" sz="2000"/>
+              <a:t>所以我們用電話樣本估計「誰比較容易上線」，然後再加權。</a:t>
+            </a:r>
+          </a:p>
+          <a:p>
+            <a:r>
+              <a:rPr lang="ja-JP" altLang="en-US" sz="2000"/>
+              <a:t>母體資料校正好電話樣本；再由電話樣本作為橋樑，把線上樣本拉回母體。</a:t>
+            </a:r>
+            <a:endParaRPr lang="en-US" sz="2000" dirty="0"/>
+          </a:p>
+        </p:txBody>
+      </p:sp>
+      <p:sp>
+        <p:nvSpPr>
+          <p:cNvPr id="4" name="Slide Number Placeholder 3">
+            <a:extLst>
+              <a:ext uri="{FF2B5EF4-FFF2-40B4-BE49-F238E27FC236}">
+                <a16:creationId xmlns:a16="http://schemas.microsoft.com/office/drawing/2014/main" id="{911EB2DB-3B3B-5073-A0E6-CC69741A5721}"/>
+              </a:ext>
+            </a:extLst>
+          </p:cNvPr>
+          <p:cNvSpPr>
+            <a:spLocks noGrp="1"/>
+          </p:cNvSpPr>
+          <p:nvPr>
+            <p:ph type="sldNum" sz="quarter" idx="12"/>
+          </p:nvPr>
+        </p:nvSpPr>
+        <p:spPr/>
+        <p:txBody>
+          <a:bodyPr/>
+          <a:lstStyle/>
+          <a:p>
+            <a:fld id="{34E21383-B02B-694B-B2AD-A967203CDE86}" type="slidenum">
+              <a:rPr lang="en-US" smtClean="0"/>
+              <a:t>17</a:t>
+            </a:fld>
+            <a:endParaRPr lang="en-US"/>
+          </a:p>
+        </p:txBody>
+      </p:sp>
+    </p:spTree>
+    <p:extLst>
+      <p:ext uri="{BB962C8B-B14F-4D97-AF65-F5344CB8AC3E}">
+        <p14:creationId xmlns:p14="http://schemas.microsoft.com/office/powerpoint/2010/main" val="1893645266"/>
+      </p:ext>
+    </p:extLst>
+  </p:cSld>
+  <p:clrMapOvr>
+    <a:masterClrMapping/>
+  </p:clrMapOvr>
+</p:sld>
+</file>
+
+<file path=ppt/slides/slide18.xml><?xml version="1.0" encoding="utf-8"?>
+<p:sld xmlns:a="http://schemas.openxmlformats.org/drawingml/2006/main" xmlns:r="http://schemas.openxmlformats.org/officeDocument/2006/relationships" xmlns:p="http://schemas.openxmlformats.org/presentationml/2006/main">
+  <p:cSld>
+    <p:spTree>
+      <p:nvGrpSpPr>
+        <p:cNvPr id="1" name="">
+          <a:extLst>
+            <a:ext uri="{FF2B5EF4-FFF2-40B4-BE49-F238E27FC236}">
+              <a16:creationId xmlns:a16="http://schemas.microsoft.com/office/drawing/2014/main" id="{C94E537B-C4AE-0BF8-E9D6-45951B9AF486}"/>
+            </a:ext>
+          </a:extLst>
+        </p:cNvPr>
+        <p:cNvGrpSpPr/>
+        <p:nvPr/>
+      </p:nvGrpSpPr>
+      <p:grpSpPr>
+        <a:xfrm>
+          <a:off x="0" y="0"/>
+          <a:ext cx="0" cy="0"/>
+          <a:chOff x="0" y="0"/>
+          <a:chExt cx="0" cy="0"/>
+        </a:xfrm>
+      </p:grpSpPr>
+      <p:sp>
+        <p:nvSpPr>
+          <p:cNvPr id="2" name="Title 1">
+            <a:extLst>
+              <a:ext uri="{FF2B5EF4-FFF2-40B4-BE49-F238E27FC236}">
+                <a16:creationId xmlns:a16="http://schemas.microsoft.com/office/drawing/2014/main" id="{25C1C553-0DB6-FAF8-C31F-2B4753D9E155}"/>
               </a:ext>
             </a:extLst>
           </p:cNvPr>
@@ -6582,6 +6815,229 @@
               <a:t>入選機率調整法</a:t>
             </a:r>
             <a:r>
+              <a:rPr lang="en-US" dirty="0"/>
+              <a:t>（</a:t>
+            </a:r>
+            <a:r>
+              <a:rPr lang="en-US" dirty="0" err="1"/>
+              <a:t>一</a:t>
+            </a:r>
+            <a:r>
+              <a:rPr lang="en-US" dirty="0"/>
+              <a:t>）</a:t>
+            </a:r>
+          </a:p>
+        </p:txBody>
+      </p:sp>
+      <p:sp>
+        <p:nvSpPr>
+          <p:cNvPr id="3" name="Content Placeholder 2">
+            <a:extLst>
+              <a:ext uri="{FF2B5EF4-FFF2-40B4-BE49-F238E27FC236}">
+                <a16:creationId xmlns:a16="http://schemas.microsoft.com/office/drawing/2014/main" id="{A92D7A7D-2D91-0425-975E-AAA6C5AE3342}"/>
+              </a:ext>
+            </a:extLst>
+          </p:cNvPr>
+          <p:cNvSpPr>
+            <a:spLocks noGrp="1"/>
+          </p:cNvSpPr>
+          <p:nvPr>
+            <p:ph idx="1"/>
+          </p:nvPr>
+        </p:nvSpPr>
+        <p:spPr/>
+        <p:txBody>
+          <a:bodyPr>
+            <a:normAutofit lnSpcReduction="10000"/>
+          </a:bodyPr>
+          <a:lstStyle/>
+          <a:p>
+            <a:pPr>
+              <a:lnSpc>
+                <a:spcPct val="150000"/>
+              </a:lnSpc>
+              <a:buFont typeface="Wingdings" pitchFamily="2" charset="2"/>
+              <a:buChar char="q"/>
+            </a:pPr>
+            <a:r>
+              <a:rPr kumimoji="1" lang="zh-TW" altLang="en-US" sz="2000" dirty="0"/>
+              <a:t>「入選機率調整法」（</a:t>
+            </a:r>
+            <a:r>
+              <a:rPr kumimoji="1" lang="en-US" altLang="zh-TW" sz="2000" dirty="0"/>
+              <a:t>Propensity Score Adjustment, PSA</a:t>
+            </a:r>
+            <a:r>
+              <a:rPr kumimoji="1" lang="zh-TW" altLang="en-US" sz="2000" dirty="0"/>
+              <a:t>）是處理非機率樣本（如網路自願調查）偏誤的核心統計技術。</a:t>
+            </a:r>
+            <a:endParaRPr lang="en-US" altLang="ja-JP" sz="2000" dirty="0"/>
+          </a:p>
+          <a:p>
+            <a:pPr>
+              <a:lnSpc>
+                <a:spcPct val="150000"/>
+              </a:lnSpc>
+              <a:buFont typeface="Wingdings" pitchFamily="2" charset="2"/>
+              <a:buChar char="q"/>
+            </a:pPr>
+            <a:r>
+              <a:rPr lang="ja-JP" altLang="en-US" sz="2000"/>
+              <a:t>學者建議電話訪問與網路調查同時進行，並且詢問受訪者一些生活上的問題，用這些題目預測哪些人更容易成為網路調查的受訪者。</a:t>
+            </a:r>
+            <a:endParaRPr lang="en-US" altLang="ja-JP" sz="2000" dirty="0"/>
+          </a:p>
+          <a:p>
+            <a:pPr>
+              <a:lnSpc>
+                <a:spcPct val="150000"/>
+              </a:lnSpc>
+              <a:buFont typeface="Wingdings" pitchFamily="2" charset="2"/>
+              <a:buChar char="q"/>
+            </a:pPr>
+            <a:r>
+              <a:rPr lang="ja-JP" altLang="en-US" sz="2000"/>
+              <a:t>例如：詢問受訪者起床時間、就寢時間、上次是否投票、是否可以在家上網、以前有沒有接受過訪問等等。</a:t>
+            </a:r>
+            <a:endParaRPr lang="en-US" altLang="ja-JP" sz="2000" dirty="0"/>
+          </a:p>
+          <a:p>
+            <a:pPr marL="742950" lvl="1" indent="-285750">
+              <a:buFont typeface="Arial" panose="020B0604020202020204" pitchFamily="34" charset="0"/>
+              <a:buChar char="•"/>
+            </a:pPr>
+            <a:r>
+              <a:rPr lang="en-US" sz="2000" dirty="0" err="1"/>
+              <a:t>起床時間：晚起床的人比較可能接觸網路</a:t>
+            </a:r>
+            <a:endParaRPr lang="en-US" sz="2000" dirty="0"/>
+          </a:p>
+          <a:p>
+            <a:pPr marL="742950" lvl="1" indent="-285750">
+              <a:buFont typeface="Arial" panose="020B0604020202020204" pitchFamily="34" charset="0"/>
+              <a:buChar char="•"/>
+            </a:pPr>
+            <a:r>
+              <a:rPr lang="en-US" sz="2000" dirty="0" err="1"/>
+              <a:t>就寢時間：晚睡的人比較可能接觸網路</a:t>
+            </a:r>
+            <a:endParaRPr lang="en-US" sz="2000" dirty="0"/>
+          </a:p>
+          <a:p>
+            <a:pPr marL="742950" lvl="1" indent="-285750">
+              <a:buFont typeface="Arial" panose="020B0604020202020204" pitchFamily="34" charset="0"/>
+              <a:buChar char="•"/>
+            </a:pPr>
+            <a:r>
+              <a:rPr lang="ja-JP" altLang="en-US" sz="2000"/>
+              <a:t>上次是否投票</a:t>
+            </a:r>
+            <a:r>
+              <a:rPr lang="en-US" sz="2000" dirty="0"/>
+              <a:t>：</a:t>
+            </a:r>
+            <a:r>
+              <a:rPr lang="en-US" sz="2000" dirty="0" err="1"/>
+              <a:t>上次投票的人比較可能願意參加網路調查</a:t>
+            </a:r>
+            <a:endParaRPr lang="ja-JP" altLang="en-US" sz="2000"/>
+          </a:p>
+          <a:p>
+            <a:r>
+              <a:rPr lang="ja-JP" altLang="en-US" sz="2000"/>
+              <a:t>合併這兩筆樣本之後，可以用這三個題目預測受訪者成為網路樣本的機率。</a:t>
+            </a:r>
+          </a:p>
+          <a:p>
+            <a:endParaRPr lang="en-US" dirty="0"/>
+          </a:p>
+        </p:txBody>
+      </p:sp>
+      <p:sp>
+        <p:nvSpPr>
+          <p:cNvPr id="4" name="Slide Number Placeholder 3">
+            <a:extLst>
+              <a:ext uri="{FF2B5EF4-FFF2-40B4-BE49-F238E27FC236}">
+                <a16:creationId xmlns:a16="http://schemas.microsoft.com/office/drawing/2014/main" id="{B1649232-4471-01C1-446B-ED966910EFE8}"/>
+              </a:ext>
+            </a:extLst>
+          </p:cNvPr>
+          <p:cNvSpPr>
+            <a:spLocks noGrp="1"/>
+          </p:cNvSpPr>
+          <p:nvPr>
+            <p:ph type="sldNum" sz="quarter" idx="12"/>
+          </p:nvPr>
+        </p:nvSpPr>
+        <p:spPr/>
+        <p:txBody>
+          <a:bodyPr/>
+          <a:lstStyle/>
+          <a:p>
+            <a:fld id="{34E21383-B02B-694B-B2AD-A967203CDE86}" type="slidenum">
+              <a:rPr lang="en-US" smtClean="0"/>
+              <a:t>18</a:t>
+            </a:fld>
+            <a:endParaRPr lang="en-US"/>
+          </a:p>
+        </p:txBody>
+      </p:sp>
+    </p:spTree>
+    <p:extLst>
+      <p:ext uri="{BB962C8B-B14F-4D97-AF65-F5344CB8AC3E}">
+        <p14:creationId xmlns:p14="http://schemas.microsoft.com/office/powerpoint/2010/main" val="1423686379"/>
+      </p:ext>
+    </p:extLst>
+  </p:cSld>
+  <p:clrMapOvr>
+    <a:masterClrMapping/>
+  </p:clrMapOvr>
+</p:sld>
+</file>
+
+<file path=ppt/slides/slide19.xml><?xml version="1.0" encoding="utf-8"?>
+<p:sld xmlns:a="http://schemas.openxmlformats.org/drawingml/2006/main" xmlns:r="http://schemas.openxmlformats.org/officeDocument/2006/relationships" xmlns:p="http://schemas.openxmlformats.org/presentationml/2006/main">
+  <p:cSld>
+    <p:spTree>
+      <p:nvGrpSpPr>
+        <p:cNvPr id="1" name=""/>
+        <p:cNvGrpSpPr/>
+        <p:nvPr/>
+      </p:nvGrpSpPr>
+      <p:grpSpPr>
+        <a:xfrm>
+          <a:off x="0" y="0"/>
+          <a:ext cx="0" cy="0"/>
+          <a:chOff x="0" y="0"/>
+          <a:chExt cx="0" cy="0"/>
+        </a:xfrm>
+      </p:grpSpPr>
+      <p:sp>
+        <p:nvSpPr>
+          <p:cNvPr id="2" name="標題 1">
+            <a:extLst>
+              <a:ext uri="{FF2B5EF4-FFF2-40B4-BE49-F238E27FC236}">
+                <a16:creationId xmlns:a16="http://schemas.microsoft.com/office/drawing/2014/main" id="{383EE3C2-DDD8-7A06-09FA-3DA3575D43D0}"/>
+              </a:ext>
+            </a:extLst>
+          </p:cNvPr>
+          <p:cNvSpPr>
+            <a:spLocks noGrp="1"/>
+          </p:cNvSpPr>
+          <p:nvPr>
+            <p:ph type="title"/>
+          </p:nvPr>
+        </p:nvSpPr>
+        <p:spPr/>
+        <p:txBody>
+          <a:bodyPr/>
+          <a:lstStyle/>
+          <a:p>
+            <a:r>
+              <a:rPr lang="ja-JP" altLang="en-US"/>
+              <a:t>入選機率調整法</a:t>
+            </a:r>
+            <a:r>
               <a:rPr lang="en-US" altLang="zh-TW" dirty="0"/>
               <a:t>（</a:t>
             </a:r>
@@ -6597,8 +7053,8 @@
           </a:p>
         </p:txBody>
       </p:sp>
-      <mc:AlternateContent xmlns:mc="http://schemas.openxmlformats.org/markup-compatibility/2006">
-        <mc:Choice xmlns:a14="http://schemas.microsoft.com/office/drawing/2010/main" Requires="a14">
+      <mc:AlternateContent xmlns:mc="http://schemas.openxmlformats.org/markup-compatibility/2006" xmlns:a14="http://schemas.microsoft.com/office/drawing/2010/main">
+        <mc:Choice Requires="a14">
           <p:sp>
             <p:nvSpPr>
               <p:cNvPr id="3" name="內容版面配置區 2">
@@ -6954,7 +7410,7 @@
             </p:txBody>
           </p:sp>
         </mc:Choice>
-        <mc:Fallback>
+        <mc:Fallback xmlns="">
           <p:sp>
             <p:nvSpPr>
               <p:cNvPr id="3" name="內容版面配置區 2">
@@ -7017,7 +7473,7 @@
           <a:p>
             <a:fld id="{34E21383-B02B-694B-B2AD-A967203CDE86}" type="slidenum">
               <a:rPr lang="en-US" smtClean="0"/>
-              <a:t>17</a:t>
+              <a:t>19</a:t>
             </a:fld>
             <a:endParaRPr lang="en-US"/>
           </a:p>
@@ -7027,430 +7483,6 @@
     <p:extLst>
       <p:ext uri="{BB962C8B-B14F-4D97-AF65-F5344CB8AC3E}">
         <p14:creationId xmlns:p14="http://schemas.microsoft.com/office/powerpoint/2010/main" val="2186623153"/>
-      </p:ext>
-    </p:extLst>
-  </p:cSld>
-  <p:clrMapOvr>
-    <a:masterClrMapping/>
-  </p:clrMapOvr>
-</p:sld>
-</file>
-
-<file path=ppt/slides/slide18.xml><?xml version="1.0" encoding="utf-8"?>
-<p:sld xmlns:a="http://schemas.openxmlformats.org/drawingml/2006/main" xmlns:r="http://schemas.openxmlformats.org/officeDocument/2006/relationships" xmlns:p="http://schemas.openxmlformats.org/presentationml/2006/main">
-  <p:cSld>
-    <p:spTree>
-      <p:nvGrpSpPr>
-        <p:cNvPr id="1" name=""/>
-        <p:cNvGrpSpPr/>
-        <p:nvPr/>
-      </p:nvGrpSpPr>
-      <p:grpSpPr>
-        <a:xfrm>
-          <a:off x="0" y="0"/>
-          <a:ext cx="0" cy="0"/>
-          <a:chOff x="0" y="0"/>
-          <a:chExt cx="0" cy="0"/>
-        </a:xfrm>
-      </p:grpSpPr>
-      <p:sp>
-        <p:nvSpPr>
-          <p:cNvPr id="2" name="標題 1">
-            <a:extLst>
-              <a:ext uri="{FF2B5EF4-FFF2-40B4-BE49-F238E27FC236}">
-                <a16:creationId xmlns:a16="http://schemas.microsoft.com/office/drawing/2014/main" id="{F4B25333-FA00-DAC2-008C-F9F92142250C}"/>
-              </a:ext>
-            </a:extLst>
-          </p:cNvPr>
-          <p:cNvSpPr>
-            <a:spLocks noGrp="1"/>
-          </p:cNvSpPr>
-          <p:nvPr>
-            <p:ph type="title"/>
-          </p:nvPr>
-        </p:nvSpPr>
-        <p:spPr/>
-        <p:txBody>
-          <a:bodyPr/>
-          <a:lstStyle/>
-          <a:p>
-            <a:r>
-              <a:rPr lang="ja-JP" altLang="en-US"/>
-              <a:t>入選機率調整法</a:t>
-            </a:r>
-            <a:r>
-              <a:rPr lang="en-US" altLang="zh-TW" dirty="0"/>
-              <a:t>（</a:t>
-            </a:r>
-            <a:r>
-              <a:rPr lang="zh-TW" altLang="en-US" dirty="0"/>
-              <a:t>三</a:t>
-            </a:r>
-            <a:r>
-              <a:rPr lang="en-US" altLang="zh-TW" dirty="0"/>
-              <a:t>）</a:t>
-            </a:r>
-            <a:endParaRPr kumimoji="1" lang="zh-TW" altLang="en-US" dirty="0"/>
-          </a:p>
-        </p:txBody>
-      </p:sp>
-      <p:sp>
-        <p:nvSpPr>
-          <p:cNvPr id="3" name="內容版面配置區 2">
-            <a:extLst>
-              <a:ext uri="{FF2B5EF4-FFF2-40B4-BE49-F238E27FC236}">
-                <a16:creationId xmlns:a16="http://schemas.microsoft.com/office/drawing/2014/main" id="{9157172E-4746-788F-EAED-46AA41DEFF13}"/>
-              </a:ext>
-            </a:extLst>
-          </p:cNvPr>
-          <p:cNvSpPr>
-            <a:spLocks noGrp="1"/>
-          </p:cNvSpPr>
-          <p:nvPr>
-            <p:ph idx="1"/>
-          </p:nvPr>
-        </p:nvSpPr>
-        <p:spPr/>
-        <p:txBody>
-          <a:bodyPr>
-            <a:normAutofit lnSpcReduction="10000"/>
-          </a:bodyPr>
-          <a:lstStyle/>
-          <a:p>
-            <a:r>
-              <a:rPr kumimoji="1" lang="en" altLang="zh-TW" sz="2000" dirty="0" err="1"/>
-              <a:t>Webographics</a:t>
-            </a:r>
-            <a:r>
-              <a:rPr kumimoji="1" lang="zh-TW" altLang="en-US" sz="2000" dirty="0"/>
-              <a:t>有如下的可能問題：</a:t>
-            </a:r>
-            <a:endParaRPr kumimoji="1" lang="en-US" altLang="zh-TW" sz="2000" dirty="0"/>
-          </a:p>
-          <a:p>
-            <a:pPr marL="457200" indent="-457200">
-              <a:lnSpc>
-                <a:spcPct val="150000"/>
-              </a:lnSpc>
-              <a:buFont typeface="+mj-lt"/>
-              <a:buAutoNum type="arabicPeriod"/>
-            </a:pPr>
-            <a:r>
-              <a:rPr kumimoji="1" lang="zh-TW" altLang="en-US" sz="2000" dirty="0"/>
-              <a:t>變數選擇的主觀性：哪些 指標最關鍵？（是上網時數？還是是否使用網銀？）目前並沒有統一標準。選錯變數可能導致加權無效，甚至增加統計噪訊。</a:t>
-            </a:r>
-            <a:endParaRPr kumimoji="1" lang="en-US" altLang="zh-TW" sz="2000" dirty="0"/>
-          </a:p>
-          <a:p>
-            <a:pPr marL="457200" indent="-457200">
-              <a:lnSpc>
-                <a:spcPct val="150000"/>
-              </a:lnSpc>
-              <a:buFont typeface="+mj-lt"/>
-              <a:buAutoNum type="arabicPeriod"/>
-            </a:pPr>
-            <a:r>
-              <a:rPr kumimoji="1" lang="zh-TW" altLang="en-US" sz="2000" dirty="0"/>
-              <a:t>可能導致樣本權值過大：如果某個特定網路行為族群在你的樣本中極少（例如：很少上網的高齡者），為了補齊權重，該樣本的權值會被放大到極端（如 </a:t>
-            </a:r>
-            <a:r>
-              <a:rPr kumimoji="1" lang="en-US" altLang="zh-TW" sz="2000" dirty="0"/>
-              <a:t>1 </a:t>
-            </a:r>
-            <a:r>
-              <a:rPr kumimoji="1" lang="zh-TW" altLang="en-US" sz="2000" dirty="0"/>
-              <a:t>個人代表 </a:t>
-            </a:r>
-            <a:r>
-              <a:rPr kumimoji="1" lang="en-US" altLang="zh-TW" sz="2000" dirty="0"/>
-              <a:t>500 </a:t>
-            </a:r>
-            <a:r>
-              <a:rPr kumimoji="1" lang="zh-TW" altLang="en-US" sz="2000" dirty="0"/>
-              <a:t>個人）。這會導致標準誤（</a:t>
-            </a:r>
-            <a:r>
-              <a:rPr kumimoji="1" lang="en" altLang="zh-TW" sz="2000" dirty="0"/>
-              <a:t>Standard Error</a:t>
-            </a:r>
-            <a:r>
-              <a:rPr kumimoji="1" lang="zh-TW" altLang="en" sz="2000" dirty="0"/>
-              <a:t>）</a:t>
-            </a:r>
-            <a:r>
-              <a:rPr kumimoji="1" lang="zh-TW" altLang="en-US" sz="2000" dirty="0"/>
-              <a:t>暴增，讓調查結果不穩定。</a:t>
-            </a:r>
-            <a:endParaRPr kumimoji="1" lang="en-US" altLang="zh-TW" sz="2000" dirty="0"/>
-          </a:p>
-          <a:p>
-            <a:pPr marL="457200" indent="-457200">
-              <a:lnSpc>
-                <a:spcPct val="150000"/>
-              </a:lnSpc>
-              <a:buFont typeface="+mj-lt"/>
-              <a:buAutoNum type="arabicPeriod"/>
-            </a:pPr>
-            <a:r>
-              <a:rPr kumimoji="1" lang="zh-TW" altLang="en-US" sz="2000" dirty="0"/>
-              <a:t>無法處理「未觀測到的差異」：即使網路行為一樣，自願填問卷的人與被動受訪的人在「性格（如熱衷程度）」上仍有本質區別，這是 </a:t>
-            </a:r>
-            <a:r>
-              <a:rPr kumimoji="1" lang="en" altLang="zh-TW" sz="2000" dirty="0" err="1"/>
-              <a:t>Webographics</a:t>
-            </a:r>
-            <a:r>
-              <a:rPr kumimoji="1" lang="en" altLang="zh-TW" sz="2000" dirty="0"/>
-              <a:t> </a:t>
-            </a:r>
-            <a:r>
-              <a:rPr kumimoji="1" lang="zh-TW" altLang="en-US" sz="2000" dirty="0"/>
-              <a:t>數據無法完全消除的殘餘偏差。</a:t>
-            </a:r>
-          </a:p>
-        </p:txBody>
-      </p:sp>
-      <p:sp>
-        <p:nvSpPr>
-          <p:cNvPr id="4" name="投影片編號版面配置區 3">
-            <a:extLst>
-              <a:ext uri="{FF2B5EF4-FFF2-40B4-BE49-F238E27FC236}">
-                <a16:creationId xmlns:a16="http://schemas.microsoft.com/office/drawing/2014/main" id="{4B3EC6B7-9114-0FA4-6CAB-B58ECE6A1FDB}"/>
-              </a:ext>
-            </a:extLst>
-          </p:cNvPr>
-          <p:cNvSpPr>
-            <a:spLocks noGrp="1"/>
-          </p:cNvSpPr>
-          <p:nvPr>
-            <p:ph type="sldNum" sz="quarter" idx="12"/>
-          </p:nvPr>
-        </p:nvSpPr>
-        <p:spPr/>
-        <p:txBody>
-          <a:bodyPr/>
-          <a:lstStyle/>
-          <a:p>
-            <a:fld id="{34E21383-B02B-694B-B2AD-A967203CDE86}" type="slidenum">
-              <a:rPr lang="en-US" smtClean="0"/>
-              <a:t>18</a:t>
-            </a:fld>
-            <a:endParaRPr lang="en-US"/>
-          </a:p>
-        </p:txBody>
-      </p:sp>
-    </p:spTree>
-    <p:extLst>
-      <p:ext uri="{BB962C8B-B14F-4D97-AF65-F5344CB8AC3E}">
-        <p14:creationId xmlns:p14="http://schemas.microsoft.com/office/powerpoint/2010/main" val="4074013559"/>
-      </p:ext>
-    </p:extLst>
-  </p:cSld>
-  <p:clrMapOvr>
-    <a:masterClrMapping/>
-  </p:clrMapOvr>
-</p:sld>
-</file>
-
-<file path=ppt/slides/slide19.xml><?xml version="1.0" encoding="utf-8"?>
-<p:sld xmlns:a="http://schemas.openxmlformats.org/drawingml/2006/main" xmlns:r="http://schemas.openxmlformats.org/officeDocument/2006/relationships" xmlns:p="http://schemas.openxmlformats.org/presentationml/2006/main">
-  <p:cSld>
-    <p:spTree>
-      <p:nvGrpSpPr>
-        <p:cNvPr id="1" name="">
-          <a:extLst>
-            <a:ext uri="{FF2B5EF4-FFF2-40B4-BE49-F238E27FC236}">
-              <a16:creationId xmlns:a16="http://schemas.microsoft.com/office/drawing/2014/main" id="{3E6B6B50-8148-E70C-37D0-8D64E7AF72B1}"/>
-            </a:ext>
-          </a:extLst>
-        </p:cNvPr>
-        <p:cNvGrpSpPr/>
-        <p:nvPr/>
-      </p:nvGrpSpPr>
-      <p:grpSpPr>
-        <a:xfrm>
-          <a:off x="0" y="0"/>
-          <a:ext cx="0" cy="0"/>
-          <a:chOff x="0" y="0"/>
-          <a:chExt cx="0" cy="0"/>
-        </a:xfrm>
-      </p:grpSpPr>
-      <p:sp>
-        <p:nvSpPr>
-          <p:cNvPr id="2" name="標題 1">
-            <a:extLst>
-              <a:ext uri="{FF2B5EF4-FFF2-40B4-BE49-F238E27FC236}">
-                <a16:creationId xmlns:a16="http://schemas.microsoft.com/office/drawing/2014/main" id="{9387CC88-554C-2C96-ADDE-E298EF1ABBB6}"/>
-              </a:ext>
-            </a:extLst>
-          </p:cNvPr>
-          <p:cNvSpPr>
-            <a:spLocks noGrp="1"/>
-          </p:cNvSpPr>
-          <p:nvPr>
-            <p:ph type="title"/>
-          </p:nvPr>
-        </p:nvSpPr>
-        <p:spPr/>
-        <p:txBody>
-          <a:bodyPr/>
-          <a:lstStyle/>
-          <a:p>
-            <a:r>
-              <a:rPr lang="ja-JP" altLang="en-US"/>
-              <a:t>入選機率調整法</a:t>
-            </a:r>
-            <a:r>
-              <a:rPr lang="en-US" altLang="zh-TW" dirty="0"/>
-              <a:t>（</a:t>
-            </a:r>
-            <a:r>
-              <a:rPr lang="zh-TW" altLang="en-US" dirty="0"/>
-              <a:t>四</a:t>
-            </a:r>
-            <a:r>
-              <a:rPr lang="en-US" altLang="zh-TW" dirty="0"/>
-              <a:t>）</a:t>
-            </a:r>
-            <a:endParaRPr kumimoji="1" lang="zh-TW" altLang="en-US" dirty="0"/>
-          </a:p>
-        </p:txBody>
-      </p:sp>
-      <p:sp>
-        <p:nvSpPr>
-          <p:cNvPr id="3" name="內容版面配置區 2">
-            <a:extLst>
-              <a:ext uri="{FF2B5EF4-FFF2-40B4-BE49-F238E27FC236}">
-                <a16:creationId xmlns:a16="http://schemas.microsoft.com/office/drawing/2014/main" id="{45B18FE7-5730-D4EA-75C6-EA68004792D2}"/>
-              </a:ext>
-            </a:extLst>
-          </p:cNvPr>
-          <p:cNvSpPr>
-            <a:spLocks noGrp="1"/>
-          </p:cNvSpPr>
-          <p:nvPr>
-            <p:ph idx="1"/>
-          </p:nvPr>
-        </p:nvSpPr>
-        <p:spPr/>
-        <p:txBody>
-          <a:bodyPr>
-            <a:normAutofit/>
-          </a:bodyPr>
-          <a:lstStyle/>
-          <a:p>
-            <a:r>
-              <a:rPr kumimoji="1" lang="zh-TW" altLang="en-US" sz="2000" dirty="0"/>
-              <a:t>假設網路調查發現「</a:t>
-            </a:r>
-            <a:r>
-              <a:rPr kumimoji="1" lang="en-US" altLang="zh-TW" sz="2000" dirty="0"/>
-              <a:t>20-29 </a:t>
-            </a:r>
-            <a:r>
-              <a:rPr kumimoji="1" lang="zh-TW" altLang="en-US" sz="2000" dirty="0"/>
-              <a:t>歲、每天上網 </a:t>
-            </a:r>
-            <a:r>
-              <a:rPr kumimoji="1" lang="en-US" altLang="zh-TW" sz="2000" dirty="0"/>
-              <a:t>5 </a:t>
-            </a:r>
-            <a:r>
-              <a:rPr kumimoji="1" lang="zh-TW" altLang="en-US" sz="2000" dirty="0"/>
-              <a:t>小時以上」的人滿意台北市長的程度極高，且這群人在問卷中佔了 </a:t>
-            </a:r>
-            <a:r>
-              <a:rPr kumimoji="1" lang="en-US" altLang="zh-TW" sz="2000" dirty="0"/>
-              <a:t>80%</a:t>
-            </a:r>
-            <a:r>
-              <a:rPr kumimoji="1" lang="zh-TW" altLang="en-US" sz="2000" dirty="0"/>
-              <a:t>。</a:t>
-            </a:r>
-          </a:p>
-          <a:p>
-            <a:endParaRPr kumimoji="1" lang="zh-TW" altLang="en-US" sz="2000" dirty="0"/>
-          </a:p>
-          <a:p>
-            <a:r>
-              <a:rPr kumimoji="1" lang="zh-TW" altLang="en-US" sz="2000" dirty="0"/>
-              <a:t>但是根據「隨機抽樣」的基準樣本顯示，這群人在真實社會中其實只佔 </a:t>
-            </a:r>
-            <a:r>
-              <a:rPr kumimoji="1" lang="en-US" altLang="zh-TW" sz="2000" dirty="0"/>
-              <a:t>20%</a:t>
-            </a:r>
-            <a:r>
-              <a:rPr kumimoji="1" lang="zh-TW" altLang="en-US" sz="2000" dirty="0"/>
-              <a:t>。</a:t>
-            </a:r>
-          </a:p>
-          <a:p>
-            <a:endParaRPr kumimoji="1" lang="zh-TW" altLang="en-US" sz="2000" dirty="0"/>
-          </a:p>
-          <a:p>
-            <a:r>
-              <a:rPr kumimoji="1" lang="en" altLang="zh-TW" sz="2000" dirty="0"/>
-              <a:t>PSA </a:t>
-            </a:r>
-            <a:r>
-              <a:rPr kumimoji="1" lang="zh-TW" altLang="en-US" sz="2000" dirty="0"/>
-              <a:t>會算出這群人的傾向分數極高。</a:t>
-            </a:r>
-          </a:p>
-          <a:p>
-            <a:endParaRPr kumimoji="1" lang="zh-TW" altLang="en-US" sz="2000" dirty="0"/>
-          </a:p>
-          <a:p>
-            <a:r>
-              <a:rPr kumimoji="1" lang="zh-TW" altLang="en-US" sz="2000" dirty="0"/>
-              <a:t>模型會自動調低這群人的權重。</a:t>
-            </a:r>
-          </a:p>
-          <a:p>
-            <a:endParaRPr kumimoji="1" lang="zh-TW" altLang="en-US" sz="2000" dirty="0"/>
-          </a:p>
-          <a:p>
-            <a:r>
-              <a:rPr kumimoji="1" lang="zh-TW" altLang="en-US" sz="2000" dirty="0"/>
-              <a:t>最終計算總平均滿意度時，結果會向「真實母體」靠攏。</a:t>
-            </a:r>
-          </a:p>
-        </p:txBody>
-      </p:sp>
-      <p:sp>
-        <p:nvSpPr>
-          <p:cNvPr id="4" name="投影片編號版面配置區 3">
-            <a:extLst>
-              <a:ext uri="{FF2B5EF4-FFF2-40B4-BE49-F238E27FC236}">
-                <a16:creationId xmlns:a16="http://schemas.microsoft.com/office/drawing/2014/main" id="{64988104-9334-8792-9756-F36D63F92C90}"/>
-              </a:ext>
-            </a:extLst>
-          </p:cNvPr>
-          <p:cNvSpPr>
-            <a:spLocks noGrp="1"/>
-          </p:cNvSpPr>
-          <p:nvPr>
-            <p:ph type="sldNum" sz="quarter" idx="12"/>
-          </p:nvPr>
-        </p:nvSpPr>
-        <p:spPr/>
-        <p:txBody>
-          <a:bodyPr/>
-          <a:lstStyle/>
-          <a:p>
-            <a:fld id="{34E21383-B02B-694B-B2AD-A967203CDE86}" type="slidenum">
-              <a:rPr lang="en-US" smtClean="0"/>
-              <a:t>19</a:t>
-            </a:fld>
-            <a:endParaRPr lang="en-US"/>
-          </a:p>
-        </p:txBody>
-      </p:sp>
-    </p:spTree>
-    <p:extLst>
-      <p:ext uri="{BB962C8B-B14F-4D97-AF65-F5344CB8AC3E}">
-        <p14:creationId xmlns:p14="http://schemas.microsoft.com/office/powerpoint/2010/main" val="1666849061"/>
       </p:ext>
     </p:extLst>
   </p:cSld>
@@ -7571,6 +7603,32 @@
             </a:pPr>
             <a:r>
               <a:rPr lang="zh-TW" altLang="en-US" kern="100" dirty="0">
+                <a:latin typeface="Times New Roman" panose="02020603050405020304" pitchFamily="18" charset="0"/>
+                <a:ea typeface="DFKai-SB"/>
+                <a:cs typeface="Times New Roman" panose="02020603050405020304" pitchFamily="18" charset="0"/>
+              </a:rPr>
+              <a:t>網路調查的形式</a:t>
+            </a:r>
+            <a:endParaRPr lang="en-US" altLang="zh-TW" kern="100" dirty="0">
+              <a:latin typeface="Times New Roman" panose="02020603050405020304" pitchFamily="18" charset="0"/>
+              <a:ea typeface="DFKai-SB"/>
+              <a:cs typeface="Times New Roman" panose="02020603050405020304" pitchFamily="18" charset="0"/>
+            </a:endParaRPr>
+          </a:p>
+          <a:p>
+            <a:pPr marL="0" marR="0" indent="304800" algn="just">
+              <a:lnSpc>
+                <a:spcPct val="150000"/>
+              </a:lnSpc>
+              <a:spcBef>
+                <a:spcPts val="0"/>
+              </a:spcBef>
+              <a:spcAft>
+                <a:spcPts val="0"/>
+              </a:spcAft>
+            </a:pPr>
+            <a:r>
+              <a:rPr lang="zh-TW" altLang="en-US" kern="100" dirty="0">
                 <a:effectLst/>
                 <a:latin typeface="Times New Roman" panose="02020603050405020304" pitchFamily="18" charset="0"/>
                 <a:ea typeface="DFKai-SB"/>
@@ -7652,6 +7710,430 @@
 </file>
 
 <file path=ppt/slides/slide20.xml><?xml version="1.0" encoding="utf-8"?>
+<p:sld xmlns:a="http://schemas.openxmlformats.org/drawingml/2006/main" xmlns:r="http://schemas.openxmlformats.org/officeDocument/2006/relationships" xmlns:p="http://schemas.openxmlformats.org/presentationml/2006/main">
+  <p:cSld>
+    <p:spTree>
+      <p:nvGrpSpPr>
+        <p:cNvPr id="1" name=""/>
+        <p:cNvGrpSpPr/>
+        <p:nvPr/>
+      </p:nvGrpSpPr>
+      <p:grpSpPr>
+        <a:xfrm>
+          <a:off x="0" y="0"/>
+          <a:ext cx="0" cy="0"/>
+          <a:chOff x="0" y="0"/>
+          <a:chExt cx="0" cy="0"/>
+        </a:xfrm>
+      </p:grpSpPr>
+      <p:sp>
+        <p:nvSpPr>
+          <p:cNvPr id="2" name="標題 1">
+            <a:extLst>
+              <a:ext uri="{FF2B5EF4-FFF2-40B4-BE49-F238E27FC236}">
+                <a16:creationId xmlns:a16="http://schemas.microsoft.com/office/drawing/2014/main" id="{F4B25333-FA00-DAC2-008C-F9F92142250C}"/>
+              </a:ext>
+            </a:extLst>
+          </p:cNvPr>
+          <p:cNvSpPr>
+            <a:spLocks noGrp="1"/>
+          </p:cNvSpPr>
+          <p:nvPr>
+            <p:ph type="title"/>
+          </p:nvPr>
+        </p:nvSpPr>
+        <p:spPr/>
+        <p:txBody>
+          <a:bodyPr/>
+          <a:lstStyle/>
+          <a:p>
+            <a:r>
+              <a:rPr lang="ja-JP" altLang="en-US"/>
+              <a:t>入選機率調整法</a:t>
+            </a:r>
+            <a:r>
+              <a:rPr lang="en-US" altLang="zh-TW" dirty="0"/>
+              <a:t>（</a:t>
+            </a:r>
+            <a:r>
+              <a:rPr lang="zh-TW" altLang="en-US" dirty="0"/>
+              <a:t>三</a:t>
+            </a:r>
+            <a:r>
+              <a:rPr lang="en-US" altLang="zh-TW" dirty="0"/>
+              <a:t>）</a:t>
+            </a:r>
+            <a:endParaRPr kumimoji="1" lang="zh-TW" altLang="en-US" dirty="0"/>
+          </a:p>
+        </p:txBody>
+      </p:sp>
+      <p:sp>
+        <p:nvSpPr>
+          <p:cNvPr id="3" name="內容版面配置區 2">
+            <a:extLst>
+              <a:ext uri="{FF2B5EF4-FFF2-40B4-BE49-F238E27FC236}">
+                <a16:creationId xmlns:a16="http://schemas.microsoft.com/office/drawing/2014/main" id="{9157172E-4746-788F-EAED-46AA41DEFF13}"/>
+              </a:ext>
+            </a:extLst>
+          </p:cNvPr>
+          <p:cNvSpPr>
+            <a:spLocks noGrp="1"/>
+          </p:cNvSpPr>
+          <p:nvPr>
+            <p:ph idx="1"/>
+          </p:nvPr>
+        </p:nvSpPr>
+        <p:spPr/>
+        <p:txBody>
+          <a:bodyPr>
+            <a:normAutofit lnSpcReduction="10000"/>
+          </a:bodyPr>
+          <a:lstStyle/>
+          <a:p>
+            <a:r>
+              <a:rPr kumimoji="1" lang="en" altLang="zh-TW" sz="2000" dirty="0" err="1"/>
+              <a:t>Webographics</a:t>
+            </a:r>
+            <a:r>
+              <a:rPr kumimoji="1" lang="zh-TW" altLang="en-US" sz="2000" dirty="0"/>
+              <a:t>有如下的可能問題：</a:t>
+            </a:r>
+            <a:endParaRPr kumimoji="1" lang="en-US" altLang="zh-TW" sz="2000" dirty="0"/>
+          </a:p>
+          <a:p>
+            <a:pPr marL="457200" indent="-457200">
+              <a:lnSpc>
+                <a:spcPct val="150000"/>
+              </a:lnSpc>
+              <a:buFont typeface="+mj-lt"/>
+              <a:buAutoNum type="arabicPeriod"/>
+            </a:pPr>
+            <a:r>
+              <a:rPr kumimoji="1" lang="zh-TW" altLang="en-US" sz="2000" dirty="0"/>
+              <a:t>變數選擇的主觀性：哪些 指標最關鍵？（是上網時數？還是是否使用網銀？）目前並沒有統一標準。選錯變數可能導致加權無效，甚至增加統計噪訊。</a:t>
+            </a:r>
+            <a:endParaRPr kumimoji="1" lang="en-US" altLang="zh-TW" sz="2000" dirty="0"/>
+          </a:p>
+          <a:p>
+            <a:pPr marL="457200" indent="-457200">
+              <a:lnSpc>
+                <a:spcPct val="150000"/>
+              </a:lnSpc>
+              <a:buFont typeface="+mj-lt"/>
+              <a:buAutoNum type="arabicPeriod"/>
+            </a:pPr>
+            <a:r>
+              <a:rPr kumimoji="1" lang="zh-TW" altLang="en-US" sz="2000" dirty="0"/>
+              <a:t>可能導致樣本權值過大：如果某個特定網路行為族群在你的樣本中極少（例如：很少上網的高齡者），為了補齊權重，該樣本的權值會被放大到極端（如 </a:t>
+            </a:r>
+            <a:r>
+              <a:rPr kumimoji="1" lang="en-US" altLang="zh-TW" sz="2000" dirty="0"/>
+              <a:t>1 </a:t>
+            </a:r>
+            <a:r>
+              <a:rPr kumimoji="1" lang="zh-TW" altLang="en-US" sz="2000" dirty="0"/>
+              <a:t>個人代表 </a:t>
+            </a:r>
+            <a:r>
+              <a:rPr kumimoji="1" lang="en-US" altLang="zh-TW" sz="2000" dirty="0"/>
+              <a:t>500 </a:t>
+            </a:r>
+            <a:r>
+              <a:rPr kumimoji="1" lang="zh-TW" altLang="en-US" sz="2000" dirty="0"/>
+              <a:t>個人）。這會導致標準誤（</a:t>
+            </a:r>
+            <a:r>
+              <a:rPr kumimoji="1" lang="en" altLang="zh-TW" sz="2000" dirty="0"/>
+              <a:t>Standard Error</a:t>
+            </a:r>
+            <a:r>
+              <a:rPr kumimoji="1" lang="zh-TW" altLang="en" sz="2000" dirty="0"/>
+              <a:t>）</a:t>
+            </a:r>
+            <a:r>
+              <a:rPr kumimoji="1" lang="zh-TW" altLang="en-US" sz="2000" dirty="0"/>
+              <a:t>暴增，讓調查結果不穩定。</a:t>
+            </a:r>
+            <a:endParaRPr kumimoji="1" lang="en-US" altLang="zh-TW" sz="2000" dirty="0"/>
+          </a:p>
+          <a:p>
+            <a:pPr marL="457200" indent="-457200">
+              <a:lnSpc>
+                <a:spcPct val="150000"/>
+              </a:lnSpc>
+              <a:buFont typeface="+mj-lt"/>
+              <a:buAutoNum type="arabicPeriod"/>
+            </a:pPr>
+            <a:r>
+              <a:rPr kumimoji="1" lang="zh-TW" altLang="en-US" sz="2000" dirty="0"/>
+              <a:t>無法處理「未觀測到的差異」：即使網路行為一樣，自願填問卷的人與被動受訪的人在「性格（如熱衷程度）」上仍有本質區別，這是 </a:t>
+            </a:r>
+            <a:r>
+              <a:rPr kumimoji="1" lang="en" altLang="zh-TW" sz="2000" dirty="0" err="1"/>
+              <a:t>Webographics</a:t>
+            </a:r>
+            <a:r>
+              <a:rPr kumimoji="1" lang="en" altLang="zh-TW" sz="2000" dirty="0"/>
+              <a:t> </a:t>
+            </a:r>
+            <a:r>
+              <a:rPr kumimoji="1" lang="zh-TW" altLang="en-US" sz="2000" dirty="0"/>
+              <a:t>數據無法完全消除的殘餘偏差。</a:t>
+            </a:r>
+          </a:p>
+        </p:txBody>
+      </p:sp>
+      <p:sp>
+        <p:nvSpPr>
+          <p:cNvPr id="4" name="投影片編號版面配置區 3">
+            <a:extLst>
+              <a:ext uri="{FF2B5EF4-FFF2-40B4-BE49-F238E27FC236}">
+                <a16:creationId xmlns:a16="http://schemas.microsoft.com/office/drawing/2014/main" id="{4B3EC6B7-9114-0FA4-6CAB-B58ECE6A1FDB}"/>
+              </a:ext>
+            </a:extLst>
+          </p:cNvPr>
+          <p:cNvSpPr>
+            <a:spLocks noGrp="1"/>
+          </p:cNvSpPr>
+          <p:nvPr>
+            <p:ph type="sldNum" sz="quarter" idx="12"/>
+          </p:nvPr>
+        </p:nvSpPr>
+        <p:spPr/>
+        <p:txBody>
+          <a:bodyPr/>
+          <a:lstStyle/>
+          <a:p>
+            <a:fld id="{34E21383-B02B-694B-B2AD-A967203CDE86}" type="slidenum">
+              <a:rPr lang="en-US" smtClean="0"/>
+              <a:t>20</a:t>
+            </a:fld>
+            <a:endParaRPr lang="en-US"/>
+          </a:p>
+        </p:txBody>
+      </p:sp>
+    </p:spTree>
+    <p:extLst>
+      <p:ext uri="{BB962C8B-B14F-4D97-AF65-F5344CB8AC3E}">
+        <p14:creationId xmlns:p14="http://schemas.microsoft.com/office/powerpoint/2010/main" val="4074013559"/>
+      </p:ext>
+    </p:extLst>
+  </p:cSld>
+  <p:clrMapOvr>
+    <a:masterClrMapping/>
+  </p:clrMapOvr>
+</p:sld>
+</file>
+
+<file path=ppt/slides/slide21.xml><?xml version="1.0" encoding="utf-8"?>
+<p:sld xmlns:a="http://schemas.openxmlformats.org/drawingml/2006/main" xmlns:r="http://schemas.openxmlformats.org/officeDocument/2006/relationships" xmlns:p="http://schemas.openxmlformats.org/presentationml/2006/main">
+  <p:cSld>
+    <p:spTree>
+      <p:nvGrpSpPr>
+        <p:cNvPr id="1" name="">
+          <a:extLst>
+            <a:ext uri="{FF2B5EF4-FFF2-40B4-BE49-F238E27FC236}">
+              <a16:creationId xmlns:a16="http://schemas.microsoft.com/office/drawing/2014/main" id="{3E6B6B50-8148-E70C-37D0-8D64E7AF72B1}"/>
+            </a:ext>
+          </a:extLst>
+        </p:cNvPr>
+        <p:cNvGrpSpPr/>
+        <p:nvPr/>
+      </p:nvGrpSpPr>
+      <p:grpSpPr>
+        <a:xfrm>
+          <a:off x="0" y="0"/>
+          <a:ext cx="0" cy="0"/>
+          <a:chOff x="0" y="0"/>
+          <a:chExt cx="0" cy="0"/>
+        </a:xfrm>
+      </p:grpSpPr>
+      <p:sp>
+        <p:nvSpPr>
+          <p:cNvPr id="2" name="標題 1">
+            <a:extLst>
+              <a:ext uri="{FF2B5EF4-FFF2-40B4-BE49-F238E27FC236}">
+                <a16:creationId xmlns:a16="http://schemas.microsoft.com/office/drawing/2014/main" id="{9387CC88-554C-2C96-ADDE-E298EF1ABBB6}"/>
+              </a:ext>
+            </a:extLst>
+          </p:cNvPr>
+          <p:cNvSpPr>
+            <a:spLocks noGrp="1"/>
+          </p:cNvSpPr>
+          <p:nvPr>
+            <p:ph type="title"/>
+          </p:nvPr>
+        </p:nvSpPr>
+        <p:spPr/>
+        <p:txBody>
+          <a:bodyPr/>
+          <a:lstStyle/>
+          <a:p>
+            <a:r>
+              <a:rPr lang="ja-JP" altLang="en-US"/>
+              <a:t>入選機率調整法</a:t>
+            </a:r>
+            <a:r>
+              <a:rPr lang="en-US" altLang="zh-TW" dirty="0"/>
+              <a:t>（</a:t>
+            </a:r>
+            <a:r>
+              <a:rPr lang="zh-TW" altLang="en-US" dirty="0"/>
+              <a:t>四</a:t>
+            </a:r>
+            <a:r>
+              <a:rPr lang="en-US" altLang="zh-TW" dirty="0"/>
+              <a:t>）</a:t>
+            </a:r>
+            <a:endParaRPr kumimoji="1" lang="zh-TW" altLang="en-US" dirty="0"/>
+          </a:p>
+        </p:txBody>
+      </p:sp>
+      <p:sp>
+        <p:nvSpPr>
+          <p:cNvPr id="3" name="內容版面配置區 2">
+            <a:extLst>
+              <a:ext uri="{FF2B5EF4-FFF2-40B4-BE49-F238E27FC236}">
+                <a16:creationId xmlns:a16="http://schemas.microsoft.com/office/drawing/2014/main" id="{45B18FE7-5730-D4EA-75C6-EA68004792D2}"/>
+              </a:ext>
+            </a:extLst>
+          </p:cNvPr>
+          <p:cNvSpPr>
+            <a:spLocks noGrp="1"/>
+          </p:cNvSpPr>
+          <p:nvPr>
+            <p:ph idx="1"/>
+          </p:nvPr>
+        </p:nvSpPr>
+        <p:spPr/>
+        <p:txBody>
+          <a:bodyPr>
+            <a:normAutofit/>
+          </a:bodyPr>
+          <a:lstStyle/>
+          <a:p>
+            <a:r>
+              <a:rPr kumimoji="1" lang="zh-TW" altLang="en-US" sz="2000" dirty="0"/>
+              <a:t>假設網路調查發現「</a:t>
+            </a:r>
+            <a:r>
+              <a:rPr kumimoji="1" lang="en-US" altLang="zh-TW" sz="2000" dirty="0"/>
+              <a:t>20-29 </a:t>
+            </a:r>
+            <a:r>
+              <a:rPr kumimoji="1" lang="zh-TW" altLang="en-US" sz="2000" dirty="0"/>
+              <a:t>歲、每天上網 </a:t>
+            </a:r>
+            <a:r>
+              <a:rPr kumimoji="1" lang="en-US" altLang="zh-TW" sz="2000" dirty="0"/>
+              <a:t>5 </a:t>
+            </a:r>
+            <a:r>
+              <a:rPr kumimoji="1" lang="zh-TW" altLang="en-US" sz="2000" dirty="0"/>
+              <a:t>小時以上」的人滿意台北市長的程度極高，且這群人在問卷中佔了 </a:t>
+            </a:r>
+            <a:r>
+              <a:rPr kumimoji="1" lang="en-US" altLang="zh-TW" sz="2000" dirty="0"/>
+              <a:t>80%</a:t>
+            </a:r>
+            <a:r>
+              <a:rPr kumimoji="1" lang="zh-TW" altLang="en-US" sz="2000" dirty="0"/>
+              <a:t>。</a:t>
+            </a:r>
+          </a:p>
+          <a:p>
+            <a:endParaRPr kumimoji="1" lang="zh-TW" altLang="en-US" sz="2000" dirty="0"/>
+          </a:p>
+          <a:p>
+            <a:r>
+              <a:rPr kumimoji="1" lang="zh-TW" altLang="en-US" sz="2000" dirty="0"/>
+              <a:t>但是根據「隨機抽樣」的基準樣本顯示，這群人在真實社會中其實只佔 </a:t>
+            </a:r>
+            <a:r>
+              <a:rPr kumimoji="1" lang="en-US" altLang="zh-TW" sz="2000" dirty="0"/>
+              <a:t>20%</a:t>
+            </a:r>
+            <a:r>
+              <a:rPr kumimoji="1" lang="zh-TW" altLang="en-US" sz="2000" dirty="0"/>
+              <a:t>。</a:t>
+            </a:r>
+          </a:p>
+          <a:p>
+            <a:endParaRPr kumimoji="1" lang="zh-TW" altLang="en-US" sz="2000" dirty="0"/>
+          </a:p>
+          <a:p>
+            <a:r>
+              <a:rPr kumimoji="1" lang="en" altLang="zh-TW" sz="2000" dirty="0"/>
+              <a:t>PSA </a:t>
+            </a:r>
+            <a:r>
+              <a:rPr kumimoji="1" lang="zh-TW" altLang="en-US" sz="2000" dirty="0"/>
+              <a:t>會算出這群人的傾向分數極高。</a:t>
+            </a:r>
+          </a:p>
+          <a:p>
+            <a:endParaRPr kumimoji="1" lang="zh-TW" altLang="en-US" sz="2000" dirty="0"/>
+          </a:p>
+          <a:p>
+            <a:r>
+              <a:rPr kumimoji="1" lang="zh-TW" altLang="en-US" sz="2000" dirty="0"/>
+              <a:t>模型會自動調低這群人的權重。</a:t>
+            </a:r>
+          </a:p>
+          <a:p>
+            <a:endParaRPr kumimoji="1" lang="zh-TW" altLang="en-US" sz="2000" dirty="0"/>
+          </a:p>
+          <a:p>
+            <a:r>
+              <a:rPr kumimoji="1" lang="zh-TW" altLang="en-US" sz="2000" dirty="0"/>
+              <a:t>最終計算總平均滿意度時，結果會向「真實母體」靠攏。</a:t>
+            </a:r>
+          </a:p>
+        </p:txBody>
+      </p:sp>
+      <p:sp>
+        <p:nvSpPr>
+          <p:cNvPr id="4" name="投影片編號版面配置區 3">
+            <a:extLst>
+              <a:ext uri="{FF2B5EF4-FFF2-40B4-BE49-F238E27FC236}">
+                <a16:creationId xmlns:a16="http://schemas.microsoft.com/office/drawing/2014/main" id="{64988104-9334-8792-9756-F36D63F92C90}"/>
+              </a:ext>
+            </a:extLst>
+          </p:cNvPr>
+          <p:cNvSpPr>
+            <a:spLocks noGrp="1"/>
+          </p:cNvSpPr>
+          <p:nvPr>
+            <p:ph type="sldNum" sz="quarter" idx="12"/>
+          </p:nvPr>
+        </p:nvSpPr>
+        <p:spPr/>
+        <p:txBody>
+          <a:bodyPr/>
+          <a:lstStyle/>
+          <a:p>
+            <a:fld id="{34E21383-B02B-694B-B2AD-A967203CDE86}" type="slidenum">
+              <a:rPr lang="en-US" smtClean="0"/>
+              <a:t>21</a:t>
+            </a:fld>
+            <a:endParaRPr lang="en-US"/>
+          </a:p>
+        </p:txBody>
+      </p:sp>
+    </p:spTree>
+    <p:extLst>
+      <p:ext uri="{BB962C8B-B14F-4D97-AF65-F5344CB8AC3E}">
+        <p14:creationId xmlns:p14="http://schemas.microsoft.com/office/powerpoint/2010/main" val="1666849061"/>
+      </p:ext>
+    </p:extLst>
+  </p:cSld>
+  <p:clrMapOvr>
+    <a:masterClrMapping/>
+  </p:clrMapOvr>
+</p:sld>
+</file>
+
+<file path=ppt/slides/slide22.xml><?xml version="1.0" encoding="utf-8"?>
 <p:sld xmlns:a="http://schemas.openxmlformats.org/drawingml/2006/main" xmlns:r="http://schemas.openxmlformats.org/officeDocument/2006/relationships" xmlns:p="http://schemas.openxmlformats.org/presentationml/2006/main">
   <p:cSld>
     <p:spTree>
@@ -7833,7 +8315,7 @@
           <a:p>
             <a:fld id="{34E21383-B02B-694B-B2AD-A967203CDE86}" type="slidenum">
               <a:rPr lang="en-US" smtClean="0"/>
-              <a:t>20</a:t>
+              <a:t>22</a:t>
             </a:fld>
             <a:endParaRPr lang="en-US"/>
           </a:p>
@@ -7852,7 +8334,7 @@
 </p:sld>
 </file>
 
-<file path=ppt/slides/slide21.xml><?xml version="1.0" encoding="utf-8"?>
+<file path=ppt/slides/slide23.xml><?xml version="1.0" encoding="utf-8"?>
 <p:sld xmlns:a="http://schemas.openxmlformats.org/drawingml/2006/main" xmlns:r="http://schemas.openxmlformats.org/officeDocument/2006/relationships" xmlns:p="http://schemas.openxmlformats.org/presentationml/2006/main">
   <p:cSld>
     <p:spTree>
@@ -7929,7 +8411,7 @@
           <a:p>
             <a:fld id="{34E21383-B02B-694B-B2AD-A967203CDE86}" type="slidenum">
               <a:rPr lang="en-US" smtClean="0"/>
-              <a:t>21</a:t>
+              <a:t>23</a:t>
             </a:fld>
             <a:endParaRPr lang="en-US"/>
           </a:p>
@@ -8046,7 +8528,7 @@
 </p:sld>
 </file>
 
-<file path=ppt/slides/slide22.xml><?xml version="1.0" encoding="utf-8"?>
+<file path=ppt/slides/slide24.xml><?xml version="1.0" encoding="utf-8"?>
 <p:sld xmlns:a="http://schemas.openxmlformats.org/drawingml/2006/main" xmlns:r="http://schemas.openxmlformats.org/officeDocument/2006/relationships" xmlns:p="http://schemas.openxmlformats.org/presentationml/2006/main">
   <p:cSld>
     <p:spTree>
@@ -8086,7 +8568,7 @@
           <a:p>
             <a:fld id="{34E21383-B02B-694B-B2AD-A967203CDE86}" type="slidenum">
               <a:rPr lang="en-US" smtClean="0"/>
-              <a:t>22</a:t>
+              <a:t>24</a:t>
             </a:fld>
             <a:endParaRPr lang="en-US"/>
           </a:p>
@@ -8135,7 +8617,7 @@
 </p:sld>
 </file>
 
-<file path=ppt/slides/slide23.xml><?xml version="1.0" encoding="utf-8"?>
+<file path=ppt/slides/slide25.xml><?xml version="1.0" encoding="utf-8"?>
 <p:sld xmlns:a="http://schemas.openxmlformats.org/drawingml/2006/main" xmlns:r="http://schemas.openxmlformats.org/officeDocument/2006/relationships" xmlns:p="http://schemas.openxmlformats.org/presentationml/2006/main">
   <p:cSld>
     <p:spTree>
@@ -8184,7 +8666,7 @@
               <a:t>混合式調查（二</a:t>
             </a:r>
             <a:r>
-              <a:rPr lang="en-US" altLang="zh-TW" dirty="0"/>
+              <a:rPr lang="ja-JP" altLang="en-US" dirty="0"/>
               <a:t>）</a:t>
             </a:r>
             <a:endParaRPr kumimoji="1" lang="zh-TW" altLang="en-US" dirty="0"/>
@@ -8256,8 +8738,8 @@
               </a:lnSpc>
             </a:pPr>
             <a:r>
-              <a:rPr kumimoji="1" lang="zh-TW" altLang="en-US" sz="2000"/>
-              <a:t>如果是固定追蹤樣本調查，可以先用面對面訪問，再用電話訪問追蹤。</a:t>
+              <a:rPr kumimoji="1" lang="zh-TW" altLang="en-US" sz="2000" dirty="0"/>
+              <a:t>如果是固定追蹤樣本調查，一般先用面對面訪問，再用電話訪問追蹤。</a:t>
             </a:r>
             <a:endParaRPr kumimoji="1" lang="en-US" altLang="zh-TW" sz="2000" dirty="0"/>
           </a:p>
@@ -8309,7 +8791,7 @@
           <a:p>
             <a:fld id="{34E21383-B02B-694B-B2AD-A967203CDE86}" type="slidenum">
               <a:rPr lang="en-US" smtClean="0"/>
-              <a:t>23</a:t>
+              <a:t>25</a:t>
             </a:fld>
             <a:endParaRPr lang="en-US"/>
           </a:p>
@@ -8328,7 +8810,7 @@
 </p:sld>
 </file>
 
-<file path=ppt/slides/slide24.xml><?xml version="1.0" encoding="utf-8"?>
+<file path=ppt/slides/slide26.xml><?xml version="1.0" encoding="utf-8"?>
 <p:sld xmlns:a="http://schemas.openxmlformats.org/drawingml/2006/main" xmlns:r="http://schemas.openxmlformats.org/officeDocument/2006/relationships" xmlns:p="http://schemas.openxmlformats.org/presentationml/2006/main">
   <p:cSld>
     <p:spTree>
@@ -8423,7 +8905,7 @@
           <a:p>
             <a:fld id="{34E21383-B02B-694B-B2AD-A967203CDE86}" type="slidenum">
               <a:rPr lang="en-US" smtClean="0"/>
-              <a:t>24</a:t>
+              <a:t>26</a:t>
             </a:fld>
             <a:endParaRPr lang="en-US"/>
           </a:p>
@@ -8574,7 +9056,7 @@
 </p:sld>
 </file>
 
-<file path=ppt/slides/slide25.xml><?xml version="1.0" encoding="utf-8"?>
+<file path=ppt/slides/slide27.xml><?xml version="1.0" encoding="utf-8"?>
 <p:sld xmlns:a="http://schemas.openxmlformats.org/drawingml/2006/main" xmlns:r="http://schemas.openxmlformats.org/officeDocument/2006/relationships" xmlns:p="http://schemas.openxmlformats.org/presentationml/2006/main">
   <p:cSld>
     <p:spTree>
@@ -8593,10 +9075,10 @@
       </p:grpSpPr>
       <p:sp>
         <p:nvSpPr>
-          <p:cNvPr id="2" name="標題 1">
-            <a:extLst>
-              <a:ext uri="{FF2B5EF4-FFF2-40B4-BE49-F238E27FC236}">
-                <a16:creationId xmlns:a16="http://schemas.microsoft.com/office/drawing/2014/main" id="{C2788B51-F32E-8A34-0FC4-F4C0663E3CD2}"/>
+          <p:cNvPr id="2" name="Title 1">
+            <a:extLst>
+              <a:ext uri="{FF2B5EF4-FFF2-40B4-BE49-F238E27FC236}">
+                <a16:creationId xmlns:a16="http://schemas.microsoft.com/office/drawing/2014/main" id="{027EF384-211A-E45A-CA80-675CF1B50621}"/>
               </a:ext>
             </a:extLst>
           </p:cNvPr>
@@ -8613,18 +9095,19 @@
           <a:lstStyle/>
           <a:p>
             <a:r>
-              <a:rPr kumimoji="1" lang="zh-TW" altLang="en-US" dirty="0"/>
-              <a:t>推薦文獻</a:t>
-            </a:r>
-          </a:p>
-        </p:txBody>
-      </p:sp>
-      <p:sp>
-        <p:nvSpPr>
-          <p:cNvPr id="3" name="內容版面配置區 2">
-            <a:extLst>
-              <a:ext uri="{FF2B5EF4-FFF2-40B4-BE49-F238E27FC236}">
-                <a16:creationId xmlns:a16="http://schemas.microsoft.com/office/drawing/2014/main" id="{7DB30E3B-4B36-E992-92C2-61F8D3F0A0C5}"/>
+              <a:rPr lang="ja-JP" altLang="en-US"/>
+              <a:t>混合式調查（三）</a:t>
+            </a:r>
+            <a:endParaRPr lang="en-US" dirty="0"/>
+          </a:p>
+        </p:txBody>
+      </p:sp>
+      <p:sp>
+        <p:nvSpPr>
+          <p:cNvPr id="3" name="Content Placeholder 2">
+            <a:extLst>
+              <a:ext uri="{FF2B5EF4-FFF2-40B4-BE49-F238E27FC236}">
+                <a16:creationId xmlns:a16="http://schemas.microsoft.com/office/drawing/2014/main" id="{798FF12E-D9A6-7583-B906-7EBC4F3E4CF4}"/>
               </a:ext>
             </a:extLst>
           </p:cNvPr>
@@ -8641,78 +9124,99 @@
           <a:lstStyle/>
           <a:p>
             <a:r>
-              <a:rPr kumimoji="1" lang="zh-TW" altLang="en-US" sz="2000" dirty="0"/>
-              <a:t>杜素豪、羅婉云、洪永泰，</a:t>
-            </a:r>
-            <a:r>
-              <a:rPr kumimoji="1" lang="en-US" altLang="zh-TW" sz="2000" dirty="0"/>
-              <a:t>2009</a:t>
-            </a:r>
-            <a:r>
-              <a:rPr kumimoji="1" lang="zh-TW" altLang="en-US" sz="2000" dirty="0"/>
-              <a:t>，</a:t>
-            </a:r>
-            <a:r>
-              <a:rPr lang="zh-TW" altLang="zh-TW" sz="2000" dirty="0">
-                <a:effectLst/>
-                <a:ea typeface="Hiragino Mincho Pro W3" panose="02020300000000000000" pitchFamily="18" charset="-128"/>
-                <a:cs typeface="Times New Roman (本文 CS 字型)"/>
-              </a:rPr>
-              <a:t> 〈</a:t>
-            </a:r>
-            <a:r>
-              <a:rPr kumimoji="1" lang="zh-TW" altLang="en-US" sz="2000" dirty="0"/>
-              <a:t>以入選機率調整法修正調查推估偏差的成效評估</a:t>
-            </a:r>
-            <a:r>
-              <a:rPr lang="zh-TW" altLang="zh-TW" sz="2000" dirty="0">
-                <a:effectLst/>
-                <a:ea typeface="Hiragino Mincho Pro W3" panose="02020300000000000000" pitchFamily="18" charset="-128"/>
-                <a:cs typeface="Times New Roman (本文 CS 字型)"/>
-              </a:rPr>
-              <a:t>〉</a:t>
-            </a:r>
-            <a:endParaRPr lang="en-US" altLang="zh-TW" sz="2000" dirty="0">
-              <a:effectLst/>
-              <a:ea typeface="Hiragino Mincho Pro W3" panose="02020300000000000000" pitchFamily="18" charset="-128"/>
-              <a:cs typeface="Times New Roman (本文 CS 字型)"/>
-            </a:endParaRPr>
-          </a:p>
-          <a:p>
-            <a:r>
-              <a:rPr lang="en" altLang="zh-TW" sz="2000" dirty="0">
-                <a:effectLst/>
-              </a:rPr>
-              <a:t>AAPOR 2020, Transitions from Telephone Surveys to Self-Administered and Mixed-Mode Surveys, AAPOR.</a:t>
-            </a:r>
-          </a:p>
-          <a:p>
-            <a:r>
-              <a:rPr lang="en" altLang="zh-TW" sz="2000" dirty="0">
-                <a:effectLst/>
-              </a:rPr>
-              <a:t>Sanders, D., Clarke, H.D., Stewart, M.C., Whiteley, P. 2007. “Does mode matter for modeling political choice: evidence from the British election study.” Polit. Anal. 15, 257–285.</a:t>
-            </a:r>
-          </a:p>
-          <a:p>
-            <a:r>
-              <a:rPr lang="en" altLang="zh-TW" sz="2000" dirty="0">
-                <a:effectLst/>
-              </a:rPr>
-              <a:t>Malhotra, N., Krosnick, J.A. 2007. “The effect of survey mode on inferences about political attitudes and behavior: comparing the 2000 and 2004 ANES to internet surveys with non-probability samples.” Polit. Anal. 15, 286–323.</a:t>
-            </a:r>
-          </a:p>
-          <a:p>
-            <a:endParaRPr kumimoji="1" lang="zh-TW" altLang="en-US" dirty="0"/>
-          </a:p>
-        </p:txBody>
-      </p:sp>
-      <p:sp>
-        <p:nvSpPr>
-          <p:cNvPr id="4" name="投影片編號版面配置區 3">
-            <a:extLst>
-              <a:ext uri="{FF2B5EF4-FFF2-40B4-BE49-F238E27FC236}">
-                <a16:creationId xmlns:a16="http://schemas.microsoft.com/office/drawing/2014/main" id="{B13E2320-A6CE-591D-7B3D-AAA8B0A65653}"/>
+              <a:rPr lang="en-US" dirty="0" err="1"/>
+              <a:t>混合式跟其他調查一樣要考慮以下幾點</a:t>
+            </a:r>
+            <a:r>
+              <a:rPr lang="en-US" dirty="0"/>
+              <a:t>：</a:t>
+            </a:r>
+          </a:p>
+          <a:p>
+            <a:pPr marL="514350" indent="-514350">
+              <a:buFont typeface="+mj-lt"/>
+              <a:buAutoNum type="arabicPeriod"/>
+            </a:pPr>
+            <a:r>
+              <a:rPr lang="en-US" dirty="0" err="1"/>
+              <a:t>需要收集的資料的複雜程度</a:t>
+            </a:r>
+            <a:r>
+              <a:rPr lang="en-US" dirty="0"/>
+              <a:t>；</a:t>
+            </a:r>
+          </a:p>
+          <a:p>
+            <a:pPr marL="514350" indent="-514350">
+              <a:buFont typeface="+mj-lt"/>
+              <a:buAutoNum type="arabicPeriod"/>
+            </a:pPr>
+            <a:r>
+              <a:rPr lang="en-US" dirty="0" err="1"/>
+              <a:t>問卷的長度以及可以訪問的時間</a:t>
+            </a:r>
+            <a:r>
+              <a:rPr lang="en-US" dirty="0"/>
+              <a:t>；</a:t>
+            </a:r>
+          </a:p>
+          <a:p>
+            <a:pPr marL="514350" indent="-514350">
+              <a:buFont typeface="+mj-lt"/>
+              <a:buAutoNum type="arabicPeriod"/>
+            </a:pPr>
+            <a:r>
+              <a:rPr lang="en-US" dirty="0" err="1"/>
+              <a:t>問題的敏感程度</a:t>
+            </a:r>
+            <a:r>
+              <a:rPr lang="en-US" dirty="0"/>
+              <a:t>；</a:t>
+            </a:r>
+          </a:p>
+          <a:p>
+            <a:pPr marL="514350" indent="-514350">
+              <a:buFont typeface="+mj-lt"/>
+              <a:buAutoNum type="arabicPeriod"/>
+            </a:pPr>
+            <a:r>
+              <a:rPr lang="en-US" dirty="0" err="1"/>
+              <a:t>過去問卷採用的格式</a:t>
+            </a:r>
+            <a:r>
+              <a:rPr lang="en-US" dirty="0"/>
+              <a:t>；</a:t>
+            </a:r>
+          </a:p>
+          <a:p>
+            <a:pPr marL="514350" indent="-514350">
+              <a:buFont typeface="+mj-lt"/>
+              <a:buAutoNum type="arabicPeriod"/>
+            </a:pPr>
+            <a:r>
+              <a:rPr lang="en-US" dirty="0" err="1"/>
+              <a:t>計畫的預算，特別是面對面訪問</a:t>
+            </a:r>
+            <a:r>
+              <a:rPr lang="en-US" dirty="0"/>
+              <a:t>。</a:t>
+            </a:r>
+          </a:p>
+          <a:p>
+            <a:pPr marL="514350" indent="-514350">
+              <a:buFont typeface="+mj-lt"/>
+              <a:buAutoNum type="arabicPeriod"/>
+            </a:pPr>
+            <a:endParaRPr lang="en-US" dirty="0"/>
+          </a:p>
+        </p:txBody>
+      </p:sp>
+      <p:sp>
+        <p:nvSpPr>
+          <p:cNvPr id="4" name="Slide Number Placeholder 3">
+            <a:extLst>
+              <a:ext uri="{FF2B5EF4-FFF2-40B4-BE49-F238E27FC236}">
+                <a16:creationId xmlns:a16="http://schemas.microsoft.com/office/drawing/2014/main" id="{DF4CC761-38B2-7397-58CF-06F15D99509A}"/>
               </a:ext>
             </a:extLst>
           </p:cNvPr>
@@ -8730,7 +9234,7 @@
           <a:p>
             <a:fld id="{34E21383-B02B-694B-B2AD-A967203CDE86}" type="slidenum">
               <a:rPr lang="en-US" smtClean="0"/>
-              <a:t>25</a:t>
+              <a:t>27</a:t>
             </a:fld>
             <a:endParaRPr lang="en-US"/>
           </a:p>
@@ -8739,7 +9243,684 @@
     </p:spTree>
     <p:extLst>
       <p:ext uri="{BB962C8B-B14F-4D97-AF65-F5344CB8AC3E}">
-        <p14:creationId xmlns:p14="http://schemas.microsoft.com/office/powerpoint/2010/main" val="1994321973"/>
+        <p14:creationId xmlns:p14="http://schemas.microsoft.com/office/powerpoint/2010/main" val="2070263140"/>
+      </p:ext>
+    </p:extLst>
+  </p:cSld>
+  <p:clrMapOvr>
+    <a:masterClrMapping/>
+  </p:clrMapOvr>
+</p:sld>
+</file>
+
+<file path=ppt/slides/slide28.xml><?xml version="1.0" encoding="utf-8"?>
+<p:sld xmlns:a="http://schemas.openxmlformats.org/drawingml/2006/main" xmlns:r="http://schemas.openxmlformats.org/officeDocument/2006/relationships" xmlns:p="http://schemas.openxmlformats.org/presentationml/2006/main">
+  <p:cSld>
+    <p:spTree>
+      <p:nvGrpSpPr>
+        <p:cNvPr id="1" name=""/>
+        <p:cNvGrpSpPr/>
+        <p:nvPr/>
+      </p:nvGrpSpPr>
+      <p:grpSpPr>
+        <a:xfrm>
+          <a:off x="0" y="0"/>
+          <a:ext cx="0" cy="0"/>
+          <a:chOff x="0" y="0"/>
+          <a:chExt cx="0" cy="0"/>
+        </a:xfrm>
+      </p:grpSpPr>
+      <p:sp>
+        <p:nvSpPr>
+          <p:cNvPr id="2" name="Title 1">
+            <a:extLst>
+              <a:ext uri="{FF2B5EF4-FFF2-40B4-BE49-F238E27FC236}">
+                <a16:creationId xmlns:a16="http://schemas.microsoft.com/office/drawing/2014/main" id="{7983CA17-C87D-DA08-A880-2C7AFEAB86D3}"/>
+              </a:ext>
+            </a:extLst>
+          </p:cNvPr>
+          <p:cNvSpPr>
+            <a:spLocks noGrp="1"/>
+          </p:cNvSpPr>
+          <p:nvPr>
+            <p:ph type="title"/>
+          </p:nvPr>
+        </p:nvSpPr>
+        <p:spPr/>
+        <p:txBody>
+          <a:bodyPr/>
+          <a:lstStyle/>
+          <a:p>
+            <a:r>
+              <a:rPr lang="en-US" dirty="0" err="1"/>
+              <a:t>自填問卷調查的比較</a:t>
+            </a:r>
+            <a:endParaRPr lang="en-US" dirty="0"/>
+          </a:p>
+        </p:txBody>
+      </p:sp>
+      <p:graphicFrame>
+        <p:nvGraphicFramePr>
+          <p:cNvPr id="5" name="Content Placeholder 4">
+            <a:extLst>
+              <a:ext uri="{FF2B5EF4-FFF2-40B4-BE49-F238E27FC236}">
+                <a16:creationId xmlns:a16="http://schemas.microsoft.com/office/drawing/2014/main" id="{95F28D88-1F0C-CF31-482C-991E16875906}"/>
+              </a:ext>
+            </a:extLst>
+          </p:cNvPr>
+          <p:cNvGraphicFramePr>
+            <a:graphicFrameLocks noGrp="1"/>
+          </p:cNvGraphicFramePr>
+          <p:nvPr>
+            <p:ph idx="1"/>
+            <p:extLst>
+              <p:ext uri="{D42A27DB-BD31-4B8C-83A1-F6EECF244321}">
+                <p14:modId xmlns:p14="http://schemas.microsoft.com/office/powerpoint/2010/main" val="3388696421"/>
+              </p:ext>
+            </p:extLst>
+          </p:nvPr>
+        </p:nvGraphicFramePr>
+        <p:xfrm>
+          <a:off x="838200" y="1825625"/>
+          <a:ext cx="10515600" cy="1828800"/>
+        </p:xfrm>
+        <a:graphic>
+          <a:graphicData uri="http://schemas.openxmlformats.org/drawingml/2006/table">
+            <a:tbl>
+              <a:tblPr firstRow="1" bandRow="1">
+                <a:tableStyleId>{91EBBBCC-DAD2-459C-BE2E-F6DE35CF9A28}</a:tableStyleId>
+              </a:tblPr>
+              <a:tblGrid>
+                <a:gridCol w="1231232">
+                  <a:extLst>
+                    <a:ext uri="{9D8B030D-6E8A-4147-A177-3AD203B41FA5}">
+                      <a16:colId xmlns:a16="http://schemas.microsoft.com/office/drawing/2014/main" val="2748985122"/>
+                    </a:ext>
+                  </a:extLst>
+                </a:gridCol>
+                <a:gridCol w="3380873">
+                  <a:extLst>
+                    <a:ext uri="{9D8B030D-6E8A-4147-A177-3AD203B41FA5}">
+                      <a16:colId xmlns:a16="http://schemas.microsoft.com/office/drawing/2014/main" val="1517892162"/>
+                    </a:ext>
+                  </a:extLst>
+                </a:gridCol>
+                <a:gridCol w="3274595">
+                  <a:extLst>
+                    <a:ext uri="{9D8B030D-6E8A-4147-A177-3AD203B41FA5}">
+                      <a16:colId xmlns:a16="http://schemas.microsoft.com/office/drawing/2014/main" val="1740108010"/>
+                    </a:ext>
+                  </a:extLst>
+                </a:gridCol>
+                <a:gridCol w="2628900">
+                  <a:extLst>
+                    <a:ext uri="{9D8B030D-6E8A-4147-A177-3AD203B41FA5}">
+                      <a16:colId xmlns:a16="http://schemas.microsoft.com/office/drawing/2014/main" val="2766263723"/>
+                    </a:ext>
+                  </a:extLst>
+                </a:gridCol>
+              </a:tblGrid>
+              <a:tr h="370840">
+                <a:tc>
+                  <a:txBody>
+                    <a:bodyPr/>
+                    <a:lstStyle/>
+                    <a:p>
+                      <a:endParaRPr lang="en-US" sz="2400" dirty="0"/>
+                    </a:p>
+                  </a:txBody>
+                  <a:tcPr/>
+                </a:tc>
+                <a:tc>
+                  <a:txBody>
+                    <a:bodyPr/>
+                    <a:lstStyle/>
+                    <a:p>
+                      <a:r>
+                        <a:rPr lang="en-US" sz="2400" dirty="0" err="1"/>
+                        <a:t>拒訪</a:t>
+                      </a:r>
+                      <a:r>
+                        <a:rPr lang="en-US" sz="2400" dirty="0"/>
+                        <a:t>(Unit </a:t>
+                      </a:r>
+                      <a:r>
+                        <a:rPr lang="en-US" sz="2400" dirty="0" err="1"/>
+                        <a:t>Nonrespnse</a:t>
+                      </a:r>
+                      <a:r>
+                        <a:rPr lang="en-US" sz="2400" dirty="0"/>
+                        <a:t>)</a:t>
+                      </a:r>
+                    </a:p>
+                  </a:txBody>
+                  <a:tcPr/>
+                </a:tc>
+                <a:tc>
+                  <a:txBody>
+                    <a:bodyPr/>
+                    <a:lstStyle/>
+                    <a:p>
+                      <a:r>
+                        <a:rPr lang="en-US" sz="2400" dirty="0" err="1"/>
+                        <a:t>拒答</a:t>
+                      </a:r>
+                      <a:r>
+                        <a:rPr lang="en-US" sz="2400" dirty="0"/>
+                        <a:t>(Item </a:t>
+                      </a:r>
+                      <a:r>
+                        <a:rPr lang="en-US" sz="2400" dirty="0" err="1"/>
+                        <a:t>Nonrespnse</a:t>
+                      </a:r>
+                      <a:r>
+                        <a:rPr lang="en-US" sz="2400" dirty="0"/>
+                        <a:t>)</a:t>
+                      </a:r>
+                    </a:p>
+                  </a:txBody>
+                  <a:tcPr/>
+                </a:tc>
+                <a:tc>
+                  <a:txBody>
+                    <a:bodyPr/>
+                    <a:lstStyle/>
+                    <a:p>
+                      <a:r>
+                        <a:rPr lang="en-US" sz="2400" dirty="0" err="1"/>
+                        <a:t>社會期待</a:t>
+                      </a:r>
+                      <a:endParaRPr lang="en-US" sz="2400" dirty="0"/>
+                    </a:p>
+                  </a:txBody>
+                  <a:tcPr/>
+                </a:tc>
+                <a:extLst>
+                  <a:ext uri="{0D108BD9-81ED-4DB2-BD59-A6C34878D82A}">
+                    <a16:rowId xmlns:a16="http://schemas.microsoft.com/office/drawing/2014/main" val="3539133915"/>
+                  </a:ext>
+                </a:extLst>
+              </a:tr>
+              <a:tr h="370840">
+                <a:tc>
+                  <a:txBody>
+                    <a:bodyPr/>
+                    <a:lstStyle/>
+                    <a:p>
+                      <a:r>
+                        <a:rPr lang="en-US" sz="2400" dirty="0"/>
+                        <a:t>CATI</a:t>
+                      </a:r>
+                    </a:p>
+                  </a:txBody>
+                  <a:tcPr/>
+                </a:tc>
+                <a:tc>
+                  <a:txBody>
+                    <a:bodyPr/>
+                    <a:lstStyle/>
+                    <a:p>
+                      <a:r>
+                        <a:rPr lang="en-US" sz="2400" dirty="0" err="1"/>
+                        <a:t>最好</a:t>
+                      </a:r>
+                      <a:endParaRPr lang="en-US" sz="2400" dirty="0"/>
+                    </a:p>
+                  </a:txBody>
+                  <a:tcPr/>
+                </a:tc>
+                <a:tc>
+                  <a:txBody>
+                    <a:bodyPr/>
+                    <a:lstStyle/>
+                    <a:p>
+                      <a:endParaRPr lang="en-US" sz="2400"/>
+                    </a:p>
+                  </a:txBody>
+                  <a:tcPr/>
+                </a:tc>
+                <a:tc>
+                  <a:txBody>
+                    <a:bodyPr/>
+                    <a:lstStyle/>
+                    <a:p>
+                      <a:endParaRPr lang="en-US" sz="2400"/>
+                    </a:p>
+                  </a:txBody>
+                  <a:tcPr/>
+                </a:tc>
+                <a:extLst>
+                  <a:ext uri="{0D108BD9-81ED-4DB2-BD59-A6C34878D82A}">
+                    <a16:rowId xmlns:a16="http://schemas.microsoft.com/office/drawing/2014/main" val="284673001"/>
+                  </a:ext>
+                </a:extLst>
+              </a:tr>
+              <a:tr h="370840">
+                <a:tc>
+                  <a:txBody>
+                    <a:bodyPr/>
+                    <a:lstStyle/>
+                    <a:p>
+                      <a:r>
+                        <a:rPr lang="en-US" sz="2400" dirty="0"/>
+                        <a:t>Web</a:t>
+                      </a:r>
+                    </a:p>
+                  </a:txBody>
+                  <a:tcPr/>
+                </a:tc>
+                <a:tc>
+                  <a:txBody>
+                    <a:bodyPr/>
+                    <a:lstStyle/>
+                    <a:p>
+                      <a:endParaRPr lang="en-US" sz="2400" dirty="0"/>
+                    </a:p>
+                  </a:txBody>
+                  <a:tcPr/>
+                </a:tc>
+                <a:tc>
+                  <a:txBody>
+                    <a:bodyPr/>
+                    <a:lstStyle/>
+                    <a:p>
+                      <a:r>
+                        <a:rPr lang="en-US" sz="2400" dirty="0" err="1"/>
+                        <a:t>最好</a:t>
+                      </a:r>
+                      <a:endParaRPr lang="en-US" sz="2400" dirty="0"/>
+                    </a:p>
+                  </a:txBody>
+                  <a:tcPr/>
+                </a:tc>
+                <a:tc>
+                  <a:txBody>
+                    <a:bodyPr/>
+                    <a:lstStyle/>
+                    <a:p>
+                      <a:r>
+                        <a:rPr lang="en-US" sz="2400" dirty="0" err="1"/>
+                        <a:t>最好</a:t>
+                      </a:r>
+                      <a:endParaRPr lang="en-US" sz="2400" dirty="0"/>
+                    </a:p>
+                  </a:txBody>
+                  <a:tcPr/>
+                </a:tc>
+                <a:extLst>
+                  <a:ext uri="{0D108BD9-81ED-4DB2-BD59-A6C34878D82A}">
+                    <a16:rowId xmlns:a16="http://schemas.microsoft.com/office/drawing/2014/main" val="3199772765"/>
+                  </a:ext>
+                </a:extLst>
+              </a:tr>
+              <a:tr h="370840">
+                <a:tc>
+                  <a:txBody>
+                    <a:bodyPr/>
+                    <a:lstStyle/>
+                    <a:p>
+                      <a:r>
+                        <a:rPr lang="en-US" sz="2400" dirty="0"/>
+                        <a:t>IVR</a:t>
+                      </a:r>
+                    </a:p>
+                  </a:txBody>
+                  <a:tcPr/>
+                </a:tc>
+                <a:tc>
+                  <a:txBody>
+                    <a:bodyPr/>
+                    <a:lstStyle/>
+                    <a:p>
+                      <a:endParaRPr lang="en-US" sz="2400" dirty="0"/>
+                    </a:p>
+                  </a:txBody>
+                  <a:tcPr/>
+                </a:tc>
+                <a:tc>
+                  <a:txBody>
+                    <a:bodyPr/>
+                    <a:lstStyle/>
+                    <a:p>
+                      <a:endParaRPr lang="en-US" sz="2400" dirty="0"/>
+                    </a:p>
+                  </a:txBody>
+                  <a:tcPr/>
+                </a:tc>
+                <a:tc>
+                  <a:txBody>
+                    <a:bodyPr/>
+                    <a:lstStyle/>
+                    <a:p>
+                      <a:endParaRPr lang="en-US" sz="2400" dirty="0"/>
+                    </a:p>
+                  </a:txBody>
+                  <a:tcPr/>
+                </a:tc>
+                <a:extLst>
+                  <a:ext uri="{0D108BD9-81ED-4DB2-BD59-A6C34878D82A}">
+                    <a16:rowId xmlns:a16="http://schemas.microsoft.com/office/drawing/2014/main" val="2466610254"/>
+                  </a:ext>
+                </a:extLst>
+              </a:tr>
+            </a:tbl>
+          </a:graphicData>
+        </a:graphic>
+      </p:graphicFrame>
+      <p:sp>
+        <p:nvSpPr>
+          <p:cNvPr id="4" name="Slide Number Placeholder 3">
+            <a:extLst>
+              <a:ext uri="{FF2B5EF4-FFF2-40B4-BE49-F238E27FC236}">
+                <a16:creationId xmlns:a16="http://schemas.microsoft.com/office/drawing/2014/main" id="{48EE0FE6-00EE-77EF-2280-2BD31CAF222E}"/>
+              </a:ext>
+            </a:extLst>
+          </p:cNvPr>
+          <p:cNvSpPr>
+            <a:spLocks noGrp="1"/>
+          </p:cNvSpPr>
+          <p:nvPr>
+            <p:ph type="sldNum" sz="quarter" idx="12"/>
+          </p:nvPr>
+        </p:nvSpPr>
+        <p:spPr/>
+        <p:txBody>
+          <a:bodyPr/>
+          <a:lstStyle/>
+          <a:p>
+            <a:fld id="{34E21383-B02B-694B-B2AD-A967203CDE86}" type="slidenum">
+              <a:rPr lang="en-US" smtClean="0"/>
+              <a:t>28</a:t>
+            </a:fld>
+            <a:endParaRPr lang="en-US"/>
+          </a:p>
+        </p:txBody>
+      </p:sp>
+      <p:sp>
+        <p:nvSpPr>
+          <p:cNvPr id="6" name="文字方塊 7">
+            <a:extLst>
+              <a:ext uri="{FF2B5EF4-FFF2-40B4-BE49-F238E27FC236}">
+                <a16:creationId xmlns:a16="http://schemas.microsoft.com/office/drawing/2014/main" id="{E08548B5-373F-99A0-9635-FFECEAE384C1}"/>
+              </a:ext>
+            </a:extLst>
+          </p:cNvPr>
+          <p:cNvSpPr txBox="1"/>
+          <p:nvPr/>
+        </p:nvSpPr>
+        <p:spPr>
+          <a:xfrm>
+            <a:off x="1726922" y="5651593"/>
+            <a:ext cx="8251965" cy="1015663"/>
+          </a:xfrm>
+          <a:prstGeom prst="rect">
+            <a:avLst/>
+          </a:prstGeom>
+          <a:noFill/>
+        </p:spPr>
+        <p:txBody>
+          <a:bodyPr wrap="square">
+            <a:spAutoFit/>
+          </a:bodyPr>
+          <a:lstStyle/>
+          <a:p>
+            <a:r>
+              <a:rPr lang="en" altLang="zh-TW" sz="2000" dirty="0">
+                <a:solidFill>
+                  <a:schemeClr val="tx1"/>
+                </a:solidFill>
+              </a:rPr>
+              <a:t>Source: Knapp, H. &amp; Kirk, S. 2003. ”Using Pencil and Paper, Internet and </a:t>
+            </a:r>
+            <a:r>
+              <a:rPr lang="en" altLang="zh-TW" sz="2000" dirty="0" err="1">
+                <a:solidFill>
+                  <a:schemeClr val="tx1"/>
+                </a:solidFill>
+              </a:rPr>
+              <a:t>Toouch</a:t>
+            </a:r>
+            <a:r>
+              <a:rPr lang="en" altLang="zh-TW" sz="2000" dirty="0">
+                <a:solidFill>
+                  <a:schemeClr val="tx1"/>
+                </a:solidFill>
+              </a:rPr>
+              <a:t>-tone Phones for Self-administered Surveys: Does Methodology Matter? </a:t>
+            </a:r>
+            <a:r>
+              <a:rPr lang="en" altLang="zh-TW" sz="2000" i="1" dirty="0">
+                <a:solidFill>
+                  <a:schemeClr val="tx1"/>
+                </a:solidFill>
+              </a:rPr>
+              <a:t>Computers in Human Behavior</a:t>
+            </a:r>
+            <a:r>
+              <a:rPr lang="en" altLang="zh-TW" sz="2000" dirty="0">
+                <a:solidFill>
+                  <a:schemeClr val="tx1"/>
+                </a:solidFill>
+              </a:rPr>
+              <a:t> 19:117-134. </a:t>
+            </a:r>
+            <a:endParaRPr lang="zh-TW" altLang="en-US" sz="2000" dirty="0">
+              <a:solidFill>
+                <a:schemeClr val="tx1"/>
+              </a:solidFill>
+            </a:endParaRPr>
+          </a:p>
+        </p:txBody>
+      </p:sp>
+    </p:spTree>
+    <p:extLst>
+      <p:ext uri="{BB962C8B-B14F-4D97-AF65-F5344CB8AC3E}">
+        <p14:creationId xmlns:p14="http://schemas.microsoft.com/office/powerpoint/2010/main" val="2088718810"/>
+      </p:ext>
+    </p:extLst>
+  </p:cSld>
+  <p:clrMapOvr>
+    <a:masterClrMapping/>
+  </p:clrMapOvr>
+</p:sld>
+</file>
+
+<file path=ppt/slides/slide29.xml><?xml version="1.0" encoding="utf-8"?>
+<p:sld xmlns:a="http://schemas.openxmlformats.org/drawingml/2006/main" xmlns:r="http://schemas.openxmlformats.org/officeDocument/2006/relationships" xmlns:p="http://schemas.openxmlformats.org/presentationml/2006/main">
+  <p:cSld>
+    <p:spTree>
+      <p:nvGrpSpPr>
+        <p:cNvPr id="1" name=""/>
+        <p:cNvGrpSpPr/>
+        <p:nvPr/>
+      </p:nvGrpSpPr>
+      <p:grpSpPr>
+        <a:xfrm>
+          <a:off x="0" y="0"/>
+          <a:ext cx="0" cy="0"/>
+          <a:chOff x="0" y="0"/>
+          <a:chExt cx="0" cy="0"/>
+        </a:xfrm>
+      </p:grpSpPr>
+      <p:sp>
+        <p:nvSpPr>
+          <p:cNvPr id="2" name="Title 1">
+            <a:extLst>
+              <a:ext uri="{FF2B5EF4-FFF2-40B4-BE49-F238E27FC236}">
+                <a16:creationId xmlns:a16="http://schemas.microsoft.com/office/drawing/2014/main" id="{18CB2DDB-1A65-C440-A75A-47943A72976D}"/>
+              </a:ext>
+            </a:extLst>
+          </p:cNvPr>
+          <p:cNvSpPr>
+            <a:spLocks noGrp="1"/>
+          </p:cNvSpPr>
+          <p:nvPr>
+            <p:ph type="title"/>
+          </p:nvPr>
+        </p:nvSpPr>
+        <p:spPr/>
+        <p:txBody>
+          <a:bodyPr/>
+          <a:lstStyle/>
+          <a:p>
+            <a:r>
+              <a:rPr lang="en-US" dirty="0" err="1"/>
+              <a:t>調查模式效應</a:t>
+            </a:r>
+            <a:r>
+              <a:rPr lang="en-US" dirty="0"/>
+              <a:t>(mode effect)</a:t>
+            </a:r>
+          </a:p>
+        </p:txBody>
+      </p:sp>
+      <p:sp>
+        <p:nvSpPr>
+          <p:cNvPr id="3" name="Content Placeholder 2">
+            <a:extLst>
+              <a:ext uri="{FF2B5EF4-FFF2-40B4-BE49-F238E27FC236}">
+                <a16:creationId xmlns:a16="http://schemas.microsoft.com/office/drawing/2014/main" id="{022E5D90-A2ED-CC33-84F3-2D40397B8620}"/>
+              </a:ext>
+            </a:extLst>
+          </p:cNvPr>
+          <p:cNvSpPr>
+            <a:spLocks noGrp="1"/>
+          </p:cNvSpPr>
+          <p:nvPr>
+            <p:ph idx="1"/>
+          </p:nvPr>
+        </p:nvSpPr>
+        <p:spPr/>
+        <p:txBody>
+          <a:bodyPr/>
+          <a:lstStyle/>
+          <a:p>
+            <a:pPr>
+              <a:lnSpc>
+                <a:spcPct val="150000"/>
+              </a:lnSpc>
+            </a:pPr>
+            <a:r>
+              <a:rPr lang="en-US" sz="2000" dirty="0" err="1"/>
+              <a:t>為了避免因為不同的調查模式影響受訪者的回答，有以下做法</a:t>
+            </a:r>
+            <a:r>
+              <a:rPr lang="en-US" sz="2000" dirty="0"/>
+              <a:t>：</a:t>
+            </a:r>
+          </a:p>
+          <a:p>
+            <a:pPr marL="514350" indent="-514350">
+              <a:lnSpc>
+                <a:spcPct val="150000"/>
+              </a:lnSpc>
+              <a:buFont typeface="+mj-lt"/>
+              <a:buAutoNum type="arabicPeriod"/>
+            </a:pPr>
+            <a:r>
+              <a:rPr lang="en-US" sz="2000" dirty="0" err="1"/>
+              <a:t>不同的模式應該使用相同的問卷</a:t>
+            </a:r>
+            <a:endParaRPr lang="en-US" sz="2000" dirty="0"/>
+          </a:p>
+          <a:p>
+            <a:pPr marL="514350" indent="-514350">
+              <a:lnSpc>
+                <a:spcPct val="150000"/>
+              </a:lnSpc>
+              <a:buFont typeface="+mj-lt"/>
+              <a:buAutoNum type="arabicPeriod"/>
+            </a:pPr>
+            <a:r>
+              <a:rPr lang="en-US" sz="2000" dirty="0" err="1"/>
+              <a:t>封閉式問題的選項不要太多</a:t>
+            </a:r>
+            <a:endParaRPr lang="en-US" sz="2000" dirty="0"/>
+          </a:p>
+          <a:p>
+            <a:pPr marL="514350" indent="-514350">
+              <a:lnSpc>
+                <a:spcPct val="150000"/>
+              </a:lnSpc>
+              <a:buFont typeface="+mj-lt"/>
+              <a:buAutoNum type="arabicPeriod"/>
+            </a:pPr>
+            <a:r>
+              <a:rPr lang="en-US" sz="2000" dirty="0" err="1"/>
+              <a:t>封閉式問題的選項的文字一致</a:t>
+            </a:r>
+            <a:endParaRPr lang="en-US" sz="2000" dirty="0"/>
+          </a:p>
+          <a:p>
+            <a:pPr marL="514350" indent="-514350">
+              <a:lnSpc>
+                <a:spcPct val="150000"/>
+              </a:lnSpc>
+              <a:buFont typeface="+mj-lt"/>
+              <a:buAutoNum type="arabicPeriod"/>
+            </a:pPr>
+            <a:r>
+              <a:rPr lang="en-US" sz="2000" dirty="0" err="1"/>
+              <a:t>封閉式問題的選項的順序隨機</a:t>
+            </a:r>
+            <a:endParaRPr lang="en-US" sz="2000" dirty="0"/>
+          </a:p>
+          <a:p>
+            <a:pPr marL="514350" indent="-514350">
+              <a:lnSpc>
+                <a:spcPct val="150000"/>
+              </a:lnSpc>
+              <a:buFont typeface="+mj-lt"/>
+              <a:buAutoNum type="arabicPeriod"/>
+            </a:pPr>
+            <a:r>
+              <a:rPr lang="en-US" sz="2000" dirty="0" err="1"/>
+              <a:t>題目應該呈現選項</a:t>
+            </a:r>
+            <a:endParaRPr lang="en-US" sz="2000" dirty="0"/>
+          </a:p>
+          <a:p>
+            <a:pPr marL="514350" indent="-514350">
+              <a:buFont typeface="+mj-lt"/>
+              <a:buAutoNum type="arabicPeriod"/>
+            </a:pPr>
+            <a:endParaRPr lang="en-US" dirty="0"/>
+          </a:p>
+        </p:txBody>
+      </p:sp>
+      <p:sp>
+        <p:nvSpPr>
+          <p:cNvPr id="4" name="Slide Number Placeholder 3">
+            <a:extLst>
+              <a:ext uri="{FF2B5EF4-FFF2-40B4-BE49-F238E27FC236}">
+                <a16:creationId xmlns:a16="http://schemas.microsoft.com/office/drawing/2014/main" id="{BC2FDA49-893E-59B4-3CA4-FF0F4190A339}"/>
+              </a:ext>
+            </a:extLst>
+          </p:cNvPr>
+          <p:cNvSpPr>
+            <a:spLocks noGrp="1"/>
+          </p:cNvSpPr>
+          <p:nvPr>
+            <p:ph type="sldNum" sz="quarter" idx="12"/>
+          </p:nvPr>
+        </p:nvSpPr>
+        <p:spPr/>
+        <p:txBody>
+          <a:bodyPr/>
+          <a:lstStyle/>
+          <a:p>
+            <a:fld id="{34E21383-B02B-694B-B2AD-A967203CDE86}" type="slidenum">
+              <a:rPr lang="en-US" smtClean="0"/>
+              <a:t>29</a:t>
+            </a:fld>
+            <a:endParaRPr lang="en-US"/>
+          </a:p>
+        </p:txBody>
+      </p:sp>
+    </p:spTree>
+    <p:extLst>
+      <p:ext uri="{BB962C8B-B14F-4D97-AF65-F5344CB8AC3E}">
+        <p14:creationId xmlns:p14="http://schemas.microsoft.com/office/powerpoint/2010/main" val="2809671408"/>
       </p:ext>
     </p:extLst>
   </p:cSld>
@@ -8955,7 +10136,667 @@
 </p:sld>
 </file>
 
+<file path=ppt/slides/slide30.xml><?xml version="1.0" encoding="utf-8"?>
+<p:sld xmlns:a="http://schemas.openxmlformats.org/drawingml/2006/main" xmlns:r="http://schemas.openxmlformats.org/officeDocument/2006/relationships" xmlns:p="http://schemas.openxmlformats.org/presentationml/2006/main">
+  <p:cSld>
+    <p:spTree>
+      <p:nvGrpSpPr>
+        <p:cNvPr id="1" name=""/>
+        <p:cNvGrpSpPr/>
+        <p:nvPr/>
+      </p:nvGrpSpPr>
+      <p:grpSpPr>
+        <a:xfrm>
+          <a:off x="0" y="0"/>
+          <a:ext cx="0" cy="0"/>
+          <a:chOff x="0" y="0"/>
+          <a:chExt cx="0" cy="0"/>
+        </a:xfrm>
+      </p:grpSpPr>
+      <p:sp>
+        <p:nvSpPr>
+          <p:cNvPr id="2" name="標題 1">
+            <a:extLst>
+              <a:ext uri="{FF2B5EF4-FFF2-40B4-BE49-F238E27FC236}">
+                <a16:creationId xmlns:a16="http://schemas.microsoft.com/office/drawing/2014/main" id="{C2788B51-F32E-8A34-0FC4-F4C0663E3CD2}"/>
+              </a:ext>
+            </a:extLst>
+          </p:cNvPr>
+          <p:cNvSpPr>
+            <a:spLocks noGrp="1"/>
+          </p:cNvSpPr>
+          <p:nvPr>
+            <p:ph type="title"/>
+          </p:nvPr>
+        </p:nvSpPr>
+        <p:spPr/>
+        <p:txBody>
+          <a:bodyPr/>
+          <a:lstStyle/>
+          <a:p>
+            <a:r>
+              <a:rPr kumimoji="1" lang="zh-TW" altLang="en-US" dirty="0"/>
+              <a:t>推薦文獻</a:t>
+            </a:r>
+          </a:p>
+        </p:txBody>
+      </p:sp>
+      <p:sp>
+        <p:nvSpPr>
+          <p:cNvPr id="3" name="內容版面配置區 2">
+            <a:extLst>
+              <a:ext uri="{FF2B5EF4-FFF2-40B4-BE49-F238E27FC236}">
+                <a16:creationId xmlns:a16="http://schemas.microsoft.com/office/drawing/2014/main" id="{7DB30E3B-4B36-E992-92C2-61F8D3F0A0C5}"/>
+              </a:ext>
+            </a:extLst>
+          </p:cNvPr>
+          <p:cNvSpPr>
+            <a:spLocks noGrp="1"/>
+          </p:cNvSpPr>
+          <p:nvPr>
+            <p:ph idx="1"/>
+          </p:nvPr>
+        </p:nvSpPr>
+        <p:spPr/>
+        <p:txBody>
+          <a:bodyPr/>
+          <a:lstStyle/>
+          <a:p>
+            <a:r>
+              <a:rPr kumimoji="1" lang="zh-TW" altLang="en-US" sz="2000" dirty="0"/>
+              <a:t>杜素豪、羅婉云、洪永泰，</a:t>
+            </a:r>
+            <a:r>
+              <a:rPr kumimoji="1" lang="en-US" altLang="zh-TW" sz="2000" dirty="0"/>
+              <a:t>2009</a:t>
+            </a:r>
+            <a:r>
+              <a:rPr kumimoji="1" lang="zh-TW" altLang="en-US" sz="2000" dirty="0"/>
+              <a:t>，</a:t>
+            </a:r>
+            <a:r>
+              <a:rPr lang="zh-TW" altLang="zh-TW" sz="2000" dirty="0">
+                <a:effectLst/>
+                <a:ea typeface="Hiragino Mincho Pro W3" panose="02020300000000000000" pitchFamily="18" charset="-128"/>
+                <a:cs typeface="Times New Roman (本文 CS 字型)"/>
+              </a:rPr>
+              <a:t> 〈</a:t>
+            </a:r>
+            <a:r>
+              <a:rPr kumimoji="1" lang="zh-TW" altLang="en-US" sz="2000" dirty="0"/>
+              <a:t>以入選機率調整法修正調查推估偏差的成效評估</a:t>
+            </a:r>
+            <a:r>
+              <a:rPr lang="zh-TW" altLang="zh-TW" sz="2000" dirty="0">
+                <a:effectLst/>
+                <a:ea typeface="Hiragino Mincho Pro W3" panose="02020300000000000000" pitchFamily="18" charset="-128"/>
+                <a:cs typeface="Times New Roman (本文 CS 字型)"/>
+              </a:rPr>
+              <a:t>〉</a:t>
+            </a:r>
+            <a:endParaRPr lang="en-US" altLang="zh-TW" sz="2000" dirty="0">
+              <a:effectLst/>
+              <a:ea typeface="Hiragino Mincho Pro W3" panose="02020300000000000000" pitchFamily="18" charset="-128"/>
+              <a:cs typeface="Times New Roman (本文 CS 字型)"/>
+            </a:endParaRPr>
+          </a:p>
+          <a:p>
+            <a:r>
+              <a:rPr lang="en" altLang="zh-TW" sz="2000" dirty="0">
+                <a:effectLst/>
+              </a:rPr>
+              <a:t>AAPOR 2020, Transitions from Telephone Surveys to Self-Administered and Mixed-Mode Surveys, AAPOR.</a:t>
+            </a:r>
+          </a:p>
+          <a:p>
+            <a:r>
+              <a:rPr lang="en" altLang="zh-TW" sz="2000" dirty="0">
+                <a:effectLst/>
+              </a:rPr>
+              <a:t>Sanders, D., Clarke, H.D., Stewart, M.C., Whiteley, P. 2007. “Does mode matter for modeling political choice: evidence from the British election study.” Polit. Anal. 15, 257–285.</a:t>
+            </a:r>
+          </a:p>
+          <a:p>
+            <a:r>
+              <a:rPr lang="en" altLang="zh-TW" sz="2000" dirty="0">
+                <a:effectLst/>
+              </a:rPr>
+              <a:t>Malhotra, N., Krosnick, J.A. 2007. “The effect of survey mode on inferences about political attitudes and behavior: comparing the 2000 and 2004 ANES to internet surveys with non-probability samples.” Polit. Anal. 15, 286–323.</a:t>
+            </a:r>
+          </a:p>
+          <a:p>
+            <a:endParaRPr kumimoji="1" lang="zh-TW" altLang="en-US" dirty="0"/>
+          </a:p>
+        </p:txBody>
+      </p:sp>
+      <p:sp>
+        <p:nvSpPr>
+          <p:cNvPr id="4" name="投影片編號版面配置區 3">
+            <a:extLst>
+              <a:ext uri="{FF2B5EF4-FFF2-40B4-BE49-F238E27FC236}">
+                <a16:creationId xmlns:a16="http://schemas.microsoft.com/office/drawing/2014/main" id="{B13E2320-A6CE-591D-7B3D-AAA8B0A65653}"/>
+              </a:ext>
+            </a:extLst>
+          </p:cNvPr>
+          <p:cNvSpPr>
+            <a:spLocks noGrp="1"/>
+          </p:cNvSpPr>
+          <p:nvPr>
+            <p:ph type="sldNum" sz="quarter" idx="12"/>
+          </p:nvPr>
+        </p:nvSpPr>
+        <p:spPr/>
+        <p:txBody>
+          <a:bodyPr/>
+          <a:lstStyle/>
+          <a:p>
+            <a:fld id="{34E21383-B02B-694B-B2AD-A967203CDE86}" type="slidenum">
+              <a:rPr lang="en-US" smtClean="0"/>
+              <a:t>30</a:t>
+            </a:fld>
+            <a:endParaRPr lang="en-US"/>
+          </a:p>
+        </p:txBody>
+      </p:sp>
+    </p:spTree>
+    <p:extLst>
+      <p:ext uri="{BB962C8B-B14F-4D97-AF65-F5344CB8AC3E}">
+        <p14:creationId xmlns:p14="http://schemas.microsoft.com/office/powerpoint/2010/main" val="1994321973"/>
+      </p:ext>
+    </p:extLst>
+  </p:cSld>
+  <p:clrMapOvr>
+    <a:masterClrMapping/>
+  </p:clrMapOvr>
+</p:sld>
+</file>
+
 <file path=ppt/slides/slide4.xml><?xml version="1.0" encoding="utf-8"?>
+<p:sld xmlns:a="http://schemas.openxmlformats.org/drawingml/2006/main" xmlns:r="http://schemas.openxmlformats.org/officeDocument/2006/relationships" xmlns:p="http://schemas.openxmlformats.org/presentationml/2006/main">
+  <p:cSld>
+    <p:spTree>
+      <p:nvGrpSpPr>
+        <p:cNvPr id="1" name=""/>
+        <p:cNvGrpSpPr/>
+        <p:nvPr/>
+      </p:nvGrpSpPr>
+      <p:grpSpPr>
+        <a:xfrm>
+          <a:off x="0" y="0"/>
+          <a:ext cx="0" cy="0"/>
+          <a:chOff x="0" y="0"/>
+          <a:chExt cx="0" cy="0"/>
+        </a:xfrm>
+      </p:grpSpPr>
+      <p:sp>
+        <p:nvSpPr>
+          <p:cNvPr id="2" name="Title 1">
+            <a:extLst>
+              <a:ext uri="{FF2B5EF4-FFF2-40B4-BE49-F238E27FC236}">
+                <a16:creationId xmlns:a16="http://schemas.microsoft.com/office/drawing/2014/main" id="{952A90D3-7117-F717-333F-D13FF3F748A3}"/>
+              </a:ext>
+            </a:extLst>
+          </p:cNvPr>
+          <p:cNvSpPr>
+            <a:spLocks noGrp="1"/>
+          </p:cNvSpPr>
+          <p:nvPr>
+            <p:ph type="title"/>
+          </p:nvPr>
+        </p:nvSpPr>
+        <p:spPr/>
+        <p:txBody>
+          <a:bodyPr/>
+          <a:lstStyle/>
+          <a:p>
+            <a:r>
+              <a:rPr lang="en-US" dirty="0" err="1"/>
+              <a:t>網路調查的形式</a:t>
+            </a:r>
+            <a:endParaRPr lang="en-US" dirty="0"/>
+          </a:p>
+        </p:txBody>
+      </p:sp>
+      <p:sp>
+        <p:nvSpPr>
+          <p:cNvPr id="3" name="Content Placeholder 2">
+            <a:extLst>
+              <a:ext uri="{FF2B5EF4-FFF2-40B4-BE49-F238E27FC236}">
+                <a16:creationId xmlns:a16="http://schemas.microsoft.com/office/drawing/2014/main" id="{92F2E987-B646-D0E2-C981-9F208294A55C}"/>
+              </a:ext>
+            </a:extLst>
+          </p:cNvPr>
+          <p:cNvSpPr>
+            <a:spLocks noGrp="1"/>
+          </p:cNvSpPr>
+          <p:nvPr>
+            <p:ph idx="1"/>
+          </p:nvPr>
+        </p:nvSpPr>
+        <p:spPr/>
+        <p:txBody>
+          <a:bodyPr/>
+          <a:lstStyle/>
+          <a:p>
+            <a:pPr>
+              <a:lnSpc>
+                <a:spcPct val="150000"/>
+              </a:lnSpc>
+            </a:pPr>
+            <a:r>
+              <a:rPr lang="en-US" sz="2000" dirty="0" err="1"/>
+              <a:t>網路調查可以透過桌上型電腦</a:t>
+            </a:r>
+            <a:r>
+              <a:rPr lang="en-US" sz="2000" dirty="0"/>
+              <a:t>(laptop)、</a:t>
+            </a:r>
+            <a:r>
+              <a:rPr lang="en-US" sz="2000" dirty="0" err="1"/>
+              <a:t>手機</a:t>
+            </a:r>
+            <a:r>
+              <a:rPr lang="en-US" sz="2000" dirty="0"/>
+              <a:t>(smartphone)、</a:t>
+            </a:r>
+            <a:r>
+              <a:rPr lang="en-US" sz="2000" dirty="0" err="1"/>
+              <a:t>平板</a:t>
+            </a:r>
+            <a:r>
+              <a:rPr lang="en-US" sz="2000" dirty="0"/>
+              <a:t>(tablet)</a:t>
+            </a:r>
+            <a:r>
+              <a:rPr lang="en-US" sz="2000" dirty="0" err="1"/>
+              <a:t>等三種裝置填寫</a:t>
+            </a:r>
+            <a:r>
+              <a:rPr lang="en-US" sz="2000" dirty="0"/>
+              <a:t>。</a:t>
+            </a:r>
+          </a:p>
+          <a:p>
+            <a:pPr>
+              <a:lnSpc>
+                <a:spcPct val="150000"/>
+              </a:lnSpc>
+            </a:pPr>
+            <a:r>
+              <a:rPr lang="en-US" sz="2000" dirty="0" err="1"/>
+              <a:t>因為帶著手機隨時可以填寫問卷，有可能受到周遭環境的影響</a:t>
+            </a:r>
+            <a:r>
+              <a:rPr lang="en-US" sz="2000" dirty="0"/>
+              <a:t>。</a:t>
+            </a:r>
+          </a:p>
+          <a:p>
+            <a:pPr>
+              <a:lnSpc>
+                <a:spcPct val="150000"/>
+              </a:lnSpc>
+            </a:pPr>
+            <a:r>
+              <a:rPr lang="en-US" sz="2000" dirty="0" err="1"/>
+              <a:t>桌機的螢幕最大，有利於呈現比較多的資訊。研究者發現，使用桌機填寫有較低的測量誤差</a:t>
+            </a:r>
+            <a:r>
+              <a:rPr lang="en-US" sz="2000" dirty="0"/>
+              <a:t>(measurement error)。</a:t>
+            </a:r>
+          </a:p>
+          <a:p>
+            <a:pPr>
+              <a:lnSpc>
+                <a:spcPct val="150000"/>
+              </a:lnSpc>
+            </a:pPr>
+            <a:r>
+              <a:rPr lang="en-US" sz="2000" dirty="0" err="1"/>
+              <a:t>考慮螢幕大小可能影響受訪者的回答，網路調查的題目最好不要太長</a:t>
+            </a:r>
+            <a:r>
+              <a:rPr lang="en-US" sz="2000" dirty="0"/>
+              <a:t>。</a:t>
+            </a:r>
+          </a:p>
+          <a:p>
+            <a:pPr>
+              <a:lnSpc>
+                <a:spcPct val="150000"/>
+              </a:lnSpc>
+            </a:pPr>
+            <a:r>
+              <a:rPr lang="en-US" sz="2000" dirty="0" err="1"/>
+              <a:t>目前還沒有研究顯示，不同的人口背景的受訪者會選擇不同的裝置</a:t>
+            </a:r>
+            <a:r>
+              <a:rPr lang="en-US" sz="2000" dirty="0"/>
+              <a:t>。</a:t>
+            </a:r>
+          </a:p>
+          <a:p>
+            <a:endParaRPr lang="en-US" dirty="0"/>
+          </a:p>
+          <a:p>
+            <a:endParaRPr lang="en-US" dirty="0"/>
+          </a:p>
+        </p:txBody>
+      </p:sp>
+      <p:sp>
+        <p:nvSpPr>
+          <p:cNvPr id="4" name="Slide Number Placeholder 3">
+            <a:extLst>
+              <a:ext uri="{FF2B5EF4-FFF2-40B4-BE49-F238E27FC236}">
+                <a16:creationId xmlns:a16="http://schemas.microsoft.com/office/drawing/2014/main" id="{53A3020D-3BF9-9CE1-7286-F7E75BDC31D7}"/>
+              </a:ext>
+            </a:extLst>
+          </p:cNvPr>
+          <p:cNvSpPr>
+            <a:spLocks noGrp="1"/>
+          </p:cNvSpPr>
+          <p:nvPr>
+            <p:ph type="sldNum" sz="quarter" idx="12"/>
+          </p:nvPr>
+        </p:nvSpPr>
+        <p:spPr/>
+        <p:txBody>
+          <a:bodyPr/>
+          <a:lstStyle/>
+          <a:p>
+            <a:fld id="{34E21383-B02B-694B-B2AD-A967203CDE86}" type="slidenum">
+              <a:rPr lang="en-US" smtClean="0"/>
+              <a:t>4</a:t>
+            </a:fld>
+            <a:endParaRPr lang="en-US"/>
+          </a:p>
+        </p:txBody>
+      </p:sp>
+    </p:spTree>
+    <p:extLst>
+      <p:ext uri="{BB962C8B-B14F-4D97-AF65-F5344CB8AC3E}">
+        <p14:creationId xmlns:p14="http://schemas.microsoft.com/office/powerpoint/2010/main" val="1517939856"/>
+      </p:ext>
+    </p:extLst>
+  </p:cSld>
+  <p:clrMapOvr>
+    <a:masterClrMapping/>
+  </p:clrMapOvr>
+</p:sld>
+</file>
+
+<file path=ppt/slides/slide5.xml><?xml version="1.0" encoding="utf-8"?>
+<p:sld xmlns:a="http://schemas.openxmlformats.org/drawingml/2006/main" xmlns:r="http://schemas.openxmlformats.org/officeDocument/2006/relationships" xmlns:p="http://schemas.openxmlformats.org/presentationml/2006/main">
+  <p:cSld>
+    <p:spTree>
+      <p:nvGrpSpPr>
+        <p:cNvPr id="1" name=""/>
+        <p:cNvGrpSpPr/>
+        <p:nvPr/>
+      </p:nvGrpSpPr>
+      <p:grpSpPr>
+        <a:xfrm>
+          <a:off x="0" y="0"/>
+          <a:ext cx="0" cy="0"/>
+          <a:chOff x="0" y="0"/>
+          <a:chExt cx="0" cy="0"/>
+        </a:xfrm>
+      </p:grpSpPr>
+      <p:sp>
+        <p:nvSpPr>
+          <p:cNvPr id="2" name="Title 1">
+            <a:extLst>
+              <a:ext uri="{FF2B5EF4-FFF2-40B4-BE49-F238E27FC236}">
+                <a16:creationId xmlns:a16="http://schemas.microsoft.com/office/drawing/2014/main" id="{952A90D3-7117-F717-333F-D13FF3F748A3}"/>
+              </a:ext>
+            </a:extLst>
+          </p:cNvPr>
+          <p:cNvSpPr>
+            <a:spLocks noGrp="1"/>
+          </p:cNvSpPr>
+          <p:nvPr>
+            <p:ph type="title"/>
+          </p:nvPr>
+        </p:nvSpPr>
+        <p:spPr/>
+        <p:txBody>
+          <a:bodyPr/>
+          <a:lstStyle/>
+          <a:p>
+            <a:r>
+              <a:rPr lang="en-US" dirty="0" err="1"/>
+              <a:t>測量效應</a:t>
+            </a:r>
+            <a:r>
+              <a:rPr lang="en-US" dirty="0"/>
+              <a:t>(measurement effect)</a:t>
+            </a:r>
+          </a:p>
+        </p:txBody>
+      </p:sp>
+      <p:sp>
+        <p:nvSpPr>
+          <p:cNvPr id="3" name="Content Placeholder 2">
+            <a:extLst>
+              <a:ext uri="{FF2B5EF4-FFF2-40B4-BE49-F238E27FC236}">
+                <a16:creationId xmlns:a16="http://schemas.microsoft.com/office/drawing/2014/main" id="{92F2E987-B646-D0E2-C981-9F208294A55C}"/>
+              </a:ext>
+            </a:extLst>
+          </p:cNvPr>
+          <p:cNvSpPr>
+            <a:spLocks noGrp="1"/>
+          </p:cNvSpPr>
+          <p:nvPr>
+            <p:ph idx="1"/>
+          </p:nvPr>
+        </p:nvSpPr>
+        <p:spPr/>
+        <p:txBody>
+          <a:bodyPr>
+            <a:normAutofit lnSpcReduction="10000"/>
+          </a:bodyPr>
+          <a:lstStyle/>
+          <a:p>
+            <a:pPr>
+              <a:lnSpc>
+                <a:spcPct val="150000"/>
+              </a:lnSpc>
+            </a:pPr>
+            <a:r>
+              <a:rPr lang="ja-JP" altLang="en-US" sz="2000"/>
+              <a:t>測量效應指的是在調查過程中，由於「測量工具」或「環境因素」導致受訪者提供的答案偏離其「真實值」的現象。常見的測量效應來源包括：</a:t>
+            </a:r>
+          </a:p>
+          <a:p>
+            <a:pPr>
+              <a:lnSpc>
+                <a:spcPct val="150000"/>
+              </a:lnSpc>
+              <a:buFont typeface="Arial" panose="020B0604020202020204" pitchFamily="34" charset="0"/>
+              <a:buChar char="•"/>
+            </a:pPr>
+            <a:r>
+              <a:rPr lang="ja-JP" altLang="en-US" sz="2000" b="1"/>
+              <a:t>問卷設計：</a:t>
+            </a:r>
+            <a:r>
+              <a:rPr lang="ja-JP" altLang="en-US" sz="2000"/>
+              <a:t> 問題的措辭（</a:t>
+            </a:r>
+            <a:r>
+              <a:rPr lang="en-US" sz="2000" dirty="0"/>
+              <a:t>Wording）、</a:t>
+            </a:r>
+            <a:r>
+              <a:rPr lang="ja-JP" altLang="en-US" sz="2000"/>
+              <a:t>選項的順序（</a:t>
+            </a:r>
+            <a:r>
+              <a:rPr lang="en-US" sz="2000" dirty="0"/>
+              <a:t>Order effects）。</a:t>
+            </a:r>
+          </a:p>
+          <a:p>
+            <a:pPr>
+              <a:lnSpc>
+                <a:spcPct val="150000"/>
+              </a:lnSpc>
+              <a:buFont typeface="Arial" panose="020B0604020202020204" pitchFamily="34" charset="0"/>
+              <a:buChar char="•"/>
+            </a:pPr>
+            <a:r>
+              <a:rPr lang="ja-JP" altLang="en-US" sz="2000" b="1"/>
+              <a:t>受訪者負擔：</a:t>
+            </a:r>
+            <a:r>
+              <a:rPr lang="ja-JP" altLang="en-US" sz="2000"/>
+              <a:t> 問卷太長導致後期隨便亂填（</a:t>
+            </a:r>
+            <a:r>
+              <a:rPr lang="en-US" sz="2000" dirty="0"/>
+              <a:t>Fatigue effects）。</a:t>
+            </a:r>
+          </a:p>
+          <a:p>
+            <a:pPr>
+              <a:lnSpc>
+                <a:spcPct val="150000"/>
+              </a:lnSpc>
+              <a:buFont typeface="Arial" panose="020B0604020202020204" pitchFamily="34" charset="0"/>
+              <a:buChar char="•"/>
+            </a:pPr>
+            <a:r>
+              <a:rPr lang="ja-JP" altLang="en-US" sz="2000" b="1"/>
+              <a:t>社會期許偏差 </a:t>
+            </a:r>
+            <a:r>
+              <a:rPr lang="en-US" altLang="ja-JP" sz="2000" b="1" dirty="0"/>
+              <a:t>(</a:t>
+            </a:r>
+            <a:r>
+              <a:rPr lang="en-US" sz="2000" b="1" dirty="0"/>
+              <a:t>Social Desirability Bias)：</a:t>
+            </a:r>
+            <a:r>
+              <a:rPr lang="en-US" sz="2000" dirty="0"/>
+              <a:t> </a:t>
+            </a:r>
+            <a:r>
+              <a:rPr lang="ja-JP" altLang="en-US" sz="2000"/>
+              <a:t>受訪者傾向於給出「社會公認正確」的答案（例如：聲稱自己有投票、沒抽菸）。</a:t>
+            </a:r>
+          </a:p>
+          <a:p>
+            <a:pPr>
+              <a:lnSpc>
+                <a:spcPct val="150000"/>
+              </a:lnSpc>
+              <a:buFont typeface="Arial" panose="020B0604020202020204" pitchFamily="34" charset="0"/>
+              <a:buChar char="•"/>
+            </a:pPr>
+            <a:r>
+              <a:rPr lang="ja-JP" altLang="en-US" sz="2000" b="1"/>
+              <a:t>訪員影響：</a:t>
+            </a:r>
+            <a:r>
+              <a:rPr lang="ja-JP" altLang="en-US" sz="2000"/>
+              <a:t> 訪員的語氣、性別或種族影響了受訪者的回答。</a:t>
+            </a:r>
+            <a:endParaRPr lang="en-US" altLang="ja-JP" sz="2000" dirty="0"/>
+          </a:p>
+          <a:p>
+            <a:pPr>
+              <a:lnSpc>
+                <a:spcPct val="150000"/>
+              </a:lnSpc>
+              <a:buFont typeface="Arial" panose="020B0604020202020204" pitchFamily="34" charset="0"/>
+              <a:buChar char="•"/>
+            </a:pPr>
+            <a:r>
+              <a:rPr lang="ja-JP" altLang="en-US" sz="2000" b="1"/>
+              <a:t>訪問模式</a:t>
+            </a:r>
+            <a:r>
+              <a:rPr lang="ja-JP" altLang="en-US" sz="2000"/>
+              <a:t>：自填或者非自填問卷、視覺</a:t>
+            </a:r>
+            <a:r>
+              <a:rPr lang="en-US" altLang="ja-JP" sz="2000" dirty="0"/>
+              <a:t>(visual)</a:t>
+            </a:r>
+            <a:r>
+              <a:rPr lang="ja-JP" altLang="en-US" sz="2000"/>
+              <a:t>或者聽覺</a:t>
+            </a:r>
+            <a:r>
+              <a:rPr lang="en-US" altLang="ja-JP" sz="2000" dirty="0"/>
+              <a:t>(aural)</a:t>
+            </a:r>
+            <a:r>
+              <a:rPr lang="ja-JP" altLang="en-US" sz="2000"/>
+              <a:t>可能影響受訪者回答。</a:t>
+            </a:r>
+          </a:p>
+          <a:p>
+            <a:pPr>
+              <a:lnSpc>
+                <a:spcPct val="150000"/>
+              </a:lnSpc>
+            </a:pPr>
+            <a:endParaRPr lang="en-US" sz="2000" dirty="0"/>
+          </a:p>
+          <a:p>
+            <a:endParaRPr lang="en-US" dirty="0"/>
+          </a:p>
+          <a:p>
+            <a:endParaRPr lang="en-US" dirty="0"/>
+          </a:p>
+        </p:txBody>
+      </p:sp>
+      <p:sp>
+        <p:nvSpPr>
+          <p:cNvPr id="4" name="Slide Number Placeholder 3">
+            <a:extLst>
+              <a:ext uri="{FF2B5EF4-FFF2-40B4-BE49-F238E27FC236}">
+                <a16:creationId xmlns:a16="http://schemas.microsoft.com/office/drawing/2014/main" id="{53A3020D-3BF9-9CE1-7286-F7E75BDC31D7}"/>
+              </a:ext>
+            </a:extLst>
+          </p:cNvPr>
+          <p:cNvSpPr>
+            <a:spLocks noGrp="1"/>
+          </p:cNvSpPr>
+          <p:nvPr>
+            <p:ph type="sldNum" sz="quarter" idx="12"/>
+          </p:nvPr>
+        </p:nvSpPr>
+        <p:spPr/>
+        <p:txBody>
+          <a:bodyPr/>
+          <a:lstStyle/>
+          <a:p>
+            <a:fld id="{34E21383-B02B-694B-B2AD-A967203CDE86}" type="slidenum">
+              <a:rPr lang="en-US" smtClean="0"/>
+              <a:t>5</a:t>
+            </a:fld>
+            <a:endParaRPr lang="en-US"/>
+          </a:p>
+        </p:txBody>
+      </p:sp>
+    </p:spTree>
+    <p:extLst>
+      <p:ext uri="{BB962C8B-B14F-4D97-AF65-F5344CB8AC3E}">
+        <p14:creationId xmlns:p14="http://schemas.microsoft.com/office/powerpoint/2010/main" val="1116446608"/>
+      </p:ext>
+    </p:extLst>
+  </p:cSld>
+  <p:clrMapOvr>
+    <a:masterClrMapping/>
+  </p:clrMapOvr>
+</p:sld>
+</file>
+
+<file path=ppt/slides/slide6.xml><?xml version="1.0" encoding="utf-8"?>
 <p:sld xmlns:a="http://schemas.openxmlformats.org/drawingml/2006/main" xmlns:r="http://schemas.openxmlformats.org/officeDocument/2006/relationships" xmlns:p="http://schemas.openxmlformats.org/presentationml/2006/main">
   <p:cSld>
     <p:spTree>
@@ -9347,7 +11188,7 @@
           <a:p>
             <a:fld id="{34E21383-B02B-694B-B2AD-A967203CDE86}" type="slidenum">
               <a:rPr lang="en-US" smtClean="0"/>
-              <a:t>4</a:t>
+              <a:t>6</a:t>
             </a:fld>
             <a:endParaRPr lang="en-US"/>
           </a:p>
@@ -9366,7 +11207,7 @@
 </p:sld>
 </file>
 
-<file path=ppt/slides/slide5.xml><?xml version="1.0" encoding="utf-8"?>
+<file path=ppt/slides/slide7.xml><?xml version="1.0" encoding="utf-8"?>
 <p:sld xmlns:a="http://schemas.openxmlformats.org/drawingml/2006/main" xmlns:r="http://schemas.openxmlformats.org/officeDocument/2006/relationships" xmlns:p="http://schemas.openxmlformats.org/presentationml/2006/main">
   <p:cSld>
     <p:spTree>
@@ -9406,7 +11247,7 @@
           <a:p>
             <a:fld id="{34E21383-B02B-694B-B2AD-A967203CDE86}" type="slidenum">
               <a:rPr lang="en-US" smtClean="0"/>
-              <a:t>5</a:t>
+              <a:t>7</a:t>
             </a:fld>
             <a:endParaRPr lang="en-US"/>
           </a:p>
@@ -9455,280 +11296,6 @@
 </p:sld>
 </file>
 
-<file path=ppt/slides/slide6.xml><?xml version="1.0" encoding="utf-8"?>
-<p:sld xmlns:a="http://schemas.openxmlformats.org/drawingml/2006/main" xmlns:r="http://schemas.openxmlformats.org/officeDocument/2006/relationships" xmlns:p="http://schemas.openxmlformats.org/presentationml/2006/main">
-  <p:cSld>
-    <p:spTree>
-      <p:nvGrpSpPr>
-        <p:cNvPr id="1" name=""/>
-        <p:cNvGrpSpPr/>
-        <p:nvPr/>
-      </p:nvGrpSpPr>
-      <p:grpSpPr>
-        <a:xfrm>
-          <a:off x="0" y="0"/>
-          <a:ext cx="0" cy="0"/>
-          <a:chOff x="0" y="0"/>
-          <a:chExt cx="0" cy="0"/>
-        </a:xfrm>
-      </p:grpSpPr>
-      <p:sp>
-        <p:nvSpPr>
-          <p:cNvPr id="2" name="Title 1">
-            <a:extLst>
-              <a:ext uri="{FF2B5EF4-FFF2-40B4-BE49-F238E27FC236}">
-                <a16:creationId xmlns:a16="http://schemas.microsoft.com/office/drawing/2014/main" id="{ED266BC7-D370-DB3B-3586-0BB7D3212D0F}"/>
-              </a:ext>
-            </a:extLst>
-          </p:cNvPr>
-          <p:cNvSpPr>
-            <a:spLocks noGrp="1"/>
-          </p:cNvSpPr>
-          <p:nvPr>
-            <p:ph type="title"/>
-          </p:nvPr>
-        </p:nvSpPr>
-        <p:spPr/>
-        <p:txBody>
-          <a:bodyPr/>
-          <a:lstStyle/>
-          <a:p>
-            <a:r>
-              <a:rPr lang="ja-JP" altLang="en-US"/>
-              <a:t>非機率抽樣</a:t>
-            </a:r>
-            <a:endParaRPr lang="en-US" dirty="0"/>
-          </a:p>
-        </p:txBody>
-      </p:sp>
-      <p:sp>
-        <p:nvSpPr>
-          <p:cNvPr id="3" name="Content Placeholder 2">
-            <a:extLst>
-              <a:ext uri="{FF2B5EF4-FFF2-40B4-BE49-F238E27FC236}">
-                <a16:creationId xmlns:a16="http://schemas.microsoft.com/office/drawing/2014/main" id="{4F08E529-29DD-AB2C-94BF-694DBD41AB6D}"/>
-              </a:ext>
-            </a:extLst>
-          </p:cNvPr>
-          <p:cNvSpPr>
-            <a:spLocks noGrp="1"/>
-          </p:cNvSpPr>
-          <p:nvPr>
-            <p:ph idx="1"/>
-          </p:nvPr>
-        </p:nvSpPr>
-        <p:spPr/>
-        <p:txBody>
-          <a:bodyPr>
-            <a:normAutofit/>
-          </a:bodyPr>
-          <a:lstStyle/>
-          <a:p>
-            <a:pPr>
-              <a:lnSpc>
-                <a:spcPct val="150000"/>
-              </a:lnSpc>
-              <a:buFont typeface="Wingdings" pitchFamily="2" charset="2"/>
-              <a:buChar char="l"/>
-            </a:pPr>
-            <a:r>
-              <a:rPr lang="ja-JP" altLang="en-US" sz="2000"/>
-              <a:t>非機率抽樣並非基於隨機原則，而是根據研究者的便利性、判斷或特定標準來選取樣本。</a:t>
-            </a:r>
-            <a:endParaRPr lang="en-US" altLang="ja-JP" sz="2000" dirty="0"/>
-          </a:p>
-          <a:p>
-            <a:pPr>
-              <a:lnSpc>
-                <a:spcPct val="150000"/>
-              </a:lnSpc>
-              <a:buFont typeface="Wingdings" pitchFamily="2" charset="2"/>
-              <a:buChar char="l"/>
-            </a:pPr>
-            <a:r>
-              <a:rPr lang="ja-JP" altLang="en-US" sz="2000"/>
-              <a:t>缺乏代表性， 可能集中在少數人，無法推論至全體母體。</a:t>
-            </a:r>
-            <a:endParaRPr lang="en-US" altLang="ja-JP" sz="2000" dirty="0"/>
-          </a:p>
-          <a:p>
-            <a:pPr>
-              <a:lnSpc>
-                <a:spcPct val="150000"/>
-              </a:lnSpc>
-              <a:buFont typeface="Wingdings" pitchFamily="2" charset="2"/>
-              <a:buChar char="l"/>
-            </a:pPr>
-            <a:r>
-              <a:rPr lang="ja-JP" altLang="en-US" sz="2000"/>
-              <a:t>抽樣機率不明，無法計算精確的抽樣誤差。</a:t>
-            </a:r>
-            <a:endParaRPr lang="en-US" altLang="ja-JP" sz="2000" dirty="0"/>
-          </a:p>
-          <a:p>
-            <a:pPr>
-              <a:lnSpc>
-                <a:spcPct val="150000"/>
-              </a:lnSpc>
-              <a:buFont typeface="Wingdings" pitchFamily="2" charset="2"/>
-              <a:buChar char="l"/>
-            </a:pPr>
-            <a:r>
-              <a:rPr lang="ja-JP" altLang="en-US" sz="2000"/>
-              <a:t>便利抽樣、判斷抽樣（專家抽樣）、滾雪球抽樣、配額抽樣都屬於非機率抽樣。</a:t>
-            </a:r>
-            <a:endParaRPr lang="en-US" altLang="ja-JP" sz="2000" dirty="0"/>
-          </a:p>
-          <a:p>
-            <a:pPr>
-              <a:lnSpc>
-                <a:spcPct val="150000"/>
-              </a:lnSpc>
-              <a:buFont typeface="Wingdings" pitchFamily="2" charset="2"/>
-              <a:buChar char="l"/>
-            </a:pPr>
-            <a:endParaRPr lang="en-US" sz="2000" dirty="0"/>
-          </a:p>
-          <a:p>
-            <a:pPr>
-              <a:buFont typeface="Wingdings" pitchFamily="2" charset="2"/>
-              <a:buChar char="l"/>
-            </a:pPr>
-            <a:endParaRPr lang="en-US" dirty="0"/>
-          </a:p>
-        </p:txBody>
-      </p:sp>
-      <p:sp>
-        <p:nvSpPr>
-          <p:cNvPr id="4" name="Slide Number Placeholder 3">
-            <a:extLst>
-              <a:ext uri="{FF2B5EF4-FFF2-40B4-BE49-F238E27FC236}">
-                <a16:creationId xmlns:a16="http://schemas.microsoft.com/office/drawing/2014/main" id="{C98085D9-FBDD-C940-3F14-8994BAC36532}"/>
-              </a:ext>
-            </a:extLst>
-          </p:cNvPr>
-          <p:cNvSpPr>
-            <a:spLocks noGrp="1"/>
-          </p:cNvSpPr>
-          <p:nvPr>
-            <p:ph type="sldNum" sz="quarter" idx="12"/>
-          </p:nvPr>
-        </p:nvSpPr>
-        <p:spPr/>
-        <p:txBody>
-          <a:bodyPr/>
-          <a:lstStyle/>
-          <a:p>
-            <a:fld id="{34E21383-B02B-694B-B2AD-A967203CDE86}" type="slidenum">
-              <a:rPr lang="en-US" smtClean="0"/>
-              <a:t>6</a:t>
-            </a:fld>
-            <a:endParaRPr lang="en-US"/>
-          </a:p>
-        </p:txBody>
-      </p:sp>
-    </p:spTree>
-    <p:extLst>
-      <p:ext uri="{BB962C8B-B14F-4D97-AF65-F5344CB8AC3E}">
-        <p14:creationId xmlns:p14="http://schemas.microsoft.com/office/powerpoint/2010/main" val="397422702"/>
-      </p:ext>
-    </p:extLst>
-  </p:cSld>
-  <p:clrMapOvr>
-    <a:masterClrMapping/>
-  </p:clrMapOvr>
-</p:sld>
-</file>
-
-<file path=ppt/slides/slide7.xml><?xml version="1.0" encoding="utf-8"?>
-<p:sld xmlns:a="http://schemas.openxmlformats.org/drawingml/2006/main" xmlns:r="http://schemas.openxmlformats.org/officeDocument/2006/relationships" xmlns:p="http://schemas.openxmlformats.org/presentationml/2006/main">
-  <p:cSld>
-    <p:spTree>
-      <p:nvGrpSpPr>
-        <p:cNvPr id="1" name=""/>
-        <p:cNvGrpSpPr/>
-        <p:nvPr/>
-      </p:nvGrpSpPr>
-      <p:grpSpPr>
-        <a:xfrm>
-          <a:off x="0" y="0"/>
-          <a:ext cx="0" cy="0"/>
-          <a:chOff x="0" y="0"/>
-          <a:chExt cx="0" cy="0"/>
-        </a:xfrm>
-      </p:grpSpPr>
-      <p:sp>
-        <p:nvSpPr>
-          <p:cNvPr id="2" name="Slide Number Placeholder 1">
-            <a:extLst>
-              <a:ext uri="{FF2B5EF4-FFF2-40B4-BE49-F238E27FC236}">
-                <a16:creationId xmlns:a16="http://schemas.microsoft.com/office/drawing/2014/main" id="{059EBEF9-A064-EC8F-F179-60480554D8D1}"/>
-              </a:ext>
-            </a:extLst>
-          </p:cNvPr>
-          <p:cNvSpPr>
-            <a:spLocks noGrp="1"/>
-          </p:cNvSpPr>
-          <p:nvPr>
-            <p:ph type="sldNum" sz="quarter" idx="12"/>
-          </p:nvPr>
-        </p:nvSpPr>
-        <p:spPr/>
-        <p:txBody>
-          <a:bodyPr/>
-          <a:lstStyle/>
-          <a:p>
-            <a:fld id="{34E21383-B02B-694B-B2AD-A967203CDE86}" type="slidenum">
-              <a:rPr lang="en-US" smtClean="0"/>
-              <a:t>7</a:t>
-            </a:fld>
-            <a:endParaRPr lang="en-US"/>
-          </a:p>
-        </p:txBody>
-      </p:sp>
-      <p:pic>
-        <p:nvPicPr>
-          <p:cNvPr id="4" name="Picture 3">
-            <a:extLst>
-              <a:ext uri="{FF2B5EF4-FFF2-40B4-BE49-F238E27FC236}">
-                <a16:creationId xmlns:a16="http://schemas.microsoft.com/office/drawing/2014/main" id="{AC7825AB-9123-046E-5144-047BBDB4FE4F}"/>
-              </a:ext>
-            </a:extLst>
-          </p:cNvPr>
-          <p:cNvPicPr>
-            <a:picLocks noChangeAspect="1"/>
-          </p:cNvPicPr>
-          <p:nvPr/>
-        </p:nvPicPr>
-        <p:blipFill>
-          <a:blip r:embed="rId2"/>
-          <a:stretch>
-            <a:fillRect/>
-          </a:stretch>
-        </p:blipFill>
-        <p:spPr>
-          <a:xfrm>
-            <a:off x="2059405" y="993274"/>
-            <a:ext cx="7772400" cy="5097346"/>
-          </a:xfrm>
-          <a:prstGeom prst="rect">
-            <a:avLst/>
-          </a:prstGeom>
-        </p:spPr>
-      </p:pic>
-    </p:spTree>
-    <p:extLst>
-      <p:ext uri="{BB962C8B-B14F-4D97-AF65-F5344CB8AC3E}">
-        <p14:creationId xmlns:p14="http://schemas.microsoft.com/office/powerpoint/2010/main" val="1103186742"/>
-      </p:ext>
-    </p:extLst>
-  </p:cSld>
-  <p:clrMapOvr>
-    <a:masterClrMapping/>
-  </p:clrMapOvr>
-</p:sld>
-</file>
-
 <file path=ppt/slides/slide8.xml><?xml version="1.0" encoding="utf-8"?>
 <p:sld xmlns:a="http://schemas.openxmlformats.org/drawingml/2006/main" xmlns:r="http://schemas.openxmlformats.org/officeDocument/2006/relationships" xmlns:p="http://schemas.openxmlformats.org/presentationml/2006/main">
   <p:cSld>
@@ -9769,7 +11336,7 @@
           <a:p>
             <a:r>
               <a:rPr lang="ja-JP" altLang="en-US"/>
-              <a:t>網路調查的非機率抽樣</a:t>
+              <a:t>非機率抽樣</a:t>
             </a:r>
             <a:endParaRPr lang="en-US" dirty="0"/>
           </a:p>
@@ -9794,7 +11361,7 @@
         <p:spPr/>
         <p:txBody>
           <a:bodyPr>
-            <a:normAutofit fontScale="85000" lnSpcReduction="10000"/>
+            <a:normAutofit/>
           </a:bodyPr>
           <a:lstStyle/>
           <a:p>
@@ -9807,15 +11374,7 @@
             </a:pPr>
             <a:r>
               <a:rPr lang="ja-JP" altLang="en-US" sz="2000"/>
-              <a:t>自願參與偏差 </a:t>
-            </a:r>
-            <a:r>
-              <a:rPr lang="en-US" altLang="ja-JP" sz="2000" dirty="0"/>
-              <a:t>(Self-Selection Bias)</a:t>
-            </a:r>
-            <a:r>
-              <a:rPr lang="ja-JP" altLang="en-US" sz="2000"/>
-              <a:t>：由對該主題感興趣、有強烈意見，或單純想領取獎勵的人自行決定加入。</a:t>
+              <a:t>非機率抽樣並非基於隨機原則，而是根據研究者的便利性、判斷或特定標準來選取樣本。</a:t>
             </a:r>
             <a:endParaRPr lang="en-US" altLang="ja-JP" sz="2000" dirty="0"/>
           </a:p>
@@ -9829,15 +11388,7 @@
             </a:pPr>
             <a:r>
               <a:rPr lang="ja-JP" altLang="en-US" sz="2000"/>
-              <a:t>涵蓋誤差 </a:t>
-            </a:r>
-            <a:r>
-              <a:rPr lang="en-US" altLang="ja-JP" sz="2000" dirty="0"/>
-              <a:t>(Coverage Error)</a:t>
-            </a:r>
-            <a:r>
-              <a:rPr lang="ja-JP" altLang="en-US" sz="2000"/>
-              <a:t>：並非所有人都有同等的機會上網或看到調查連結。例如高齡族群、低收入者的上網頻率較低。</a:t>
+              <a:t>缺乏代表性， 可能集中在少數人，無法推論至全體母體。</a:t>
             </a:r>
             <a:endParaRPr lang="en-US" altLang="ja-JP" sz="2000" dirty="0"/>
           </a:p>
@@ -9851,15 +11402,7 @@
             </a:pPr>
             <a:r>
               <a:rPr lang="ja-JP" altLang="en-US" sz="2000"/>
-              <a:t>非隨機的「便利性」：研究者通常將連結發布在自己能觸及的社群媒體、論壇或 </a:t>
-            </a:r>
-            <a:r>
-              <a:rPr lang="en-US" altLang="ja-JP" sz="2000" dirty="0"/>
-              <a:t>LINE </a:t>
-            </a:r>
-            <a:r>
-              <a:rPr lang="ja-JP" altLang="en-US" sz="2000"/>
-              <a:t>群組中。受限於研究者的「同溫層」。</a:t>
+              <a:t>抽樣機率不明，無法計算精確的抽樣誤差。</a:t>
             </a:r>
             <a:endParaRPr lang="en-US" altLang="ja-JP" sz="2000" dirty="0"/>
           </a:p>
@@ -9873,54 +11416,7 @@
             </a:pPr>
             <a:r>
               <a:rPr lang="ja-JP" altLang="en-US" sz="2000"/>
-              <a:t>樣本性質難以驗證：</a:t>
-            </a:r>
-          </a:p>
-          <a:p>
-            <a:pPr>
-              <a:lnSpc>
-                <a:spcPct val="150000"/>
-              </a:lnSpc>
-              <a:buFont typeface="Courier New" panose="02070309020205020404" pitchFamily="49" charset="0"/>
-              <a:buChar char="o"/>
-            </a:pPr>
-            <a:r>
-              <a:rPr lang="ja-JP" altLang="en-US" sz="2000"/>
-              <a:t>重複填答： 同一人可能為了獎品多次填寫。</a:t>
-            </a:r>
-          </a:p>
-          <a:p>
-            <a:pPr>
-              <a:lnSpc>
-                <a:spcPct val="150000"/>
-              </a:lnSpc>
-              <a:buFont typeface="Courier New" panose="02070309020205020404" pitchFamily="49" charset="0"/>
-              <a:buChar char="o"/>
-            </a:pPr>
-            <a:r>
-              <a:rPr lang="ja-JP" altLang="en-US" sz="2000"/>
-              <a:t>機器人與無效樣本： </a:t>
-            </a:r>
-            <a:r>
-              <a:rPr lang="en-US" altLang="ja-JP" sz="2000" dirty="0"/>
-              <a:t>AI </a:t>
-            </a:r>
-            <a:r>
-              <a:rPr lang="ja-JP" altLang="en-US" sz="2000"/>
-              <a:t>或自動化程式可能產生大量垃圾數據。</a:t>
-            </a:r>
-          </a:p>
-          <a:p>
-            <a:pPr>
-              <a:lnSpc>
-                <a:spcPct val="150000"/>
-              </a:lnSpc>
-              <a:buFont typeface="Courier New" panose="02070309020205020404" pitchFamily="49" charset="0"/>
-              <a:buChar char="o"/>
-            </a:pPr>
-            <a:r>
-              <a:rPr lang="ja-JP" altLang="en-US" sz="2000"/>
-              <a:t>身分造假： 受訪者可能為了領取獎勵而虛報符合填答問卷條件的年齡或職業。</a:t>
+              <a:t>便利抽樣、判斷抽樣（專家抽樣）、滾雪球抽樣、配額抽樣都屬於非機率抽樣。</a:t>
             </a:r>
             <a:endParaRPr lang="en-US" altLang="ja-JP" sz="2000" dirty="0"/>
           </a:p>
@@ -9975,7 +11471,7 @@
     </p:spTree>
     <p:extLst>
       <p:ext uri="{BB962C8B-B14F-4D97-AF65-F5344CB8AC3E}">
-        <p14:creationId xmlns:p14="http://schemas.microsoft.com/office/powerpoint/2010/main" val="1700727804"/>
+        <p14:creationId xmlns:p14="http://schemas.microsoft.com/office/powerpoint/2010/main" val="397422702"/>
       </p:ext>
     </p:extLst>
   </p:cSld>
@@ -10004,146 +11500,10 @@
       </p:grpSpPr>
       <p:sp>
         <p:nvSpPr>
-          <p:cNvPr id="2" name="Title 1">
-            <a:extLst>
-              <a:ext uri="{FF2B5EF4-FFF2-40B4-BE49-F238E27FC236}">
-                <a16:creationId xmlns:a16="http://schemas.microsoft.com/office/drawing/2014/main" id="{ED266BC7-D370-DB3B-3586-0BB7D3212D0F}"/>
-              </a:ext>
-            </a:extLst>
-          </p:cNvPr>
-          <p:cNvSpPr>
-            <a:spLocks noGrp="1"/>
-          </p:cNvSpPr>
-          <p:nvPr>
-            <p:ph type="title"/>
-          </p:nvPr>
-        </p:nvSpPr>
-        <p:spPr/>
-        <p:txBody>
-          <a:bodyPr/>
-          <a:lstStyle/>
-          <a:p>
-            <a:r>
-              <a:rPr lang="ja-JP" altLang="en-US"/>
-              <a:t>如何修正網路調查的非機率抽樣？（一）</a:t>
-            </a:r>
-            <a:endParaRPr lang="en-US" dirty="0"/>
-          </a:p>
-        </p:txBody>
-      </p:sp>
-      <p:sp>
-        <p:nvSpPr>
-          <p:cNvPr id="3" name="Content Placeholder 2">
-            <a:extLst>
-              <a:ext uri="{FF2B5EF4-FFF2-40B4-BE49-F238E27FC236}">
-                <a16:creationId xmlns:a16="http://schemas.microsoft.com/office/drawing/2014/main" id="{4F08E529-29DD-AB2C-94BF-694DBD41AB6D}"/>
-              </a:ext>
-            </a:extLst>
-          </p:cNvPr>
-          <p:cNvSpPr>
-            <a:spLocks noGrp="1"/>
-          </p:cNvSpPr>
-          <p:nvPr>
-            <p:ph idx="1"/>
-          </p:nvPr>
-        </p:nvSpPr>
-        <p:spPr/>
-        <p:txBody>
-          <a:bodyPr>
-            <a:normAutofit/>
-          </a:bodyPr>
-          <a:lstStyle/>
-          <a:p>
-            <a:pPr>
-              <a:lnSpc>
-                <a:spcPct val="150000"/>
-              </a:lnSpc>
-              <a:buFont typeface="Wingdings" pitchFamily="2" charset="2"/>
-              <a:buChar char="q"/>
-            </a:pPr>
-            <a:r>
-              <a:rPr lang="ja-JP" altLang="en-US" sz="2000"/>
-              <a:t>配額抽樣 </a:t>
-            </a:r>
-            <a:r>
-              <a:rPr lang="en-US" altLang="ja-JP" sz="2000" dirty="0"/>
-              <a:t>(Quota Sampling)</a:t>
-            </a:r>
-            <a:r>
-              <a:rPr lang="ja-JP" altLang="en-US" sz="2000"/>
-              <a:t>： 如果資料庫中有足夠的樣本，可以設定性別、年齡比例，一旦某族群收滿足夠的樣本，就停止發送給受訪者。</a:t>
-            </a:r>
-          </a:p>
-          <a:p>
-            <a:pPr>
-              <a:lnSpc>
-                <a:spcPct val="150000"/>
-              </a:lnSpc>
-              <a:buFont typeface="Wingdings" pitchFamily="2" charset="2"/>
-              <a:buChar char="q"/>
-            </a:pPr>
-            <a:r>
-              <a:rPr lang="ja-JP" altLang="en-US" sz="2000"/>
-              <a:t>加權校正 </a:t>
-            </a:r>
-            <a:r>
-              <a:rPr lang="en-US" altLang="ja-JP" sz="2000" dirty="0"/>
-              <a:t>(Weighting)</a:t>
-            </a:r>
-            <a:r>
-              <a:rPr lang="ja-JP" altLang="en-US" sz="2000"/>
-              <a:t>： 根據人口普查數據，對受訪者進行事後數學調整。</a:t>
-            </a:r>
-            <a:endParaRPr lang="en-US" altLang="ja-JP" sz="2000" dirty="0"/>
-          </a:p>
-          <a:p>
-            <a:pPr>
-              <a:lnSpc>
-                <a:spcPct val="150000"/>
-              </a:lnSpc>
-              <a:buFont typeface="Wingdings" pitchFamily="2" charset="2"/>
-              <a:buChar char="q"/>
-            </a:pPr>
-            <a:endParaRPr lang="en-US" altLang="ja-JP" sz="2000" dirty="0"/>
-          </a:p>
-          <a:p>
-            <a:endParaRPr lang="en-US" altLang="ja-JP" sz="2000" dirty="0"/>
-          </a:p>
-          <a:p>
-            <a:pPr>
-              <a:lnSpc>
-                <a:spcPct val="150000"/>
-              </a:lnSpc>
-              <a:buFont typeface="Wingdings" pitchFamily="2" charset="2"/>
-              <a:buChar char="q"/>
-            </a:pPr>
-            <a:endParaRPr lang="en-US" altLang="ja-JP" sz="2000" dirty="0"/>
-          </a:p>
-          <a:p>
-            <a:pPr>
-              <a:lnSpc>
-                <a:spcPct val="150000"/>
-              </a:lnSpc>
-              <a:buFont typeface="Wingdings" pitchFamily="2" charset="2"/>
-              <a:buChar char="l"/>
-            </a:pPr>
-            <a:endParaRPr lang="en-US" sz="2000" dirty="0"/>
-          </a:p>
-          <a:p>
-            <a:pPr>
-              <a:buFont typeface="Wingdings" pitchFamily="2" charset="2"/>
-              <a:buChar char="l"/>
-            </a:pPr>
-            <a:endParaRPr lang="en-US" dirty="0"/>
-          </a:p>
-        </p:txBody>
-      </p:sp>
-      <p:sp>
-        <p:nvSpPr>
-          <p:cNvPr id="4" name="Slide Number Placeholder 3">
-            <a:extLst>
-              <a:ext uri="{FF2B5EF4-FFF2-40B4-BE49-F238E27FC236}">
-                <a16:creationId xmlns:a16="http://schemas.microsoft.com/office/drawing/2014/main" id="{C98085D9-FBDD-C940-3F14-8994BAC36532}"/>
+          <p:cNvPr id="2" name="Slide Number Placeholder 1">
+            <a:extLst>
+              <a:ext uri="{FF2B5EF4-FFF2-40B4-BE49-F238E27FC236}">
+                <a16:creationId xmlns:a16="http://schemas.microsoft.com/office/drawing/2014/main" id="{059EBEF9-A064-EC8F-F179-60480554D8D1}"/>
               </a:ext>
             </a:extLst>
           </p:cNvPr>
@@ -10167,10 +11527,40 @@
           </a:p>
         </p:txBody>
       </p:sp>
+      <p:pic>
+        <p:nvPicPr>
+          <p:cNvPr id="4" name="Picture 3">
+            <a:extLst>
+              <a:ext uri="{FF2B5EF4-FFF2-40B4-BE49-F238E27FC236}">
+                <a16:creationId xmlns:a16="http://schemas.microsoft.com/office/drawing/2014/main" id="{AC7825AB-9123-046E-5144-047BBDB4FE4F}"/>
+              </a:ext>
+            </a:extLst>
+          </p:cNvPr>
+          <p:cNvPicPr>
+            <a:picLocks noChangeAspect="1"/>
+          </p:cNvPicPr>
+          <p:nvPr/>
+        </p:nvPicPr>
+        <p:blipFill>
+          <a:blip r:embed="rId2"/>
+          <a:stretch>
+            <a:fillRect/>
+          </a:stretch>
+        </p:blipFill>
+        <p:spPr>
+          <a:xfrm>
+            <a:off x="2059405" y="993274"/>
+            <a:ext cx="7772400" cy="5097346"/>
+          </a:xfrm>
+          <a:prstGeom prst="rect">
+            <a:avLst/>
+          </a:prstGeom>
+        </p:spPr>
+      </p:pic>
     </p:spTree>
     <p:extLst>
       <p:ext uri="{BB962C8B-B14F-4D97-AF65-F5344CB8AC3E}">
-        <p14:creationId xmlns:p14="http://schemas.microsoft.com/office/powerpoint/2010/main" val="3836497003"/>
+        <p14:creationId xmlns:p14="http://schemas.microsoft.com/office/powerpoint/2010/main" val="1103186742"/>
       </p:ext>
     </p:extLst>
   </p:cSld>

--- a/投影片/民意與調查Week4.pptx
+++ b/投影片/民意與調查Week4.pptx
@@ -5,7 +5,7 @@
     <p:sldMasterId id="2147483648" r:id="rId1"/>
   </p:sldMasterIdLst>
   <p:notesMasterIdLst>
-    <p:notesMasterId r:id="rId32"/>
+    <p:notesMasterId r:id="rId33"/>
   </p:notesMasterIdLst>
   <p:sldIdLst>
     <p:sldId id="256" r:id="rId2"/>
@@ -20,24 +20,25 @@
     <p:sldId id="268" r:id="rId11"/>
     <p:sldId id="269" r:id="rId12"/>
     <p:sldId id="275" r:id="rId13"/>
-    <p:sldId id="274" r:id="rId14"/>
-    <p:sldId id="270" r:id="rId15"/>
-    <p:sldId id="271" r:id="rId16"/>
-    <p:sldId id="272" r:id="rId17"/>
-    <p:sldId id="273" r:id="rId18"/>
-    <p:sldId id="276" r:id="rId19"/>
-    <p:sldId id="279" r:id="rId20"/>
-    <p:sldId id="278" r:id="rId21"/>
-    <p:sldId id="280" r:id="rId22"/>
-    <p:sldId id="282" r:id="rId23"/>
-    <p:sldId id="283" r:id="rId24"/>
-    <p:sldId id="285" r:id="rId25"/>
-    <p:sldId id="286" r:id="rId26"/>
-    <p:sldId id="284" r:id="rId27"/>
-    <p:sldId id="287" r:id="rId28"/>
-    <p:sldId id="288" r:id="rId29"/>
-    <p:sldId id="290" r:id="rId30"/>
-    <p:sldId id="281" r:id="rId31"/>
+    <p:sldId id="292" r:id="rId14"/>
+    <p:sldId id="274" r:id="rId15"/>
+    <p:sldId id="270" r:id="rId16"/>
+    <p:sldId id="271" r:id="rId17"/>
+    <p:sldId id="272" r:id="rId18"/>
+    <p:sldId id="273" r:id="rId19"/>
+    <p:sldId id="276" r:id="rId20"/>
+    <p:sldId id="279" r:id="rId21"/>
+    <p:sldId id="278" r:id="rId22"/>
+    <p:sldId id="280" r:id="rId23"/>
+    <p:sldId id="282" r:id="rId24"/>
+    <p:sldId id="283" r:id="rId25"/>
+    <p:sldId id="285" r:id="rId26"/>
+    <p:sldId id="286" r:id="rId27"/>
+    <p:sldId id="284" r:id="rId28"/>
+    <p:sldId id="287" r:id="rId29"/>
+    <p:sldId id="288" r:id="rId30"/>
+    <p:sldId id="290" r:id="rId31"/>
+    <p:sldId id="281" r:id="rId32"/>
   </p:sldIdLst>
   <p:sldSz cx="12192000" cy="6858000"/>
   <p:notesSz cx="6858000" cy="9144000"/>
@@ -226,7 +227,7 @@
           <a:p>
             <a:fld id="{308549C9-F1F2-A344-9318-AC3AB4654B7E}" type="datetimeFigureOut">
               <a:rPr lang="en-US" smtClean="0"/>
-              <a:t>3/23/26</a:t>
+              <a:t>3/25/26</a:t>
             </a:fld>
             <a:endParaRPr lang="en-US"/>
           </a:p>
@@ -640,7 +641,7 @@
           <a:p>
             <a:fld id="{0ECB731F-7F54-EF4E-BC14-D4454C95FF4D}" type="datetime1">
               <a:rPr lang="en-US" smtClean="0"/>
-              <a:t>3/23/26</a:t>
+              <a:t>3/25/26</a:t>
             </a:fld>
             <a:endParaRPr lang="en-US"/>
           </a:p>
@@ -838,7 +839,7 @@
           <a:p>
             <a:fld id="{5FC0AAEB-F940-CA44-B742-2110711973A7}" type="datetime1">
               <a:rPr lang="en-US" smtClean="0"/>
-              <a:t>3/23/26</a:t>
+              <a:t>3/25/26</a:t>
             </a:fld>
             <a:endParaRPr lang="en-US"/>
           </a:p>
@@ -1046,7 +1047,7 @@
           <a:p>
             <a:fld id="{0C0FC7EA-A73C-4146-9B14-54C11597AA40}" type="datetime1">
               <a:rPr lang="en-US" smtClean="0"/>
-              <a:t>3/23/26</a:t>
+              <a:t>3/25/26</a:t>
             </a:fld>
             <a:endParaRPr lang="en-US"/>
           </a:p>
@@ -1244,7 +1245,7 @@
           <a:p>
             <a:fld id="{24943121-CDD1-174D-9095-06B3974B3CC1}" type="datetime1">
               <a:rPr lang="en-US" smtClean="0"/>
-              <a:t>3/23/26</a:t>
+              <a:t>3/25/26</a:t>
             </a:fld>
             <a:endParaRPr lang="en-US"/>
           </a:p>
@@ -1519,7 +1520,7 @@
           <a:p>
             <a:fld id="{21F2BAF9-EAD3-1641-87AF-ADC71D8222CD}" type="datetime1">
               <a:rPr lang="en-US" smtClean="0"/>
-              <a:t>3/23/26</a:t>
+              <a:t>3/25/26</a:t>
             </a:fld>
             <a:endParaRPr lang="en-US"/>
           </a:p>
@@ -1784,7 +1785,7 @@
           <a:p>
             <a:fld id="{F8F7A49D-4C23-6A49-AF9D-C0E1C1130921}" type="datetime1">
               <a:rPr lang="en-US" smtClean="0"/>
-              <a:t>3/23/26</a:t>
+              <a:t>3/25/26</a:t>
             </a:fld>
             <a:endParaRPr lang="en-US"/>
           </a:p>
@@ -2196,7 +2197,7 @@
           <a:p>
             <a:fld id="{9F516F59-8951-4749-B49C-6C88C0B4B6BD}" type="datetime1">
               <a:rPr lang="en-US" smtClean="0"/>
-              <a:t>3/23/26</a:t>
+              <a:t>3/25/26</a:t>
             </a:fld>
             <a:endParaRPr lang="en-US"/>
           </a:p>
@@ -2337,7 +2338,7 @@
           <a:p>
             <a:fld id="{CA82BBDF-C485-174D-8051-FF3ED3DF33C6}" type="datetime1">
               <a:rPr lang="en-US" smtClean="0"/>
-              <a:t>3/23/26</a:t>
+              <a:t>3/25/26</a:t>
             </a:fld>
             <a:endParaRPr lang="en-US"/>
           </a:p>
@@ -2450,7 +2451,7 @@
           <a:p>
             <a:fld id="{3CA316C8-35EA-C448-A7DB-295F753FB635}" type="datetime1">
               <a:rPr lang="en-US" smtClean="0"/>
-              <a:t>3/23/26</a:t>
+              <a:t>3/25/26</a:t>
             </a:fld>
             <a:endParaRPr lang="en-US"/>
           </a:p>
@@ -2761,7 +2762,7 @@
           <a:p>
             <a:fld id="{3EBA6818-685C-B142-BE10-A6D54A85D7FF}" type="datetime1">
               <a:rPr lang="en-US" smtClean="0"/>
-              <a:t>3/23/26</a:t>
+              <a:t>3/25/26</a:t>
             </a:fld>
             <a:endParaRPr lang="en-US"/>
           </a:p>
@@ -3049,7 +3050,7 @@
           <a:p>
             <a:fld id="{D444D57B-5B66-2F49-AB7C-362DD22B45D8}" type="datetime1">
               <a:rPr lang="en-US" smtClean="0"/>
-              <a:t>3/23/26</a:t>
+              <a:t>3/25/26</a:t>
             </a:fld>
             <a:endParaRPr lang="en-US"/>
           </a:p>
@@ -3290,7 +3291,7 @@
           <a:p>
             <a:fld id="{4025DC53-D744-A54C-8957-51F9F93FF803}" type="datetime1">
               <a:rPr lang="en-US" smtClean="0"/>
-              <a:t>3/23/26</a:t>
+              <a:t>3/25/26</a:t>
             </a:fld>
             <a:endParaRPr lang="en-US"/>
           </a:p>
@@ -4287,8 +4288,8 @@
           </a:p>
         </p:txBody>
       </p:sp>
-      <mc:AlternateContent xmlns:mc="http://schemas.openxmlformats.org/markup-compatibility/2006" xmlns:a14="http://schemas.microsoft.com/office/drawing/2010/main">
-        <mc:Choice Requires="a14">
+      <mc:AlternateContent xmlns:mc="http://schemas.openxmlformats.org/markup-compatibility/2006">
+        <mc:Choice xmlns:a14="http://schemas.microsoft.com/office/drawing/2010/main" Requires="a14">
           <p:sp>
             <p:nvSpPr>
               <p:cNvPr id="3" name="Content Placeholder 2">
@@ -4308,7 +4309,7 @@
             <p:spPr/>
             <p:txBody>
               <a:bodyPr>
-                <a:normAutofit fontScale="92500" lnSpcReduction="20000"/>
+                <a:normAutofit fontScale="85000" lnSpcReduction="20000"/>
               </a:bodyPr>
               <a:lstStyle/>
               <a:p>
@@ -4396,6 +4397,72 @@
                   <a:rPr lang="ja-JP" altLang="en-US" sz="2000"/>
                   <a:t>權重：</a:t>
                 </a:r>
+                <a14:m>
+                  <m:oMath xmlns:m="http://schemas.openxmlformats.org/officeDocument/2006/math">
+                    <m:r>
+                      <a:rPr lang="en-US" altLang="ja-JP" sz="2000" b="0" i="1" smtClean="0">
+                        <a:latin typeface="Cambria Math" panose="02040503050406030204" pitchFamily="18" charset="0"/>
+                      </a:rPr>
+                      <m:t>𝑤</m:t>
+                    </m:r>
+                    <m:r>
+                      <a:rPr lang="en-US" altLang="ja-JP" sz="2000" b="0" i="1" smtClean="0">
+                        <a:latin typeface="Cambria Math" panose="02040503050406030204" pitchFamily="18" charset="0"/>
+                      </a:rPr>
+                      <m:t>=</m:t>
+                    </m:r>
+                    <m:f>
+                      <m:fPr>
+                        <m:ctrlPr>
+                          <a:rPr lang="en-US" altLang="ja-JP" sz="2000" b="0" i="1" smtClean="0">
+                            <a:latin typeface="Cambria Math" panose="02040503050406030204" pitchFamily="18" charset="0"/>
+                          </a:rPr>
+                        </m:ctrlPr>
+                      </m:fPr>
+                      <m:num>
+                        <m:r>
+                          <a:rPr lang="en-US" altLang="ja-JP" sz="2000" b="0" i="1" smtClean="0">
+                            <a:latin typeface="Cambria Math" panose="02040503050406030204" pitchFamily="18" charset="0"/>
+                          </a:rPr>
+                          <m:t>𝑝𝑜𝑝𝑢𝑙𝑎𝑡𝑖𝑜𝑛</m:t>
+                        </m:r>
+                        <m:r>
+                          <a:rPr lang="en-US" altLang="ja-JP" sz="2000" b="0" i="1" smtClean="0">
+                            <a:latin typeface="Cambria Math" panose="02040503050406030204" pitchFamily="18" charset="0"/>
+                          </a:rPr>
+                          <m:t> </m:t>
+                        </m:r>
+                        <m:r>
+                          <a:rPr lang="en-US" altLang="ja-JP" sz="2000" b="0" i="1" smtClean="0">
+                            <a:latin typeface="Cambria Math" panose="02040503050406030204" pitchFamily="18" charset="0"/>
+                          </a:rPr>
+                          <m:t>𝑝𝑟𝑜𝑝𝑜𝑟𝑡𝑖𝑜𝑛</m:t>
+                        </m:r>
+                      </m:num>
+                      <m:den>
+                        <m:r>
+                          <a:rPr lang="en-US" altLang="ja-JP" sz="2000" b="0" i="1" smtClean="0">
+                            <a:latin typeface="Cambria Math" panose="02040503050406030204" pitchFamily="18" charset="0"/>
+                          </a:rPr>
+                          <m:t>𝑠𝑎𝑚𝑝𝑙𝑒</m:t>
+                        </m:r>
+                        <m:r>
+                          <a:rPr lang="en-US" altLang="ja-JP" sz="2000" b="0" i="1" smtClean="0">
+                            <a:latin typeface="Cambria Math" panose="02040503050406030204" pitchFamily="18" charset="0"/>
+                          </a:rPr>
+                          <m:t> </m:t>
+                        </m:r>
+                        <m:r>
+                          <a:rPr lang="en-US" altLang="ja-JP" sz="2000" b="0" i="1" smtClean="0">
+                            <a:latin typeface="Cambria Math" panose="02040503050406030204" pitchFamily="18" charset="0"/>
+                          </a:rPr>
+                          <m:t>𝑝𝑟𝑜𝑝𝑜𝑟𝑡𝑖𝑜𝑛</m:t>
+                        </m:r>
+                      </m:den>
+                    </m:f>
+                  </m:oMath>
+                </a14:m>
+                <a:endParaRPr lang="ja-JP" altLang="en-US" sz="2000"/>
               </a:p>
               <a:p>
                 <a:pPr>
@@ -4420,7 +4487,7 @@
                 </a:r>
                 <a:r>
                   <a:rPr lang="en-US" altLang="ja-JP" sz="2000" dirty="0"/>
-                  <a:t>1/0.8=1.251/0.8 = 1.251/0.8=1.25</a:t>
+                  <a:t>0.3/0.8=0.375</a:t>
                 </a:r>
               </a:p>
               <a:p>
@@ -4446,7 +4513,7 @@
                 </a:r>
                 <a:r>
                   <a:rPr lang="en-US" altLang="ja-JP" sz="2000" dirty="0"/>
-                  <a:t>1/0.2=51/0.2 = 51/0.2=5</a:t>
+                  <a:t>0.7/0.2=3.5</a:t>
                 </a:r>
               </a:p>
               <a:p>
@@ -4485,7 +4552,42 @@
                         <a:latin typeface="Cambria Math" panose="02040503050406030204" pitchFamily="18" charset="0"/>
                         <a:ea typeface="Cambria Math" panose="02040503050406030204" pitchFamily="18" charset="0"/>
                       </a:rPr>
-                      <m:t>×1.25=1</m:t>
+                      <m:t>×</m:t>
+                    </m:r>
+                    <m:r>
+                      <a:rPr lang="en-US" altLang="ja-JP" sz="2000" b="0" i="1" smtClean="0">
+                        <a:latin typeface="Cambria Math" panose="02040503050406030204" pitchFamily="18" charset="0"/>
+                        <a:ea typeface="Cambria Math" panose="02040503050406030204" pitchFamily="18" charset="0"/>
+                      </a:rPr>
+                      <m:t>0</m:t>
+                    </m:r>
+                    <m:r>
+                      <a:rPr lang="en-US" altLang="ja-JP" sz="2000" b="0" i="1" smtClean="0">
+                        <a:latin typeface="Cambria Math" panose="02040503050406030204" pitchFamily="18" charset="0"/>
+                        <a:ea typeface="Cambria Math" panose="02040503050406030204" pitchFamily="18" charset="0"/>
+                      </a:rPr>
+                      <m:t>.</m:t>
+                    </m:r>
+                    <m:r>
+                      <a:rPr lang="en-US" altLang="ja-JP" sz="2000" b="0" i="1" smtClean="0">
+                        <a:latin typeface="Cambria Math" panose="02040503050406030204" pitchFamily="18" charset="0"/>
+                        <a:ea typeface="Cambria Math" panose="02040503050406030204" pitchFamily="18" charset="0"/>
+                      </a:rPr>
+                      <m:t>37</m:t>
+                    </m:r>
+                    <m:r>
+                      <a:rPr lang="en-US" altLang="ja-JP" sz="2000" b="0" i="1" smtClean="0">
+                        <a:latin typeface="Cambria Math" panose="02040503050406030204" pitchFamily="18" charset="0"/>
+                        <a:ea typeface="Cambria Math" panose="02040503050406030204" pitchFamily="18" charset="0"/>
+                      </a:rPr>
+                      <m:t>5=</m:t>
+                    </m:r>
+                    <m:r>
+                      <a:rPr lang="en-US" altLang="ja-JP" sz="2000" b="0" i="1" smtClean="0">
+                        <a:latin typeface="Cambria Math" panose="02040503050406030204" pitchFamily="18" charset="0"/>
+                        <a:ea typeface="Cambria Math" panose="02040503050406030204" pitchFamily="18" charset="0"/>
+                      </a:rPr>
+                      <m:t>0.3</m:t>
                     </m:r>
                     <m:r>
                       <a:rPr lang="zh-TW" altLang="en-US" sz="2000" b="0" i="1" smtClean="0">
@@ -4531,10 +4633,35 @@
                         <a:latin typeface="Cambria Math" panose="02040503050406030204" pitchFamily="18" charset="0"/>
                         <a:ea typeface="Cambria Math" panose="02040503050406030204" pitchFamily="18" charset="0"/>
                       </a:rPr>
-                      <m:t>×5=1</m:t>
+                      <m:t>×</m:t>
+                    </m:r>
+                    <m:r>
+                      <a:rPr lang="en-US" altLang="ja-JP" sz="2000" b="0" i="1" smtClean="0">
+                        <a:latin typeface="Cambria Math" panose="02040503050406030204" pitchFamily="18" charset="0"/>
+                        <a:ea typeface="Cambria Math" panose="02040503050406030204" pitchFamily="18" charset="0"/>
+                      </a:rPr>
+                      <m:t>3.</m:t>
+                    </m:r>
+                    <m:r>
+                      <a:rPr lang="en-US" altLang="ja-JP" sz="2000" i="1">
+                        <a:latin typeface="Cambria Math" panose="02040503050406030204" pitchFamily="18" charset="0"/>
+                        <a:ea typeface="Cambria Math" panose="02040503050406030204" pitchFamily="18" charset="0"/>
+                      </a:rPr>
+                      <m:t>5=</m:t>
+                    </m:r>
+                    <m:r>
+                      <a:rPr lang="en-US" altLang="ja-JP" sz="2000" b="0" i="1" smtClean="0">
+                        <a:latin typeface="Cambria Math" panose="02040503050406030204" pitchFamily="18" charset="0"/>
+                        <a:ea typeface="Cambria Math" panose="02040503050406030204" pitchFamily="18" charset="0"/>
+                      </a:rPr>
+                      <m:t>0.7</m:t>
                     </m:r>
                   </m:oMath>
                 </a14:m>
+                <a:r>
+                  <a:rPr lang="ja-JP" altLang="en-US" sz="2000" dirty="0"/>
+                  <a:t>，符合母體的比例。</a:t>
+                </a:r>
                 <a:endParaRPr lang="en-US" altLang="ja-JP" sz="2000" dirty="0"/>
               </a:p>
               <a:p>
@@ -4564,7 +4691,7 @@
             </p:txBody>
           </p:sp>
         </mc:Choice>
-        <mc:Fallback xmlns="">
+        <mc:Fallback>
           <p:sp>
             <p:nvSpPr>
               <p:cNvPr id="3" name="Content Placeholder 2">
@@ -4585,7 +4712,7 @@
               <a:blipFill>
                 <a:blip r:embed="rId2"/>
                 <a:stretch>
-                  <a:fillRect l="-483" b="-1744"/>
+                  <a:fillRect l="-362"/>
                 </a:stretch>
               </a:blipFill>
             </p:spPr>
@@ -4594,7 +4721,7 @@
               <a:lstStyle/>
               <a:p>
                 <a:r>
-                  <a:rPr lang="en-US">
+                  <a:rPr lang="zh-TW" altLang="en-US">
                     <a:noFill/>
                   </a:rPr>
                   <a:t> </a:t>
@@ -4648,7 +4775,7 @@
           <p:nvPr>
             <p:extLst>
               <p:ext uri="{D42A27DB-BD31-4B8C-83A1-F6EECF244321}">
-                <p14:modId xmlns:p14="http://schemas.microsoft.com/office/powerpoint/2010/main" val="3721987672"/>
+                <p14:modId xmlns:p14="http://schemas.microsoft.com/office/powerpoint/2010/main" val="2852519260"/>
               </p:ext>
             </p:extLst>
           </p:nvPr>
@@ -4736,7 +4863,7 @@
                     <a:p>
                       <a:r>
                         <a:rPr lang="en-US" dirty="0"/>
-                        <a:t>50%</a:t>
+                        <a:t>30%</a:t>
                       </a:r>
                     </a:p>
                   </a:txBody>
@@ -4770,7 +4897,7 @@
                     <a:p>
                       <a:r>
                         <a:rPr lang="en-US" dirty="0"/>
-                        <a:t>30%</a:t>
+                        <a:t>70%</a:t>
                       </a:r>
                     </a:p>
                   </a:txBody>
@@ -4957,6 +5084,632 @@
   <p:cSld>
     <p:spTree>
       <p:nvGrpSpPr>
+        <p:cNvPr id="1" name="">
+          <a:extLst>
+            <a:ext uri="{FF2B5EF4-FFF2-40B4-BE49-F238E27FC236}">
+              <a16:creationId xmlns:a16="http://schemas.microsoft.com/office/drawing/2014/main" id="{079F290D-4C3C-1711-9B9C-61B4EB786901}"/>
+            </a:ext>
+          </a:extLst>
+        </p:cNvPr>
+        <p:cNvGrpSpPr/>
+        <p:nvPr/>
+      </p:nvGrpSpPr>
+      <p:grpSpPr>
+        <a:xfrm>
+          <a:off x="0" y="0"/>
+          <a:ext cx="0" cy="0"/>
+          <a:chOff x="0" y="0"/>
+          <a:chExt cx="0" cy="0"/>
+        </a:xfrm>
+      </p:grpSpPr>
+      <p:sp>
+        <p:nvSpPr>
+          <p:cNvPr id="2" name="Title 1">
+            <a:extLst>
+              <a:ext uri="{FF2B5EF4-FFF2-40B4-BE49-F238E27FC236}">
+                <a16:creationId xmlns:a16="http://schemas.microsoft.com/office/drawing/2014/main" id="{47B561BE-AA9A-4EFE-6B56-EED4211D54B0}"/>
+              </a:ext>
+            </a:extLst>
+          </p:cNvPr>
+          <p:cNvSpPr>
+            <a:spLocks noGrp="1"/>
+          </p:cNvSpPr>
+          <p:nvPr>
+            <p:ph type="title"/>
+          </p:nvPr>
+        </p:nvSpPr>
+        <p:spPr/>
+        <p:txBody>
+          <a:bodyPr/>
+          <a:lstStyle/>
+          <a:p>
+            <a:r>
+              <a:rPr lang="ja-JP" altLang="en-US"/>
+              <a:t>如何修正網路調查的非機率抽樣？（三）</a:t>
+            </a:r>
+            <a:endParaRPr lang="en-US" dirty="0"/>
+          </a:p>
+        </p:txBody>
+      </p:sp>
+      <mc:AlternateContent xmlns:mc="http://schemas.openxmlformats.org/markup-compatibility/2006">
+        <mc:Choice xmlns:a14="http://schemas.microsoft.com/office/drawing/2010/main" Requires="a14">
+          <p:sp>
+            <p:nvSpPr>
+              <p:cNvPr id="3" name="Content Placeholder 2">
+                <a:extLst>
+                  <a:ext uri="{FF2B5EF4-FFF2-40B4-BE49-F238E27FC236}">
+                    <a16:creationId xmlns:a16="http://schemas.microsoft.com/office/drawing/2014/main" id="{3EA93E38-7841-925C-BFC9-14185BED8723}"/>
+                  </a:ext>
+                </a:extLst>
+              </p:cNvPr>
+              <p:cNvSpPr>
+                <a:spLocks noGrp="1"/>
+              </p:cNvSpPr>
+              <p:nvPr>
+                <p:ph idx="1"/>
+              </p:nvPr>
+            </p:nvSpPr>
+            <p:spPr/>
+            <p:txBody>
+              <a:bodyPr>
+                <a:normAutofit/>
+              </a:bodyPr>
+              <a:lstStyle/>
+              <a:p>
+                <a:pPr>
+                  <a:lnSpc>
+                    <a:spcPct val="150000"/>
+                  </a:lnSpc>
+                  <a:buFont typeface="Wingdings" pitchFamily="2" charset="2"/>
+                  <a:buChar char="q"/>
+                </a:pPr>
+                <a:r>
+                  <a:rPr lang="ja-JP" altLang="en-US" sz="2000"/>
+                  <a:t>假設網路調查顯示：</a:t>
+                </a:r>
+              </a:p>
+              <a:p>
+                <a:pPr marL="0" indent="0">
+                  <a:lnSpc>
+                    <a:spcPct val="150000"/>
+                  </a:lnSpc>
+                  <a:buNone/>
+                </a:pPr>
+                <a:endParaRPr lang="en-US" altLang="ja-JP" sz="2000" dirty="0"/>
+              </a:p>
+              <a:p>
+                <a:pPr>
+                  <a:lnSpc>
+                    <a:spcPct val="150000"/>
+                  </a:lnSpc>
+                  <a:buFont typeface="Wingdings" pitchFamily="2" charset="2"/>
+                  <a:buChar char="q"/>
+                </a:pPr>
+                <a:r>
+                  <a:rPr lang="ja-JP" altLang="en-US" sz="2000"/>
+                  <a:t>加權之前的投票意願：</a:t>
+                </a:r>
+                <a:endParaRPr lang="en-US" altLang="ja-JP" sz="2000" dirty="0"/>
+              </a:p>
+              <a:p>
+                <a:pPr marL="0" indent="0" algn="ctr" rtl="0" eaLnBrk="1" fontAlgn="t" latinLnBrk="0" hangingPunct="1">
+                  <a:spcBef>
+                    <a:spcPts val="0"/>
+                  </a:spcBef>
+                  <a:spcAft>
+                    <a:spcPts val="0"/>
+                  </a:spcAft>
+                  <a:buNone/>
+                </a:pPr>
+                <a14:m>
+                  <m:oMath xmlns:m="http://schemas.openxmlformats.org/officeDocument/2006/math">
+                    <m:d>
+                      <m:dPr>
+                        <m:ctrlPr>
+                          <a:rPr lang="en-US" altLang="ja-JP" sz="2000" b="0" i="1" smtClean="0">
+                            <a:latin typeface="Cambria Math" panose="02040503050406030204" pitchFamily="18" charset="0"/>
+                          </a:rPr>
+                        </m:ctrlPr>
+                      </m:dPr>
+                      <m:e>
+                        <m:r>
+                          <a:rPr lang="en-US" altLang="ja-JP" sz="2000" b="0" i="1" smtClean="0">
+                            <a:latin typeface="Cambria Math" panose="02040503050406030204" pitchFamily="18" charset="0"/>
+                          </a:rPr>
+                          <m:t>0.8</m:t>
+                        </m:r>
+                        <m:r>
+                          <a:rPr lang="en-US" altLang="ja-JP" sz="2000" b="0" i="1" smtClean="0">
+                            <a:latin typeface="Cambria Math" panose="02040503050406030204" pitchFamily="18" charset="0"/>
+                            <a:ea typeface="Cambria Math" panose="02040503050406030204" pitchFamily="18" charset="0"/>
+                          </a:rPr>
+                          <m:t>×90%</m:t>
+                        </m:r>
+                      </m:e>
+                    </m:d>
+                    <m:r>
+                      <a:rPr lang="en-US" altLang="ja-JP" sz="2000" b="0" i="1" smtClean="0">
+                        <a:latin typeface="Cambria Math" panose="02040503050406030204" pitchFamily="18" charset="0"/>
+                      </a:rPr>
+                      <m:t>+(0.2</m:t>
+                    </m:r>
+                    <m:r>
+                      <a:rPr lang="en-US" altLang="ja-JP" sz="2000" b="0" i="1" smtClean="0">
+                        <a:latin typeface="Cambria Math" panose="02040503050406030204" pitchFamily="18" charset="0"/>
+                        <a:ea typeface="Cambria Math" panose="02040503050406030204" pitchFamily="18" charset="0"/>
+                      </a:rPr>
+                      <m:t>×10%)</m:t>
+                    </m:r>
+                  </m:oMath>
+                </a14:m>
+                <a:r>
+                  <a:rPr lang="en-US" altLang="ja-JP" sz="2000" dirty="0"/>
+                  <a:t>=78%</a:t>
+                </a:r>
+              </a:p>
+              <a:p>
+                <a:pPr>
+                  <a:lnSpc>
+                    <a:spcPct val="150000"/>
+                  </a:lnSpc>
+                  <a:buFont typeface="Wingdings" pitchFamily="2" charset="2"/>
+                  <a:buChar char="q"/>
+                </a:pPr>
+                <a:r>
+                  <a:rPr lang="ja-JP" altLang="en-US" sz="2000"/>
+                  <a:t>加權之後的投票意願：</a:t>
+                </a:r>
+                <a14:m>
+                  <m:oMath xmlns:m="http://schemas.openxmlformats.org/officeDocument/2006/math">
+                    <m:r>
+                      <a:rPr lang="en-US" altLang="ja-JP" sz="2000" b="0" i="1" smtClean="0">
+                        <a:latin typeface="Cambria Math" panose="02040503050406030204" pitchFamily="18" charset="0"/>
+                      </a:rPr>
+                      <m:t>9</m:t>
+                    </m:r>
+                  </m:oMath>
+                </a14:m>
+                <a:r>
+                  <a:rPr lang="en-US" altLang="ja-JP" sz="2000" dirty="0"/>
+                  <a:t>0%</a:t>
+                </a:r>
+                <a14:m>
+                  <m:oMath xmlns:m="http://schemas.openxmlformats.org/officeDocument/2006/math">
+                    <m:r>
+                      <a:rPr lang="en-US" altLang="ja-JP" sz="2000" i="1" dirty="0" smtClean="0">
+                        <a:latin typeface="Cambria Math" panose="02040503050406030204" pitchFamily="18" charset="0"/>
+                        <a:ea typeface="Cambria Math" panose="02040503050406030204" pitchFamily="18" charset="0"/>
+                      </a:rPr>
+                      <m:t>×</m:t>
+                    </m:r>
+                    <m:d>
+                      <m:dPr>
+                        <m:ctrlPr>
+                          <a:rPr lang="en-US" altLang="ja-JP" sz="2000" b="0" i="1" dirty="0" smtClean="0">
+                            <a:latin typeface="Cambria Math" panose="02040503050406030204" pitchFamily="18" charset="0"/>
+                            <a:ea typeface="Cambria Math" panose="02040503050406030204" pitchFamily="18" charset="0"/>
+                          </a:rPr>
+                        </m:ctrlPr>
+                      </m:dPr>
+                      <m:e>
+                        <m:r>
+                          <a:rPr lang="en-US" altLang="ja-JP" sz="2000" b="0" i="1" dirty="0" smtClean="0">
+                            <a:latin typeface="Cambria Math" panose="02040503050406030204" pitchFamily="18" charset="0"/>
+                            <a:ea typeface="Cambria Math" panose="02040503050406030204" pitchFamily="18" charset="0"/>
+                          </a:rPr>
+                          <m:t>0.8×0.375</m:t>
+                        </m:r>
+                      </m:e>
+                    </m:d>
+                    <m:r>
+                      <a:rPr lang="en-US" altLang="ja-JP" sz="2000" b="0" i="1" dirty="0" smtClean="0">
+                        <a:latin typeface="Cambria Math" panose="02040503050406030204" pitchFamily="18" charset="0"/>
+                        <a:ea typeface="Cambria Math" panose="02040503050406030204" pitchFamily="18" charset="0"/>
+                      </a:rPr>
+                      <m:t>+10%×</m:t>
+                    </m:r>
+                    <m:d>
+                      <m:dPr>
+                        <m:ctrlPr>
+                          <a:rPr lang="en-US" altLang="ja-JP" sz="2000" b="0" i="1" dirty="0" smtClean="0">
+                            <a:latin typeface="Cambria Math" panose="02040503050406030204" pitchFamily="18" charset="0"/>
+                            <a:ea typeface="Cambria Math" panose="02040503050406030204" pitchFamily="18" charset="0"/>
+                          </a:rPr>
+                        </m:ctrlPr>
+                      </m:dPr>
+                      <m:e>
+                        <m:r>
+                          <a:rPr lang="en-US" altLang="ja-JP" sz="2000" b="0" i="1" dirty="0" smtClean="0">
+                            <a:latin typeface="Cambria Math" panose="02040503050406030204" pitchFamily="18" charset="0"/>
+                            <a:ea typeface="Cambria Math" panose="02040503050406030204" pitchFamily="18" charset="0"/>
+                          </a:rPr>
+                          <m:t>0.2×3.5</m:t>
+                        </m:r>
+                      </m:e>
+                    </m:d>
+                    <m:r>
+                      <a:rPr lang="en-US" altLang="ja-JP" sz="2000" b="0" i="1" dirty="0" smtClean="0">
+                        <a:latin typeface="Cambria Math" panose="02040503050406030204" pitchFamily="18" charset="0"/>
+                        <a:ea typeface="Cambria Math" panose="02040503050406030204" pitchFamily="18" charset="0"/>
+                      </a:rPr>
+                      <m:t>=48%</m:t>
+                    </m:r>
+                  </m:oMath>
+                </a14:m>
+                <a:endParaRPr lang="en-US" altLang="ja-JP" sz="2000" dirty="0"/>
+              </a:p>
+              <a:p>
+                <a:pPr>
+                  <a:lnSpc>
+                    <a:spcPct val="150000"/>
+                  </a:lnSpc>
+                  <a:buFont typeface="Arial" panose="020B0604020202020204" pitchFamily="34" charset="0"/>
+                  <a:buChar char="•"/>
+                </a:pPr>
+                <a:r>
+                  <a:rPr lang="zh-TW" altLang="en-US" sz="2000" dirty="0"/>
+                  <a:t>我們透過 </a:t>
+                </a:r>
+                <a:r>
+                  <a:rPr lang="en-US" altLang="zh-TW" sz="2000" dirty="0"/>
+                  <a:t>3.5 </a:t>
+                </a:r>
+                <a:r>
+                  <a:rPr lang="zh-TW" altLang="en-US" sz="2000" dirty="0"/>
+                  <a:t>倍的權重 放大</a:t>
+                </a:r>
+                <a:r>
+                  <a:rPr lang="en-US" altLang="zh-TW" sz="2000" dirty="0"/>
+                  <a:t>20% </a:t>
+                </a:r>
+                <a:r>
+                  <a:rPr lang="zh-TW" altLang="en-US" sz="2000" dirty="0"/>
+                  <a:t>低興趣者的聲音，同時透過 </a:t>
+                </a:r>
+                <a:r>
+                  <a:rPr lang="en-US" altLang="zh-TW" sz="2000" dirty="0"/>
+                  <a:t>0.375 </a:t>
+                </a:r>
+                <a:r>
+                  <a:rPr lang="zh-TW" altLang="en-US" sz="2000" dirty="0"/>
+                  <a:t>倍的權重 縮小高興趣者的意見，最終結果從 </a:t>
+                </a:r>
+                <a:r>
+                  <a:rPr lang="en-US" altLang="zh-TW" sz="2000" dirty="0"/>
+                  <a:t>78% </a:t>
+                </a:r>
+                <a:r>
+                  <a:rPr lang="zh-TW" altLang="en-US" sz="2000" dirty="0"/>
+                  <a:t>修正回 </a:t>
+                </a:r>
+                <a:r>
+                  <a:rPr lang="en-US" altLang="zh-TW" sz="2000" dirty="0"/>
+                  <a:t>48%</a:t>
+                </a:r>
+                <a:r>
+                  <a:rPr lang="zh-TW" altLang="en-US" sz="2000" dirty="0"/>
+                  <a:t>。</a:t>
+                </a:r>
+                <a:endParaRPr lang="en-US" altLang="zh-TW" sz="2000" dirty="0"/>
+              </a:p>
+              <a:p>
+                <a:pPr>
+                  <a:buFont typeface="Arial" panose="020B0604020202020204" pitchFamily="34" charset="0"/>
+                  <a:buChar char="•"/>
+                </a:pPr>
+                <a:r>
+                  <a:rPr lang="zh-TW" altLang="en-US" sz="2000" dirty="0"/>
+                  <a:t>實務上我們用母體資料中有的性別、年齡、教育程度做加權。</a:t>
+                </a:r>
+                <a:endParaRPr lang="en-US" altLang="ja-JP" sz="2000" dirty="0"/>
+              </a:p>
+              <a:p>
+                <a:pPr>
+                  <a:lnSpc>
+                    <a:spcPct val="150000"/>
+                  </a:lnSpc>
+                  <a:buFont typeface="Wingdings" pitchFamily="2" charset="2"/>
+                  <a:buChar char="l"/>
+                </a:pPr>
+                <a:endParaRPr lang="en-US" sz="2000" dirty="0"/>
+              </a:p>
+              <a:p>
+                <a:pPr>
+                  <a:buFont typeface="Wingdings" pitchFamily="2" charset="2"/>
+                  <a:buChar char="l"/>
+                </a:pPr>
+                <a:endParaRPr lang="en-US" dirty="0"/>
+              </a:p>
+            </p:txBody>
+          </p:sp>
+        </mc:Choice>
+        <mc:Fallback>
+          <p:sp>
+            <p:nvSpPr>
+              <p:cNvPr id="3" name="Content Placeholder 2">
+                <a:extLst>
+                  <a:ext uri="{FF2B5EF4-FFF2-40B4-BE49-F238E27FC236}">
+                    <a16:creationId xmlns:a16="http://schemas.microsoft.com/office/drawing/2014/main" id="{3EA93E38-7841-925C-BFC9-14185BED8723}"/>
+                  </a:ext>
+                </a:extLst>
+              </p:cNvPr>
+              <p:cNvSpPr>
+                <a:spLocks noGrp="1" noRot="1" noChangeAspect="1" noMove="1" noResize="1" noEditPoints="1" noAdjustHandles="1" noChangeArrowheads="1" noChangeShapeType="1" noTextEdit="1"/>
+              </p:cNvSpPr>
+              <p:nvPr>
+                <p:ph idx="1"/>
+              </p:nvPr>
+            </p:nvSpPr>
+            <p:spPr>
+              <a:blipFill>
+                <a:blip r:embed="rId2"/>
+                <a:stretch>
+                  <a:fillRect l="-603"/>
+                </a:stretch>
+              </a:blipFill>
+            </p:spPr>
+            <p:txBody>
+              <a:bodyPr/>
+              <a:lstStyle/>
+              <a:p>
+                <a:r>
+                  <a:rPr lang="zh-TW" altLang="en-US">
+                    <a:noFill/>
+                  </a:rPr>
+                  <a:t> </a:t>
+                </a:r>
+              </a:p>
+            </p:txBody>
+          </p:sp>
+        </mc:Fallback>
+      </mc:AlternateContent>
+      <p:sp>
+        <p:nvSpPr>
+          <p:cNvPr id="4" name="Slide Number Placeholder 3">
+            <a:extLst>
+              <a:ext uri="{FF2B5EF4-FFF2-40B4-BE49-F238E27FC236}">
+                <a16:creationId xmlns:a16="http://schemas.microsoft.com/office/drawing/2014/main" id="{2F8FF1E7-E322-21A1-6294-CC4E877BA0B8}"/>
+              </a:ext>
+            </a:extLst>
+          </p:cNvPr>
+          <p:cNvSpPr>
+            <a:spLocks noGrp="1"/>
+          </p:cNvSpPr>
+          <p:nvPr>
+            <p:ph type="sldNum" sz="quarter" idx="12"/>
+          </p:nvPr>
+        </p:nvSpPr>
+        <p:spPr/>
+        <p:txBody>
+          <a:bodyPr/>
+          <a:lstStyle/>
+          <a:p>
+            <a:fld id="{34E21383-B02B-694B-B2AD-A967203CDE86}" type="slidenum">
+              <a:rPr lang="en-US" smtClean="0"/>
+              <a:t>13</a:t>
+            </a:fld>
+            <a:endParaRPr lang="en-US"/>
+          </a:p>
+        </p:txBody>
+      </p:sp>
+      <p:graphicFrame>
+        <p:nvGraphicFramePr>
+          <p:cNvPr id="5" name="Table 4">
+            <a:extLst>
+              <a:ext uri="{FF2B5EF4-FFF2-40B4-BE49-F238E27FC236}">
+                <a16:creationId xmlns:a16="http://schemas.microsoft.com/office/drawing/2014/main" id="{1CE15306-01FD-43DA-5871-5DFAE34D02B7}"/>
+              </a:ext>
+            </a:extLst>
+          </p:cNvPr>
+          <p:cNvGraphicFramePr>
+            <a:graphicFrameLocks noGrp="1"/>
+          </p:cNvGraphicFramePr>
+          <p:nvPr>
+            <p:extLst>
+              <p:ext uri="{D42A27DB-BD31-4B8C-83A1-F6EECF244321}">
+                <p14:modId xmlns:p14="http://schemas.microsoft.com/office/powerpoint/2010/main" val="714846717"/>
+              </p:ext>
+            </p:extLst>
+          </p:nvPr>
+        </p:nvGraphicFramePr>
+        <p:xfrm>
+          <a:off x="4436853" y="2063927"/>
+          <a:ext cx="4458669" cy="1118976"/>
+        </p:xfrm>
+        <a:graphic>
+          <a:graphicData uri="http://schemas.openxmlformats.org/drawingml/2006/table">
+            <a:tbl>
+              <a:tblPr firstRow="1" bandRow="1">
+                <a:tableStyleId>{5C22544A-7EE6-4342-B048-85BDC9FD1C3A}</a:tableStyleId>
+              </a:tblPr>
+              <a:tblGrid>
+                <a:gridCol w="1486223">
+                  <a:extLst>
+                    <a:ext uri="{9D8B030D-6E8A-4147-A177-3AD203B41FA5}">
+                      <a16:colId xmlns:a16="http://schemas.microsoft.com/office/drawing/2014/main" val="2198280680"/>
+                    </a:ext>
+                  </a:extLst>
+                </a:gridCol>
+                <a:gridCol w="1486223">
+                  <a:extLst>
+                    <a:ext uri="{9D8B030D-6E8A-4147-A177-3AD203B41FA5}">
+                      <a16:colId xmlns:a16="http://schemas.microsoft.com/office/drawing/2014/main" val="3632971567"/>
+                    </a:ext>
+                  </a:extLst>
+                </a:gridCol>
+                <a:gridCol w="1486223">
+                  <a:extLst>
+                    <a:ext uri="{9D8B030D-6E8A-4147-A177-3AD203B41FA5}">
+                      <a16:colId xmlns:a16="http://schemas.microsoft.com/office/drawing/2014/main" val="3549734281"/>
+                    </a:ext>
+                  </a:extLst>
+                </a:gridCol>
+              </a:tblGrid>
+              <a:tr h="377296">
+                <a:tc>
+                  <a:txBody>
+                    <a:bodyPr/>
+                    <a:lstStyle/>
+                    <a:p>
+                      <a:r>
+                        <a:rPr lang="en-US" dirty="0" err="1"/>
+                        <a:t>類型</a:t>
+                      </a:r>
+                      <a:endParaRPr lang="en-US" dirty="0"/>
+                    </a:p>
+                  </a:txBody>
+                  <a:tcPr/>
+                </a:tc>
+                <a:tc>
+                  <a:txBody>
+                    <a:bodyPr/>
+                    <a:lstStyle/>
+                    <a:p>
+                      <a:r>
+                        <a:rPr lang="en-US" dirty="0" err="1"/>
+                        <a:t>比例</a:t>
+                      </a:r>
+                      <a:endParaRPr lang="en-US" dirty="0"/>
+                    </a:p>
+                  </a:txBody>
+                  <a:tcPr/>
+                </a:tc>
+                <a:tc>
+                  <a:txBody>
+                    <a:bodyPr/>
+                    <a:lstStyle/>
+                    <a:p>
+                      <a:r>
+                        <a:rPr lang="en-US" dirty="0" err="1"/>
+                        <a:t>投票意願</a:t>
+                      </a:r>
+                      <a:endParaRPr lang="en-US" dirty="0"/>
+                    </a:p>
+                  </a:txBody>
+                  <a:tcPr/>
+                </a:tc>
+                <a:extLst>
+                  <a:ext uri="{0D108BD9-81ED-4DB2-BD59-A6C34878D82A}">
+                    <a16:rowId xmlns:a16="http://schemas.microsoft.com/office/drawing/2014/main" val="3134948381"/>
+                  </a:ext>
+                </a:extLst>
+              </a:tr>
+              <a:tr h="370840">
+                <a:tc>
+                  <a:txBody>
+                    <a:bodyPr/>
+                    <a:lstStyle/>
+                    <a:p>
+                      <a:r>
+                        <a:rPr lang="ja-JP" altLang="en-US" sz="1800"/>
+                        <a:t>高政治興趣</a:t>
+                      </a:r>
+                      <a:endParaRPr lang="en-US" dirty="0"/>
+                    </a:p>
+                  </a:txBody>
+                  <a:tcPr/>
+                </a:tc>
+                <a:tc>
+                  <a:txBody>
+                    <a:bodyPr/>
+                    <a:lstStyle/>
+                    <a:p>
+                      <a:r>
+                        <a:rPr lang="en-US" dirty="0"/>
+                        <a:t>80%</a:t>
+                      </a:r>
+                    </a:p>
+                  </a:txBody>
+                  <a:tcPr/>
+                </a:tc>
+                <a:tc>
+                  <a:txBody>
+                    <a:bodyPr/>
+                    <a:lstStyle/>
+                    <a:p>
+                      <a:r>
+                        <a:rPr lang="en-US" dirty="0"/>
+                        <a:t>90%</a:t>
+                      </a:r>
+                    </a:p>
+                  </a:txBody>
+                  <a:tcPr/>
+                </a:tc>
+                <a:extLst>
+                  <a:ext uri="{0D108BD9-81ED-4DB2-BD59-A6C34878D82A}">
+                    <a16:rowId xmlns:a16="http://schemas.microsoft.com/office/drawing/2014/main" val="623175551"/>
+                  </a:ext>
+                </a:extLst>
+              </a:tr>
+              <a:tr h="370840">
+                <a:tc>
+                  <a:txBody>
+                    <a:bodyPr/>
+                    <a:lstStyle/>
+                    <a:p>
+                      <a:r>
+                        <a:rPr lang="ja-JP" altLang="en-US" sz="1800"/>
+                        <a:t>低政治興趣</a:t>
+                      </a:r>
+                      <a:endParaRPr lang="en-US" dirty="0"/>
+                    </a:p>
+                  </a:txBody>
+                  <a:tcPr/>
+                </a:tc>
+                <a:tc>
+                  <a:txBody>
+                    <a:bodyPr/>
+                    <a:lstStyle/>
+                    <a:p>
+                      <a:r>
+                        <a:rPr lang="en-US" dirty="0"/>
+                        <a:t>20%</a:t>
+                      </a:r>
+                    </a:p>
+                  </a:txBody>
+                  <a:tcPr/>
+                </a:tc>
+                <a:tc>
+                  <a:txBody>
+                    <a:bodyPr/>
+                    <a:lstStyle/>
+                    <a:p>
+                      <a:r>
+                        <a:rPr lang="en-US" dirty="0"/>
+                        <a:t>10%</a:t>
+                      </a:r>
+                    </a:p>
+                  </a:txBody>
+                  <a:tcPr/>
+                </a:tc>
+                <a:extLst>
+                  <a:ext uri="{0D108BD9-81ED-4DB2-BD59-A6C34878D82A}">
+                    <a16:rowId xmlns:a16="http://schemas.microsoft.com/office/drawing/2014/main" val="4166148556"/>
+                  </a:ext>
+                </a:extLst>
+              </a:tr>
+            </a:tbl>
+          </a:graphicData>
+        </a:graphic>
+      </p:graphicFrame>
+    </p:spTree>
+    <p:extLst>
+      <p:ext uri="{BB962C8B-B14F-4D97-AF65-F5344CB8AC3E}">
+        <p14:creationId xmlns:p14="http://schemas.microsoft.com/office/powerpoint/2010/main" val="2464990952"/>
+      </p:ext>
+    </p:extLst>
+  </p:cSld>
+  <p:clrMapOvr>
+    <a:masterClrMapping/>
+  </p:clrMapOvr>
+</p:sld>
+</file>
+
+<file path=ppt/slides/slide14.xml><?xml version="1.0" encoding="utf-8"?>
+<p:sld xmlns:a="http://schemas.openxmlformats.org/drawingml/2006/main" xmlns:r="http://schemas.openxmlformats.org/officeDocument/2006/relationships" xmlns:p="http://schemas.openxmlformats.org/presentationml/2006/main">
+  <p:cSld>
+    <p:spTree>
+      <p:nvGrpSpPr>
         <p:cNvPr id="1" name=""/>
         <p:cNvGrpSpPr/>
         <p:nvPr/>
@@ -5005,8 +5758,8 @@
           </a:p>
         </p:txBody>
       </p:sp>
-      <mc:AlternateContent xmlns:mc="http://schemas.openxmlformats.org/markup-compatibility/2006" xmlns:a14="http://schemas.microsoft.com/office/drawing/2010/main">
-        <mc:Choice Requires="a14">
+      <mc:AlternateContent xmlns:mc="http://schemas.openxmlformats.org/markup-compatibility/2006">
+        <mc:Choice xmlns:a14="http://schemas.microsoft.com/office/drawing/2010/main" Requires="a14">
           <p:sp>
             <p:nvSpPr>
               <p:cNvPr id="3" name="Content Placeholder 2">
@@ -5198,7 +5951,7 @@
               </a:p>
               <a:p>
                 <a:r>
-                  <a:rPr lang="ja-JP" altLang="en-US" sz="2100"/>
+                  <a:rPr lang="ja-JP" altLang="en-US" sz="2000"/>
                   <a:t>最後資料的集合是：</a:t>
                 </a:r>
                 <a14:m>
@@ -5208,20 +5961,20 @@
                         <m:begChr m:val="{"/>
                         <m:endChr m:val="}"/>
                         <m:ctrlPr>
-                          <a:rPr lang="en-US" altLang="ja-JP" sz="2100" i="1" smtClean="0">
+                          <a:rPr lang="en-US" altLang="ja-JP" sz="2000" i="1" smtClean="0">
                             <a:latin typeface="Cambria Math" panose="02040503050406030204" pitchFamily="18" charset="0"/>
                           </a:rPr>
                         </m:ctrlPr>
                       </m:dPr>
                       <m:e>
                         <m:r>
-                          <a:rPr lang="en-US" altLang="ja-JP" sz="2100" b="0" i="1" smtClean="0">
+                          <a:rPr lang="en-US" altLang="ja-JP" sz="2000" b="0" i="1" smtClean="0">
                             <a:latin typeface="Cambria Math" panose="02040503050406030204" pitchFamily="18" charset="0"/>
                           </a:rPr>
                           <m:t>𝑖</m:t>
                         </m:r>
                         <m:r>
-                          <a:rPr lang="en-US" altLang="ja-JP" sz="2100" b="0" i="1" smtClean="0">
+                          <a:rPr lang="en-US" altLang="ja-JP" sz="2000" b="0" i="1" smtClean="0">
                             <a:latin typeface="Cambria Math" panose="02040503050406030204" pitchFamily="18" charset="0"/>
                           </a:rPr>
                           <m:t>:</m:t>
@@ -5229,14 +5982,14 @@
                         <m:sSub>
                           <m:sSubPr>
                             <m:ctrlPr>
-                              <a:rPr lang="en-US" sz="2400" i="1">
+                              <a:rPr lang="en-US" sz="2000" i="1">
                                 <a:latin typeface="Cambria Math" panose="02040503050406030204" pitchFamily="18" charset="0"/>
                               </a:rPr>
                             </m:ctrlPr>
                           </m:sSubPr>
                           <m:e>
                             <m:r>
-                              <a:rPr lang="en-US" sz="2400" i="1">
+                              <a:rPr lang="en-US" sz="2000" i="1">
                                 <a:latin typeface="Cambria Math" panose="02040503050406030204" pitchFamily="18" charset="0"/>
                               </a:rPr>
                               <m:t>𝑆</m:t>
@@ -5244,7 +5997,7 @@
                           </m:e>
                           <m:sub>
                             <m:r>
-                              <a:rPr lang="en-US" sz="2400" i="1">
+                              <a:rPr lang="en-US" sz="2000" i="1">
                                 <a:latin typeface="Cambria Math" panose="02040503050406030204" pitchFamily="18" charset="0"/>
                               </a:rPr>
                               <m:t>𝑖</m:t>
@@ -5252,13 +6005,13 @@
                           </m:sub>
                         </m:sSub>
                         <m:r>
-                          <a:rPr lang="en-US" sz="2400" i="1">
+                          <a:rPr lang="en-US" sz="2000" i="1">
                             <a:latin typeface="Cambria Math" panose="02040503050406030204" pitchFamily="18" charset="0"/>
                           </a:rPr>
                           <m:t>=1</m:t>
                         </m:r>
                         <m:r>
-                          <a:rPr lang="en-US" sz="2400" b="0" i="1" smtClean="0">
+                          <a:rPr lang="en-US" sz="2000" b="0" i="1" smtClean="0">
                             <a:latin typeface="Cambria Math" panose="02040503050406030204" pitchFamily="18" charset="0"/>
                           </a:rPr>
                           <m:t>,</m:t>
@@ -5266,14 +6019,14 @@
                         <m:sSub>
                           <m:sSubPr>
                             <m:ctrlPr>
-                              <a:rPr lang="en-US" sz="2400" i="1">
+                              <a:rPr lang="en-US" sz="2000" i="1">
                                 <a:latin typeface="Cambria Math" panose="02040503050406030204" pitchFamily="18" charset="0"/>
                               </a:rPr>
                             </m:ctrlPr>
                           </m:sSubPr>
                           <m:e>
                             <m:r>
-                              <a:rPr lang="en-US" sz="2400" b="0" i="1" smtClean="0">
+                              <a:rPr lang="en-US" sz="2000" b="0" i="1" smtClean="0">
                                 <a:latin typeface="Cambria Math" panose="02040503050406030204" pitchFamily="18" charset="0"/>
                               </a:rPr>
                               <m:t>𝐽</m:t>
@@ -5281,7 +6034,7 @@
                           </m:e>
                           <m:sub>
                             <m:r>
-                              <a:rPr lang="en-US" sz="2400" i="1">
+                              <a:rPr lang="en-US" sz="2000" i="1">
                                 <a:latin typeface="Cambria Math" panose="02040503050406030204" pitchFamily="18" charset="0"/>
                               </a:rPr>
                               <m:t>𝑖</m:t>
@@ -5289,13 +6042,13 @@
                           </m:sub>
                         </m:sSub>
                         <m:r>
-                          <a:rPr lang="en-US" sz="2400" i="1">
+                          <a:rPr lang="en-US" sz="2000" i="1">
                             <a:latin typeface="Cambria Math" panose="02040503050406030204" pitchFamily="18" charset="0"/>
                           </a:rPr>
                           <m:t>=1</m:t>
                         </m:r>
                         <m:r>
-                          <a:rPr lang="en-US" sz="2400" b="0" i="1" smtClean="0">
+                          <a:rPr lang="en-US" sz="2000" b="0" i="1" smtClean="0">
                             <a:latin typeface="Cambria Math" panose="02040503050406030204" pitchFamily="18" charset="0"/>
                           </a:rPr>
                           <m:t>,</m:t>
@@ -5303,14 +6056,14 @@
                         <m:sSub>
                           <m:sSubPr>
                             <m:ctrlPr>
-                              <a:rPr lang="en-US" sz="2400" i="1">
+                              <a:rPr lang="en-US" sz="2000" i="1">
                                 <a:latin typeface="Cambria Math" panose="02040503050406030204" pitchFamily="18" charset="0"/>
                               </a:rPr>
                             </m:ctrlPr>
                           </m:sSubPr>
                           <m:e>
                             <m:r>
-                              <a:rPr lang="en-US" sz="2400" b="0" i="1" smtClean="0">
+                              <a:rPr lang="en-US" sz="2000" b="0" i="1" smtClean="0">
                                 <a:latin typeface="Cambria Math" panose="02040503050406030204" pitchFamily="18" charset="0"/>
                               </a:rPr>
                               <m:t>𝑅</m:t>
@@ -5318,7 +6071,7 @@
                           </m:e>
                           <m:sub>
                             <m:r>
-                              <a:rPr lang="en-US" sz="2400" i="1">
+                              <a:rPr lang="en-US" sz="2000" i="1">
                                 <a:latin typeface="Cambria Math" panose="02040503050406030204" pitchFamily="18" charset="0"/>
                               </a:rPr>
                               <m:t>𝑖</m:t>
@@ -5326,7 +6079,7 @@
                           </m:sub>
                         </m:sSub>
                         <m:r>
-                          <a:rPr lang="en-US" sz="2400" i="1">
+                          <a:rPr lang="en-US" sz="2000" i="1">
                             <a:latin typeface="Cambria Math" panose="02040503050406030204" pitchFamily="18" charset="0"/>
                           </a:rPr>
                           <m:t>=1</m:t>
@@ -5335,15 +6088,131 @@
                     </m:d>
                   </m:oMath>
                 </a14:m>
-                <a:endParaRPr lang="ja-JP" altLang="en-US" sz="2100"/>
+                <a:endParaRPr lang="en-US" altLang="ja-JP" sz="2000" dirty="0"/>
               </a:p>
               <a:p>
-                <a:endParaRPr lang="en-US" dirty="0"/>
+                <a:r>
+                  <a:rPr lang="ja-JP" altLang="en-US" sz="2000"/>
+                  <a:t> 例如：</a:t>
+                </a:r>
+                <a:r>
+                  <a:rPr lang="en-US" altLang="ja-JP" sz="2000" dirty="0"/>
+                  <a:t>100 </a:t>
+                </a:r>
+                <a:r>
+                  <a:rPr lang="ja-JP" altLang="en-US" sz="2000"/>
+                  <a:t>人接電話</a:t>
+                </a:r>
+                <a14:m>
+                  <m:oMath xmlns:m="http://schemas.openxmlformats.org/officeDocument/2006/math">
+                    <m:r>
+                      <a:rPr lang="zh-TW" altLang="en-US" sz="2000" b="0" i="1" smtClean="0">
+                        <a:latin typeface="Cambria Math" panose="02040503050406030204" pitchFamily="18" charset="0"/>
+                      </a:rPr>
+                      <m:t>→</m:t>
+                    </m:r>
+                  </m:oMath>
+                </a14:m>
+                <a:r>
+                  <a:rPr lang="ja-JP" altLang="en-US" sz="2000"/>
+                  <a:t> </a:t>
+                </a:r>
+                <a:r>
+                  <a:rPr lang="en" altLang="ja-JP" sz="2000" dirty="0"/>
+                  <a:t>20 </a:t>
+                </a:r>
+                <a:r>
+                  <a:rPr lang="ja-JP" altLang="en-US" sz="2000"/>
+                  <a:t>人同意 </a:t>
+                </a:r>
+                <a14:m>
+                  <m:oMath xmlns:m="http://schemas.openxmlformats.org/officeDocument/2006/math">
+                    <m:r>
+                      <a:rPr lang="zh-TW" altLang="en-US" sz="2000" i="1">
+                        <a:latin typeface="Cambria Math" panose="02040503050406030204" pitchFamily="18" charset="0"/>
+                      </a:rPr>
+                      <m:t>→</m:t>
+                    </m:r>
+                  </m:oMath>
+                </a14:m>
+                <a:r>
+                  <a:rPr lang="en" altLang="ja-JP" sz="2000" dirty="0"/>
+                  <a:t> 5 </a:t>
+                </a:r>
+                <a:r>
+                  <a:rPr lang="ja-JP" altLang="en-US" sz="2000"/>
+                  <a:t>人填完 。為了推論母體，最後留下的這 </a:t>
+                </a:r>
+                <a:r>
+                  <a:rPr lang="en-US" altLang="ja-JP" sz="2000" dirty="0"/>
+                  <a:t>5 </a:t>
+                </a:r>
+                <a:r>
+                  <a:rPr lang="ja-JP" altLang="en-US" sz="2000"/>
+                  <a:t>個人，每個人都要代表原本那 </a:t>
+                </a:r>
+                <a:r>
+                  <a:rPr lang="en-US" altLang="ja-JP" sz="2000" dirty="0"/>
+                  <a:t>100 </a:t>
+                </a:r>
+                <a:r>
+                  <a:rPr lang="ja-JP" altLang="en-US" sz="2000"/>
+                  <a:t>人的份量 。</a:t>
+                </a:r>
+              </a:p>
+              <a:p>
+                <a:r>
+                  <a:rPr lang="zh-TW" altLang="en-US" sz="2000" dirty="0"/>
+                  <a:t>所以，權值</a:t>
+                </a:r>
+                <a:r>
+                  <a:rPr lang="en-US" altLang="zh-TW" sz="2000" dirty="0"/>
+                  <a:t>=</a:t>
+                </a:r>
+                <a:r>
+                  <a:rPr lang="zh-TW" altLang="en-US" sz="2000" dirty="0"/>
+                  <a:t>電話抽樣權重 </a:t>
+                </a:r>
+                <a14:m>
+                  <m:oMath xmlns:m="http://schemas.openxmlformats.org/officeDocument/2006/math">
+                    <m:r>
+                      <a:rPr lang="en-US" altLang="zh-TW" sz="2000" i="1" smtClean="0">
+                        <a:latin typeface="Cambria Math" panose="02040503050406030204" pitchFamily="18" charset="0"/>
+                        <a:ea typeface="Cambria Math" panose="02040503050406030204" pitchFamily="18" charset="0"/>
+                      </a:rPr>
+                      <m:t>×</m:t>
+                    </m:r>
+                  </m:oMath>
+                </a14:m>
+                <a:r>
+                  <a:rPr lang="en-US" sz="2000" dirty="0"/>
+                  <a:t> </a:t>
+                </a:r>
+                <a:r>
+                  <a:rPr lang="zh-TW" altLang="en-US" sz="2000" dirty="0"/>
+                  <a:t>加入資料庫機率的倒數 </a:t>
+                </a:r>
+                <a14:m>
+                  <m:oMath xmlns:m="http://schemas.openxmlformats.org/officeDocument/2006/math">
+                    <m:r>
+                      <a:rPr lang="en-US" altLang="zh-TW" sz="2000" i="1" dirty="0" smtClean="0">
+                        <a:latin typeface="Cambria Math" panose="02040503050406030204" pitchFamily="18" charset="0"/>
+                        <a:ea typeface="Cambria Math" panose="02040503050406030204" pitchFamily="18" charset="0"/>
+                      </a:rPr>
+                      <m:t>×</m:t>
+                    </m:r>
+                  </m:oMath>
+                </a14:m>
+                <a:r>
+                  <a:rPr lang="zh-TW" altLang="en-US" sz="2000" dirty="0"/>
+                  <a:t>完成問卷機率的倒數 。</a:t>
+                </a:r>
+                <a:endParaRPr lang="en-US" sz="2000" dirty="0"/>
               </a:p>
             </p:txBody>
           </p:sp>
         </mc:Choice>
-        <mc:Fallback xmlns="">
+        <mc:Fallback>
           <p:sp>
             <p:nvSpPr>
               <p:cNvPr id="3" name="Content Placeholder 2">
@@ -5373,7 +6242,7 @@
               <a:lstStyle/>
               <a:p>
                 <a:r>
-                  <a:rPr lang="en-US">
+                  <a:rPr lang="zh-TW" altLang="en-US">
                     <a:noFill/>
                   </a:rPr>
                   <a:t> </a:t>
@@ -5406,7 +6275,7 @@
           <a:p>
             <a:fld id="{34E21383-B02B-694B-B2AD-A967203CDE86}" type="slidenum">
               <a:rPr lang="en-US" smtClean="0"/>
-              <a:t>13</a:t>
+              <a:t>14</a:t>
             </a:fld>
             <a:endParaRPr lang="en-US"/>
           </a:p>
@@ -5425,7 +6294,7 @@
 </p:sld>
 </file>
 
-<file path=ppt/slides/slide14.xml><?xml version="1.0" encoding="utf-8"?>
+<file path=ppt/slides/slide15.xml><?xml version="1.0" encoding="utf-8"?>
 <p:sld xmlns:a="http://schemas.openxmlformats.org/drawingml/2006/main" xmlns:r="http://schemas.openxmlformats.org/officeDocument/2006/relationships" xmlns:p="http://schemas.openxmlformats.org/presentationml/2006/main">
   <p:cSld>
     <p:spTree>
@@ -5478,8 +6347,8 @@
           </a:p>
         </p:txBody>
       </p:sp>
-      <mc:AlternateContent xmlns:mc="http://schemas.openxmlformats.org/markup-compatibility/2006" xmlns:a14="http://schemas.microsoft.com/office/drawing/2010/main">
-        <mc:Choice Requires="a14">
+      <mc:AlternateContent xmlns:mc="http://schemas.openxmlformats.org/markup-compatibility/2006">
+        <mc:Choice xmlns:a14="http://schemas.microsoft.com/office/drawing/2010/main" Requires="a14">
           <p:sp>
             <p:nvSpPr>
               <p:cNvPr id="3" name="Content Placeholder 2">
@@ -5499,30 +6368,40 @@
             <p:spPr/>
             <p:txBody>
               <a:bodyPr>
-                <a:normAutofit/>
+                <a:normAutofit fontScale="92500" lnSpcReduction="20000"/>
               </a:bodyPr>
               <a:lstStyle/>
               <a:p>
-                <a:r>
-                  <a:rPr lang="ja-JP" altLang="en-US" sz="2400"/>
+                <a:pPr>
+                  <a:lnSpc>
+                    <a:spcPct val="150000"/>
+                  </a:lnSpc>
+                </a:pPr>
+                <a:r>
+                  <a:rPr lang="ja-JP" altLang="en-US" sz="2000"/>
                   <a:t>在電話樣本內，完成線上問卷的條件機率為：</a:t>
                 </a:r>
-                <a:endParaRPr lang="en-US" altLang="ja-JP" sz="2400" dirty="0"/>
+                <a:endParaRPr lang="en-US" altLang="ja-JP" sz="2000" dirty="0"/>
               </a:p>
               <a:p>
+                <a:pPr>
+                  <a:lnSpc>
+                    <a:spcPct val="150000"/>
+                  </a:lnSpc>
+                </a:pPr>
                 <a14:m>
                   <m:oMath xmlns:m="http://schemas.openxmlformats.org/officeDocument/2006/math">
                     <m:sSub>
                       <m:sSubPr>
                         <m:ctrlPr>
-                          <a:rPr lang="en-US" altLang="ja-JP" sz="2400" i="1" smtClean="0">
+                          <a:rPr lang="en-US" altLang="ja-JP" sz="2000" i="1" smtClean="0">
                             <a:latin typeface="Cambria Math" panose="02040503050406030204" pitchFamily="18" charset="0"/>
                           </a:rPr>
                         </m:ctrlPr>
                       </m:sSubPr>
                       <m:e>
                         <m:r>
-                          <a:rPr lang="en-US" altLang="ja-JP" sz="2400" b="0" i="1" smtClean="0">
+                          <a:rPr lang="en-US" altLang="ja-JP" sz="2000" b="0" i="1" smtClean="0">
                             <a:latin typeface="Cambria Math" panose="02040503050406030204" pitchFamily="18" charset="0"/>
                           </a:rPr>
                           <m:t>𝑝</m:t>
@@ -5530,7 +6409,7 @@
                       </m:e>
                       <m:sub>
                         <m:r>
-                          <a:rPr lang="en-US" altLang="ja-JP" sz="2400" b="0" i="1" smtClean="0">
+                          <a:rPr lang="en-US" altLang="ja-JP" sz="2000" b="0" i="1" smtClean="0">
                             <a:latin typeface="Cambria Math" panose="02040503050406030204" pitchFamily="18" charset="0"/>
                           </a:rPr>
                           <m:t>𝐽𝑅</m:t>
@@ -5540,14 +6419,14 @@
                     <m:d>
                       <m:dPr>
                         <m:ctrlPr>
-                          <a:rPr lang="en-US" altLang="ja-JP" sz="2400" b="0" i="1" smtClean="0">
+                          <a:rPr lang="en-US" altLang="ja-JP" sz="2000" b="0" i="1" smtClean="0">
                             <a:latin typeface="Cambria Math" panose="02040503050406030204" pitchFamily="18" charset="0"/>
                           </a:rPr>
                         </m:ctrlPr>
                       </m:dPr>
                       <m:e>
                         <m:r>
-                          <a:rPr lang="en-US" altLang="ja-JP" sz="2400" b="0" i="1" smtClean="0">
+                          <a:rPr lang="en-US" altLang="ja-JP" sz="2000" b="0" i="1" smtClean="0">
                             <a:latin typeface="Cambria Math" panose="02040503050406030204" pitchFamily="18" charset="0"/>
                           </a:rPr>
                           <m:t>𝑋</m:t>
@@ -5555,7 +6434,7 @@
                       </m:e>
                     </m:d>
                     <m:r>
-                      <a:rPr lang="en-US" altLang="ja-JP" sz="2400" b="0" i="1" smtClean="0">
+                      <a:rPr lang="en-US" altLang="ja-JP" sz="2000" b="0" i="1" smtClean="0">
                         <a:latin typeface="Cambria Math" panose="02040503050406030204" pitchFamily="18" charset="0"/>
                       </a:rPr>
                       <m:t>=</m:t>
@@ -5563,7 +6442,7 @@
                     <m:func>
                       <m:funcPr>
                         <m:ctrlPr>
-                          <a:rPr lang="en-US" altLang="ja-JP" sz="2400" b="0" i="1" smtClean="0">
+                          <a:rPr lang="en-US" altLang="ja-JP" sz="2000" b="0" i="1" smtClean="0">
                             <a:latin typeface="Cambria Math" panose="02040503050406030204" pitchFamily="18" charset="0"/>
                           </a:rPr>
                         </m:ctrlPr>
@@ -5573,7 +6452,7 @@
                           <m:rPr>
                             <m:sty m:val="p"/>
                           </m:rPr>
-                          <a:rPr lang="en-US" altLang="ja-JP" sz="2400" b="0" i="0" smtClean="0">
+                          <a:rPr lang="en-US" altLang="ja-JP" sz="2000" b="0" i="0" smtClean="0">
                             <a:latin typeface="Cambria Math" panose="02040503050406030204" pitchFamily="18" charset="0"/>
                           </a:rPr>
                           <m:t>Pr</m:t>
@@ -5583,32 +6462,32 @@
                         <m:d>
                           <m:dPr>
                             <m:ctrlPr>
-                              <a:rPr lang="en-US" altLang="ja-JP" sz="2400" b="0" i="1" smtClean="0">
+                              <a:rPr lang="en-US" altLang="ja-JP" sz="2000" b="0" i="1" smtClean="0">
                                 <a:latin typeface="Cambria Math" panose="02040503050406030204" pitchFamily="18" charset="0"/>
                               </a:rPr>
                             </m:ctrlPr>
                           </m:dPr>
                           <m:e>
                             <m:r>
-                              <a:rPr lang="en-US" altLang="ja-JP" sz="2400" b="0" i="1" smtClean="0">
+                              <a:rPr lang="en-US" altLang="ja-JP" sz="2000" b="0" i="1" smtClean="0">
                                 <a:latin typeface="Cambria Math" panose="02040503050406030204" pitchFamily="18" charset="0"/>
                               </a:rPr>
                               <m:t>𝐽</m:t>
                             </m:r>
                             <m:r>
-                              <a:rPr lang="en-US" altLang="ja-JP" sz="2400" b="0" i="1" smtClean="0">
+                              <a:rPr lang="en-US" altLang="ja-JP" sz="2000" b="0" i="1" smtClean="0">
                                 <a:latin typeface="Cambria Math" panose="02040503050406030204" pitchFamily="18" charset="0"/>
                               </a:rPr>
                               <m:t>=1,</m:t>
                             </m:r>
                             <m:r>
-                              <a:rPr lang="en-US" altLang="ja-JP" sz="2400" b="0" i="1" smtClean="0">
+                              <a:rPr lang="en-US" altLang="ja-JP" sz="2000" b="0" i="1" smtClean="0">
                                 <a:latin typeface="Cambria Math" panose="02040503050406030204" pitchFamily="18" charset="0"/>
                               </a:rPr>
                               <m:t>𝑅</m:t>
                             </m:r>
                             <m:r>
-                              <a:rPr lang="en-US" altLang="ja-JP" sz="2400" b="0" i="1" smtClean="0">
+                              <a:rPr lang="en-US" altLang="ja-JP" sz="2000" b="0" i="1" smtClean="0">
                                 <a:latin typeface="Cambria Math" panose="02040503050406030204" pitchFamily="18" charset="0"/>
                               </a:rPr>
                               <m:t>=1</m:t>
@@ -5616,25 +6495,25 @@
                           </m:e>
                           <m:e>
                             <m:r>
-                              <a:rPr lang="en-US" altLang="ja-JP" sz="2400" b="0" i="1" smtClean="0">
+                              <a:rPr lang="en-US" altLang="ja-JP" sz="2000" b="0" i="1" smtClean="0">
                                 <a:latin typeface="Cambria Math" panose="02040503050406030204" pitchFamily="18" charset="0"/>
                               </a:rPr>
                               <m:t>𝑋</m:t>
                             </m:r>
                             <m:r>
-                              <a:rPr lang="en-US" altLang="ja-JP" sz="2400" b="0" i="1" smtClean="0">
+                              <a:rPr lang="en-US" altLang="ja-JP" sz="2000" b="0" i="1" smtClean="0">
                                 <a:latin typeface="Cambria Math" panose="02040503050406030204" pitchFamily="18" charset="0"/>
                               </a:rPr>
                               <m:t>,</m:t>
                             </m:r>
                             <m:r>
-                              <a:rPr lang="en-US" altLang="ja-JP" sz="2400" b="0" i="1" smtClean="0">
+                              <a:rPr lang="en-US" altLang="ja-JP" sz="2000" b="0" i="1" smtClean="0">
                                 <a:latin typeface="Cambria Math" panose="02040503050406030204" pitchFamily="18" charset="0"/>
                               </a:rPr>
                               <m:t>𝑆</m:t>
                             </m:r>
                             <m:r>
-                              <a:rPr lang="en-US" altLang="ja-JP" sz="2400" b="0" i="1" smtClean="0">
+                              <a:rPr lang="en-US" altLang="ja-JP" sz="2000" b="0" i="1" smtClean="0">
                                 <a:latin typeface="Cambria Math" panose="02040503050406030204" pitchFamily="18" charset="0"/>
                               </a:rPr>
                               <m:t>=1</m:t>
@@ -5644,7 +6523,7 @@
                       </m:e>
                     </m:func>
                     <m:r>
-                      <a:rPr lang="en-US" altLang="ja-JP" sz="2400" b="0" i="1" smtClean="0">
+                      <a:rPr lang="en-US" altLang="ja-JP" sz="2000" b="0" i="1" smtClean="0">
                         <a:latin typeface="Cambria Math" panose="02040503050406030204" pitchFamily="18" charset="0"/>
                       </a:rPr>
                       <m:t>=</m:t>
@@ -5652,14 +6531,14 @@
                     <m:sSub>
                       <m:sSubPr>
                         <m:ctrlPr>
-                          <a:rPr lang="en-US" altLang="ja-JP" sz="2400" b="0" i="1" smtClean="0">
+                          <a:rPr lang="en-US" altLang="ja-JP" sz="2000" b="0" i="1" smtClean="0">
                             <a:latin typeface="Cambria Math" panose="02040503050406030204" pitchFamily="18" charset="0"/>
                           </a:rPr>
                         </m:ctrlPr>
                       </m:sSubPr>
                       <m:e>
                         <m:r>
-                          <a:rPr lang="en-US" altLang="ja-JP" sz="2400" b="0" i="1" smtClean="0">
+                          <a:rPr lang="en-US" altLang="ja-JP" sz="2000" b="0" i="1" smtClean="0">
                             <a:latin typeface="Cambria Math" panose="02040503050406030204" pitchFamily="18" charset="0"/>
                           </a:rPr>
                           <m:t>𝑝</m:t>
@@ -5667,7 +6546,7 @@
                       </m:e>
                       <m:sub>
                         <m:r>
-                          <a:rPr lang="en-US" altLang="ja-JP" sz="2400" b="0" i="1" smtClean="0">
+                          <a:rPr lang="en-US" altLang="ja-JP" sz="2000" b="0" i="1" smtClean="0">
                             <a:latin typeface="Cambria Math" panose="02040503050406030204" pitchFamily="18" charset="0"/>
                           </a:rPr>
                           <m:t>𝐽</m:t>
@@ -5677,14 +6556,14 @@
                     <m:d>
                       <m:dPr>
                         <m:ctrlPr>
-                          <a:rPr lang="en-US" altLang="ja-JP" sz="2400" b="0" i="1" smtClean="0">
+                          <a:rPr lang="en-US" altLang="ja-JP" sz="2000" b="0" i="1" smtClean="0">
                             <a:latin typeface="Cambria Math" panose="02040503050406030204" pitchFamily="18" charset="0"/>
                           </a:rPr>
                         </m:ctrlPr>
                       </m:dPr>
                       <m:e>
                         <m:r>
-                          <a:rPr lang="en-US" altLang="ja-JP" sz="2400" b="0" i="1" smtClean="0">
+                          <a:rPr lang="en-US" altLang="ja-JP" sz="2000" b="0" i="1" smtClean="0">
                             <a:latin typeface="Cambria Math" panose="02040503050406030204" pitchFamily="18" charset="0"/>
                           </a:rPr>
                           <m:t>𝑋</m:t>
@@ -5694,14 +6573,14 @@
                     <m:sSub>
                       <m:sSubPr>
                         <m:ctrlPr>
-                          <a:rPr lang="en-US" altLang="ja-JP" sz="2400" b="0" i="1" smtClean="0">
+                          <a:rPr lang="en-US" altLang="ja-JP" sz="2000" b="0" i="1" smtClean="0">
                             <a:latin typeface="Cambria Math" panose="02040503050406030204" pitchFamily="18" charset="0"/>
                           </a:rPr>
                         </m:ctrlPr>
                       </m:sSubPr>
                       <m:e>
                         <m:r>
-                          <a:rPr lang="en-US" altLang="ja-JP" sz="2400" b="0" i="1" smtClean="0">
+                          <a:rPr lang="en-US" altLang="ja-JP" sz="2000" b="0" i="1" smtClean="0">
                             <a:latin typeface="Cambria Math" panose="02040503050406030204" pitchFamily="18" charset="0"/>
                           </a:rPr>
                           <m:t>𝑝</m:t>
@@ -5709,7 +6588,7 @@
                       </m:e>
                       <m:sub>
                         <m:r>
-                          <a:rPr lang="en-US" altLang="ja-JP" sz="2400" b="0" i="1" smtClean="0">
+                          <a:rPr lang="en-US" altLang="ja-JP" sz="2000" b="0" i="1" smtClean="0">
                             <a:latin typeface="Cambria Math" panose="02040503050406030204" pitchFamily="18" charset="0"/>
                           </a:rPr>
                           <m:t>𝑅</m:t>
@@ -5719,14 +6598,14 @@
                     <m:d>
                       <m:dPr>
                         <m:ctrlPr>
-                          <a:rPr lang="en-US" altLang="ja-JP" sz="2400" b="0" i="1" smtClean="0">
+                          <a:rPr lang="en-US" altLang="ja-JP" sz="2000" b="0" i="1" smtClean="0">
                             <a:latin typeface="Cambria Math" panose="02040503050406030204" pitchFamily="18" charset="0"/>
                           </a:rPr>
                         </m:ctrlPr>
                       </m:dPr>
                       <m:e>
                         <m:r>
-                          <a:rPr lang="en-US" altLang="ja-JP" sz="2400" b="0" i="1" smtClean="0">
+                          <a:rPr lang="en-US" altLang="ja-JP" sz="2000" b="0" i="1" smtClean="0">
                             <a:latin typeface="Cambria Math" panose="02040503050406030204" pitchFamily="18" charset="0"/>
                           </a:rPr>
                           <m:t>𝑋</m:t>
@@ -5735,63 +6614,78 @@
                     </m:d>
                   </m:oMath>
                 </a14:m>
-                <a:endParaRPr lang="en-US" altLang="ja-JP" sz="2400" b="0" dirty="0"/>
+                <a:endParaRPr lang="en-US" altLang="ja-JP" sz="2000" b="0" dirty="0"/>
               </a:p>
               <a:p>
-                <a:r>
-                  <a:rPr lang="ja-JP" altLang="en-US" sz="2400"/>
+                <a:pPr>
+                  <a:lnSpc>
+                    <a:spcPct val="150000"/>
+                  </a:lnSpc>
+                </a:pPr>
+                <a:r>
+                  <a:rPr lang="ja-JP" altLang="en-US" sz="2000"/>
                   <a:t>在「已經完成電話訪問（</a:t>
                 </a:r>
                 <a:r>
-                  <a:rPr lang="en-US" sz="2400" i="1" dirty="0"/>
+                  <a:rPr lang="en-US" sz="2000" i="1" dirty="0"/>
                   <a:t>S</a:t>
                 </a:r>
                 <a:r>
-                  <a:rPr lang="en-US" sz="2400" dirty="0"/>
+                  <a:rPr lang="en-US" sz="2000" dirty="0"/>
                   <a:t>=1）」</a:t>
                 </a:r>
                 <a:r>
-                  <a:rPr lang="ja-JP" altLang="en-US" sz="2400"/>
+                  <a:rPr lang="ja-JP" altLang="en-US" sz="2000"/>
                   <a:t>且給定特徵 </a:t>
                 </a:r>
                 <a:r>
-                  <a:rPr lang="en-US" altLang="ja-JP" sz="2400" dirty="0"/>
+                  <a:rPr lang="en-US" altLang="ja-JP" sz="2000" dirty="0"/>
                   <a:t>X</a:t>
                 </a:r>
                 <a:r>
-                  <a:rPr lang="en-US" sz="2400" dirty="0"/>
+                  <a:rPr lang="en-US" sz="2000" dirty="0"/>
                   <a:t> </a:t>
                 </a:r>
                 <a:r>
-                  <a:rPr lang="ja-JP" altLang="en-US" sz="2400"/>
-                  <a:t>的情況下，一個人同時會「加入面板」且「完成線上問卷」的機率等於：</a:t>
-                </a:r>
-                <a:r>
-                  <a:rPr lang="en-US" sz="2400" dirty="0"/>
+                  <a:rPr lang="ja-JP" altLang="en-US" sz="2000"/>
+                  <a:t>的情況下，一個人同時會「加入資料庫」且「完成線上問卷」的機率等於：</a:t>
+                </a:r>
+                <a:r>
+                  <a:rPr lang="en-US" sz="2000" dirty="0"/>
                   <a:t>「</a:t>
                 </a:r>
                 <a:r>
-                  <a:rPr lang="ja-JP" altLang="en-US" sz="2400"/>
+                  <a:rPr lang="ja-JP" altLang="en-US" sz="2000"/>
                   <a:t>加入網路調查資料庫的機率」</a:t>
                 </a:r>
                 <a:r>
-                  <a:rPr lang="en-US" altLang="ja-JP" sz="2400" dirty="0"/>
+                  <a:rPr lang="en-US" altLang="ja-JP" sz="2000" dirty="0"/>
                   <a:t>×</a:t>
                 </a:r>
                 <a:r>
-                  <a:rPr lang="ja-JP" altLang="en-US" sz="2400"/>
+                  <a:rPr lang="ja-JP" altLang="en-US" sz="2000"/>
                   <a:t>「加入後完成的機率」</a:t>
                 </a:r>
-                <a:endParaRPr lang="en-US" altLang="ja-JP" sz="2400" dirty="0"/>
+                <a:endParaRPr lang="en-US" altLang="ja-JP" sz="2000" dirty="0"/>
               </a:p>
               <a:p>
-                <a:r>
-                  <a:rPr lang="ja-JP" altLang="en-US" sz="2400"/>
+                <a:pPr>
+                  <a:lnSpc>
+                    <a:spcPct val="150000"/>
+                  </a:lnSpc>
+                </a:pPr>
+                <a:r>
+                  <a:rPr lang="ja-JP" altLang="en-US" sz="2000"/>
                   <a:t>「線上完成者」的總權重可以寫成：</a:t>
                 </a:r>
-                <a:endParaRPr lang="en-US" altLang="ja-JP" sz="2400" dirty="0"/>
+                <a:endParaRPr lang="en-US" altLang="ja-JP" sz="2000" dirty="0"/>
               </a:p>
               <a:p>
+                <a:pPr>
+                  <a:lnSpc>
+                    <a:spcPct val="150000"/>
+                  </a:lnSpc>
+                </a:pPr>
                 <a14:m>
                   <m:oMath xmlns:m="http://schemas.openxmlformats.org/officeDocument/2006/math">
                     <m:sSub>
@@ -6071,16 +6965,21 @@
                 <a:endParaRPr lang="en-US" altLang="ja-JP" sz="2400" dirty="0"/>
               </a:p>
               <a:p>
-                <a:r>
-                  <a:rPr lang="ja-JP" altLang="en-US" sz="2400"/>
+                <a:pPr>
+                  <a:lnSpc>
+                    <a:spcPct val="150000"/>
+                  </a:lnSpc>
+                </a:pPr>
+                <a:r>
+                  <a:rPr lang="ja-JP" altLang="en-US" sz="2000"/>
                   <a:t>用「機率的倒數」去加權時，被選進樣本的隨機過程會被「抵消掉」。所以加權後能回到母體平均。</a:t>
                 </a:r>
-                <a:endParaRPr lang="en-US" sz="2400" dirty="0"/>
+                <a:endParaRPr lang="en-US" sz="2000" dirty="0"/>
               </a:p>
             </p:txBody>
           </p:sp>
         </mc:Choice>
-        <mc:Fallback xmlns="">
+        <mc:Fallback>
           <p:sp>
             <p:nvSpPr>
               <p:cNvPr id="3" name="Content Placeholder 2">
@@ -6101,7 +7000,7 @@
               <a:blipFill>
                 <a:blip r:embed="rId2"/>
                 <a:stretch>
-                  <a:fillRect l="-844" t="-2035" r="-483"/>
+                  <a:fillRect l="-724"/>
                 </a:stretch>
               </a:blipFill>
             </p:spPr>
@@ -6110,7 +7009,7 @@
               <a:lstStyle/>
               <a:p>
                 <a:r>
-                  <a:rPr lang="en-US">
+                  <a:rPr lang="zh-TW" altLang="en-US">
                     <a:noFill/>
                   </a:rPr>
                   <a:t> </a:t>
@@ -6143,7 +7042,7 @@
           <a:p>
             <a:fld id="{34E21383-B02B-694B-B2AD-A967203CDE86}" type="slidenum">
               <a:rPr lang="en-US" smtClean="0"/>
-              <a:t>14</a:t>
+              <a:t>15</a:t>
             </a:fld>
             <a:endParaRPr lang="en-US"/>
           </a:p>
@@ -6153,231 +7052,6 @@
     <p:extLst>
       <p:ext uri="{BB962C8B-B14F-4D97-AF65-F5344CB8AC3E}">
         <p14:creationId xmlns:p14="http://schemas.microsoft.com/office/powerpoint/2010/main" val="1486744652"/>
-      </p:ext>
-    </p:extLst>
-  </p:cSld>
-  <p:clrMapOvr>
-    <a:masterClrMapping/>
-  </p:clrMapOvr>
-</p:sld>
-</file>
-
-<file path=ppt/slides/slide15.xml><?xml version="1.0" encoding="utf-8"?>
-<p:sld xmlns:a="http://schemas.openxmlformats.org/drawingml/2006/main" xmlns:r="http://schemas.openxmlformats.org/officeDocument/2006/relationships" xmlns:p="http://schemas.openxmlformats.org/presentationml/2006/main">
-  <p:cSld>
-    <p:spTree>
-      <p:nvGrpSpPr>
-        <p:cNvPr id="1" name=""/>
-        <p:cNvGrpSpPr/>
-        <p:nvPr/>
-      </p:nvGrpSpPr>
-      <p:grpSpPr>
-        <a:xfrm>
-          <a:off x="0" y="0"/>
-          <a:ext cx="0" cy="0"/>
-          <a:chOff x="0" y="0"/>
-          <a:chExt cx="0" cy="0"/>
-        </a:xfrm>
-      </p:grpSpPr>
-      <p:sp>
-        <p:nvSpPr>
-          <p:cNvPr id="2" name="Title 1">
-            <a:extLst>
-              <a:ext uri="{FF2B5EF4-FFF2-40B4-BE49-F238E27FC236}">
-                <a16:creationId xmlns:a16="http://schemas.microsoft.com/office/drawing/2014/main" id="{DA77E66D-9F36-5B97-5623-156937724516}"/>
-              </a:ext>
-            </a:extLst>
-          </p:cNvPr>
-          <p:cNvSpPr>
-            <a:spLocks noGrp="1"/>
-          </p:cNvSpPr>
-          <p:nvPr>
-            <p:ph type="title"/>
-          </p:nvPr>
-        </p:nvSpPr>
-        <p:spPr/>
-        <p:txBody>
-          <a:bodyPr/>
-          <a:lstStyle/>
-          <a:p>
-            <a:r>
-              <a:rPr lang="ja-JP" altLang="en-US"/>
-              <a:t>網路調查的</a:t>
-            </a:r>
-            <a:r>
-              <a:rPr lang="en-US" dirty="0" err="1"/>
-              <a:t>加權（三</a:t>
-            </a:r>
-            <a:r>
-              <a:rPr lang="en-US" dirty="0"/>
-              <a:t>）</a:t>
-            </a:r>
-          </a:p>
-        </p:txBody>
-      </p:sp>
-      <p:sp>
-        <p:nvSpPr>
-          <p:cNvPr id="3" name="Content Placeholder 2">
-            <a:extLst>
-              <a:ext uri="{FF2B5EF4-FFF2-40B4-BE49-F238E27FC236}">
-                <a16:creationId xmlns:a16="http://schemas.microsoft.com/office/drawing/2014/main" id="{AB16EA0F-9F78-1203-E782-0F8EC7D2F0A9}"/>
-              </a:ext>
-            </a:extLst>
-          </p:cNvPr>
-          <p:cNvSpPr>
-            <a:spLocks noGrp="1"/>
-          </p:cNvSpPr>
-          <p:nvPr>
-            <p:ph idx="1"/>
-          </p:nvPr>
-        </p:nvSpPr>
-        <p:spPr/>
-        <p:txBody>
-          <a:bodyPr>
-            <a:normAutofit/>
-          </a:bodyPr>
-          <a:lstStyle/>
-          <a:p>
-            <a:r>
-              <a:rPr lang="ja-JP" altLang="en-US" sz="2400"/>
-              <a:t>因為觀察到的資料</a:t>
-            </a:r>
-            <a:r>
-              <a:rPr lang="en-US" altLang="ja-JP" sz="2400" dirty="0"/>
-              <a:t>=</a:t>
-            </a:r>
-            <a:r>
-              <a:rPr lang="ja-JP" altLang="en-US" sz="2400"/>
-              <a:t>真實資料</a:t>
-            </a:r>
-            <a:r>
-              <a:rPr lang="en-US" altLang="ja-JP" sz="2400" dirty="0"/>
-              <a:t>×</a:t>
-            </a:r>
-            <a:r>
-              <a:rPr lang="ja-JP" altLang="en-US" sz="2400"/>
-              <a:t>被抽中的機率，所以修正後資料</a:t>
-            </a:r>
-            <a:r>
-              <a:rPr lang="en-US" altLang="ja-JP" sz="2400" dirty="0"/>
-              <a:t>=</a:t>
-            </a:r>
-            <a:r>
-              <a:rPr lang="ja-JP" altLang="en-US" sz="2400"/>
-              <a:t>被抽中的機率</a:t>
-            </a:r>
-            <a:r>
-              <a:rPr lang="en-US" altLang="ja-JP" sz="2400" dirty="0"/>
-              <a:t>/</a:t>
-            </a:r>
-            <a:r>
-              <a:rPr lang="ja-JP" altLang="en-US" sz="2400"/>
-              <a:t>觀察到的資料​，稱為</a:t>
-            </a:r>
-            <a:r>
-              <a:rPr lang="en-US" altLang="ja-JP" sz="2400" dirty="0"/>
-              <a:t>Inversed Probability Weighting (IPW)</a:t>
-            </a:r>
-            <a:r>
-              <a:rPr lang="ja-JP" altLang="en-US" sz="2400"/>
-              <a:t>。</a:t>
-            </a:r>
-            <a:endParaRPr lang="en-US" altLang="ja-JP" sz="2400" dirty="0"/>
-          </a:p>
-          <a:p>
-            <a:r>
-              <a:rPr lang="ja-JP" altLang="en-US" sz="2400"/>
-              <a:t>這一套程序的前提是加入資料以及最後的預測（例如：投票）只依賴於我們觀察到的 𝑋</a:t>
-            </a:r>
-          </a:p>
-          <a:p>
-            <a:r>
-              <a:rPr lang="ja-JP" altLang="en-US" sz="2400"/>
-              <a:t>如果有 </a:t>
-            </a:r>
-            <a:r>
-              <a:rPr lang="en-US" sz="2400" dirty="0"/>
-              <a:t>unobserved trait（</a:t>
-            </a:r>
-            <a:r>
-              <a:rPr lang="ja-JP" altLang="en-US" sz="2400"/>
-              <a:t>例如「隱性政治熱情」）同時影響：</a:t>
-            </a:r>
-          </a:p>
-          <a:p>
-            <a:pPr>
-              <a:buFont typeface="Wingdings" pitchFamily="2" charset="2"/>
-              <a:buChar char="ü"/>
-            </a:pPr>
-            <a:r>
-              <a:rPr lang="ja-JP" altLang="en-US" sz="2400"/>
-              <a:t>上網填問卷</a:t>
-            </a:r>
-          </a:p>
-          <a:p>
-            <a:pPr>
-              <a:buFont typeface="Wingdings" pitchFamily="2" charset="2"/>
-              <a:buChar char="ü"/>
-            </a:pPr>
-            <a:r>
-              <a:rPr lang="ja-JP" altLang="en-US" sz="2400"/>
-              <a:t>投票意向</a:t>
-            </a:r>
-          </a:p>
-          <a:p>
-            <a:r>
-              <a:rPr lang="en-US" sz="2400" dirty="0"/>
-              <a:t>👉 </a:t>
-            </a:r>
-            <a:r>
-              <a:rPr lang="ja-JP" altLang="en-US" sz="2400"/>
-              <a:t>那麼 </a:t>
-            </a:r>
-            <a:r>
-              <a:rPr lang="en-US" sz="2400" dirty="0"/>
-              <a:t>IPW </a:t>
-            </a:r>
-            <a:r>
-              <a:rPr lang="ja-JP" altLang="en-US" sz="2400"/>
-              <a:t>不能完全修正</a:t>
-            </a:r>
-            <a:endParaRPr lang="en-US" sz="2400" dirty="0"/>
-          </a:p>
-        </p:txBody>
-      </p:sp>
-      <p:sp>
-        <p:nvSpPr>
-          <p:cNvPr id="4" name="Slide Number Placeholder 3">
-            <a:extLst>
-              <a:ext uri="{FF2B5EF4-FFF2-40B4-BE49-F238E27FC236}">
-                <a16:creationId xmlns:a16="http://schemas.microsoft.com/office/drawing/2014/main" id="{8B934A1A-6A41-BD1C-EF90-321E7BAE7721}"/>
-              </a:ext>
-            </a:extLst>
-          </p:cNvPr>
-          <p:cNvSpPr>
-            <a:spLocks noGrp="1"/>
-          </p:cNvSpPr>
-          <p:nvPr>
-            <p:ph type="sldNum" sz="quarter" idx="12"/>
-          </p:nvPr>
-        </p:nvSpPr>
-        <p:spPr/>
-        <p:txBody>
-          <a:bodyPr/>
-          <a:lstStyle/>
-          <a:p>
-            <a:fld id="{34E21383-B02B-694B-B2AD-A967203CDE86}" type="slidenum">
-              <a:rPr lang="en-US" smtClean="0"/>
-              <a:t>15</a:t>
-            </a:fld>
-            <a:endParaRPr lang="en-US"/>
-          </a:p>
-        </p:txBody>
-      </p:sp>
-    </p:spTree>
-    <p:extLst>
-      <p:ext uri="{BB962C8B-B14F-4D97-AF65-F5344CB8AC3E}">
-        <p14:creationId xmlns:p14="http://schemas.microsoft.com/office/powerpoint/2010/main" val="3293910327"/>
       </p:ext>
     </p:extLst>
   </p:cSld>
@@ -6409,7 +7083,7 @@
           <p:cNvPr id="2" name="Title 1">
             <a:extLst>
               <a:ext uri="{FF2B5EF4-FFF2-40B4-BE49-F238E27FC236}">
-                <a16:creationId xmlns:a16="http://schemas.microsoft.com/office/drawing/2014/main" id="{CA97296C-20CB-E09A-16CC-99A289B64445}"/>
+                <a16:creationId xmlns:a16="http://schemas.microsoft.com/office/drawing/2014/main" id="{DA77E66D-9F36-5B97-5623-156937724516}"/>
               </a:ext>
             </a:extLst>
           </p:cNvPr>
@@ -6431,7 +7105,7 @@
             </a:r>
             <a:r>
               <a:rPr lang="en-US" dirty="0" err="1"/>
-              <a:t>加權（四</a:t>
+              <a:t>加權（三</a:t>
             </a:r>
             <a:r>
               <a:rPr lang="en-US" dirty="0"/>
@@ -6445,7 +7119,7 @@
           <p:cNvPr id="3" name="Content Placeholder 2">
             <a:extLst>
               <a:ext uri="{FF2B5EF4-FFF2-40B4-BE49-F238E27FC236}">
-                <a16:creationId xmlns:a16="http://schemas.microsoft.com/office/drawing/2014/main" id="{503E2529-124E-4C1E-A46F-EA482C25D185}"/>
+                <a16:creationId xmlns:a16="http://schemas.microsoft.com/office/drawing/2014/main" id="{AB16EA0F-9F78-1203-E782-0F8EC7D2F0A9}"/>
               </a:ext>
             </a:extLst>
           </p:cNvPr>
@@ -6459,89 +7133,140 @@
         <p:spPr/>
         <p:txBody>
           <a:bodyPr>
-            <a:normAutofit fontScale="92500" lnSpcReduction="10000"/>
+            <a:normAutofit/>
           </a:bodyPr>
           <a:lstStyle/>
           <a:p>
-            <a:r>
-              <a:rPr lang="ja-JP" altLang="en-US"/>
-              <a:t>第一層：電話樣本對母體加權</a:t>
-            </a:r>
-          </a:p>
-          <a:p>
-            <a:r>
-              <a:rPr lang="ja-JP" altLang="en-US"/>
-              <a:t>電話樣本雖然比較接近 </a:t>
-            </a:r>
-            <a:r>
-              <a:rPr lang="en-US" dirty="0"/>
-              <a:t>probability sample，</a:t>
-            </a:r>
-            <a:r>
-              <a:rPr lang="ja-JP" altLang="en-US"/>
-              <a:t>但還是會有：</a:t>
-            </a:r>
-          </a:p>
-          <a:p>
-            <a:pPr marL="514350" indent="-514350">
-              <a:buFont typeface="+mj-lt"/>
-              <a:buAutoNum type="arabicPeriod"/>
+            <a:pPr>
+              <a:lnSpc>
+                <a:spcPct val="150000"/>
+              </a:lnSpc>
             </a:pPr>
             <a:r>
-              <a:rPr lang="ja-JP" altLang="en-US"/>
-              <a:t>拒訪</a:t>
-            </a:r>
-          </a:p>
-          <a:p>
-            <a:pPr marL="514350" indent="-514350">
-              <a:buFont typeface="+mj-lt"/>
-              <a:buAutoNum type="arabicPeriod"/>
+              <a:rPr lang="ja-JP" altLang="en-US" sz="2000"/>
+              <a:t>因為觀察到的資料</a:t>
+            </a:r>
+            <a:r>
+              <a:rPr lang="en-US" altLang="ja-JP" sz="2000" dirty="0"/>
+              <a:t>=</a:t>
+            </a:r>
+            <a:r>
+              <a:rPr lang="ja-JP" altLang="en-US" sz="2000"/>
+              <a:t>真實資料</a:t>
+            </a:r>
+            <a:r>
+              <a:rPr lang="en-US" altLang="ja-JP" sz="2000" dirty="0"/>
+              <a:t>×</a:t>
+            </a:r>
+            <a:r>
+              <a:rPr lang="ja-JP" altLang="en-US" sz="2000"/>
+              <a:t>被抽中的機率，所以修正後資料</a:t>
+            </a:r>
+            <a:r>
+              <a:rPr lang="en-US" altLang="ja-JP" sz="2000" dirty="0"/>
+              <a:t>=</a:t>
+            </a:r>
+            <a:r>
+              <a:rPr lang="ja-JP" altLang="en-US" sz="2000"/>
+              <a:t>觀察到的資料​</a:t>
+            </a:r>
+            <a:r>
+              <a:rPr lang="en-US" altLang="ja-JP" sz="2000" dirty="0"/>
+              <a:t>/</a:t>
+            </a:r>
+            <a:r>
+              <a:rPr lang="ja-JP" altLang="en-US" sz="2000"/>
+              <a:t>被抽中的機率，稱為</a:t>
+            </a:r>
+            <a:r>
+              <a:rPr lang="en-US" altLang="ja-JP" sz="2000" dirty="0"/>
+              <a:t>Inversed Probability Weighting (IPW)</a:t>
+            </a:r>
+            <a:r>
+              <a:rPr lang="ja-JP" altLang="en-US" sz="2000"/>
+              <a:t>。</a:t>
+            </a:r>
+            <a:endParaRPr lang="en-US" altLang="ja-JP" sz="2000" dirty="0"/>
+          </a:p>
+          <a:p>
+            <a:pPr>
+              <a:lnSpc>
+                <a:spcPct val="150000"/>
+              </a:lnSpc>
             </a:pPr>
             <a:r>
-              <a:rPr lang="en-US" dirty="0"/>
-              <a:t>frame coverage </a:t>
-            </a:r>
-            <a:r>
-              <a:rPr lang="ja-JP" altLang="en-US"/>
-              <a:t>問題</a:t>
-            </a:r>
-          </a:p>
-          <a:p>
-            <a:pPr marL="514350" indent="-514350">
-              <a:buFont typeface="+mj-lt"/>
-              <a:buAutoNum type="arabicPeriod"/>
+              <a:rPr lang="ja-JP" altLang="en-US" sz="2000"/>
+              <a:t>這一套程序的前提是加入資料以及最後的預測（例如：投票）只依賴於我們觀察到的 𝑋</a:t>
+            </a:r>
+          </a:p>
+          <a:p>
+            <a:pPr>
+              <a:lnSpc>
+                <a:spcPct val="150000"/>
+              </a:lnSpc>
             </a:pPr>
             <a:r>
-              <a:rPr lang="ja-JP" altLang="en-US"/>
-              <a:t>市話</a:t>
-            </a:r>
-            <a:r>
-              <a:rPr lang="en-US" altLang="ja-JP" dirty="0"/>
-              <a:t>/</a:t>
-            </a:r>
-            <a:r>
-              <a:rPr lang="ja-JP" altLang="en-US"/>
-              <a:t>手機混合抽樣偏誤</a:t>
-            </a:r>
-          </a:p>
-          <a:p>
-            <a:endParaRPr lang="ja-JP" altLang="en-US"/>
-          </a:p>
-          <a:p>
-            <a:r>
-              <a:rPr lang="ja-JP" altLang="en-US"/>
-              <a:t>所以要用母體已知分布（例如年齡、性別、區域、教育）去校準電話樣本。</a:t>
-            </a:r>
-          </a:p>
-          <a:p>
-            <a:r>
-              <a:rPr lang="ja-JP" altLang="en-US"/>
-              <a:t>這時母體資料的作用是：把電話樣本修正成更接近母體的 </a:t>
-            </a:r>
-            <a:r>
-              <a:rPr lang="en-US" dirty="0"/>
-              <a:t>reference sample</a:t>
-            </a:r>
+              <a:rPr lang="ja-JP" altLang="en-US" sz="2000"/>
+              <a:t>如果有 </a:t>
+            </a:r>
+            <a:r>
+              <a:rPr lang="en-US" sz="2000" dirty="0"/>
+              <a:t>unobserved trait（</a:t>
+            </a:r>
+            <a:r>
+              <a:rPr lang="ja-JP" altLang="en-US" sz="2000"/>
+              <a:t>例如「隱性政治熱情」）同時影響：</a:t>
+            </a:r>
+          </a:p>
+          <a:p>
+            <a:pPr>
+              <a:lnSpc>
+                <a:spcPct val="150000"/>
+              </a:lnSpc>
+              <a:buFont typeface="Wingdings" pitchFamily="2" charset="2"/>
+              <a:buChar char="ü"/>
+            </a:pPr>
+            <a:r>
+              <a:rPr lang="ja-JP" altLang="en-US" sz="2000"/>
+              <a:t>上網填問卷</a:t>
+            </a:r>
+          </a:p>
+          <a:p>
+            <a:pPr>
+              <a:lnSpc>
+                <a:spcPct val="150000"/>
+              </a:lnSpc>
+              <a:buFont typeface="Wingdings" pitchFamily="2" charset="2"/>
+              <a:buChar char="ü"/>
+            </a:pPr>
+            <a:r>
+              <a:rPr lang="ja-JP" altLang="en-US" sz="2000"/>
+              <a:t>投票意向</a:t>
+            </a:r>
+          </a:p>
+          <a:p>
+            <a:pPr>
+              <a:lnSpc>
+                <a:spcPct val="150000"/>
+              </a:lnSpc>
+            </a:pPr>
+            <a:r>
+              <a:rPr lang="en-US" sz="2000" dirty="0"/>
+              <a:t>👉 </a:t>
+            </a:r>
+            <a:r>
+              <a:rPr lang="ja-JP" altLang="en-US" sz="2000"/>
+              <a:t>那麼 </a:t>
+            </a:r>
+            <a:r>
+              <a:rPr lang="en-US" sz="2000" dirty="0"/>
+              <a:t>IPW </a:t>
+            </a:r>
+            <a:r>
+              <a:rPr lang="ja-JP" altLang="en-US" sz="2000"/>
+              <a:t>不能完全修正</a:t>
+            </a:r>
+            <a:endParaRPr lang="en-US" sz="2000" dirty="0"/>
           </a:p>
         </p:txBody>
       </p:sp>
@@ -6550,7 +7275,7 @@
           <p:cNvPr id="4" name="Slide Number Placeholder 3">
             <a:extLst>
               <a:ext uri="{FF2B5EF4-FFF2-40B4-BE49-F238E27FC236}">
-                <a16:creationId xmlns:a16="http://schemas.microsoft.com/office/drawing/2014/main" id="{911EB2DB-3B3B-5073-A0E6-CC69741A5721}"/>
+                <a16:creationId xmlns:a16="http://schemas.microsoft.com/office/drawing/2014/main" id="{8B934A1A-6A41-BD1C-EF90-321E7BAE7721}"/>
               </a:ext>
             </a:extLst>
           </p:cNvPr>
@@ -6577,7 +7302,7 @@
     </p:spTree>
     <p:extLst>
       <p:ext uri="{BB962C8B-B14F-4D97-AF65-F5344CB8AC3E}">
-        <p14:creationId xmlns:p14="http://schemas.microsoft.com/office/powerpoint/2010/main" val="3340902583"/>
+        <p14:creationId xmlns:p14="http://schemas.microsoft.com/office/powerpoint/2010/main" val="3293910327"/>
       </p:ext>
     </p:extLst>
   </p:cSld>
@@ -6631,7 +7356,7 @@
             </a:r>
             <a:r>
               <a:rPr lang="en-US" dirty="0" err="1"/>
-              <a:t>加權（五</a:t>
+              <a:t>加權（四</a:t>
             </a:r>
             <a:r>
               <a:rPr lang="en-US" dirty="0"/>
@@ -6663,64 +7388,111 @@
           </a:bodyPr>
           <a:lstStyle/>
           <a:p>
+            <a:pPr>
+              <a:lnSpc>
+                <a:spcPct val="150000"/>
+              </a:lnSpc>
+            </a:pPr>
             <a:r>
               <a:rPr lang="ja-JP" altLang="en-US" sz="2000"/>
-              <a:t>第二層：線上樣本對電話</a:t>
-            </a:r>
-            <a:r>
-              <a:rPr lang="en-US" altLang="ja-JP" sz="2000" dirty="0"/>
-              <a:t>/</a:t>
-            </a:r>
+              <a:t>回顧剛剛的三階段加權過程，第一層：電話樣本根據母體加權</a:t>
+            </a:r>
+          </a:p>
+          <a:p>
+            <a:pPr>
+              <a:lnSpc>
+                <a:spcPct val="150000"/>
+              </a:lnSpc>
+            </a:pPr>
             <a:r>
               <a:rPr lang="ja-JP" altLang="en-US" sz="2000"/>
-              <a:t>母體加權</a:t>
-            </a:r>
-          </a:p>
-          <a:p>
+              <a:t>電話樣本雖然比較接近 </a:t>
+            </a:r>
+            <a:r>
+              <a:rPr lang="en-US" sz="2000" dirty="0"/>
+              <a:t>probability sample，</a:t>
+            </a:r>
             <a:r>
               <a:rPr lang="ja-JP" altLang="en-US" sz="2000"/>
-              <a:t>線上樣本不是直接從母體抽出來，而是從電話樣本中再篩一次：</a:t>
+              <a:t>但還是會有：</a:t>
             </a:r>
           </a:p>
           <a:p>
             <a:pPr marL="514350" indent="-514350">
+              <a:lnSpc>
+                <a:spcPct val="150000"/>
+              </a:lnSpc>
               <a:buFont typeface="+mj-lt"/>
               <a:buAutoNum type="arabicPeriod"/>
             </a:pPr>
             <a:r>
               <a:rPr lang="ja-JP" altLang="en-US" sz="2000"/>
-              <a:t>願不願意加入 </a:t>
-            </a:r>
-            <a:r>
-              <a:rPr lang="en-US" altLang="ja-JP" sz="2000" dirty="0"/>
-              <a:t>panel</a:t>
+              <a:t>拒訪</a:t>
             </a:r>
           </a:p>
           <a:p>
             <a:pPr marL="514350" indent="-514350">
+              <a:lnSpc>
+                <a:spcPct val="150000"/>
+              </a:lnSpc>
               <a:buFont typeface="+mj-lt"/>
               <a:buAutoNum type="arabicPeriod"/>
             </a:pPr>
             <a:r>
+              <a:rPr lang="en-US" sz="2000" dirty="0"/>
+              <a:t>frame coverage </a:t>
+            </a:r>
+            <a:r>
               <a:rPr lang="ja-JP" altLang="en-US" sz="2000"/>
-              <a:t>會不會真的完成線上問卷</a:t>
-            </a:r>
-          </a:p>
-          <a:p>
-            <a:endParaRPr lang="ja-JP" altLang="en-US" sz="2000"/>
-          </a:p>
-          <a:p>
+              <a:t>問題</a:t>
+            </a:r>
+          </a:p>
+          <a:p>
+            <a:pPr marL="514350" indent="-514350">
+              <a:lnSpc>
+                <a:spcPct val="150000"/>
+              </a:lnSpc>
+              <a:buFont typeface="+mj-lt"/>
+              <a:buAutoNum type="arabicPeriod"/>
+            </a:pPr>
             <a:r>
               <a:rPr lang="ja-JP" altLang="en-US" sz="2000"/>
-              <a:t>所以我們用電話樣本估計「誰比較容易上線」，然後再加權。</a:t>
-            </a:r>
-          </a:p>
-          <a:p>
+              <a:t>市話</a:t>
+            </a:r>
+            <a:r>
+              <a:rPr lang="en-US" altLang="ja-JP" sz="2000" dirty="0"/>
+              <a:t>/</a:t>
+            </a:r>
             <a:r>
               <a:rPr lang="ja-JP" altLang="en-US" sz="2000"/>
-              <a:t>母體資料校正好電話樣本；再由電話樣本作為橋樑，把線上樣本拉回母體。</a:t>
-            </a:r>
-            <a:endParaRPr lang="en-US" sz="2000" dirty="0"/>
+              <a:t>手機混合抽樣偏誤</a:t>
+            </a:r>
+          </a:p>
+          <a:p>
+            <a:pPr>
+              <a:lnSpc>
+                <a:spcPct val="150000"/>
+              </a:lnSpc>
+            </a:pPr>
+            <a:r>
+              <a:rPr lang="ja-JP" altLang="en-US" sz="2000"/>
+              <a:t>所以要用母體已知分布（例如年齡、性別、區域、教育）去校準電話樣本。</a:t>
+            </a:r>
+          </a:p>
+          <a:p>
+            <a:pPr>
+              <a:lnSpc>
+                <a:spcPct val="150000"/>
+              </a:lnSpc>
+            </a:pPr>
+            <a:r>
+              <a:rPr lang="ja-JP" altLang="en-US" sz="2000"/>
+              <a:t>這時母體資料的作用是：把電話樣本修正成更接近母體的 </a:t>
+            </a:r>
+            <a:r>
+              <a:rPr lang="en-US" sz="2000" dirty="0"/>
+              <a:t>reference sample</a:t>
+            </a:r>
           </a:p>
         </p:txBody>
       </p:sp>
@@ -6748,6 +7520,216 @@
             <a:fld id="{34E21383-B02B-694B-B2AD-A967203CDE86}" type="slidenum">
               <a:rPr lang="en-US" smtClean="0"/>
               <a:t>17</a:t>
+            </a:fld>
+            <a:endParaRPr lang="en-US"/>
+          </a:p>
+        </p:txBody>
+      </p:sp>
+    </p:spTree>
+    <p:extLst>
+      <p:ext uri="{BB962C8B-B14F-4D97-AF65-F5344CB8AC3E}">
+        <p14:creationId xmlns:p14="http://schemas.microsoft.com/office/powerpoint/2010/main" val="3340902583"/>
+      </p:ext>
+    </p:extLst>
+  </p:cSld>
+  <p:clrMapOvr>
+    <a:masterClrMapping/>
+  </p:clrMapOvr>
+</p:sld>
+</file>
+
+<file path=ppt/slides/slide18.xml><?xml version="1.0" encoding="utf-8"?>
+<p:sld xmlns:a="http://schemas.openxmlformats.org/drawingml/2006/main" xmlns:r="http://schemas.openxmlformats.org/officeDocument/2006/relationships" xmlns:p="http://schemas.openxmlformats.org/presentationml/2006/main">
+  <p:cSld>
+    <p:spTree>
+      <p:nvGrpSpPr>
+        <p:cNvPr id="1" name=""/>
+        <p:cNvGrpSpPr/>
+        <p:nvPr/>
+      </p:nvGrpSpPr>
+      <p:grpSpPr>
+        <a:xfrm>
+          <a:off x="0" y="0"/>
+          <a:ext cx="0" cy="0"/>
+          <a:chOff x="0" y="0"/>
+          <a:chExt cx="0" cy="0"/>
+        </a:xfrm>
+      </p:grpSpPr>
+      <p:sp>
+        <p:nvSpPr>
+          <p:cNvPr id="2" name="Title 1">
+            <a:extLst>
+              <a:ext uri="{FF2B5EF4-FFF2-40B4-BE49-F238E27FC236}">
+                <a16:creationId xmlns:a16="http://schemas.microsoft.com/office/drawing/2014/main" id="{CA97296C-20CB-E09A-16CC-99A289B64445}"/>
+              </a:ext>
+            </a:extLst>
+          </p:cNvPr>
+          <p:cNvSpPr>
+            <a:spLocks noGrp="1"/>
+          </p:cNvSpPr>
+          <p:nvPr>
+            <p:ph type="title"/>
+          </p:nvPr>
+        </p:nvSpPr>
+        <p:spPr/>
+        <p:txBody>
+          <a:bodyPr/>
+          <a:lstStyle/>
+          <a:p>
+            <a:r>
+              <a:rPr lang="ja-JP" altLang="en-US"/>
+              <a:t>網路調查的</a:t>
+            </a:r>
+            <a:r>
+              <a:rPr lang="en-US" dirty="0" err="1"/>
+              <a:t>加權（五</a:t>
+            </a:r>
+            <a:r>
+              <a:rPr lang="en-US" dirty="0"/>
+              <a:t>）</a:t>
+            </a:r>
+          </a:p>
+        </p:txBody>
+      </p:sp>
+      <p:sp>
+        <p:nvSpPr>
+          <p:cNvPr id="3" name="Content Placeholder 2">
+            <a:extLst>
+              <a:ext uri="{FF2B5EF4-FFF2-40B4-BE49-F238E27FC236}">
+                <a16:creationId xmlns:a16="http://schemas.microsoft.com/office/drawing/2014/main" id="{503E2529-124E-4C1E-A46F-EA482C25D185}"/>
+              </a:ext>
+            </a:extLst>
+          </p:cNvPr>
+          <p:cNvSpPr>
+            <a:spLocks noGrp="1"/>
+          </p:cNvSpPr>
+          <p:nvPr>
+            <p:ph idx="1"/>
+          </p:nvPr>
+        </p:nvSpPr>
+        <p:spPr/>
+        <p:txBody>
+          <a:bodyPr>
+            <a:normAutofit/>
+          </a:bodyPr>
+          <a:lstStyle/>
+          <a:p>
+            <a:pPr>
+              <a:lnSpc>
+                <a:spcPct val="150000"/>
+              </a:lnSpc>
+            </a:pPr>
+            <a:r>
+              <a:rPr lang="ja-JP" altLang="en-US" sz="2000"/>
+              <a:t>第二層：線上樣本對電話</a:t>
+            </a:r>
+            <a:r>
+              <a:rPr lang="en-US" altLang="ja-JP" sz="2000" dirty="0"/>
+              <a:t>/</a:t>
+            </a:r>
+            <a:r>
+              <a:rPr lang="ja-JP" altLang="en-US" sz="2000"/>
+              <a:t>母體加權</a:t>
+            </a:r>
+          </a:p>
+          <a:p>
+            <a:pPr>
+              <a:lnSpc>
+                <a:spcPct val="150000"/>
+              </a:lnSpc>
+            </a:pPr>
+            <a:r>
+              <a:rPr lang="ja-JP" altLang="en-US" sz="2000"/>
+              <a:t>因為線上樣本不是直接從母體抽出來，而是從電話樣本中篩選：</a:t>
+            </a:r>
+          </a:p>
+          <a:p>
+            <a:pPr marL="514350" indent="-514350">
+              <a:lnSpc>
+                <a:spcPct val="150000"/>
+              </a:lnSpc>
+              <a:buFont typeface="+mj-lt"/>
+              <a:buAutoNum type="arabicPeriod"/>
+            </a:pPr>
+            <a:r>
+              <a:rPr lang="ja-JP" altLang="en-US" sz="2000"/>
+              <a:t>願不願意加入 </a:t>
+            </a:r>
+            <a:r>
+              <a:rPr lang="en-US" altLang="ja-JP" sz="2000" dirty="0"/>
+              <a:t>panel</a:t>
+            </a:r>
+          </a:p>
+          <a:p>
+            <a:pPr marL="514350" indent="-514350">
+              <a:lnSpc>
+                <a:spcPct val="150000"/>
+              </a:lnSpc>
+              <a:buFont typeface="+mj-lt"/>
+              <a:buAutoNum type="arabicPeriod"/>
+            </a:pPr>
+            <a:r>
+              <a:rPr lang="ja-JP" altLang="en-US" sz="2000"/>
+              <a:t>會不會真的完成線上問卷</a:t>
+            </a:r>
+          </a:p>
+          <a:p>
+            <a:pPr>
+              <a:lnSpc>
+                <a:spcPct val="150000"/>
+              </a:lnSpc>
+            </a:pPr>
+            <a:r>
+              <a:rPr lang="ja-JP" altLang="en-US" sz="2000"/>
+              <a:t>所以我們用電話樣本估計「誰比較容易上線」，然後用機率的倒數加權。更好的方式是用 </a:t>
+            </a:r>
+            <a:r>
+              <a:rPr lang="en" altLang="ja-JP" sz="2000" dirty="0"/>
+              <a:t>logistic regression </a:t>
+            </a:r>
+            <a:r>
+              <a:rPr lang="ja-JP" altLang="en-US" sz="2000"/>
+              <a:t>這種模型，估計每種特徵組合的留下機率。</a:t>
+            </a:r>
+          </a:p>
+          <a:p>
+            <a:pPr>
+              <a:lnSpc>
+                <a:spcPct val="150000"/>
+              </a:lnSpc>
+            </a:pPr>
+            <a:r>
+              <a:rPr lang="ja-JP" altLang="en-US" sz="2000"/>
+              <a:t>整體來說，這一套過程是：母體資料校正好電話樣本；再由電話樣本作為橋樑，把線上樣本代表母體。</a:t>
+            </a:r>
+            <a:endParaRPr lang="en-US" sz="2000" dirty="0"/>
+          </a:p>
+        </p:txBody>
+      </p:sp>
+      <p:sp>
+        <p:nvSpPr>
+          <p:cNvPr id="4" name="Slide Number Placeholder 3">
+            <a:extLst>
+              <a:ext uri="{FF2B5EF4-FFF2-40B4-BE49-F238E27FC236}">
+                <a16:creationId xmlns:a16="http://schemas.microsoft.com/office/drawing/2014/main" id="{911EB2DB-3B3B-5073-A0E6-CC69741A5721}"/>
+              </a:ext>
+            </a:extLst>
+          </p:cNvPr>
+          <p:cNvSpPr>
+            <a:spLocks noGrp="1"/>
+          </p:cNvSpPr>
+          <p:nvPr>
+            <p:ph type="sldNum" sz="quarter" idx="12"/>
+          </p:nvPr>
+        </p:nvSpPr>
+        <p:spPr/>
+        <p:txBody>
+          <a:bodyPr/>
+          <a:lstStyle/>
+          <a:p>
+            <a:fld id="{34E21383-B02B-694B-B2AD-A967203CDE86}" type="slidenum">
+              <a:rPr lang="en-US" smtClean="0"/>
+              <a:t>18</a:t>
             </a:fld>
             <a:endParaRPr lang="en-US"/>
           </a:p>
@@ -6766,7 +7748,7 @@
 </p:sld>
 </file>
 
-<file path=ppt/slides/slide18.xml><?xml version="1.0" encoding="utf-8"?>
+<file path=ppt/slides/slide19.xml><?xml version="1.0" encoding="utf-8"?>
 <p:sld xmlns:a="http://schemas.openxmlformats.org/drawingml/2006/main" xmlns:r="http://schemas.openxmlformats.org/officeDocument/2006/relationships" xmlns:p="http://schemas.openxmlformats.org/presentationml/2006/main">
   <p:cSld>
     <p:spTree>
@@ -6976,7 +7958,7 @@
           <a:p>
             <a:fld id="{34E21383-B02B-694B-B2AD-A967203CDE86}" type="slidenum">
               <a:rPr lang="en-US" smtClean="0"/>
-              <a:t>18</a:t>
+              <a:t>19</a:t>
             </a:fld>
             <a:endParaRPr lang="en-US"/>
           </a:p>
@@ -6995,7 +7977,224 @@
 </p:sld>
 </file>
 
-<file path=ppt/slides/slide19.xml><?xml version="1.0" encoding="utf-8"?>
+<file path=ppt/slides/slide2.xml><?xml version="1.0" encoding="utf-8"?>
+<p:sld xmlns:a="http://schemas.openxmlformats.org/drawingml/2006/main" xmlns:r="http://schemas.openxmlformats.org/officeDocument/2006/relationships" xmlns:p="http://schemas.openxmlformats.org/presentationml/2006/main">
+  <p:cSld>
+    <p:spTree>
+      <p:nvGrpSpPr>
+        <p:cNvPr id="1" name=""/>
+        <p:cNvGrpSpPr/>
+        <p:nvPr/>
+      </p:nvGrpSpPr>
+      <p:grpSpPr>
+        <a:xfrm>
+          <a:off x="0" y="0"/>
+          <a:ext cx="0" cy="0"/>
+          <a:chOff x="0" y="0"/>
+          <a:chExt cx="0" cy="0"/>
+        </a:xfrm>
+      </p:grpSpPr>
+      <p:sp>
+        <p:nvSpPr>
+          <p:cNvPr id="2" name="Title 1">
+            <a:extLst>
+              <a:ext uri="{FF2B5EF4-FFF2-40B4-BE49-F238E27FC236}">
+                <a16:creationId xmlns:a16="http://schemas.microsoft.com/office/drawing/2014/main" id="{152AB62F-DCD4-57B2-B6B1-93F7FFB5ACA1}"/>
+              </a:ext>
+            </a:extLst>
+          </p:cNvPr>
+          <p:cNvSpPr>
+            <a:spLocks noGrp="1"/>
+          </p:cNvSpPr>
+          <p:nvPr>
+            <p:ph type="title"/>
+          </p:nvPr>
+        </p:nvSpPr>
+        <p:spPr/>
+        <p:txBody>
+          <a:bodyPr/>
+          <a:lstStyle/>
+          <a:p>
+            <a:r>
+              <a:rPr lang="zh-TW" sz="4400" kern="100" dirty="0">
+                <a:effectLst/>
+                <a:latin typeface="Times New Roman" panose="02020603050405020304" pitchFamily="18" charset="0"/>
+                <a:ea typeface="DFKai-SB"/>
+                <a:cs typeface="Times New Roman" panose="02020603050405020304" pitchFamily="18" charset="0"/>
+              </a:rPr>
+              <a:t>課程目標</a:t>
+            </a:r>
+            <a:endParaRPr lang="en-US" dirty="0"/>
+          </a:p>
+        </p:txBody>
+      </p:sp>
+      <p:sp>
+        <p:nvSpPr>
+          <p:cNvPr id="3" name="Content Placeholder 2">
+            <a:extLst>
+              <a:ext uri="{FF2B5EF4-FFF2-40B4-BE49-F238E27FC236}">
+                <a16:creationId xmlns:a16="http://schemas.microsoft.com/office/drawing/2014/main" id="{9C3D5CCB-B0EE-E4AC-9EFC-B45819986D2E}"/>
+              </a:ext>
+            </a:extLst>
+          </p:cNvPr>
+          <p:cNvSpPr>
+            <a:spLocks noGrp="1"/>
+          </p:cNvSpPr>
+          <p:nvPr>
+            <p:ph idx="1"/>
+          </p:nvPr>
+        </p:nvSpPr>
+        <p:spPr/>
+        <p:txBody>
+          <a:bodyPr/>
+          <a:lstStyle/>
+          <a:p>
+            <a:pPr marL="0" marR="0" indent="304800" algn="just">
+              <a:lnSpc>
+                <a:spcPct val="150000"/>
+              </a:lnSpc>
+              <a:spcBef>
+                <a:spcPts val="0"/>
+              </a:spcBef>
+              <a:spcAft>
+                <a:spcPts val="0"/>
+              </a:spcAft>
+            </a:pPr>
+            <a:r>
+              <a:rPr lang="zh-TW" altLang="en-US" kern="100" dirty="0">
+                <a:latin typeface="Times New Roman" panose="02020603050405020304" pitchFamily="18" charset="0"/>
+                <a:ea typeface="DFKai-SB"/>
+                <a:cs typeface="Times New Roman" panose="02020603050405020304" pitchFamily="18" charset="0"/>
+              </a:rPr>
+              <a:t>網路調查的特色</a:t>
+            </a:r>
+            <a:endParaRPr lang="en-US" altLang="zh-TW" kern="100" dirty="0">
+              <a:latin typeface="Times New Roman" panose="02020603050405020304" pitchFamily="18" charset="0"/>
+              <a:ea typeface="DFKai-SB"/>
+              <a:cs typeface="Times New Roman" panose="02020603050405020304" pitchFamily="18" charset="0"/>
+            </a:endParaRPr>
+          </a:p>
+          <a:p>
+            <a:pPr marL="0" marR="0" indent="304800" algn="just">
+              <a:lnSpc>
+                <a:spcPct val="150000"/>
+              </a:lnSpc>
+              <a:spcBef>
+                <a:spcPts val="0"/>
+              </a:spcBef>
+              <a:spcAft>
+                <a:spcPts val="0"/>
+              </a:spcAft>
+            </a:pPr>
+            <a:r>
+              <a:rPr lang="zh-TW" altLang="en-US" kern="100" dirty="0">
+                <a:latin typeface="Times New Roman" panose="02020603050405020304" pitchFamily="18" charset="0"/>
+                <a:ea typeface="DFKai-SB"/>
+                <a:cs typeface="Times New Roman" panose="02020603050405020304" pitchFamily="18" charset="0"/>
+              </a:rPr>
+              <a:t>網路調查的形式</a:t>
+            </a:r>
+            <a:endParaRPr lang="en-US" altLang="zh-TW" kern="100" dirty="0">
+              <a:latin typeface="Times New Roman" panose="02020603050405020304" pitchFamily="18" charset="0"/>
+              <a:ea typeface="DFKai-SB"/>
+              <a:cs typeface="Times New Roman" panose="02020603050405020304" pitchFamily="18" charset="0"/>
+            </a:endParaRPr>
+          </a:p>
+          <a:p>
+            <a:pPr marL="0" marR="0" indent="304800" algn="just">
+              <a:lnSpc>
+                <a:spcPct val="150000"/>
+              </a:lnSpc>
+              <a:spcBef>
+                <a:spcPts val="0"/>
+              </a:spcBef>
+              <a:spcAft>
+                <a:spcPts val="0"/>
+              </a:spcAft>
+            </a:pPr>
+            <a:r>
+              <a:rPr lang="zh-TW" altLang="en-US" kern="100" dirty="0">
+                <a:effectLst/>
+                <a:latin typeface="Times New Roman" panose="02020603050405020304" pitchFamily="18" charset="0"/>
+                <a:ea typeface="DFKai-SB"/>
+                <a:cs typeface="Times New Roman" panose="02020603050405020304" pitchFamily="18" charset="0"/>
+              </a:rPr>
+              <a:t>網路調查的</a:t>
+            </a:r>
+            <a:r>
+              <a:rPr lang="zh-TW" altLang="en-US" kern="100" dirty="0">
+                <a:latin typeface="Times New Roman" panose="02020603050405020304" pitchFamily="18" charset="0"/>
+                <a:ea typeface="DFKai-SB"/>
+                <a:cs typeface="Times New Roman" panose="02020603050405020304" pitchFamily="18" charset="0"/>
+              </a:rPr>
+              <a:t>加權</a:t>
+            </a:r>
+            <a:endParaRPr lang="en-US" altLang="zh-TW" sz="2000" kern="100" dirty="0">
+              <a:effectLst/>
+              <a:latin typeface="Times New Roman" panose="02020603050405020304" pitchFamily="18" charset="0"/>
+              <a:ea typeface="DFKai-SB"/>
+              <a:cs typeface="Times New Roman" panose="02020603050405020304" pitchFamily="18" charset="0"/>
+            </a:endParaRPr>
+          </a:p>
+          <a:p>
+            <a:pPr marL="0" marR="0" indent="304800" algn="just">
+              <a:spcBef>
+                <a:spcPts val="0"/>
+              </a:spcBef>
+              <a:spcAft>
+                <a:spcPts val="0"/>
+              </a:spcAft>
+            </a:pPr>
+            <a:endParaRPr lang="en-US" dirty="0"/>
+          </a:p>
+          <a:p>
+            <a:endParaRPr lang="en-US" dirty="0"/>
+          </a:p>
+        </p:txBody>
+      </p:sp>
+      <p:sp>
+        <p:nvSpPr>
+          <p:cNvPr id="4" name="Slide Number Placeholder 3">
+            <a:extLst>
+              <a:ext uri="{FF2B5EF4-FFF2-40B4-BE49-F238E27FC236}">
+                <a16:creationId xmlns:a16="http://schemas.microsoft.com/office/drawing/2014/main" id="{B55B3FC9-8666-6C80-0610-26E10A33F2BE}"/>
+              </a:ext>
+            </a:extLst>
+          </p:cNvPr>
+          <p:cNvSpPr>
+            <a:spLocks noGrp="1"/>
+          </p:cNvSpPr>
+          <p:nvPr>
+            <p:ph type="sldNum" sz="quarter" idx="12"/>
+          </p:nvPr>
+        </p:nvSpPr>
+        <p:spPr/>
+        <p:txBody>
+          <a:bodyPr/>
+          <a:lstStyle/>
+          <a:p>
+            <a:fld id="{34E21383-B02B-694B-B2AD-A967203CDE86}" type="slidenum">
+              <a:rPr lang="en-US" smtClean="0"/>
+              <a:t>2</a:t>
+            </a:fld>
+            <a:endParaRPr lang="en-US"/>
+          </a:p>
+        </p:txBody>
+      </p:sp>
+    </p:spTree>
+    <p:extLst>
+      <p:ext uri="{BB962C8B-B14F-4D97-AF65-F5344CB8AC3E}">
+        <p14:creationId xmlns:p14="http://schemas.microsoft.com/office/powerpoint/2010/main" val="3913136485"/>
+      </p:ext>
+    </p:extLst>
+  </p:cSld>
+  <p:clrMapOvr>
+    <a:masterClrMapping/>
+  </p:clrMapOvr>
+</p:sld>
+</file>
+
+<file path=ppt/slides/slide20.xml><?xml version="1.0" encoding="utf-8"?>
 <p:sld xmlns:a="http://schemas.openxmlformats.org/drawingml/2006/main" xmlns:r="http://schemas.openxmlformats.org/officeDocument/2006/relationships" xmlns:p="http://schemas.openxmlformats.org/presentationml/2006/main">
   <p:cSld>
     <p:spTree>
@@ -7473,7 +8672,7 @@
           <a:p>
             <a:fld id="{34E21383-B02B-694B-B2AD-A967203CDE86}" type="slidenum">
               <a:rPr lang="en-US" smtClean="0"/>
-              <a:t>19</a:t>
+              <a:t>20</a:t>
             </a:fld>
             <a:endParaRPr lang="en-US"/>
           </a:p>
@@ -7492,7 +8691,7 @@
 </p:sld>
 </file>
 
-<file path=ppt/slides/slide2.xml><?xml version="1.0" encoding="utf-8"?>
+<file path=ppt/slides/slide21.xml><?xml version="1.0" encoding="utf-8"?>
 <p:sld xmlns:a="http://schemas.openxmlformats.org/drawingml/2006/main" xmlns:r="http://schemas.openxmlformats.org/officeDocument/2006/relationships" xmlns:p="http://schemas.openxmlformats.org/presentationml/2006/main">
   <p:cSld>
     <p:spTree>
@@ -7511,223 +8710,6 @@
       </p:grpSpPr>
       <p:sp>
         <p:nvSpPr>
-          <p:cNvPr id="2" name="Title 1">
-            <a:extLst>
-              <a:ext uri="{FF2B5EF4-FFF2-40B4-BE49-F238E27FC236}">
-                <a16:creationId xmlns:a16="http://schemas.microsoft.com/office/drawing/2014/main" id="{152AB62F-DCD4-57B2-B6B1-93F7FFB5ACA1}"/>
-              </a:ext>
-            </a:extLst>
-          </p:cNvPr>
-          <p:cNvSpPr>
-            <a:spLocks noGrp="1"/>
-          </p:cNvSpPr>
-          <p:nvPr>
-            <p:ph type="title"/>
-          </p:nvPr>
-        </p:nvSpPr>
-        <p:spPr/>
-        <p:txBody>
-          <a:bodyPr/>
-          <a:lstStyle/>
-          <a:p>
-            <a:r>
-              <a:rPr lang="zh-TW" sz="4400" kern="100" dirty="0">
-                <a:effectLst/>
-                <a:latin typeface="Times New Roman" panose="02020603050405020304" pitchFamily="18" charset="0"/>
-                <a:ea typeface="DFKai-SB"/>
-                <a:cs typeface="Times New Roman" panose="02020603050405020304" pitchFamily="18" charset="0"/>
-              </a:rPr>
-              <a:t>課程目標</a:t>
-            </a:r>
-            <a:endParaRPr lang="en-US" dirty="0"/>
-          </a:p>
-        </p:txBody>
-      </p:sp>
-      <p:sp>
-        <p:nvSpPr>
-          <p:cNvPr id="3" name="Content Placeholder 2">
-            <a:extLst>
-              <a:ext uri="{FF2B5EF4-FFF2-40B4-BE49-F238E27FC236}">
-                <a16:creationId xmlns:a16="http://schemas.microsoft.com/office/drawing/2014/main" id="{9C3D5CCB-B0EE-E4AC-9EFC-B45819986D2E}"/>
-              </a:ext>
-            </a:extLst>
-          </p:cNvPr>
-          <p:cNvSpPr>
-            <a:spLocks noGrp="1"/>
-          </p:cNvSpPr>
-          <p:nvPr>
-            <p:ph idx="1"/>
-          </p:nvPr>
-        </p:nvSpPr>
-        <p:spPr/>
-        <p:txBody>
-          <a:bodyPr/>
-          <a:lstStyle/>
-          <a:p>
-            <a:pPr marL="0" marR="0" indent="304800" algn="just">
-              <a:lnSpc>
-                <a:spcPct val="150000"/>
-              </a:lnSpc>
-              <a:spcBef>
-                <a:spcPts val="0"/>
-              </a:spcBef>
-              <a:spcAft>
-                <a:spcPts val="0"/>
-              </a:spcAft>
-            </a:pPr>
-            <a:r>
-              <a:rPr lang="zh-TW" altLang="en-US" kern="100" dirty="0">
-                <a:latin typeface="Times New Roman" panose="02020603050405020304" pitchFamily="18" charset="0"/>
-                <a:ea typeface="DFKai-SB"/>
-                <a:cs typeface="Times New Roman" panose="02020603050405020304" pitchFamily="18" charset="0"/>
-              </a:rPr>
-              <a:t>網路調查的特色</a:t>
-            </a:r>
-            <a:endParaRPr lang="en-US" altLang="zh-TW" kern="100" dirty="0">
-              <a:latin typeface="Times New Roman" panose="02020603050405020304" pitchFamily="18" charset="0"/>
-              <a:ea typeface="DFKai-SB"/>
-              <a:cs typeface="Times New Roman" panose="02020603050405020304" pitchFamily="18" charset="0"/>
-            </a:endParaRPr>
-          </a:p>
-          <a:p>
-            <a:pPr marL="0" marR="0" indent="304800" algn="just">
-              <a:lnSpc>
-                <a:spcPct val="150000"/>
-              </a:lnSpc>
-              <a:spcBef>
-                <a:spcPts val="0"/>
-              </a:spcBef>
-              <a:spcAft>
-                <a:spcPts val="0"/>
-              </a:spcAft>
-            </a:pPr>
-            <a:r>
-              <a:rPr lang="zh-TW" altLang="en-US" kern="100" dirty="0">
-                <a:latin typeface="Times New Roman" panose="02020603050405020304" pitchFamily="18" charset="0"/>
-                <a:ea typeface="DFKai-SB"/>
-                <a:cs typeface="Times New Roman" panose="02020603050405020304" pitchFamily="18" charset="0"/>
-              </a:rPr>
-              <a:t>網路調查的形式</a:t>
-            </a:r>
-            <a:endParaRPr lang="en-US" altLang="zh-TW" kern="100" dirty="0">
-              <a:latin typeface="Times New Roman" panose="02020603050405020304" pitchFamily="18" charset="0"/>
-              <a:ea typeface="DFKai-SB"/>
-              <a:cs typeface="Times New Roman" panose="02020603050405020304" pitchFamily="18" charset="0"/>
-            </a:endParaRPr>
-          </a:p>
-          <a:p>
-            <a:pPr marL="0" marR="0" indent="304800" algn="just">
-              <a:lnSpc>
-                <a:spcPct val="150000"/>
-              </a:lnSpc>
-              <a:spcBef>
-                <a:spcPts val="0"/>
-              </a:spcBef>
-              <a:spcAft>
-                <a:spcPts val="0"/>
-              </a:spcAft>
-            </a:pPr>
-            <a:r>
-              <a:rPr lang="zh-TW" altLang="en-US" kern="100" dirty="0">
-                <a:effectLst/>
-                <a:latin typeface="Times New Roman" panose="02020603050405020304" pitchFamily="18" charset="0"/>
-                <a:ea typeface="DFKai-SB"/>
-                <a:cs typeface="Times New Roman" panose="02020603050405020304" pitchFamily="18" charset="0"/>
-              </a:rPr>
-              <a:t>網路調查的</a:t>
-            </a:r>
-            <a:r>
-              <a:rPr lang="zh-TW" altLang="en-US" kern="100" dirty="0">
-                <a:latin typeface="Times New Roman" panose="02020603050405020304" pitchFamily="18" charset="0"/>
-                <a:ea typeface="DFKai-SB"/>
-                <a:cs typeface="Times New Roman" panose="02020603050405020304" pitchFamily="18" charset="0"/>
-              </a:rPr>
-              <a:t>加權</a:t>
-            </a:r>
-            <a:endParaRPr lang="en-US" altLang="zh-TW" sz="2000" kern="100" dirty="0">
-              <a:effectLst/>
-              <a:latin typeface="Times New Roman" panose="02020603050405020304" pitchFamily="18" charset="0"/>
-              <a:ea typeface="DFKai-SB"/>
-              <a:cs typeface="Times New Roman" panose="02020603050405020304" pitchFamily="18" charset="0"/>
-            </a:endParaRPr>
-          </a:p>
-          <a:p>
-            <a:pPr marL="0" marR="0" indent="304800" algn="just">
-              <a:spcBef>
-                <a:spcPts val="0"/>
-              </a:spcBef>
-              <a:spcAft>
-                <a:spcPts val="0"/>
-              </a:spcAft>
-            </a:pPr>
-            <a:endParaRPr lang="en-US" dirty="0"/>
-          </a:p>
-          <a:p>
-            <a:endParaRPr lang="en-US" dirty="0"/>
-          </a:p>
-        </p:txBody>
-      </p:sp>
-      <p:sp>
-        <p:nvSpPr>
-          <p:cNvPr id="4" name="Slide Number Placeholder 3">
-            <a:extLst>
-              <a:ext uri="{FF2B5EF4-FFF2-40B4-BE49-F238E27FC236}">
-                <a16:creationId xmlns:a16="http://schemas.microsoft.com/office/drawing/2014/main" id="{B55B3FC9-8666-6C80-0610-26E10A33F2BE}"/>
-              </a:ext>
-            </a:extLst>
-          </p:cNvPr>
-          <p:cNvSpPr>
-            <a:spLocks noGrp="1"/>
-          </p:cNvSpPr>
-          <p:nvPr>
-            <p:ph type="sldNum" sz="quarter" idx="12"/>
-          </p:nvPr>
-        </p:nvSpPr>
-        <p:spPr/>
-        <p:txBody>
-          <a:bodyPr/>
-          <a:lstStyle/>
-          <a:p>
-            <a:fld id="{34E21383-B02B-694B-B2AD-A967203CDE86}" type="slidenum">
-              <a:rPr lang="en-US" smtClean="0"/>
-              <a:t>2</a:t>
-            </a:fld>
-            <a:endParaRPr lang="en-US"/>
-          </a:p>
-        </p:txBody>
-      </p:sp>
-    </p:spTree>
-    <p:extLst>
-      <p:ext uri="{BB962C8B-B14F-4D97-AF65-F5344CB8AC3E}">
-        <p14:creationId xmlns:p14="http://schemas.microsoft.com/office/powerpoint/2010/main" val="3913136485"/>
-      </p:ext>
-    </p:extLst>
-  </p:cSld>
-  <p:clrMapOvr>
-    <a:masterClrMapping/>
-  </p:clrMapOvr>
-</p:sld>
-</file>
-
-<file path=ppt/slides/slide20.xml><?xml version="1.0" encoding="utf-8"?>
-<p:sld xmlns:a="http://schemas.openxmlformats.org/drawingml/2006/main" xmlns:r="http://schemas.openxmlformats.org/officeDocument/2006/relationships" xmlns:p="http://schemas.openxmlformats.org/presentationml/2006/main">
-  <p:cSld>
-    <p:spTree>
-      <p:nvGrpSpPr>
-        <p:cNvPr id="1" name=""/>
-        <p:cNvGrpSpPr/>
-        <p:nvPr/>
-      </p:nvGrpSpPr>
-      <p:grpSpPr>
-        <a:xfrm>
-          <a:off x="0" y="0"/>
-          <a:ext cx="0" cy="0"/>
-          <a:chOff x="0" y="0"/>
-          <a:chExt cx="0" cy="0"/>
-        </a:xfrm>
-      </p:grpSpPr>
-      <p:sp>
-        <p:nvSpPr>
           <p:cNvPr id="2" name="標題 1">
             <a:extLst>
               <a:ext uri="{FF2B5EF4-FFF2-40B4-BE49-F238E27FC236}">
@@ -7906,7 +8888,7 @@
           <a:p>
             <a:fld id="{34E21383-B02B-694B-B2AD-A967203CDE86}" type="slidenum">
               <a:rPr lang="en-US" smtClean="0"/>
-              <a:t>20</a:t>
+              <a:t>21</a:t>
             </a:fld>
             <a:endParaRPr lang="en-US"/>
           </a:p>
@@ -7925,7 +8907,7 @@
 </p:sld>
 </file>
 
-<file path=ppt/slides/slide21.xml><?xml version="1.0" encoding="utf-8"?>
+<file path=ppt/slides/slide22.xml><?xml version="1.0" encoding="utf-8"?>
 <p:sld xmlns:a="http://schemas.openxmlformats.org/drawingml/2006/main" xmlns:r="http://schemas.openxmlformats.org/officeDocument/2006/relationships" xmlns:p="http://schemas.openxmlformats.org/presentationml/2006/main">
   <p:cSld>
     <p:spTree>
@@ -8114,7 +9096,7 @@
           <a:p>
             <a:fld id="{34E21383-B02B-694B-B2AD-A967203CDE86}" type="slidenum">
               <a:rPr lang="en-US" smtClean="0"/>
-              <a:t>21</a:t>
+              <a:t>22</a:t>
             </a:fld>
             <a:endParaRPr lang="en-US"/>
           </a:p>
@@ -8133,7 +9115,7 @@
 </p:sld>
 </file>
 
-<file path=ppt/slides/slide22.xml><?xml version="1.0" encoding="utf-8"?>
+<file path=ppt/slides/slide23.xml><?xml version="1.0" encoding="utf-8"?>
 <p:sld xmlns:a="http://schemas.openxmlformats.org/drawingml/2006/main" xmlns:r="http://schemas.openxmlformats.org/officeDocument/2006/relationships" xmlns:p="http://schemas.openxmlformats.org/presentationml/2006/main">
   <p:cSld>
     <p:spTree>
@@ -8315,7 +9297,7 @@
           <a:p>
             <a:fld id="{34E21383-B02B-694B-B2AD-A967203CDE86}" type="slidenum">
               <a:rPr lang="en-US" smtClean="0"/>
-              <a:t>22</a:t>
+              <a:t>23</a:t>
             </a:fld>
             <a:endParaRPr lang="en-US"/>
           </a:p>
@@ -8325,200 +9307,6 @@
     <p:extLst>
       <p:ext uri="{BB962C8B-B14F-4D97-AF65-F5344CB8AC3E}">
         <p14:creationId xmlns:p14="http://schemas.microsoft.com/office/powerpoint/2010/main" val="2075321502"/>
-      </p:ext>
-    </p:extLst>
-  </p:cSld>
-  <p:clrMapOvr>
-    <a:masterClrMapping/>
-  </p:clrMapOvr>
-</p:sld>
-</file>
-
-<file path=ppt/slides/slide23.xml><?xml version="1.0" encoding="utf-8"?>
-<p:sld xmlns:a="http://schemas.openxmlformats.org/drawingml/2006/main" xmlns:r="http://schemas.openxmlformats.org/officeDocument/2006/relationships" xmlns:p="http://schemas.openxmlformats.org/presentationml/2006/main">
-  <p:cSld>
-    <p:spTree>
-      <p:nvGrpSpPr>
-        <p:cNvPr id="1" name=""/>
-        <p:cNvGrpSpPr/>
-        <p:nvPr/>
-      </p:nvGrpSpPr>
-      <p:grpSpPr>
-        <a:xfrm>
-          <a:off x="0" y="0"/>
-          <a:ext cx="0" cy="0"/>
-          <a:chOff x="0" y="0"/>
-          <a:chExt cx="0" cy="0"/>
-        </a:xfrm>
-      </p:grpSpPr>
-      <p:sp>
-        <p:nvSpPr>
-          <p:cNvPr id="5" name="標題 4">
-            <a:extLst>
-              <a:ext uri="{FF2B5EF4-FFF2-40B4-BE49-F238E27FC236}">
-                <a16:creationId xmlns:a16="http://schemas.microsoft.com/office/drawing/2014/main" id="{33E8A9C4-7ACB-3C55-7D5B-D0873F0A94C2}"/>
-              </a:ext>
-            </a:extLst>
-          </p:cNvPr>
-          <p:cNvSpPr>
-            <a:spLocks noGrp="1"/>
-          </p:cNvSpPr>
-          <p:nvPr>
-            <p:ph type="title"/>
-          </p:nvPr>
-        </p:nvSpPr>
-        <p:spPr/>
-        <p:txBody>
-          <a:bodyPr/>
-          <a:lstStyle/>
-          <a:p>
-            <a:r>
-              <a:rPr kumimoji="1" lang="zh-TW" altLang="en-US" sz="4400" dirty="0"/>
-              <a:t>同時進行</a:t>
-            </a:r>
-            <a:r>
-              <a:rPr kumimoji="1" lang="en-US" altLang="zh-TW" sz="4400" dirty="0"/>
-              <a:t>(concurrent)</a:t>
-            </a:r>
-            <a:r>
-              <a:rPr kumimoji="1" lang="zh-TW" altLang="en-US" sz="4400" dirty="0"/>
-              <a:t>混合式調查</a:t>
-            </a:r>
-            <a:endParaRPr lang="zh-TW" altLang="en-US" dirty="0"/>
-          </a:p>
-        </p:txBody>
-      </p:sp>
-      <p:sp>
-        <p:nvSpPr>
-          <p:cNvPr id="2" name="投影片編號版面配置區 1">
-            <a:extLst>
-              <a:ext uri="{FF2B5EF4-FFF2-40B4-BE49-F238E27FC236}">
-                <a16:creationId xmlns:a16="http://schemas.microsoft.com/office/drawing/2014/main" id="{DA51D1FF-4BBD-B68D-1613-D8AF5298360A}"/>
-              </a:ext>
-            </a:extLst>
-          </p:cNvPr>
-          <p:cNvSpPr>
-            <a:spLocks noGrp="1"/>
-          </p:cNvSpPr>
-          <p:nvPr>
-            <p:ph type="sldNum" sz="quarter" idx="12"/>
-          </p:nvPr>
-        </p:nvSpPr>
-        <p:spPr/>
-        <p:txBody>
-          <a:bodyPr/>
-          <a:lstStyle/>
-          <a:p>
-            <a:fld id="{34E21383-B02B-694B-B2AD-A967203CDE86}" type="slidenum">
-              <a:rPr lang="en-US" smtClean="0"/>
-              <a:t>23</a:t>
-            </a:fld>
-            <a:endParaRPr lang="en-US"/>
-          </a:p>
-        </p:txBody>
-      </p:sp>
-      <p:pic>
-        <p:nvPicPr>
-          <p:cNvPr id="4" name="圖片 3">
-            <a:extLst>
-              <a:ext uri="{FF2B5EF4-FFF2-40B4-BE49-F238E27FC236}">
-                <a16:creationId xmlns:a16="http://schemas.microsoft.com/office/drawing/2014/main" id="{C1E7E73F-BA88-71FE-D867-82A3765918A6}"/>
-              </a:ext>
-            </a:extLst>
-          </p:cNvPr>
-          <p:cNvPicPr>
-            <a:picLocks noChangeAspect="1"/>
-          </p:cNvPicPr>
-          <p:nvPr/>
-        </p:nvPicPr>
-        <p:blipFill>
-          <a:blip r:embed="rId2"/>
-          <a:stretch>
-            <a:fillRect/>
-          </a:stretch>
-        </p:blipFill>
-        <p:spPr>
-          <a:xfrm>
-            <a:off x="1885950" y="1714500"/>
-            <a:ext cx="7772400" cy="3165230"/>
-          </a:xfrm>
-          <a:prstGeom prst="rect">
-            <a:avLst/>
-          </a:prstGeom>
-        </p:spPr>
-      </p:pic>
-      <p:sp>
-        <p:nvSpPr>
-          <p:cNvPr id="7" name="文字方塊 6">
-            <a:extLst>
-              <a:ext uri="{FF2B5EF4-FFF2-40B4-BE49-F238E27FC236}">
-                <a16:creationId xmlns:a16="http://schemas.microsoft.com/office/drawing/2014/main" id="{6A654AAB-9100-E7E3-BAD4-41162A12769A}"/>
-              </a:ext>
-            </a:extLst>
-          </p:cNvPr>
-          <p:cNvSpPr txBox="1"/>
-          <p:nvPr/>
-        </p:nvSpPr>
-        <p:spPr>
-          <a:xfrm>
-            <a:off x="1736862" y="5294874"/>
-            <a:ext cx="7921487" cy="400110"/>
-          </a:xfrm>
-          <a:prstGeom prst="rect">
-            <a:avLst/>
-          </a:prstGeom>
-          <a:noFill/>
-        </p:spPr>
-        <p:txBody>
-          <a:bodyPr wrap="square">
-            <a:spAutoFit/>
-          </a:bodyPr>
-          <a:lstStyle/>
-          <a:p>
-            <a:r>
-              <a:rPr lang="en" altLang="zh-TW" sz="2000" dirty="0">
-                <a:solidFill>
-                  <a:schemeClr val="tx1"/>
-                </a:solidFill>
-              </a:rPr>
-              <a:t>Source: </a:t>
-            </a:r>
-            <a:r>
-              <a:rPr lang="en" altLang="zh-TW" sz="2000" dirty="0" err="1">
-                <a:solidFill>
-                  <a:schemeClr val="tx1"/>
-                </a:solidFill>
-              </a:rPr>
-              <a:t>Biffignandi</a:t>
-            </a:r>
-            <a:r>
-              <a:rPr lang="en-US" altLang="zh-TW" sz="2000" dirty="0">
-                <a:solidFill>
-                  <a:schemeClr val="tx1"/>
-                </a:solidFill>
-              </a:rPr>
-              <a:t> and </a:t>
-            </a:r>
-            <a:r>
-              <a:rPr lang="en" altLang="zh-TW" sz="2000" dirty="0">
-                <a:solidFill>
-                  <a:schemeClr val="tx1"/>
-                </a:solidFill>
-              </a:rPr>
-              <a:t>Bethlehem (2021) Handbook of Web Survey, p. 344</a:t>
-            </a:r>
-            <a:endParaRPr lang="zh-TW" altLang="en-US" sz="2000" dirty="0">
-              <a:solidFill>
-                <a:schemeClr val="tx1"/>
-              </a:solidFill>
-            </a:endParaRPr>
-          </a:p>
-        </p:txBody>
-      </p:sp>
-    </p:spTree>
-    <p:extLst>
-      <p:ext uri="{BB962C8B-B14F-4D97-AF65-F5344CB8AC3E}">
-        <p14:creationId xmlns:p14="http://schemas.microsoft.com/office/powerpoint/2010/main" val="642962622"/>
       </p:ext>
     </p:extLst>
   </p:cSld>
@@ -8547,10 +9335,47 @@
       </p:grpSpPr>
       <p:sp>
         <p:nvSpPr>
+          <p:cNvPr id="5" name="標題 4">
+            <a:extLst>
+              <a:ext uri="{FF2B5EF4-FFF2-40B4-BE49-F238E27FC236}">
+                <a16:creationId xmlns:a16="http://schemas.microsoft.com/office/drawing/2014/main" id="{33E8A9C4-7ACB-3C55-7D5B-D0873F0A94C2}"/>
+              </a:ext>
+            </a:extLst>
+          </p:cNvPr>
+          <p:cNvSpPr>
+            <a:spLocks noGrp="1"/>
+          </p:cNvSpPr>
+          <p:nvPr>
+            <p:ph type="title"/>
+          </p:nvPr>
+        </p:nvSpPr>
+        <p:spPr/>
+        <p:txBody>
+          <a:bodyPr/>
+          <a:lstStyle/>
+          <a:p>
+            <a:r>
+              <a:rPr kumimoji="1" lang="zh-TW" altLang="en-US" sz="4400" dirty="0"/>
+              <a:t>同時進行</a:t>
+            </a:r>
+            <a:r>
+              <a:rPr kumimoji="1" lang="en-US" altLang="zh-TW" sz="4400" dirty="0"/>
+              <a:t>(concurrent)</a:t>
+            </a:r>
+            <a:r>
+              <a:rPr kumimoji="1" lang="zh-TW" altLang="en-US" sz="4400" dirty="0"/>
+              <a:t>混合式調查</a:t>
+            </a:r>
+            <a:endParaRPr lang="zh-TW" altLang="en-US" dirty="0"/>
+          </a:p>
+        </p:txBody>
+      </p:sp>
+      <p:sp>
+        <p:nvSpPr>
           <p:cNvPr id="2" name="投影片編號版面配置區 1">
             <a:extLst>
               <a:ext uri="{FF2B5EF4-FFF2-40B4-BE49-F238E27FC236}">
-                <a16:creationId xmlns:a16="http://schemas.microsoft.com/office/drawing/2014/main" id="{A0E86C1C-C9CC-7306-F445-3C98D7EADC7F}"/>
+                <a16:creationId xmlns:a16="http://schemas.microsoft.com/office/drawing/2014/main" id="{DA51D1FF-4BBD-B68D-1613-D8AF5298360A}"/>
               </a:ext>
             </a:extLst>
           </p:cNvPr>
@@ -8569,6 +9394,163 @@
             <a:fld id="{34E21383-B02B-694B-B2AD-A967203CDE86}" type="slidenum">
               <a:rPr lang="en-US" smtClean="0"/>
               <a:t>24</a:t>
+            </a:fld>
+            <a:endParaRPr lang="en-US"/>
+          </a:p>
+        </p:txBody>
+      </p:sp>
+      <p:pic>
+        <p:nvPicPr>
+          <p:cNvPr id="4" name="圖片 3">
+            <a:extLst>
+              <a:ext uri="{FF2B5EF4-FFF2-40B4-BE49-F238E27FC236}">
+                <a16:creationId xmlns:a16="http://schemas.microsoft.com/office/drawing/2014/main" id="{C1E7E73F-BA88-71FE-D867-82A3765918A6}"/>
+              </a:ext>
+            </a:extLst>
+          </p:cNvPr>
+          <p:cNvPicPr>
+            <a:picLocks noChangeAspect="1"/>
+          </p:cNvPicPr>
+          <p:nvPr/>
+        </p:nvPicPr>
+        <p:blipFill>
+          <a:blip r:embed="rId2"/>
+          <a:stretch>
+            <a:fillRect/>
+          </a:stretch>
+        </p:blipFill>
+        <p:spPr>
+          <a:xfrm>
+            <a:off x="1885950" y="1714500"/>
+            <a:ext cx="7772400" cy="3165230"/>
+          </a:xfrm>
+          <a:prstGeom prst="rect">
+            <a:avLst/>
+          </a:prstGeom>
+        </p:spPr>
+      </p:pic>
+      <p:sp>
+        <p:nvSpPr>
+          <p:cNvPr id="7" name="文字方塊 6">
+            <a:extLst>
+              <a:ext uri="{FF2B5EF4-FFF2-40B4-BE49-F238E27FC236}">
+                <a16:creationId xmlns:a16="http://schemas.microsoft.com/office/drawing/2014/main" id="{6A654AAB-9100-E7E3-BAD4-41162A12769A}"/>
+              </a:ext>
+            </a:extLst>
+          </p:cNvPr>
+          <p:cNvSpPr txBox="1"/>
+          <p:nvPr/>
+        </p:nvSpPr>
+        <p:spPr>
+          <a:xfrm>
+            <a:off x="1736862" y="5294874"/>
+            <a:ext cx="7921487" cy="400110"/>
+          </a:xfrm>
+          <a:prstGeom prst="rect">
+            <a:avLst/>
+          </a:prstGeom>
+          <a:noFill/>
+        </p:spPr>
+        <p:txBody>
+          <a:bodyPr wrap="square">
+            <a:spAutoFit/>
+          </a:bodyPr>
+          <a:lstStyle/>
+          <a:p>
+            <a:r>
+              <a:rPr lang="en" altLang="zh-TW" sz="2000" dirty="0">
+                <a:solidFill>
+                  <a:schemeClr val="tx1"/>
+                </a:solidFill>
+              </a:rPr>
+              <a:t>Source: </a:t>
+            </a:r>
+            <a:r>
+              <a:rPr lang="en" altLang="zh-TW" sz="2000" dirty="0" err="1">
+                <a:solidFill>
+                  <a:schemeClr val="tx1"/>
+                </a:solidFill>
+              </a:rPr>
+              <a:t>Biffignandi</a:t>
+            </a:r>
+            <a:r>
+              <a:rPr lang="en-US" altLang="zh-TW" sz="2000" dirty="0">
+                <a:solidFill>
+                  <a:schemeClr val="tx1"/>
+                </a:solidFill>
+              </a:rPr>
+              <a:t> and </a:t>
+            </a:r>
+            <a:r>
+              <a:rPr lang="en" altLang="zh-TW" sz="2000" dirty="0">
+                <a:solidFill>
+                  <a:schemeClr val="tx1"/>
+                </a:solidFill>
+              </a:rPr>
+              <a:t>Bethlehem (2021) Handbook of Web Survey, p. 344</a:t>
+            </a:r>
+            <a:endParaRPr lang="zh-TW" altLang="en-US" sz="2000" dirty="0">
+              <a:solidFill>
+                <a:schemeClr val="tx1"/>
+              </a:solidFill>
+            </a:endParaRPr>
+          </a:p>
+        </p:txBody>
+      </p:sp>
+    </p:spTree>
+    <p:extLst>
+      <p:ext uri="{BB962C8B-B14F-4D97-AF65-F5344CB8AC3E}">
+        <p14:creationId xmlns:p14="http://schemas.microsoft.com/office/powerpoint/2010/main" val="642962622"/>
+      </p:ext>
+    </p:extLst>
+  </p:cSld>
+  <p:clrMapOvr>
+    <a:masterClrMapping/>
+  </p:clrMapOvr>
+</p:sld>
+</file>
+
+<file path=ppt/slides/slide25.xml><?xml version="1.0" encoding="utf-8"?>
+<p:sld xmlns:a="http://schemas.openxmlformats.org/drawingml/2006/main" xmlns:r="http://schemas.openxmlformats.org/officeDocument/2006/relationships" xmlns:p="http://schemas.openxmlformats.org/presentationml/2006/main">
+  <p:cSld>
+    <p:spTree>
+      <p:nvGrpSpPr>
+        <p:cNvPr id="1" name=""/>
+        <p:cNvGrpSpPr/>
+        <p:nvPr/>
+      </p:nvGrpSpPr>
+      <p:grpSpPr>
+        <a:xfrm>
+          <a:off x="0" y="0"/>
+          <a:ext cx="0" cy="0"/>
+          <a:chOff x="0" y="0"/>
+          <a:chExt cx="0" cy="0"/>
+        </a:xfrm>
+      </p:grpSpPr>
+      <p:sp>
+        <p:nvSpPr>
+          <p:cNvPr id="2" name="投影片編號版面配置區 1">
+            <a:extLst>
+              <a:ext uri="{FF2B5EF4-FFF2-40B4-BE49-F238E27FC236}">
+                <a16:creationId xmlns:a16="http://schemas.microsoft.com/office/drawing/2014/main" id="{A0E86C1C-C9CC-7306-F445-3C98D7EADC7F}"/>
+              </a:ext>
+            </a:extLst>
+          </p:cNvPr>
+          <p:cNvSpPr>
+            <a:spLocks noGrp="1"/>
+          </p:cNvSpPr>
+          <p:nvPr>
+            <p:ph type="sldNum" sz="quarter" idx="12"/>
+          </p:nvPr>
+        </p:nvSpPr>
+        <p:spPr/>
+        <p:txBody>
+          <a:bodyPr/>
+          <a:lstStyle/>
+          <a:p>
+            <a:fld id="{34E21383-B02B-694B-B2AD-A967203CDE86}" type="slidenum">
+              <a:rPr lang="en-US" smtClean="0"/>
+              <a:t>25</a:t>
             </a:fld>
             <a:endParaRPr lang="en-US"/>
           </a:p>
@@ -8617,7 +9599,7 @@
 </p:sld>
 </file>
 
-<file path=ppt/slides/slide25.xml><?xml version="1.0" encoding="utf-8"?>
+<file path=ppt/slides/slide26.xml><?xml version="1.0" encoding="utf-8"?>
 <p:sld xmlns:a="http://schemas.openxmlformats.org/drawingml/2006/main" xmlns:r="http://schemas.openxmlformats.org/officeDocument/2006/relationships" xmlns:p="http://schemas.openxmlformats.org/presentationml/2006/main">
   <p:cSld>
     <p:spTree>
@@ -8791,7 +9773,7 @@
           <a:p>
             <a:fld id="{34E21383-B02B-694B-B2AD-A967203CDE86}" type="slidenum">
               <a:rPr lang="en-US" smtClean="0"/>
-              <a:t>25</a:t>
+              <a:t>26</a:t>
             </a:fld>
             <a:endParaRPr lang="en-US"/>
           </a:p>
@@ -8810,7 +9792,7 @@
 </p:sld>
 </file>
 
-<file path=ppt/slides/slide26.xml><?xml version="1.0" encoding="utf-8"?>
+<file path=ppt/slides/slide27.xml><?xml version="1.0" encoding="utf-8"?>
 <p:sld xmlns:a="http://schemas.openxmlformats.org/drawingml/2006/main" xmlns:r="http://schemas.openxmlformats.org/officeDocument/2006/relationships" xmlns:p="http://schemas.openxmlformats.org/presentationml/2006/main">
   <p:cSld>
     <p:spTree>
@@ -8905,7 +9887,7 @@
           <a:p>
             <a:fld id="{34E21383-B02B-694B-B2AD-A967203CDE86}" type="slidenum">
               <a:rPr lang="en-US" smtClean="0"/>
-              <a:t>26</a:t>
+              <a:t>27</a:t>
             </a:fld>
             <a:endParaRPr lang="en-US"/>
           </a:p>
@@ -9056,7 +10038,7 @@
 </p:sld>
 </file>
 
-<file path=ppt/slides/slide27.xml><?xml version="1.0" encoding="utf-8"?>
+<file path=ppt/slides/slide28.xml><?xml version="1.0" encoding="utf-8"?>
 <p:sld xmlns:a="http://schemas.openxmlformats.org/drawingml/2006/main" xmlns:r="http://schemas.openxmlformats.org/officeDocument/2006/relationships" xmlns:p="http://schemas.openxmlformats.org/presentationml/2006/main">
   <p:cSld>
     <p:spTree>
@@ -9234,7 +10216,7 @@
           <a:p>
             <a:fld id="{34E21383-B02B-694B-B2AD-A967203CDE86}" type="slidenum">
               <a:rPr lang="en-US" smtClean="0"/>
-              <a:t>27</a:t>
+              <a:t>28</a:t>
             </a:fld>
             <a:endParaRPr lang="en-US"/>
           </a:p>
@@ -9253,7 +10235,7 @@
 </p:sld>
 </file>
 
-<file path=ppt/slides/slide28.xml><?xml version="1.0" encoding="utf-8"?>
+<file path=ppt/slides/slide29.xml><?xml version="1.0" encoding="utf-8"?>
 <p:sld xmlns:a="http://schemas.openxmlformats.org/drawingml/2006/main" xmlns:r="http://schemas.openxmlformats.org/officeDocument/2006/relationships" xmlns:p="http://schemas.openxmlformats.org/presentationml/2006/main">
   <p:cSld>
     <p:spTree>
@@ -9630,7 +10612,7 @@
           <a:p>
             <a:fld id="{34E21383-B02B-694B-B2AD-A967203CDE86}" type="slidenum">
               <a:rPr lang="en-US" smtClean="0"/>
-              <a:t>28</a:t>
+              <a:t>29</a:t>
             </a:fld>
             <a:endParaRPr lang="en-US"/>
           </a:p>
@@ -9716,211 +10698,6 @@
     <p:extLst>
       <p:ext uri="{BB962C8B-B14F-4D97-AF65-F5344CB8AC3E}">
         <p14:creationId xmlns:p14="http://schemas.microsoft.com/office/powerpoint/2010/main" val="2088718810"/>
-      </p:ext>
-    </p:extLst>
-  </p:cSld>
-  <p:clrMapOvr>
-    <a:masterClrMapping/>
-  </p:clrMapOvr>
-</p:sld>
-</file>
-
-<file path=ppt/slides/slide29.xml><?xml version="1.0" encoding="utf-8"?>
-<p:sld xmlns:a="http://schemas.openxmlformats.org/drawingml/2006/main" xmlns:r="http://schemas.openxmlformats.org/officeDocument/2006/relationships" xmlns:p="http://schemas.openxmlformats.org/presentationml/2006/main">
-  <p:cSld>
-    <p:spTree>
-      <p:nvGrpSpPr>
-        <p:cNvPr id="1" name=""/>
-        <p:cNvGrpSpPr/>
-        <p:nvPr/>
-      </p:nvGrpSpPr>
-      <p:grpSpPr>
-        <a:xfrm>
-          <a:off x="0" y="0"/>
-          <a:ext cx="0" cy="0"/>
-          <a:chOff x="0" y="0"/>
-          <a:chExt cx="0" cy="0"/>
-        </a:xfrm>
-      </p:grpSpPr>
-      <p:sp>
-        <p:nvSpPr>
-          <p:cNvPr id="2" name="Title 1">
-            <a:extLst>
-              <a:ext uri="{FF2B5EF4-FFF2-40B4-BE49-F238E27FC236}">
-                <a16:creationId xmlns:a16="http://schemas.microsoft.com/office/drawing/2014/main" id="{18CB2DDB-1A65-C440-A75A-47943A72976D}"/>
-              </a:ext>
-            </a:extLst>
-          </p:cNvPr>
-          <p:cNvSpPr>
-            <a:spLocks noGrp="1"/>
-          </p:cNvSpPr>
-          <p:nvPr>
-            <p:ph type="title"/>
-          </p:nvPr>
-        </p:nvSpPr>
-        <p:spPr/>
-        <p:txBody>
-          <a:bodyPr/>
-          <a:lstStyle/>
-          <a:p>
-            <a:r>
-              <a:rPr lang="en-US" dirty="0" err="1"/>
-              <a:t>調查模式效應</a:t>
-            </a:r>
-            <a:r>
-              <a:rPr lang="en-US" dirty="0"/>
-              <a:t>(mode effect)</a:t>
-            </a:r>
-          </a:p>
-        </p:txBody>
-      </p:sp>
-      <p:sp>
-        <p:nvSpPr>
-          <p:cNvPr id="3" name="Content Placeholder 2">
-            <a:extLst>
-              <a:ext uri="{FF2B5EF4-FFF2-40B4-BE49-F238E27FC236}">
-                <a16:creationId xmlns:a16="http://schemas.microsoft.com/office/drawing/2014/main" id="{022E5D90-A2ED-CC33-84F3-2D40397B8620}"/>
-              </a:ext>
-            </a:extLst>
-          </p:cNvPr>
-          <p:cNvSpPr>
-            <a:spLocks noGrp="1"/>
-          </p:cNvSpPr>
-          <p:nvPr>
-            <p:ph idx="1"/>
-          </p:nvPr>
-        </p:nvSpPr>
-        <p:spPr/>
-        <p:txBody>
-          <a:bodyPr/>
-          <a:lstStyle/>
-          <a:p>
-            <a:pPr>
-              <a:lnSpc>
-                <a:spcPct val="150000"/>
-              </a:lnSpc>
-            </a:pPr>
-            <a:r>
-              <a:rPr lang="en-US" sz="2000" dirty="0" err="1"/>
-              <a:t>為了避免因為不同的調查模式影響受訪者的回答，有以下做法</a:t>
-            </a:r>
-            <a:r>
-              <a:rPr lang="en-US" sz="2000" dirty="0"/>
-              <a:t>：</a:t>
-            </a:r>
-          </a:p>
-          <a:p>
-            <a:pPr marL="514350" indent="-514350">
-              <a:lnSpc>
-                <a:spcPct val="150000"/>
-              </a:lnSpc>
-              <a:buFont typeface="+mj-lt"/>
-              <a:buAutoNum type="arabicPeriod"/>
-            </a:pPr>
-            <a:r>
-              <a:rPr lang="en-US" sz="2000" dirty="0" err="1"/>
-              <a:t>不同的模式應該使用相同的問卷</a:t>
-            </a:r>
-            <a:endParaRPr lang="en-US" sz="2000" dirty="0"/>
-          </a:p>
-          <a:p>
-            <a:pPr marL="514350" indent="-514350">
-              <a:lnSpc>
-                <a:spcPct val="150000"/>
-              </a:lnSpc>
-              <a:buFont typeface="+mj-lt"/>
-              <a:buAutoNum type="arabicPeriod"/>
-            </a:pPr>
-            <a:r>
-              <a:rPr lang="en-US" sz="2000" dirty="0" err="1"/>
-              <a:t>封閉式問題的選項不要太多</a:t>
-            </a:r>
-            <a:endParaRPr lang="en-US" sz="2000" dirty="0"/>
-          </a:p>
-          <a:p>
-            <a:pPr marL="514350" indent="-514350">
-              <a:lnSpc>
-                <a:spcPct val="150000"/>
-              </a:lnSpc>
-              <a:buFont typeface="+mj-lt"/>
-              <a:buAutoNum type="arabicPeriod"/>
-            </a:pPr>
-            <a:r>
-              <a:rPr lang="en-US" sz="2000" dirty="0" err="1"/>
-              <a:t>封閉式問題的選項的文字一致</a:t>
-            </a:r>
-            <a:endParaRPr lang="en-US" sz="2000" dirty="0"/>
-          </a:p>
-          <a:p>
-            <a:pPr marL="514350" indent="-514350">
-              <a:lnSpc>
-                <a:spcPct val="150000"/>
-              </a:lnSpc>
-              <a:buFont typeface="+mj-lt"/>
-              <a:buAutoNum type="arabicPeriod"/>
-            </a:pPr>
-            <a:r>
-              <a:rPr lang="en-US" sz="2000" dirty="0" err="1"/>
-              <a:t>封閉式問題的選項的順序隨機</a:t>
-            </a:r>
-            <a:endParaRPr lang="en-US" sz="2000" dirty="0"/>
-          </a:p>
-          <a:p>
-            <a:pPr marL="514350" indent="-514350">
-              <a:lnSpc>
-                <a:spcPct val="150000"/>
-              </a:lnSpc>
-              <a:buFont typeface="+mj-lt"/>
-              <a:buAutoNum type="arabicPeriod"/>
-            </a:pPr>
-            <a:r>
-              <a:rPr lang="en-US" sz="2000" dirty="0" err="1"/>
-              <a:t>題目應該呈現選項</a:t>
-            </a:r>
-            <a:endParaRPr lang="en-US" sz="2000" dirty="0"/>
-          </a:p>
-          <a:p>
-            <a:pPr marL="514350" indent="-514350">
-              <a:buFont typeface="+mj-lt"/>
-              <a:buAutoNum type="arabicPeriod"/>
-            </a:pPr>
-            <a:endParaRPr lang="en-US" dirty="0"/>
-          </a:p>
-        </p:txBody>
-      </p:sp>
-      <p:sp>
-        <p:nvSpPr>
-          <p:cNvPr id="4" name="Slide Number Placeholder 3">
-            <a:extLst>
-              <a:ext uri="{FF2B5EF4-FFF2-40B4-BE49-F238E27FC236}">
-                <a16:creationId xmlns:a16="http://schemas.microsoft.com/office/drawing/2014/main" id="{BC2FDA49-893E-59B4-3CA4-FF0F4190A339}"/>
-              </a:ext>
-            </a:extLst>
-          </p:cNvPr>
-          <p:cNvSpPr>
-            <a:spLocks noGrp="1"/>
-          </p:cNvSpPr>
-          <p:nvPr>
-            <p:ph type="sldNum" sz="quarter" idx="12"/>
-          </p:nvPr>
-        </p:nvSpPr>
-        <p:spPr/>
-        <p:txBody>
-          <a:bodyPr/>
-          <a:lstStyle/>
-          <a:p>
-            <a:fld id="{34E21383-B02B-694B-B2AD-A967203CDE86}" type="slidenum">
-              <a:rPr lang="en-US" smtClean="0"/>
-              <a:t>29</a:t>
-            </a:fld>
-            <a:endParaRPr lang="en-US"/>
-          </a:p>
-        </p:txBody>
-      </p:sp>
-    </p:spTree>
-    <p:extLst>
-      <p:ext uri="{BB962C8B-B14F-4D97-AF65-F5344CB8AC3E}">
-        <p14:creationId xmlns:p14="http://schemas.microsoft.com/office/powerpoint/2010/main" val="2809671408"/>
       </p:ext>
     </p:extLst>
   </p:cSld>
@@ -10155,6 +10932,211 @@
       </p:grpSpPr>
       <p:sp>
         <p:nvSpPr>
+          <p:cNvPr id="2" name="Title 1">
+            <a:extLst>
+              <a:ext uri="{FF2B5EF4-FFF2-40B4-BE49-F238E27FC236}">
+                <a16:creationId xmlns:a16="http://schemas.microsoft.com/office/drawing/2014/main" id="{18CB2DDB-1A65-C440-A75A-47943A72976D}"/>
+              </a:ext>
+            </a:extLst>
+          </p:cNvPr>
+          <p:cNvSpPr>
+            <a:spLocks noGrp="1"/>
+          </p:cNvSpPr>
+          <p:nvPr>
+            <p:ph type="title"/>
+          </p:nvPr>
+        </p:nvSpPr>
+        <p:spPr/>
+        <p:txBody>
+          <a:bodyPr/>
+          <a:lstStyle/>
+          <a:p>
+            <a:r>
+              <a:rPr lang="en-US" dirty="0" err="1"/>
+              <a:t>調查模式效應</a:t>
+            </a:r>
+            <a:r>
+              <a:rPr lang="en-US" dirty="0"/>
+              <a:t>(mode effect)</a:t>
+            </a:r>
+          </a:p>
+        </p:txBody>
+      </p:sp>
+      <p:sp>
+        <p:nvSpPr>
+          <p:cNvPr id="3" name="Content Placeholder 2">
+            <a:extLst>
+              <a:ext uri="{FF2B5EF4-FFF2-40B4-BE49-F238E27FC236}">
+                <a16:creationId xmlns:a16="http://schemas.microsoft.com/office/drawing/2014/main" id="{022E5D90-A2ED-CC33-84F3-2D40397B8620}"/>
+              </a:ext>
+            </a:extLst>
+          </p:cNvPr>
+          <p:cNvSpPr>
+            <a:spLocks noGrp="1"/>
+          </p:cNvSpPr>
+          <p:nvPr>
+            <p:ph idx="1"/>
+          </p:nvPr>
+        </p:nvSpPr>
+        <p:spPr/>
+        <p:txBody>
+          <a:bodyPr/>
+          <a:lstStyle/>
+          <a:p>
+            <a:pPr>
+              <a:lnSpc>
+                <a:spcPct val="150000"/>
+              </a:lnSpc>
+            </a:pPr>
+            <a:r>
+              <a:rPr lang="en-US" sz="2000" dirty="0" err="1"/>
+              <a:t>為了避免因為不同的調查模式影響受訪者的回答，有以下做法</a:t>
+            </a:r>
+            <a:r>
+              <a:rPr lang="en-US" sz="2000" dirty="0"/>
+              <a:t>：</a:t>
+            </a:r>
+          </a:p>
+          <a:p>
+            <a:pPr marL="514350" indent="-514350">
+              <a:lnSpc>
+                <a:spcPct val="150000"/>
+              </a:lnSpc>
+              <a:buFont typeface="+mj-lt"/>
+              <a:buAutoNum type="arabicPeriod"/>
+            </a:pPr>
+            <a:r>
+              <a:rPr lang="en-US" sz="2000" dirty="0" err="1"/>
+              <a:t>不同的模式應該使用相同的問卷</a:t>
+            </a:r>
+            <a:endParaRPr lang="en-US" sz="2000" dirty="0"/>
+          </a:p>
+          <a:p>
+            <a:pPr marL="514350" indent="-514350">
+              <a:lnSpc>
+                <a:spcPct val="150000"/>
+              </a:lnSpc>
+              <a:buFont typeface="+mj-lt"/>
+              <a:buAutoNum type="arabicPeriod"/>
+            </a:pPr>
+            <a:r>
+              <a:rPr lang="en-US" sz="2000" dirty="0" err="1"/>
+              <a:t>封閉式問題的選項不要太多</a:t>
+            </a:r>
+            <a:endParaRPr lang="en-US" sz="2000" dirty="0"/>
+          </a:p>
+          <a:p>
+            <a:pPr marL="514350" indent="-514350">
+              <a:lnSpc>
+                <a:spcPct val="150000"/>
+              </a:lnSpc>
+              <a:buFont typeface="+mj-lt"/>
+              <a:buAutoNum type="arabicPeriod"/>
+            </a:pPr>
+            <a:r>
+              <a:rPr lang="en-US" sz="2000" dirty="0" err="1"/>
+              <a:t>封閉式問題的選項的文字一致</a:t>
+            </a:r>
+            <a:endParaRPr lang="en-US" sz="2000" dirty="0"/>
+          </a:p>
+          <a:p>
+            <a:pPr marL="514350" indent="-514350">
+              <a:lnSpc>
+                <a:spcPct val="150000"/>
+              </a:lnSpc>
+              <a:buFont typeface="+mj-lt"/>
+              <a:buAutoNum type="arabicPeriod"/>
+            </a:pPr>
+            <a:r>
+              <a:rPr lang="en-US" sz="2000" dirty="0" err="1"/>
+              <a:t>封閉式問題的選項的順序隨機</a:t>
+            </a:r>
+            <a:endParaRPr lang="en-US" sz="2000" dirty="0"/>
+          </a:p>
+          <a:p>
+            <a:pPr marL="514350" indent="-514350">
+              <a:lnSpc>
+                <a:spcPct val="150000"/>
+              </a:lnSpc>
+              <a:buFont typeface="+mj-lt"/>
+              <a:buAutoNum type="arabicPeriod"/>
+            </a:pPr>
+            <a:r>
+              <a:rPr lang="en-US" sz="2000" dirty="0" err="1"/>
+              <a:t>題目應該呈現選項</a:t>
+            </a:r>
+            <a:endParaRPr lang="en-US" sz="2000" dirty="0"/>
+          </a:p>
+          <a:p>
+            <a:pPr marL="514350" indent="-514350">
+              <a:buFont typeface="+mj-lt"/>
+              <a:buAutoNum type="arabicPeriod"/>
+            </a:pPr>
+            <a:endParaRPr lang="en-US" dirty="0"/>
+          </a:p>
+        </p:txBody>
+      </p:sp>
+      <p:sp>
+        <p:nvSpPr>
+          <p:cNvPr id="4" name="Slide Number Placeholder 3">
+            <a:extLst>
+              <a:ext uri="{FF2B5EF4-FFF2-40B4-BE49-F238E27FC236}">
+                <a16:creationId xmlns:a16="http://schemas.microsoft.com/office/drawing/2014/main" id="{BC2FDA49-893E-59B4-3CA4-FF0F4190A339}"/>
+              </a:ext>
+            </a:extLst>
+          </p:cNvPr>
+          <p:cNvSpPr>
+            <a:spLocks noGrp="1"/>
+          </p:cNvSpPr>
+          <p:nvPr>
+            <p:ph type="sldNum" sz="quarter" idx="12"/>
+          </p:nvPr>
+        </p:nvSpPr>
+        <p:spPr/>
+        <p:txBody>
+          <a:bodyPr/>
+          <a:lstStyle/>
+          <a:p>
+            <a:fld id="{34E21383-B02B-694B-B2AD-A967203CDE86}" type="slidenum">
+              <a:rPr lang="en-US" smtClean="0"/>
+              <a:t>30</a:t>
+            </a:fld>
+            <a:endParaRPr lang="en-US"/>
+          </a:p>
+        </p:txBody>
+      </p:sp>
+    </p:spTree>
+    <p:extLst>
+      <p:ext uri="{BB962C8B-B14F-4D97-AF65-F5344CB8AC3E}">
+        <p14:creationId xmlns:p14="http://schemas.microsoft.com/office/powerpoint/2010/main" val="2809671408"/>
+      </p:ext>
+    </p:extLst>
+  </p:cSld>
+  <p:clrMapOvr>
+    <a:masterClrMapping/>
+  </p:clrMapOvr>
+</p:sld>
+</file>
+
+<file path=ppt/slides/slide31.xml><?xml version="1.0" encoding="utf-8"?>
+<p:sld xmlns:a="http://schemas.openxmlformats.org/drawingml/2006/main" xmlns:r="http://schemas.openxmlformats.org/officeDocument/2006/relationships" xmlns:p="http://schemas.openxmlformats.org/presentationml/2006/main">
+  <p:cSld>
+    <p:spTree>
+      <p:nvGrpSpPr>
+        <p:cNvPr id="1" name=""/>
+        <p:cNvGrpSpPr/>
+        <p:nvPr/>
+      </p:nvGrpSpPr>
+      <p:grpSpPr>
+        <a:xfrm>
+          <a:off x="0" y="0"/>
+          <a:ext cx="0" cy="0"/>
+          <a:chOff x="0" y="0"/>
+          <a:chExt cx="0" cy="0"/>
+        </a:xfrm>
+      </p:grpSpPr>
+      <p:sp>
+        <p:nvSpPr>
           <p:cNvPr id="2" name="標題 1">
             <a:extLst>
               <a:ext uri="{FF2B5EF4-FFF2-40B4-BE49-F238E27FC236}">
@@ -10292,7 +11274,7 @@
           <a:p>
             <a:fld id="{34E21383-B02B-694B-B2AD-A967203CDE86}" type="slidenum">
               <a:rPr lang="en-US" smtClean="0"/>
-              <a:t>30</a:t>
+              <a:t>31</a:t>
             </a:fld>
             <a:endParaRPr lang="en-US"/>
           </a:p>
